--- a/Nahiv/Avamil/Amil.pptx
+++ b/Nahiv/Avamil/Amil.pptx
@@ -6,6 +6,8 @@
   </p:sldMasterIdLst>
   <p:sldIdLst>
     <p:sldId id="256" r:id="rId2"/>
+    <p:sldId id="257" r:id="rId3"/>
+    <p:sldId id="258" r:id="rId4"/>
   </p:sldIdLst>
   <p:sldSz cx="12192000" cy="6858000"/>
   <p:notesSz cx="6858000" cy="9144000"/>
@@ -104,6 +106,11 @@
       </a:defRPr>
     </a:lvl9pPr>
   </p:defaultTextStyle>
+  <p:extLst>
+    <p:ext uri="{EFAFB233-063F-42B5-8137-9DF3F51BA10A}">
+      <p15:sldGuideLst xmlns:p15="http://schemas.microsoft.com/office/powerpoint/2012/main"/>
+    </p:ext>
+  </p:extLst>
 </p:presentation>
 </file>
 
@@ -111,13 +118,13 @@
 <pc:chgInfo xmlns:a="http://schemas.openxmlformats.org/drawingml/2006/main" xmlns:r="http://schemas.openxmlformats.org/officeDocument/2006/relationships" xmlns:ac="http://schemas.microsoft.com/office/drawing/2013/main/command" xmlns:pc="http://schemas.microsoft.com/office/powerpoint/2013/main/command">
   <pc:docChgLst>
     <pc:chgData name="Ayhan Karaman" userId="ec277a7f08761a62" providerId="LiveId" clId="{A7318BDB-BC3B-435E-9587-295F14AD73EF}"/>
-    <pc:docChg chg="undo custSel addSld modSld">
-      <pc:chgData name="Ayhan Karaman" userId="ec277a7f08761a62" providerId="LiveId" clId="{A7318BDB-BC3B-435E-9587-295F14AD73EF}" dt="2026-10-11T18:30:34.603" v="464" actId="20577"/>
+    <pc:docChg chg="undo redo custSel addSld modSld">
+      <pc:chgData name="Ayhan Karaman" userId="ec277a7f08761a62" providerId="LiveId" clId="{A7318BDB-BC3B-435E-9587-295F14AD73EF}" dt="2026-10-11T20:39:06.415" v="2893" actId="6549"/>
       <pc:docMkLst>
         <pc:docMk/>
       </pc:docMkLst>
       <pc:sldChg chg="addSp delSp modSp new mod">
-        <pc:chgData name="Ayhan Karaman" userId="ec277a7f08761a62" providerId="LiveId" clId="{A7318BDB-BC3B-435E-9587-295F14AD73EF}" dt="2026-10-11T18:30:34.603" v="464" actId="20577"/>
+        <pc:chgData name="Ayhan Karaman" userId="ec277a7f08761a62" providerId="LiveId" clId="{A7318BDB-BC3B-435E-9587-295F14AD73EF}" dt="2026-10-11T18:45:36.315" v="660" actId="14100"/>
         <pc:sldMkLst>
           <pc:docMk/>
           <pc:sldMk cId="4077904148" sldId="256"/>
@@ -139,7 +146,7 @@
           </ac:spMkLst>
         </pc:spChg>
         <pc:spChg chg="add mod topLvl">
-          <ac:chgData name="Ayhan Karaman" userId="ec277a7f08761a62" providerId="LiveId" clId="{A7318BDB-BC3B-435E-9587-295F14AD73EF}" dt="2026-10-11T17:59:09.194" v="103" actId="165"/>
+          <ac:chgData name="Ayhan Karaman" userId="ec277a7f08761a62" providerId="LiveId" clId="{A7318BDB-BC3B-435E-9587-295F14AD73EF}" dt="2026-10-11T18:38:34.794" v="465" actId="14100"/>
           <ac:spMkLst>
             <pc:docMk/>
             <pc:sldMk cId="4077904148" sldId="256"/>
@@ -154,8 +161,16 @@
             <ac:spMk id="5" creationId="{8DB23B2B-55E9-9652-30BD-D1D86BBEDC2E}"/>
           </ac:spMkLst>
         </pc:spChg>
+        <pc:spChg chg="mod topLvl">
+          <ac:chgData name="Ayhan Karaman" userId="ec277a7f08761a62" providerId="LiveId" clId="{A7318BDB-BC3B-435E-9587-295F14AD73EF}" dt="2026-10-11T18:42:53.434" v="640" actId="164"/>
+          <ac:spMkLst>
+            <pc:docMk/>
+            <pc:sldMk cId="4077904148" sldId="256"/>
+            <ac:spMk id="6" creationId="{EC103A0C-957F-1BC9-195E-F2C7D0417206}"/>
+          </ac:spMkLst>
+        </pc:spChg>
         <pc:spChg chg="add mod">
-          <ac:chgData name="Ayhan Karaman" userId="ec277a7f08761a62" providerId="LiveId" clId="{A7318BDB-BC3B-435E-9587-295F14AD73EF}" dt="2026-10-11T17:58:31.545" v="101" actId="14100"/>
+          <ac:chgData name="Ayhan Karaman" userId="ec277a7f08761a62" providerId="LiveId" clId="{A7318BDB-BC3B-435E-9587-295F14AD73EF}" dt="2026-10-11T18:39:07.658" v="468" actId="1076"/>
           <ac:spMkLst>
             <pc:docMk/>
             <pc:sldMk cId="4077904148" sldId="256"/>
@@ -163,7 +178,7 @@
           </ac:spMkLst>
         </pc:spChg>
         <pc:spChg chg="add mod">
-          <ac:chgData name="Ayhan Karaman" userId="ec277a7f08761a62" providerId="LiveId" clId="{A7318BDB-BC3B-435E-9587-295F14AD73EF}" dt="2026-10-11T17:58:25.501" v="100" actId="14100"/>
+          <ac:chgData name="Ayhan Karaman" userId="ec277a7f08761a62" providerId="LiveId" clId="{A7318BDB-BC3B-435E-9587-295F14AD73EF}" dt="2026-10-11T18:39:07.658" v="468" actId="1076"/>
           <ac:spMkLst>
             <pc:docMk/>
             <pc:sldMk cId="4077904148" sldId="256"/>
@@ -171,7 +186,7 @@
           </ac:spMkLst>
         </pc:spChg>
         <pc:spChg chg="add mod">
-          <ac:chgData name="Ayhan Karaman" userId="ec277a7f08761a62" providerId="LiveId" clId="{A7318BDB-BC3B-435E-9587-295F14AD73EF}" dt="2026-10-11T17:58:42.457" v="102" actId="14100"/>
+          <ac:chgData name="Ayhan Karaman" userId="ec277a7f08761a62" providerId="LiveId" clId="{A7318BDB-BC3B-435E-9587-295F14AD73EF}" dt="2026-10-11T18:39:07.658" v="468" actId="1076"/>
           <ac:spMkLst>
             <pc:docMk/>
             <pc:sldMk cId="4077904148" sldId="256"/>
@@ -179,7 +194,7 @@
           </ac:spMkLst>
         </pc:spChg>
         <pc:spChg chg="add mod">
-          <ac:chgData name="Ayhan Karaman" userId="ec277a7f08761a62" providerId="LiveId" clId="{A7318BDB-BC3B-435E-9587-295F14AD73EF}" dt="2026-10-11T17:58:01.066" v="93" actId="403"/>
+          <ac:chgData name="Ayhan Karaman" userId="ec277a7f08761a62" providerId="LiveId" clId="{A7318BDB-BC3B-435E-9587-295F14AD73EF}" dt="2026-10-11T18:39:07.658" v="468" actId="1076"/>
           <ac:spMkLst>
             <pc:docMk/>
             <pc:sldMk cId="4077904148" sldId="256"/>
@@ -187,7 +202,7 @@
           </ac:spMkLst>
         </pc:spChg>
         <pc:spChg chg="add mod">
-          <ac:chgData name="Ayhan Karaman" userId="ec277a7f08761a62" providerId="LiveId" clId="{A7318BDB-BC3B-435E-9587-295F14AD73EF}" dt="2026-10-11T17:58:05.489" v="95" actId="403"/>
+          <ac:chgData name="Ayhan Karaman" userId="ec277a7f08761a62" providerId="LiveId" clId="{A7318BDB-BC3B-435E-9587-295F14AD73EF}" dt="2026-10-11T18:39:07.658" v="468" actId="1076"/>
           <ac:spMkLst>
             <pc:docMk/>
             <pc:sldMk cId="4077904148" sldId="256"/>
@@ -195,7 +210,7 @@
           </ac:spMkLst>
         </pc:spChg>
         <pc:spChg chg="add mod">
-          <ac:chgData name="Ayhan Karaman" userId="ec277a7f08761a62" providerId="LiveId" clId="{A7318BDB-BC3B-435E-9587-295F14AD73EF}" dt="2026-10-11T17:58:08.803" v="97" actId="403"/>
+          <ac:chgData name="Ayhan Karaman" userId="ec277a7f08761a62" providerId="LiveId" clId="{A7318BDB-BC3B-435E-9587-295F14AD73EF}" dt="2026-10-11T18:39:07.658" v="468" actId="1076"/>
           <ac:spMkLst>
             <pc:docMk/>
             <pc:sldMk cId="4077904148" sldId="256"/>
@@ -203,7 +218,7 @@
           </ac:spMkLst>
         </pc:spChg>
         <pc:spChg chg="add mod">
-          <ac:chgData name="Ayhan Karaman" userId="ec277a7f08761a62" providerId="LiveId" clId="{A7318BDB-BC3B-435E-9587-295F14AD73EF}" dt="2026-10-11T18:01:00.892" v="128" actId="1076"/>
+          <ac:chgData name="Ayhan Karaman" userId="ec277a7f08761a62" providerId="LiveId" clId="{A7318BDB-BC3B-435E-9587-295F14AD73EF}" dt="2026-10-11T18:39:07.658" v="468" actId="1076"/>
           <ac:spMkLst>
             <pc:docMk/>
             <pc:sldMk cId="4077904148" sldId="256"/>
@@ -211,7 +226,7 @@
           </ac:spMkLst>
         </pc:spChg>
         <pc:spChg chg="add mod">
-          <ac:chgData name="Ayhan Karaman" userId="ec277a7f08761a62" providerId="LiveId" clId="{A7318BDB-BC3B-435E-9587-295F14AD73EF}" dt="2026-10-11T18:00:53.115" v="127" actId="1076"/>
+          <ac:chgData name="Ayhan Karaman" userId="ec277a7f08761a62" providerId="LiveId" clId="{A7318BDB-BC3B-435E-9587-295F14AD73EF}" dt="2026-10-11T18:39:07.658" v="468" actId="1076"/>
           <ac:spMkLst>
             <pc:docMk/>
             <pc:sldMk cId="4077904148" sldId="256"/>
@@ -219,19 +234,51 @@
           </ac:spMkLst>
         </pc:spChg>
         <pc:spChg chg="add mod">
-          <ac:chgData name="Ayhan Karaman" userId="ec277a7f08761a62" providerId="LiveId" clId="{A7318BDB-BC3B-435E-9587-295F14AD73EF}" dt="2026-10-11T18:00:32.694" v="120" actId="20577"/>
+          <ac:chgData name="Ayhan Karaman" userId="ec277a7f08761a62" providerId="LiveId" clId="{A7318BDB-BC3B-435E-9587-295F14AD73EF}" dt="2026-10-11T18:39:07.658" v="468" actId="1076"/>
           <ac:spMkLst>
             <pc:docMk/>
             <pc:sldMk cId="4077904148" sldId="256"/>
             <ac:spMk id="15" creationId="{1EB97B78-4638-D170-C1CD-1D1C8F463BF4}"/>
           </ac:spMkLst>
         </pc:spChg>
+        <pc:spChg chg="mod topLvl">
+          <ac:chgData name="Ayhan Karaman" userId="ec277a7f08761a62" providerId="LiveId" clId="{A7318BDB-BC3B-435E-9587-295F14AD73EF}" dt="2026-10-11T18:42:53.434" v="640" actId="164"/>
+          <ac:spMkLst>
+            <pc:docMk/>
+            <pc:sldMk cId="4077904148" sldId="256"/>
+            <ac:spMk id="16" creationId="{97608624-8029-9BAF-9BCA-55C640B05ADE}"/>
+          </ac:spMkLst>
+        </pc:spChg>
+        <pc:spChg chg="mod topLvl">
+          <ac:chgData name="Ayhan Karaman" userId="ec277a7f08761a62" providerId="LiveId" clId="{A7318BDB-BC3B-435E-9587-295F14AD73EF}" dt="2026-10-11T18:42:53.434" v="640" actId="164"/>
+          <ac:spMkLst>
+            <pc:docMk/>
+            <pc:sldMk cId="4077904148" sldId="256"/>
+            <ac:spMk id="18" creationId="{998CBB6A-E625-0546-913F-FAA7B24D349F}"/>
+          </ac:spMkLst>
+        </pc:spChg>
+        <pc:spChg chg="mod topLvl">
+          <ac:chgData name="Ayhan Karaman" userId="ec277a7f08761a62" providerId="LiveId" clId="{A7318BDB-BC3B-435E-9587-295F14AD73EF}" dt="2026-10-11T18:42:53.434" v="640" actId="164"/>
+          <ac:spMkLst>
+            <pc:docMk/>
+            <pc:sldMk cId="4077904148" sldId="256"/>
+            <ac:spMk id="20" creationId="{8035F9EA-F268-95BC-10F2-37EFD1A34E90}"/>
+          </ac:spMkLst>
+        </pc:spChg>
         <pc:spChg chg="add mod topLvl">
-          <ac:chgData name="Ayhan Karaman" userId="ec277a7f08761a62" providerId="LiveId" clId="{A7318BDB-BC3B-435E-9587-295F14AD73EF}" dt="2026-10-11T18:18:59.648" v="277" actId="1076"/>
+          <ac:chgData name="Ayhan Karaman" userId="ec277a7f08761a62" providerId="LiveId" clId="{A7318BDB-BC3B-435E-9587-295F14AD73EF}" dt="2026-10-11T18:39:07.658" v="468" actId="1076"/>
           <ac:spMkLst>
             <pc:docMk/>
             <pc:sldMk cId="4077904148" sldId="256"/>
             <ac:spMk id="22" creationId="{1F732419-7BEE-3A59-BFB4-D28508256611}"/>
+          </ac:spMkLst>
+        </pc:spChg>
+        <pc:spChg chg="add mod">
+          <ac:chgData name="Ayhan Karaman" userId="ec277a7f08761a62" providerId="LiveId" clId="{A7318BDB-BC3B-435E-9587-295F14AD73EF}" dt="2026-10-11T18:42:53.434" v="640" actId="164"/>
+          <ac:spMkLst>
+            <pc:docMk/>
+            <pc:sldMk cId="4077904148" sldId="256"/>
+            <ac:spMk id="23" creationId="{AF74F6CD-7BBA-C036-D6CE-9B9CB9818A6F}"/>
           </ac:spMkLst>
         </pc:spChg>
         <pc:spChg chg="add del mod topLvl">
@@ -251,7 +298,7 @@
           </ac:spMkLst>
         </pc:spChg>
         <pc:spChg chg="mod topLvl">
-          <ac:chgData name="Ayhan Karaman" userId="ec277a7f08761a62" providerId="LiveId" clId="{A7318BDB-BC3B-435E-9587-295F14AD73EF}" dt="2026-10-11T18:18:38.455" v="275" actId="1076"/>
+          <ac:chgData name="Ayhan Karaman" userId="ec277a7f08761a62" providerId="LiveId" clId="{A7318BDB-BC3B-435E-9587-295F14AD73EF}" dt="2026-10-11T18:39:07.658" v="468" actId="1076"/>
           <ac:spMkLst>
             <pc:docMk/>
             <pc:sldMk cId="4077904148" sldId="256"/>
@@ -275,7 +322,7 @@
           </ac:spMkLst>
         </pc:spChg>
         <pc:spChg chg="mod topLvl">
-          <ac:chgData name="Ayhan Karaman" userId="ec277a7f08761a62" providerId="LiveId" clId="{A7318BDB-BC3B-435E-9587-295F14AD73EF}" dt="2026-10-11T18:19:10.178" v="278" actId="1076"/>
+          <ac:chgData name="Ayhan Karaman" userId="ec277a7f08761a62" providerId="LiveId" clId="{A7318BDB-BC3B-435E-9587-295F14AD73EF}" dt="2026-10-11T18:39:07.658" v="468" actId="1076"/>
           <ac:spMkLst>
             <pc:docMk/>
             <pc:sldMk cId="4077904148" sldId="256"/>
@@ -299,7 +346,7 @@
           </ac:spMkLst>
         </pc:spChg>
         <pc:spChg chg="add mod">
-          <ac:chgData name="Ayhan Karaman" userId="ec277a7f08761a62" providerId="LiveId" clId="{A7318BDB-BC3B-435E-9587-295F14AD73EF}" dt="2026-10-11T18:24:29.095" v="356" actId="1076"/>
+          <ac:chgData name="Ayhan Karaman" userId="ec277a7f08761a62" providerId="LiveId" clId="{A7318BDB-BC3B-435E-9587-295F14AD73EF}" dt="2026-10-11T18:39:07.658" v="468" actId="1076"/>
           <ac:spMkLst>
             <pc:docMk/>
             <pc:sldMk cId="4077904148" sldId="256"/>
@@ -307,7 +354,7 @@
           </ac:spMkLst>
         </pc:spChg>
         <pc:spChg chg="add mod">
-          <ac:chgData name="Ayhan Karaman" userId="ec277a7f08761a62" providerId="LiveId" clId="{A7318BDB-BC3B-435E-9587-295F14AD73EF}" dt="2026-10-11T18:26:04.564" v="366" actId="1076"/>
+          <ac:chgData name="Ayhan Karaman" userId="ec277a7f08761a62" providerId="LiveId" clId="{A7318BDB-BC3B-435E-9587-295F14AD73EF}" dt="2026-10-11T18:39:07.658" v="468" actId="1076"/>
           <ac:spMkLst>
             <pc:docMk/>
             <pc:sldMk cId="4077904148" sldId="256"/>
@@ -347,7 +394,7 @@
           </ac:spMkLst>
         </pc:spChg>
         <pc:spChg chg="add mod">
-          <ac:chgData name="Ayhan Karaman" userId="ec277a7f08761a62" providerId="LiveId" clId="{A7318BDB-BC3B-435E-9587-295F14AD73EF}" dt="2026-10-11T18:27:11.285" v="402" actId="20577"/>
+          <ac:chgData name="Ayhan Karaman" userId="ec277a7f08761a62" providerId="LiveId" clId="{A7318BDB-BC3B-435E-9587-295F14AD73EF}" dt="2026-10-11T18:39:07.658" v="468" actId="1076"/>
           <ac:spMkLst>
             <pc:docMk/>
             <pc:sldMk cId="4077904148" sldId="256"/>
@@ -355,7 +402,7 @@
           </ac:spMkLst>
         </pc:spChg>
         <pc:spChg chg="add mod">
-          <ac:chgData name="Ayhan Karaman" userId="ec277a7f08761a62" providerId="LiveId" clId="{A7318BDB-BC3B-435E-9587-295F14AD73EF}" dt="2026-10-11T18:27:48.235" v="414" actId="20577"/>
+          <ac:chgData name="Ayhan Karaman" userId="ec277a7f08761a62" providerId="LiveId" clId="{A7318BDB-BC3B-435E-9587-295F14AD73EF}" dt="2026-10-11T18:39:07.658" v="468" actId="1076"/>
           <ac:spMkLst>
             <pc:docMk/>
             <pc:sldMk cId="4077904148" sldId="256"/>
@@ -363,7 +410,7 @@
           </ac:spMkLst>
         </pc:spChg>
         <pc:spChg chg="add mod">
-          <ac:chgData name="Ayhan Karaman" userId="ec277a7f08761a62" providerId="LiveId" clId="{A7318BDB-BC3B-435E-9587-295F14AD73EF}" dt="2026-10-11T18:30:00.208" v="456" actId="20577"/>
+          <ac:chgData name="Ayhan Karaman" userId="ec277a7f08761a62" providerId="LiveId" clId="{A7318BDB-BC3B-435E-9587-295F14AD73EF}" dt="2026-10-11T18:39:07.658" v="468" actId="1076"/>
           <ac:spMkLst>
             <pc:docMk/>
             <pc:sldMk cId="4077904148" sldId="256"/>
@@ -371,7 +418,7 @@
           </ac:spMkLst>
         </pc:spChg>
         <pc:spChg chg="add mod">
-          <ac:chgData name="Ayhan Karaman" userId="ec277a7f08761a62" providerId="LiveId" clId="{A7318BDB-BC3B-435E-9587-295F14AD73EF}" dt="2026-10-11T18:30:34.603" v="464" actId="20577"/>
+          <ac:chgData name="Ayhan Karaman" userId="ec277a7f08761a62" providerId="LiveId" clId="{A7318BDB-BC3B-435E-9587-295F14AD73EF}" dt="2026-10-11T18:39:07.658" v="468" actId="1076"/>
           <ac:spMkLst>
             <pc:docMk/>
             <pc:sldMk cId="4077904148" sldId="256"/>
@@ -379,11 +426,27 @@
           </ac:spMkLst>
         </pc:spChg>
         <pc:grpChg chg="add del mod">
+          <ac:chgData name="Ayhan Karaman" userId="ec277a7f08761a62" providerId="LiveId" clId="{A7318BDB-BC3B-435E-9587-295F14AD73EF}" dt="2026-10-11T18:39:40.768" v="471" actId="165"/>
+          <ac:grpSpMkLst>
+            <pc:docMk/>
+            <pc:sldMk cId="4077904148" sldId="256"/>
+            <ac:grpSpMk id="3" creationId="{6C55E4DA-7C4D-A5B0-987F-1FF20CAB9536}"/>
+          </ac:grpSpMkLst>
+        </pc:grpChg>
+        <pc:grpChg chg="add del mod">
           <ac:chgData name="Ayhan Karaman" userId="ec277a7f08761a62" providerId="LiveId" clId="{A7318BDB-BC3B-435E-9587-295F14AD73EF}" dt="2026-10-11T17:59:09.194" v="103" actId="165"/>
           <ac:grpSpMkLst>
             <pc:docMk/>
             <pc:sldMk cId="4077904148" sldId="256"/>
             <ac:grpSpMk id="6" creationId="{B2112991-B67E-8873-664A-2B96EC4BFDB6}"/>
+          </ac:grpSpMkLst>
+        </pc:grpChg>
+        <pc:grpChg chg="add mod">
+          <ac:chgData name="Ayhan Karaman" userId="ec277a7f08761a62" providerId="LiveId" clId="{A7318BDB-BC3B-435E-9587-295F14AD73EF}" dt="2026-10-11T18:44:25.017" v="655" actId="1076"/>
+          <ac:grpSpMkLst>
+            <pc:docMk/>
+            <pc:sldMk cId="4077904148" sldId="256"/>
+            <ac:grpSpMk id="24" creationId="{4CAB63B4-FD1F-56B0-D557-DCFEC7A2D04B}"/>
           </ac:grpSpMkLst>
         </pc:grpChg>
         <pc:grpChg chg="add del mod">
@@ -411,7 +474,7 @@
           </ac:grpSpMkLst>
         </pc:grpChg>
         <pc:grpChg chg="add mod">
-          <ac:chgData name="Ayhan Karaman" userId="ec277a7f08761a62" providerId="LiveId" clId="{A7318BDB-BC3B-435E-9587-295F14AD73EF}" dt="2026-10-11T18:24:56.048" v="358" actId="1076"/>
+          <ac:chgData name="Ayhan Karaman" userId="ec277a7f08761a62" providerId="LiveId" clId="{A7318BDB-BC3B-435E-9587-295F14AD73EF}" dt="2026-10-11T18:43:31.675" v="645" actId="1076"/>
           <ac:grpSpMkLst>
             <pc:docMk/>
             <pc:sldMk cId="4077904148" sldId="256"/>
@@ -419,7 +482,7 @@
           </ac:grpSpMkLst>
         </pc:grpChg>
         <pc:cxnChg chg="add mod">
-          <ac:chgData name="Ayhan Karaman" userId="ec277a7f08761a62" providerId="LiveId" clId="{A7318BDB-BC3B-435E-9587-295F14AD73EF}" dt="2026-10-11T18:18:59.648" v="277" actId="1076"/>
+          <ac:chgData name="Ayhan Karaman" userId="ec277a7f08761a62" providerId="LiveId" clId="{A7318BDB-BC3B-435E-9587-295F14AD73EF}" dt="2026-10-11T18:39:07.658" v="468" actId="1076"/>
           <ac:cxnSpMkLst>
             <pc:docMk/>
             <pc:sldMk cId="4077904148" sldId="256"/>
@@ -427,7 +490,7 @@
           </ac:cxnSpMkLst>
         </pc:cxnChg>
         <pc:cxnChg chg="add mod">
-          <ac:chgData name="Ayhan Karaman" userId="ec277a7f08761a62" providerId="LiveId" clId="{A7318BDB-BC3B-435E-9587-295F14AD73EF}" dt="2026-10-11T18:18:38.455" v="275" actId="1076"/>
+          <ac:chgData name="Ayhan Karaman" userId="ec277a7f08761a62" providerId="LiveId" clId="{A7318BDB-BC3B-435E-9587-295F14AD73EF}" dt="2026-10-11T18:39:07.658" v="468" actId="1076"/>
           <ac:cxnSpMkLst>
             <pc:docMk/>
             <pc:sldMk cId="4077904148" sldId="256"/>
@@ -435,7 +498,7 @@
           </ac:cxnSpMkLst>
         </pc:cxnChg>
         <pc:cxnChg chg="add mod">
-          <ac:chgData name="Ayhan Karaman" userId="ec277a7f08761a62" providerId="LiveId" clId="{A7318BDB-BC3B-435E-9587-295F14AD73EF}" dt="2026-10-11T18:19:10.178" v="278" actId="1076"/>
+          <ac:chgData name="Ayhan Karaman" userId="ec277a7f08761a62" providerId="LiveId" clId="{A7318BDB-BC3B-435E-9587-295F14AD73EF}" dt="2026-10-11T18:39:07.658" v="468" actId="1076"/>
           <ac:cxnSpMkLst>
             <pc:docMk/>
             <pc:sldMk cId="4077904148" sldId="256"/>
@@ -450,12 +513,28 @@
             <ac:cxnSpMk id="25" creationId="{630D87C0-634D-4E75-E88B-4E8CEAE4B9D6}"/>
           </ac:cxnSpMkLst>
         </pc:cxnChg>
+        <pc:cxnChg chg="add mod">
+          <ac:chgData name="Ayhan Karaman" userId="ec277a7f08761a62" providerId="LiveId" clId="{A7318BDB-BC3B-435E-9587-295F14AD73EF}" dt="2026-10-11T18:45:23.595" v="657" actId="14100"/>
+          <ac:cxnSpMkLst>
+            <pc:docMk/>
+            <pc:sldMk cId="4077904148" sldId="256"/>
+            <ac:cxnSpMk id="25" creationId="{6B4CA5AD-4432-6E1E-D603-D9F0E8349836}"/>
+          </ac:cxnSpMkLst>
+        </pc:cxnChg>
         <pc:cxnChg chg="del mod topLvl">
           <ac:chgData name="Ayhan Karaman" userId="ec277a7f08761a62" providerId="LiveId" clId="{A7318BDB-BC3B-435E-9587-295F14AD73EF}" dt="2026-10-11T18:14:12.408" v="268" actId="478"/>
           <ac:cxnSpMkLst>
             <pc:docMk/>
             <pc:sldMk cId="4077904148" sldId="256"/>
             <ac:cxnSpMk id="31" creationId="{0EFA64DF-517C-EAE0-0FDC-A130B8B62AE8}"/>
+          </ac:cxnSpMkLst>
+        </pc:cxnChg>
+        <pc:cxnChg chg="add mod">
+          <ac:chgData name="Ayhan Karaman" userId="ec277a7f08761a62" providerId="LiveId" clId="{A7318BDB-BC3B-435E-9587-295F14AD73EF}" dt="2026-10-11T18:44:18.422" v="654" actId="14100"/>
+          <ac:cxnSpMkLst>
+            <pc:docMk/>
+            <pc:sldMk cId="4077904148" sldId="256"/>
+            <ac:cxnSpMk id="31" creationId="{FAEB3B02-F679-8898-A56D-1AC25D7CC733}"/>
           </ac:cxnSpMkLst>
         </pc:cxnChg>
         <pc:cxnChg chg="del mod topLvl">
@@ -467,7 +546,15 @@
           </ac:cxnSpMkLst>
         </pc:cxnChg>
         <pc:cxnChg chg="add mod">
-          <ac:chgData name="Ayhan Karaman" userId="ec277a7f08761a62" providerId="LiveId" clId="{A7318BDB-BC3B-435E-9587-295F14AD73EF}" dt="2026-10-11T18:24:29.095" v="356" actId="1076"/>
+          <ac:chgData name="Ayhan Karaman" userId="ec277a7f08761a62" providerId="LiveId" clId="{A7318BDB-BC3B-435E-9587-295F14AD73EF}" dt="2026-10-11T18:45:36.315" v="660" actId="14100"/>
+          <ac:cxnSpMkLst>
+            <pc:docMk/>
+            <pc:sldMk cId="4077904148" sldId="256"/>
+            <ac:cxnSpMk id="38" creationId="{EC89B389-F3CF-91D6-DB9A-B7FA7DE026C2}"/>
+          </ac:cxnSpMkLst>
+        </pc:cxnChg>
+        <pc:cxnChg chg="add mod">
+          <ac:chgData name="Ayhan Karaman" userId="ec277a7f08761a62" providerId="LiveId" clId="{A7318BDB-BC3B-435E-9587-295F14AD73EF}" dt="2026-10-11T18:43:42.573" v="648" actId="14100"/>
           <ac:cxnSpMkLst>
             <pc:docMk/>
             <pc:sldMk cId="4077904148" sldId="256"/>
@@ -475,7 +562,7 @@
           </ac:cxnSpMkLst>
         </pc:cxnChg>
         <pc:cxnChg chg="add mod">
-          <ac:chgData name="Ayhan Karaman" userId="ec277a7f08761a62" providerId="LiveId" clId="{A7318BDB-BC3B-435E-9587-295F14AD73EF}" dt="2026-10-11T18:26:17.295" v="368" actId="14100"/>
+          <ac:chgData name="Ayhan Karaman" userId="ec277a7f08761a62" providerId="LiveId" clId="{A7318BDB-BC3B-435E-9587-295F14AD73EF}" dt="2026-10-11T18:39:07.658" v="468" actId="1076"/>
           <ac:cxnSpMkLst>
             <pc:docMk/>
             <pc:sldMk cId="4077904148" sldId="256"/>
@@ -483,7 +570,7 @@
           </ac:cxnSpMkLst>
         </pc:cxnChg>
         <pc:cxnChg chg="add mod">
-          <ac:chgData name="Ayhan Karaman" userId="ec277a7f08761a62" providerId="LiveId" clId="{A7318BDB-BC3B-435E-9587-295F14AD73EF}" dt="2026-10-11T18:24:44.117" v="357" actId="14100"/>
+          <ac:chgData name="Ayhan Karaman" userId="ec277a7f08761a62" providerId="LiveId" clId="{A7318BDB-BC3B-435E-9587-295F14AD73EF}" dt="2026-10-11T18:43:31.675" v="645" actId="1076"/>
           <ac:cxnSpMkLst>
             <pc:docMk/>
             <pc:sldMk cId="4077904148" sldId="256"/>
@@ -499,7 +586,7 @@
           </ac:cxnSpMkLst>
         </pc:cxnChg>
         <pc:cxnChg chg="add mod">
-          <ac:chgData name="Ayhan Karaman" userId="ec277a7f08761a62" providerId="LiveId" clId="{A7318BDB-BC3B-435E-9587-295F14AD73EF}" dt="2026-10-11T18:27:00.820" v="398" actId="14100"/>
+          <ac:chgData name="Ayhan Karaman" userId="ec277a7f08761a62" providerId="LiveId" clId="{A7318BDB-BC3B-435E-9587-295F14AD73EF}" dt="2026-10-11T18:39:07.658" v="468" actId="1076"/>
           <ac:cxnSpMkLst>
             <pc:docMk/>
             <pc:sldMk cId="4077904148" sldId="256"/>
@@ -507,7 +594,7 @@
           </ac:cxnSpMkLst>
         </pc:cxnChg>
         <pc:cxnChg chg="add mod">
-          <ac:chgData name="Ayhan Karaman" userId="ec277a7f08761a62" providerId="LiveId" clId="{A7318BDB-BC3B-435E-9587-295F14AD73EF}" dt="2026-10-11T18:27:44.136" v="409" actId="20577"/>
+          <ac:chgData name="Ayhan Karaman" userId="ec277a7f08761a62" providerId="LiveId" clId="{A7318BDB-BC3B-435E-9587-295F14AD73EF}" dt="2026-10-11T18:39:07.658" v="468" actId="1076"/>
           <ac:cxnSpMkLst>
             <pc:docMk/>
             <pc:sldMk cId="4077904148" sldId="256"/>
@@ -515,7 +602,7 @@
           </ac:cxnSpMkLst>
         </pc:cxnChg>
         <pc:cxnChg chg="add mod">
-          <ac:chgData name="Ayhan Karaman" userId="ec277a7f08761a62" providerId="LiveId" clId="{A7318BDB-BC3B-435E-9587-295F14AD73EF}" dt="2026-10-11T18:30:27.771" v="461" actId="20577"/>
+          <ac:chgData name="Ayhan Karaman" userId="ec277a7f08761a62" providerId="LiveId" clId="{A7318BDB-BC3B-435E-9587-295F14AD73EF}" dt="2026-10-11T18:39:07.658" v="468" actId="1076"/>
           <ac:cxnSpMkLst>
             <pc:docMk/>
             <pc:sldMk cId="4077904148" sldId="256"/>
@@ -523,13 +610,227 @@
           </ac:cxnSpMkLst>
         </pc:cxnChg>
         <pc:cxnChg chg="add mod">
-          <ac:chgData name="Ayhan Karaman" userId="ec277a7f08761a62" providerId="LiveId" clId="{A7318BDB-BC3B-435E-9587-295F14AD73EF}" dt="2026-10-11T18:30:14.502" v="458" actId="14100"/>
+          <ac:chgData name="Ayhan Karaman" userId="ec277a7f08761a62" providerId="LiveId" clId="{A7318BDB-BC3B-435E-9587-295F14AD73EF}" dt="2026-10-11T18:39:07.658" v="468" actId="1076"/>
           <ac:cxnSpMkLst>
             <pc:docMk/>
             <pc:sldMk cId="4077904148" sldId="256"/>
             <ac:cxnSpMk id="99" creationId="{C55BFDE2-88A0-44F5-2A20-35E22411BDD2}"/>
           </ac:cxnSpMkLst>
         </pc:cxnChg>
+      </pc:sldChg>
+      <pc:sldChg chg="addSp delSp modSp new mod">
+        <pc:chgData name="Ayhan Karaman" userId="ec277a7f08761a62" providerId="LiveId" clId="{A7318BDB-BC3B-435E-9587-295F14AD73EF}" dt="2026-10-11T19:07:22.057" v="1097" actId="1076"/>
+        <pc:sldMkLst>
+          <pc:docMk/>
+          <pc:sldMk cId="4058067677" sldId="257"/>
+        </pc:sldMkLst>
+        <pc:spChg chg="add del mod">
+          <ac:chgData name="Ayhan Karaman" userId="ec277a7f08761a62" providerId="LiveId" clId="{A7318BDB-BC3B-435E-9587-295F14AD73EF}" dt="2026-10-11T18:47:07.624" v="682" actId="403"/>
+          <ac:spMkLst>
+            <pc:docMk/>
+            <pc:sldMk cId="4058067677" sldId="257"/>
+            <ac:spMk id="2" creationId="{06340E6F-8D9B-A29F-8D57-3D62D3B9A931}"/>
+          </ac:spMkLst>
+        </pc:spChg>
+        <pc:spChg chg="del">
+          <ac:chgData name="Ayhan Karaman" userId="ec277a7f08761a62" providerId="LiveId" clId="{A7318BDB-BC3B-435E-9587-295F14AD73EF}" dt="2026-10-11T18:47:15.002" v="683" actId="478"/>
+          <ac:spMkLst>
+            <pc:docMk/>
+            <pc:sldMk cId="4058067677" sldId="257"/>
+            <ac:spMk id="3" creationId="{2AA95335-2F4D-80D9-C9DA-30BEFE2E90A8}"/>
+          </ac:spMkLst>
+        </pc:spChg>
+        <pc:spChg chg="add mod">
+          <ac:chgData name="Ayhan Karaman" userId="ec277a7f08761a62" providerId="LiveId" clId="{A7318BDB-BC3B-435E-9587-295F14AD73EF}" dt="2026-10-11T18:48:02.769" v="692" actId="1076"/>
+          <ac:spMkLst>
+            <pc:docMk/>
+            <pc:sldMk cId="4058067677" sldId="257"/>
+            <ac:spMk id="4" creationId="{AD1C7C5E-8792-A0AD-A3DE-F02AD22702E4}"/>
+          </ac:spMkLst>
+        </pc:spChg>
+        <pc:spChg chg="add mod topLvl">
+          <ac:chgData name="Ayhan Karaman" userId="ec277a7f08761a62" providerId="LiveId" clId="{A7318BDB-BC3B-435E-9587-295F14AD73EF}" dt="2026-10-11T19:03:10.594" v="900" actId="165"/>
+          <ac:spMkLst>
+            <pc:docMk/>
+            <pc:sldMk cId="4058067677" sldId="257"/>
+            <ac:spMk id="10" creationId="{008A38E2-FE3A-8F8B-11A9-B6F3A96EF53A}"/>
+          </ac:spMkLst>
+        </pc:spChg>
+        <pc:spChg chg="add mod">
+          <ac:chgData name="Ayhan Karaman" userId="ec277a7f08761a62" providerId="LiveId" clId="{A7318BDB-BC3B-435E-9587-295F14AD73EF}" dt="2026-10-11T18:54:04.669" v="740" actId="20577"/>
+          <ac:spMkLst>
+            <pc:docMk/>
+            <pc:sldMk cId="4058067677" sldId="257"/>
+            <ac:spMk id="13" creationId="{6F86D03A-C3EA-C4B1-B00E-5124D5FFF473}"/>
+          </ac:spMkLst>
+        </pc:spChg>
+        <pc:spChg chg="add mod topLvl">
+          <ac:chgData name="Ayhan Karaman" userId="ec277a7f08761a62" providerId="LiveId" clId="{A7318BDB-BC3B-435E-9587-295F14AD73EF}" dt="2026-10-11T19:03:10.594" v="900" actId="165"/>
+          <ac:spMkLst>
+            <pc:docMk/>
+            <pc:sldMk cId="4058067677" sldId="257"/>
+            <ac:spMk id="19" creationId="{5C229175-2B92-A2B6-2CD1-610852973B0F}"/>
+          </ac:spMkLst>
+        </pc:spChg>
+        <pc:spChg chg="add mod topLvl">
+          <ac:chgData name="Ayhan Karaman" userId="ec277a7f08761a62" providerId="LiveId" clId="{A7318BDB-BC3B-435E-9587-295F14AD73EF}" dt="2026-10-11T19:03:10.594" v="900" actId="165"/>
+          <ac:spMkLst>
+            <pc:docMk/>
+            <pc:sldMk cId="4058067677" sldId="257"/>
+            <ac:spMk id="20" creationId="{149ADE37-2B73-80AC-001C-A70B37952EED}"/>
+          </ac:spMkLst>
+        </pc:spChg>
+        <pc:spChg chg="add mod topLvl">
+          <ac:chgData name="Ayhan Karaman" userId="ec277a7f08761a62" providerId="LiveId" clId="{A7318BDB-BC3B-435E-9587-295F14AD73EF}" dt="2026-10-11T19:03:10.594" v="900" actId="165"/>
+          <ac:spMkLst>
+            <pc:docMk/>
+            <pc:sldMk cId="4058067677" sldId="257"/>
+            <ac:spMk id="21" creationId="{46898670-7EFA-ED2D-251A-AB1D62DE7A09}"/>
+          </ac:spMkLst>
+        </pc:spChg>
+        <pc:spChg chg="add mod topLvl">
+          <ac:chgData name="Ayhan Karaman" userId="ec277a7f08761a62" providerId="LiveId" clId="{A7318BDB-BC3B-435E-9587-295F14AD73EF}" dt="2026-10-11T19:03:10.594" v="900" actId="165"/>
+          <ac:spMkLst>
+            <pc:docMk/>
+            <pc:sldMk cId="4058067677" sldId="257"/>
+            <ac:spMk id="22" creationId="{87925643-1D9B-A0B1-AFB0-3A582BC7F162}"/>
+          </ac:spMkLst>
+        </pc:spChg>
+        <pc:spChg chg="add mod topLvl">
+          <ac:chgData name="Ayhan Karaman" userId="ec277a7f08761a62" providerId="LiveId" clId="{A7318BDB-BC3B-435E-9587-295F14AD73EF}" dt="2026-10-11T19:03:10.594" v="900" actId="165"/>
+          <ac:spMkLst>
+            <pc:docMk/>
+            <pc:sldMk cId="4058067677" sldId="257"/>
+            <ac:spMk id="23" creationId="{2D1ACF31-7E40-3DDA-02F4-A488856F1741}"/>
+          </ac:spMkLst>
+        </pc:spChg>
+        <pc:spChg chg="add mod">
+          <ac:chgData name="Ayhan Karaman" userId="ec277a7f08761a62" providerId="LiveId" clId="{A7318BDB-BC3B-435E-9587-295F14AD73EF}" dt="2026-10-11T19:03:50.245" v="906" actId="1076"/>
+          <ac:spMkLst>
+            <pc:docMk/>
+            <pc:sldMk cId="4058067677" sldId="257"/>
+            <ac:spMk id="25" creationId="{35FC2671-BC94-7BF6-6200-09D975F13449}"/>
+          </ac:spMkLst>
+        </pc:spChg>
+        <pc:spChg chg="add mod">
+          <ac:chgData name="Ayhan Karaman" userId="ec277a7f08761a62" providerId="LiveId" clId="{A7318BDB-BC3B-435E-9587-295F14AD73EF}" dt="2026-10-11T19:07:22.057" v="1097" actId="1076"/>
+          <ac:spMkLst>
+            <pc:docMk/>
+            <pc:sldMk cId="4058067677" sldId="257"/>
+            <ac:spMk id="26" creationId="{E4DD5B58-C704-3654-296F-A1C10F5B0793}"/>
+          </ac:spMkLst>
+        </pc:spChg>
+        <pc:grpChg chg="add del mod">
+          <ac:chgData name="Ayhan Karaman" userId="ec277a7f08761a62" providerId="LiveId" clId="{A7318BDB-BC3B-435E-9587-295F14AD73EF}" dt="2026-10-11T19:03:10.594" v="900" actId="165"/>
+          <ac:grpSpMkLst>
+            <pc:docMk/>
+            <pc:sldMk cId="4058067677" sldId="257"/>
+            <ac:grpSpMk id="24" creationId="{32BA0BF6-2FBB-D9C0-CD37-317C2DA5F76B}"/>
+          </ac:grpSpMkLst>
+        </pc:grpChg>
+        <pc:cxnChg chg="add mod">
+          <ac:chgData name="Ayhan Karaman" userId="ec277a7f08761a62" providerId="LiveId" clId="{A7318BDB-BC3B-435E-9587-295F14AD73EF}" dt="2026-10-11T19:02:43.539" v="899" actId="1076"/>
+          <ac:cxnSpMkLst>
+            <pc:docMk/>
+            <pc:sldMk cId="4058067677" sldId="257"/>
+            <ac:cxnSpMk id="6" creationId="{8AB07830-DC11-5A85-C7BC-9A30681F4237}"/>
+          </ac:cxnSpMkLst>
+        </pc:cxnChg>
+        <pc:cxnChg chg="add mod">
+          <ac:chgData name="Ayhan Karaman" userId="ec277a7f08761a62" providerId="LiveId" clId="{A7318BDB-BC3B-435E-9587-295F14AD73EF}" dt="2026-10-11T19:02:40.830" v="896" actId="1076"/>
+          <ac:cxnSpMkLst>
+            <pc:docMk/>
+            <pc:sldMk cId="4058067677" sldId="257"/>
+            <ac:cxnSpMk id="7" creationId="{D9440D5A-70BF-3483-C118-886AD9EFC05E}"/>
+          </ac:cxnSpMkLst>
+        </pc:cxnChg>
+        <pc:cxnChg chg="add mod topLvl">
+          <ac:chgData name="Ayhan Karaman" userId="ec277a7f08761a62" providerId="LiveId" clId="{A7318BDB-BC3B-435E-9587-295F14AD73EF}" dt="2026-10-11T19:03:10.594" v="900" actId="165"/>
+          <ac:cxnSpMkLst>
+            <pc:docMk/>
+            <pc:sldMk cId="4058067677" sldId="257"/>
+            <ac:cxnSpMk id="16" creationId="{E4C1E75D-F209-62FE-A4DB-1C2910FCAC16}"/>
+          </ac:cxnSpMkLst>
+        </pc:cxnChg>
+        <pc:cxnChg chg="add mod">
+          <ac:chgData name="Ayhan Karaman" userId="ec277a7f08761a62" providerId="LiveId" clId="{A7318BDB-BC3B-435E-9587-295F14AD73EF}" dt="2026-10-11T18:54:47.772" v="746" actId="1076"/>
+          <ac:cxnSpMkLst>
+            <pc:docMk/>
+            <pc:sldMk cId="4058067677" sldId="257"/>
+            <ac:cxnSpMk id="18" creationId="{90531D68-8147-D837-8DB6-C31868192631}"/>
+          </ac:cxnSpMkLst>
+        </pc:cxnChg>
+      </pc:sldChg>
+      <pc:sldChg chg="addSp delSp modSp new mod">
+        <pc:chgData name="Ayhan Karaman" userId="ec277a7f08761a62" providerId="LiveId" clId="{A7318BDB-BC3B-435E-9587-295F14AD73EF}" dt="2026-10-11T20:39:06.415" v="2893" actId="6549"/>
+        <pc:sldMkLst>
+          <pc:docMk/>
+          <pc:sldMk cId="512067248" sldId="258"/>
+        </pc:sldMkLst>
+        <pc:spChg chg="mod">
+          <ac:chgData name="Ayhan Karaman" userId="ec277a7f08761a62" providerId="LiveId" clId="{A7318BDB-BC3B-435E-9587-295F14AD73EF}" dt="2026-10-11T20:37:50.455" v="2885" actId="14100"/>
+          <ac:spMkLst>
+            <pc:docMk/>
+            <pc:sldMk cId="512067248" sldId="258"/>
+            <ac:spMk id="2" creationId="{4F31AC6B-9B8F-F79D-2B52-3A31D83E3662}"/>
+          </ac:spMkLst>
+        </pc:spChg>
+        <pc:spChg chg="del">
+          <ac:chgData name="Ayhan Karaman" userId="ec277a7f08761a62" providerId="LiveId" clId="{A7318BDB-BC3B-435E-9587-295F14AD73EF}" dt="2026-10-11T19:09:09.829" v="1134" actId="478"/>
+          <ac:spMkLst>
+            <pc:docMk/>
+            <pc:sldMk cId="512067248" sldId="258"/>
+            <ac:spMk id="3" creationId="{3E60ABC4-A887-D5E7-B409-817308DFB8CB}"/>
+          </ac:spMkLst>
+        </pc:spChg>
+        <pc:spChg chg="add mod">
+          <ac:chgData name="Ayhan Karaman" userId="ec277a7f08761a62" providerId="LiveId" clId="{A7318BDB-BC3B-435E-9587-295F14AD73EF}" dt="2026-10-11T20:37:55.737" v="2886" actId="1076"/>
+          <ac:spMkLst>
+            <pc:docMk/>
+            <pc:sldMk cId="512067248" sldId="258"/>
+            <ac:spMk id="4" creationId="{9668639A-0B97-AD1E-43FA-28EF8958806C}"/>
+          </ac:spMkLst>
+        </pc:spChg>
+        <pc:spChg chg="add mod">
+          <ac:chgData name="Ayhan Karaman" userId="ec277a7f08761a62" providerId="LiveId" clId="{A7318BDB-BC3B-435E-9587-295F14AD73EF}" dt="2026-10-11T20:38:35.526" v="2891" actId="207"/>
+          <ac:spMkLst>
+            <pc:docMk/>
+            <pc:sldMk cId="512067248" sldId="258"/>
+            <ac:spMk id="5" creationId="{D158510D-C4F3-24F0-5171-960FD2A8E88A}"/>
+          </ac:spMkLst>
+        </pc:spChg>
+        <pc:spChg chg="add del mod">
+          <ac:chgData name="Ayhan Karaman" userId="ec277a7f08761a62" providerId="LiveId" clId="{A7318BDB-BC3B-435E-9587-295F14AD73EF}" dt="2026-10-11T19:23:18.651" v="1312"/>
+          <ac:spMkLst>
+            <pc:docMk/>
+            <pc:sldMk cId="512067248" sldId="258"/>
+            <ac:spMk id="6" creationId="{38F58C63-6EAB-22C8-FA8B-A7D0E1117499}"/>
+          </ac:spMkLst>
+        </pc:spChg>
+        <pc:spChg chg="add del mod">
+          <ac:chgData name="Ayhan Karaman" userId="ec277a7f08761a62" providerId="LiveId" clId="{A7318BDB-BC3B-435E-9587-295F14AD73EF}" dt="2026-10-11T19:22:43.089" v="1309"/>
+          <ac:spMkLst>
+            <pc:docMk/>
+            <pc:sldMk cId="512067248" sldId="258"/>
+            <ac:spMk id="7" creationId="{47C47182-6991-2535-C868-25E0B9198030}"/>
+          </ac:spMkLst>
+        </pc:spChg>
+        <pc:graphicFrameChg chg="add mod modGraphic">
+          <ac:chgData name="Ayhan Karaman" userId="ec277a7f08761a62" providerId="LiveId" clId="{A7318BDB-BC3B-435E-9587-295F14AD73EF}" dt="2026-10-11T20:37:40.728" v="2883" actId="1076"/>
+          <ac:graphicFrameMkLst>
+            <pc:docMk/>
+            <pc:sldMk cId="512067248" sldId="258"/>
+            <ac:graphicFrameMk id="8" creationId="{73B81C24-4295-452A-3186-02A4ECFDE86A}"/>
+          </ac:graphicFrameMkLst>
+        </pc:graphicFrameChg>
+        <pc:graphicFrameChg chg="add mod modGraphic">
+          <ac:chgData name="Ayhan Karaman" userId="ec277a7f08761a62" providerId="LiveId" clId="{A7318BDB-BC3B-435E-9587-295F14AD73EF}" dt="2026-10-11T20:39:06.415" v="2893" actId="6549"/>
+          <ac:graphicFrameMkLst>
+            <pc:docMk/>
+            <pc:sldMk cId="512067248" sldId="258"/>
+            <ac:graphicFrameMk id="9" creationId="{A9FEB907-20A7-2D65-95C7-F8C5370DE7F9}"/>
+          </ac:graphicFrameMkLst>
+        </pc:graphicFrameChg>
       </pc:sldChg>
     </pc:docChg>
   </pc:docChgLst>
@@ -3765,7 +4066,7 @@
         <p:spPr>
           <a:xfrm>
             <a:off x="605245" y="116784"/>
-            <a:ext cx="10981509" cy="1968137"/>
+            <a:ext cx="10981509" cy="1089539"/>
           </a:xfrm>
           <a:prstGeom prst="roundRect">
             <a:avLst/>
@@ -3861,7 +4162,7 @@
         </p:nvSpPr>
         <p:spPr>
           <a:xfrm rot="5400000">
-            <a:off x="7940716" y="641310"/>
+            <a:off x="7940716" y="-273421"/>
             <a:ext cx="311154" cy="4159335"/>
           </a:xfrm>
           <a:prstGeom prst="bentArrow">
@@ -3916,7 +4217,7 @@
         </p:nvSpPr>
         <p:spPr>
           <a:xfrm rot="16200000" flipH="1">
-            <a:off x="3874316" y="654870"/>
+            <a:off x="3874316" y="-259861"/>
             <a:ext cx="311154" cy="4132214"/>
           </a:xfrm>
           <a:prstGeom prst="bentArrow">
@@ -3976,7 +4277,7 @@
         </p:nvSpPr>
         <p:spPr>
           <a:xfrm>
-            <a:off x="6016625" y="2084922"/>
+            <a:off x="6016625" y="1170191"/>
             <a:ext cx="158750" cy="836082"/>
           </a:xfrm>
           <a:prstGeom prst="downArrow">
@@ -4027,7 +4328,7 @@
         </p:nvSpPr>
         <p:spPr>
           <a:xfrm>
-            <a:off x="1312333" y="2876552"/>
+            <a:off x="1312333" y="1961821"/>
             <a:ext cx="1540934" cy="905934"/>
           </a:xfrm>
           <a:prstGeom prst="rect">
@@ -4077,7 +4378,7 @@
         </p:nvSpPr>
         <p:spPr>
           <a:xfrm>
-            <a:off x="5325533" y="2921004"/>
+            <a:off x="5325533" y="2006273"/>
             <a:ext cx="1540934" cy="905934"/>
           </a:xfrm>
           <a:prstGeom prst="rect">
@@ -4126,7 +4427,7 @@
         </p:nvSpPr>
         <p:spPr>
           <a:xfrm>
-            <a:off x="9338733" y="2876552"/>
+            <a:off x="9338733" y="1961821"/>
             <a:ext cx="1540934" cy="905934"/>
           </a:xfrm>
           <a:prstGeom prst="rect">
@@ -4176,7 +4477,7 @@
         </p:nvSpPr>
         <p:spPr>
           <a:xfrm>
-            <a:off x="5799967" y="3457606"/>
+            <a:off x="5799967" y="2542875"/>
             <a:ext cx="592063" cy="369332"/>
           </a:xfrm>
           <a:prstGeom prst="rect">
@@ -4231,7 +4532,7 @@
         </p:nvSpPr>
         <p:spPr>
           <a:xfrm>
-            <a:off x="9879929" y="3432206"/>
+            <a:off x="9879929" y="2517475"/>
             <a:ext cx="592063" cy="369332"/>
           </a:xfrm>
           <a:prstGeom prst="rect">
@@ -4286,7 +4587,7 @@
         </p:nvSpPr>
         <p:spPr>
           <a:xfrm>
-            <a:off x="1786768" y="3385644"/>
+            <a:off x="1786768" y="2470913"/>
             <a:ext cx="592063" cy="369332"/>
           </a:xfrm>
           <a:prstGeom prst="rect">
@@ -4345,7 +4646,7 @@
         </p:nvCxnSpPr>
         <p:spPr>
           <a:xfrm flipH="1">
-            <a:off x="856750" y="3754976"/>
+            <a:off x="856750" y="2840245"/>
             <a:ext cx="1226050" cy="678005"/>
           </a:xfrm>
           <a:prstGeom prst="straightConnector1">
@@ -4388,7 +4689,7 @@
         </p:nvCxnSpPr>
         <p:spPr>
           <a:xfrm flipH="1">
-            <a:off x="2076603" y="3754976"/>
+            <a:off x="2076603" y="2840245"/>
             <a:ext cx="6197" cy="665704"/>
           </a:xfrm>
           <a:prstGeom prst="straightConnector1">
@@ -4431,7 +4732,7 @@
         </p:nvCxnSpPr>
         <p:spPr>
           <a:xfrm>
-            <a:off x="2082800" y="3754976"/>
+            <a:off x="2082800" y="2840245"/>
             <a:ext cx="1358116" cy="662152"/>
           </a:xfrm>
           <a:prstGeom prst="straightConnector1">
@@ -4470,7 +4771,7 @@
         </p:nvSpPr>
         <p:spPr>
           <a:xfrm>
-            <a:off x="406947" y="4432981"/>
+            <a:off x="406947" y="3518250"/>
             <a:ext cx="899605" cy="369332"/>
           </a:xfrm>
           <a:prstGeom prst="rect">
@@ -4505,7 +4806,7 @@
         </p:nvSpPr>
         <p:spPr>
           <a:xfrm>
-            <a:off x="1638694" y="4420680"/>
+            <a:off x="1638694" y="3505949"/>
             <a:ext cx="875817" cy="646331"/>
           </a:xfrm>
           <a:prstGeom prst="rect">
@@ -4543,7 +4844,7 @@
         </p:nvSpPr>
         <p:spPr>
           <a:xfrm>
-            <a:off x="2852242" y="4417128"/>
+            <a:off x="2852242" y="3502397"/>
             <a:ext cx="1177347" cy="369332"/>
           </a:xfrm>
           <a:prstGeom prst="rect">
@@ -4575,15 +4876,15 @@
           </p:cNvPr>
           <p:cNvCxnSpPr>
             <a:cxnSpLocks/>
-            <a:stCxn id="13" idx="2"/>
-            <a:endCxn id="49" idx="0"/>
+            <a:stCxn id="49" idx="2"/>
+            <a:endCxn id="70" idx="0"/>
           </p:cNvCxnSpPr>
           <p:nvPr/>
         </p:nvCxnSpPr>
         <p:spPr>
           <a:xfrm flipH="1">
-            <a:off x="5199955" y="3826938"/>
-            <a:ext cx="896044" cy="467544"/>
+            <a:off x="5136274" y="4026082"/>
+            <a:ext cx="63681" cy="295107"/>
           </a:xfrm>
           <a:prstGeom prst="straightConnector1">
             <a:avLst/>
@@ -4625,7 +4926,7 @@
         </p:nvCxnSpPr>
         <p:spPr>
           <a:xfrm>
-            <a:off x="6095999" y="3826938"/>
+            <a:off x="6095999" y="2912207"/>
             <a:ext cx="1575074" cy="455242"/>
           </a:xfrm>
           <a:prstGeom prst="straightConnector1">
@@ -4664,7 +4965,7 @@
         </p:nvSpPr>
         <p:spPr>
           <a:xfrm>
-            <a:off x="4446688" y="4294482"/>
+            <a:off x="4446688" y="3379751"/>
             <a:ext cx="1506533" cy="646331"/>
           </a:xfrm>
           <a:prstGeom prst="rect">
@@ -4711,7 +5012,7 @@
         </p:nvSpPr>
         <p:spPr>
           <a:xfrm>
-            <a:off x="6804297" y="4282180"/>
+            <a:off x="6804297" y="3367449"/>
             <a:ext cx="1733552" cy="646331"/>
           </a:xfrm>
           <a:prstGeom prst="rect">
@@ -4762,7 +5063,7 @@
         </p:nvCxnSpPr>
         <p:spPr>
           <a:xfrm>
-            <a:off x="4273550" y="4928511"/>
+            <a:off x="4288731" y="4306657"/>
             <a:ext cx="1822448" cy="0"/>
           </a:xfrm>
           <a:prstGeom prst="line">
@@ -4798,7 +5099,7 @@
         </p:nvGrpSpPr>
         <p:grpSpPr>
           <a:xfrm>
-            <a:off x="4151918" y="4943043"/>
+            <a:off x="4167099" y="4321189"/>
             <a:ext cx="2231222" cy="855476"/>
             <a:chOff x="4366924" y="5082695"/>
             <a:chExt cx="2331087" cy="1405626"/>
@@ -5127,7 +5428,7 @@
         </p:nvCxnSpPr>
         <p:spPr>
           <a:xfrm flipH="1">
-            <a:off x="9367545" y="3801538"/>
+            <a:off x="9367545" y="2886807"/>
             <a:ext cx="808416" cy="477090"/>
           </a:xfrm>
           <a:prstGeom prst="straightConnector1">
@@ -5170,7 +5471,7 @@
         </p:nvCxnSpPr>
         <p:spPr>
           <a:xfrm>
-            <a:off x="10175961" y="3801538"/>
+            <a:off x="10175961" y="2886807"/>
             <a:ext cx="1159289" cy="492944"/>
           </a:xfrm>
           <a:prstGeom prst="straightConnector1">
@@ -5209,7 +5510,7 @@
         </p:nvSpPr>
         <p:spPr>
           <a:xfrm>
-            <a:off x="8707145" y="4278628"/>
+            <a:off x="8707145" y="3363897"/>
             <a:ext cx="1320800" cy="646331"/>
           </a:xfrm>
           <a:prstGeom prst="rect">
@@ -5244,7 +5545,7 @@
         </p:nvSpPr>
         <p:spPr>
           <a:xfrm>
-            <a:off x="10674850" y="4294482"/>
+            <a:off x="10674850" y="3379751"/>
             <a:ext cx="1320800" cy="646331"/>
           </a:xfrm>
           <a:prstGeom prst="rect">
@@ -5283,7 +5584,7 @@
         </p:nvCxnSpPr>
         <p:spPr>
           <a:xfrm>
-            <a:off x="11335250" y="4940813"/>
+            <a:off x="11335250" y="4026082"/>
             <a:ext cx="0" cy="424337"/>
           </a:xfrm>
           <a:prstGeom prst="straightConnector1">
@@ -5326,7 +5627,7 @@
         </p:nvCxnSpPr>
         <p:spPr>
           <a:xfrm flipH="1">
-            <a:off x="9570720" y="4940813"/>
+            <a:off x="9570720" y="4026082"/>
             <a:ext cx="1764530" cy="321313"/>
           </a:xfrm>
           <a:prstGeom prst="straightConnector1">
@@ -5365,7 +5666,7 @@
         </p:nvSpPr>
         <p:spPr>
           <a:xfrm>
-            <a:off x="8910320" y="5262126"/>
+            <a:off x="8910320" y="4347395"/>
             <a:ext cx="1320800" cy="646331"/>
           </a:xfrm>
           <a:prstGeom prst="rect">
@@ -5400,7 +5701,7 @@
         </p:nvSpPr>
         <p:spPr>
           <a:xfrm>
-            <a:off x="10674850" y="5365150"/>
+            <a:off x="10674850" y="4450419"/>
             <a:ext cx="1320800" cy="646331"/>
           </a:xfrm>
           <a:prstGeom prst="rect">
@@ -5421,10 +5722,3200 @@
           </a:p>
         </p:txBody>
       </p:sp>
+      <p:grpSp>
+        <p:nvGrpSpPr>
+          <p:cNvPr id="24" name="Grup 23">
+            <a:extLst>
+              <a:ext uri="{FF2B5EF4-FFF2-40B4-BE49-F238E27FC236}">
+                <a16:creationId xmlns:a16="http://schemas.microsoft.com/office/drawing/2014/main" id="{4CAB63B4-FD1F-56B0-D557-DCFEC7A2D04B}"/>
+              </a:ext>
+            </a:extLst>
+          </p:cNvPr>
+          <p:cNvGrpSpPr/>
+          <p:nvPr/>
+        </p:nvGrpSpPr>
+        <p:grpSpPr>
+          <a:xfrm>
+            <a:off x="9570049" y="5330893"/>
+            <a:ext cx="2594700" cy="1191259"/>
+            <a:chOff x="1306552" y="4724434"/>
+            <a:chExt cx="2594700" cy="1191259"/>
+          </a:xfrm>
+        </p:grpSpPr>
+        <p:sp>
+          <p:nvSpPr>
+            <p:cNvPr id="6" name="Metin kutusu 5">
+              <a:extLst>
+                <a:ext uri="{FF2B5EF4-FFF2-40B4-BE49-F238E27FC236}">
+                  <a16:creationId xmlns:a16="http://schemas.microsoft.com/office/drawing/2014/main" id="{EC103A0C-957F-1BC9-195E-F2C7D0417206}"/>
+                </a:ext>
+              </a:extLst>
+            </p:cNvPr>
+            <p:cNvSpPr txBox="1"/>
+            <p:nvPr/>
+          </p:nvSpPr>
+          <p:spPr>
+            <a:xfrm>
+              <a:off x="1306552" y="4724434"/>
+              <a:ext cx="1642116" cy="338554"/>
+            </a:xfrm>
+            <a:prstGeom prst="rect">
+              <a:avLst/>
+            </a:prstGeom>
+            <a:noFill/>
+          </p:spPr>
+          <p:txBody>
+            <a:bodyPr wrap="none" rtlCol="0">
+              <a:spAutoFit/>
+            </a:bodyPr>
+            <a:lstStyle/>
+            <a:p>
+              <a:r>
+                <a:rPr lang="tr-TR" sz="1600" dirty="0">
+                  <a:solidFill>
+                    <a:schemeClr val="accent1">
+                      <a:lumMod val="75000"/>
+                    </a:schemeClr>
+                  </a:solidFill>
+                </a:rPr>
+                <a:t>1. Harf-i Cer (20)</a:t>
+              </a:r>
+            </a:p>
+          </p:txBody>
+        </p:sp>
+        <p:sp>
+          <p:nvSpPr>
+            <p:cNvPr id="16" name="Metin kutusu 15">
+              <a:extLst>
+                <a:ext uri="{FF2B5EF4-FFF2-40B4-BE49-F238E27FC236}">
+                  <a16:creationId xmlns:a16="http://schemas.microsoft.com/office/drawing/2014/main" id="{97608624-8029-9BAF-9BCA-55C640B05ADE}"/>
+                </a:ext>
+              </a:extLst>
+            </p:cNvPr>
+            <p:cNvSpPr txBox="1"/>
+            <p:nvPr/>
+          </p:nvSpPr>
+          <p:spPr>
+            <a:xfrm>
+              <a:off x="1306552" y="4940494"/>
+              <a:ext cx="2581348" cy="338554"/>
+            </a:xfrm>
+            <a:prstGeom prst="rect">
+              <a:avLst/>
+            </a:prstGeom>
+            <a:noFill/>
+          </p:spPr>
+          <p:txBody>
+            <a:bodyPr wrap="none" rtlCol="0">
+              <a:spAutoFit/>
+            </a:bodyPr>
+            <a:lstStyle/>
+            <a:p>
+              <a:r>
+                <a:rPr lang="tr-TR" sz="1600" dirty="0">
+                  <a:solidFill>
+                    <a:schemeClr val="accent1">
+                      <a:lumMod val="75000"/>
+                    </a:schemeClr>
+                  </a:solidFill>
+                </a:rPr>
+                <a:t>2. İsmi </a:t>
+              </a:r>
+              <a:r>
+                <a:rPr lang="tr-TR" sz="1600" dirty="0" err="1">
+                  <a:solidFill>
+                    <a:schemeClr val="accent1">
+                      <a:lumMod val="75000"/>
+                    </a:schemeClr>
+                  </a:solidFill>
+                </a:rPr>
+                <a:t>Nasb</a:t>
+              </a:r>
+              <a:r>
+                <a:rPr lang="tr-TR" sz="1600" dirty="0">
+                  <a:solidFill>
+                    <a:schemeClr val="accent1">
+                      <a:lumMod val="75000"/>
+                    </a:schemeClr>
+                  </a:solidFill>
+                </a:rPr>
+                <a:t>, Haberi </a:t>
+              </a:r>
+              <a:r>
+                <a:rPr lang="tr-TR" sz="1600" dirty="0" err="1">
+                  <a:solidFill>
+                    <a:schemeClr val="accent1">
+                      <a:lumMod val="75000"/>
+                    </a:schemeClr>
+                  </a:solidFill>
+                </a:rPr>
+                <a:t>Ref</a:t>
+              </a:r>
+              <a:r>
+                <a:rPr lang="tr-TR" sz="1600" dirty="0">
+                  <a:solidFill>
+                    <a:schemeClr val="accent1">
+                      <a:lumMod val="75000"/>
+                    </a:schemeClr>
+                  </a:solidFill>
+                </a:rPr>
+                <a:t> (8)</a:t>
+              </a:r>
+            </a:p>
+          </p:txBody>
+        </p:sp>
+        <p:sp>
+          <p:nvSpPr>
+            <p:cNvPr id="18" name="Metin kutusu 17">
+              <a:extLst>
+                <a:ext uri="{FF2B5EF4-FFF2-40B4-BE49-F238E27FC236}">
+                  <a16:creationId xmlns:a16="http://schemas.microsoft.com/office/drawing/2014/main" id="{998CBB6A-E625-0546-913F-FAA7B24D349F}"/>
+                </a:ext>
+              </a:extLst>
+            </p:cNvPr>
+            <p:cNvSpPr txBox="1"/>
+            <p:nvPr/>
+          </p:nvSpPr>
+          <p:spPr>
+            <a:xfrm>
+              <a:off x="1321892" y="5373863"/>
+              <a:ext cx="2189125" cy="338554"/>
+            </a:xfrm>
+            <a:prstGeom prst="rect">
+              <a:avLst/>
+            </a:prstGeom>
+            <a:noFill/>
+          </p:spPr>
+          <p:txBody>
+            <a:bodyPr wrap="none" rtlCol="0">
+              <a:spAutoFit/>
+            </a:bodyPr>
+            <a:lstStyle/>
+            <a:p>
+              <a:r>
+                <a:rPr lang="tr-TR" sz="1600" dirty="0">
+                  <a:solidFill>
+                    <a:schemeClr val="accent1">
+                      <a:lumMod val="75000"/>
+                    </a:schemeClr>
+                  </a:solidFill>
+                </a:rPr>
+                <a:t>4. Fiil-i </a:t>
+              </a:r>
+              <a:r>
+                <a:rPr lang="tr-TR" sz="1600" dirty="0" err="1">
+                  <a:solidFill>
+                    <a:schemeClr val="accent1">
+                      <a:lumMod val="75000"/>
+                    </a:schemeClr>
+                  </a:solidFill>
+                </a:rPr>
+                <a:t>Muzari</a:t>
+              </a:r>
+              <a:r>
+                <a:rPr lang="tr-TR" sz="1600" dirty="0">
+                  <a:solidFill>
+                    <a:schemeClr val="accent1">
+                      <a:lumMod val="75000"/>
+                    </a:schemeClr>
+                  </a:solidFill>
+                </a:rPr>
+                <a:t> </a:t>
+              </a:r>
+              <a:r>
+                <a:rPr lang="tr-TR" sz="1600" dirty="0" err="1">
+                  <a:solidFill>
+                    <a:schemeClr val="accent1">
+                      <a:lumMod val="75000"/>
+                    </a:schemeClr>
+                  </a:solidFill>
+                </a:rPr>
+                <a:t>Nasb</a:t>
+              </a:r>
+              <a:r>
+                <a:rPr lang="tr-TR" sz="1600" dirty="0">
+                  <a:solidFill>
+                    <a:schemeClr val="accent1">
+                      <a:lumMod val="75000"/>
+                    </a:schemeClr>
+                  </a:solidFill>
+                </a:rPr>
+                <a:t> (4)</a:t>
+              </a:r>
+            </a:p>
+          </p:txBody>
+        </p:sp>
+        <p:sp>
+          <p:nvSpPr>
+            <p:cNvPr id="20" name="Metin kutusu 19">
+              <a:extLst>
+                <a:ext uri="{FF2B5EF4-FFF2-40B4-BE49-F238E27FC236}">
+                  <a16:creationId xmlns:a16="http://schemas.microsoft.com/office/drawing/2014/main" id="{8035F9EA-F268-95BC-10F2-37EFD1A34E90}"/>
+                </a:ext>
+              </a:extLst>
+            </p:cNvPr>
+            <p:cNvSpPr txBox="1"/>
+            <p:nvPr/>
+          </p:nvSpPr>
+          <p:spPr>
+            <a:xfrm>
+              <a:off x="1321892" y="5167816"/>
+              <a:ext cx="2579360" cy="338554"/>
+            </a:xfrm>
+            <a:prstGeom prst="rect">
+              <a:avLst/>
+            </a:prstGeom>
+            <a:noFill/>
+          </p:spPr>
+          <p:txBody>
+            <a:bodyPr wrap="none" rtlCol="0">
+              <a:spAutoFit/>
+            </a:bodyPr>
+            <a:lstStyle/>
+            <a:p>
+              <a:r>
+                <a:rPr lang="tr-TR" sz="1600" dirty="0">
+                  <a:solidFill>
+                    <a:schemeClr val="accent1">
+                      <a:lumMod val="75000"/>
+                    </a:schemeClr>
+                  </a:solidFill>
+                </a:rPr>
+                <a:t>3. İsmi </a:t>
+              </a:r>
+              <a:r>
+                <a:rPr lang="tr-TR" sz="1600" dirty="0" err="1">
+                  <a:solidFill>
+                    <a:schemeClr val="accent1">
+                      <a:lumMod val="75000"/>
+                    </a:schemeClr>
+                  </a:solidFill>
+                </a:rPr>
+                <a:t>Ref</a:t>
+              </a:r>
+              <a:r>
+                <a:rPr lang="tr-TR" sz="1600" dirty="0">
+                  <a:solidFill>
+                    <a:schemeClr val="accent1">
+                      <a:lumMod val="75000"/>
+                    </a:schemeClr>
+                  </a:solidFill>
+                </a:rPr>
+                <a:t>, Haberi </a:t>
+              </a:r>
+              <a:r>
+                <a:rPr lang="tr-TR" sz="1600" dirty="0" err="1">
+                  <a:solidFill>
+                    <a:schemeClr val="accent1">
+                      <a:lumMod val="75000"/>
+                    </a:schemeClr>
+                  </a:solidFill>
+                </a:rPr>
+                <a:t>Nasb</a:t>
+              </a:r>
+              <a:r>
+                <a:rPr lang="tr-TR" sz="1600" dirty="0">
+                  <a:solidFill>
+                    <a:schemeClr val="accent1">
+                      <a:lumMod val="75000"/>
+                    </a:schemeClr>
+                  </a:solidFill>
+                </a:rPr>
+                <a:t> (2)</a:t>
+              </a:r>
+            </a:p>
+          </p:txBody>
+        </p:sp>
+        <p:sp>
+          <p:nvSpPr>
+            <p:cNvPr id="23" name="Metin kutusu 22">
+              <a:extLst>
+                <a:ext uri="{FF2B5EF4-FFF2-40B4-BE49-F238E27FC236}">
+                  <a16:creationId xmlns:a16="http://schemas.microsoft.com/office/drawing/2014/main" id="{AF74F6CD-7BBA-C036-D6CE-9B9CB9818A6F}"/>
+                </a:ext>
+              </a:extLst>
+            </p:cNvPr>
+            <p:cNvSpPr txBox="1"/>
+            <p:nvPr/>
+          </p:nvSpPr>
+          <p:spPr>
+            <a:xfrm>
+              <a:off x="1321892" y="5577139"/>
+              <a:ext cx="2341795" cy="338554"/>
+            </a:xfrm>
+            <a:prstGeom prst="rect">
+              <a:avLst/>
+            </a:prstGeom>
+            <a:noFill/>
+          </p:spPr>
+          <p:txBody>
+            <a:bodyPr wrap="none" rtlCol="0">
+              <a:spAutoFit/>
+            </a:bodyPr>
+            <a:lstStyle/>
+            <a:p>
+              <a:r>
+                <a:rPr lang="tr-TR" sz="1600" dirty="0">
+                  <a:solidFill>
+                    <a:schemeClr val="accent1">
+                      <a:lumMod val="75000"/>
+                    </a:schemeClr>
+                  </a:solidFill>
+                </a:rPr>
+                <a:t>5. Fiil-i </a:t>
+              </a:r>
+              <a:r>
+                <a:rPr lang="tr-TR" sz="1600" dirty="0" err="1">
+                  <a:solidFill>
+                    <a:schemeClr val="accent1">
+                      <a:lumMod val="75000"/>
+                    </a:schemeClr>
+                  </a:solidFill>
+                </a:rPr>
+                <a:t>Muzari</a:t>
+              </a:r>
+              <a:r>
+                <a:rPr lang="tr-TR" sz="1600" dirty="0">
+                  <a:solidFill>
+                    <a:schemeClr val="accent1">
+                      <a:lumMod val="75000"/>
+                    </a:schemeClr>
+                  </a:solidFill>
+                </a:rPr>
+                <a:t> </a:t>
+              </a:r>
+              <a:r>
+                <a:rPr lang="tr-TR" sz="1600" dirty="0" err="1">
+                  <a:solidFill>
+                    <a:schemeClr val="accent1">
+                      <a:lumMod val="75000"/>
+                    </a:schemeClr>
+                  </a:solidFill>
+                </a:rPr>
+                <a:t>Cezm</a:t>
+              </a:r>
+              <a:r>
+                <a:rPr lang="tr-TR" sz="1600" dirty="0">
+                  <a:solidFill>
+                    <a:schemeClr val="accent1">
+                      <a:lumMod val="75000"/>
+                    </a:schemeClr>
+                  </a:solidFill>
+                </a:rPr>
+                <a:t> (15)</a:t>
+              </a:r>
+            </a:p>
+          </p:txBody>
+        </p:sp>
+      </p:grpSp>
+      <p:cxnSp>
+        <p:nvCxnSpPr>
+          <p:cNvPr id="25" name="Düz Ok Bağlayıcısı 24">
+            <a:extLst>
+              <a:ext uri="{FF2B5EF4-FFF2-40B4-BE49-F238E27FC236}">
+                <a16:creationId xmlns:a16="http://schemas.microsoft.com/office/drawing/2014/main" id="{6B4CA5AD-4432-6E1E-D603-D9F0E8349836}"/>
+              </a:ext>
+            </a:extLst>
+          </p:cNvPr>
+          <p:cNvCxnSpPr>
+            <a:cxnSpLocks/>
+            <a:stCxn id="107" idx="2"/>
+          </p:cNvCxnSpPr>
+          <p:nvPr/>
+        </p:nvCxnSpPr>
+        <p:spPr>
+          <a:xfrm flipH="1">
+            <a:off x="10834614" y="5096750"/>
+            <a:ext cx="500636" cy="205109"/>
+          </a:xfrm>
+          <a:prstGeom prst="straightConnector1">
+            <a:avLst/>
+          </a:prstGeom>
+          <a:ln>
+            <a:tailEnd type="triangle"/>
+          </a:ln>
+        </p:spPr>
+        <p:style>
+          <a:lnRef idx="2">
+            <a:schemeClr val="accent1"/>
+          </a:lnRef>
+          <a:fillRef idx="0">
+            <a:schemeClr val="accent1"/>
+          </a:fillRef>
+          <a:effectRef idx="1">
+            <a:schemeClr val="accent1"/>
+          </a:effectRef>
+          <a:fontRef idx="minor">
+            <a:schemeClr val="tx1"/>
+          </a:fontRef>
+        </p:style>
+      </p:cxnSp>
+      <p:cxnSp>
+        <p:nvCxnSpPr>
+          <p:cNvPr id="31" name="Düz Bağlayıcı 30">
+            <a:extLst>
+              <a:ext uri="{FF2B5EF4-FFF2-40B4-BE49-F238E27FC236}">
+                <a16:creationId xmlns:a16="http://schemas.microsoft.com/office/drawing/2014/main" id="{FAEB3B02-F679-8898-A56D-1AC25D7CC733}"/>
+              </a:ext>
+            </a:extLst>
+          </p:cNvPr>
+          <p:cNvCxnSpPr>
+            <a:cxnSpLocks/>
+          </p:cNvCxnSpPr>
+          <p:nvPr/>
+        </p:nvCxnSpPr>
+        <p:spPr>
+          <a:xfrm>
+            <a:off x="9678507" y="5341843"/>
+            <a:ext cx="2312214" cy="0"/>
+          </a:xfrm>
+          <a:prstGeom prst="line">
+            <a:avLst/>
+          </a:prstGeom>
+        </p:spPr>
+        <p:style>
+          <a:lnRef idx="2">
+            <a:schemeClr val="accent1"/>
+          </a:lnRef>
+          <a:fillRef idx="0">
+            <a:schemeClr val="accent1"/>
+          </a:fillRef>
+          <a:effectRef idx="1">
+            <a:schemeClr val="accent1"/>
+          </a:effectRef>
+          <a:fontRef idx="minor">
+            <a:schemeClr val="tx1"/>
+          </a:fontRef>
+        </p:style>
+      </p:cxnSp>
+      <p:cxnSp>
+        <p:nvCxnSpPr>
+          <p:cNvPr id="38" name="Düz Ok Bağlayıcısı 37">
+            <a:extLst>
+              <a:ext uri="{FF2B5EF4-FFF2-40B4-BE49-F238E27FC236}">
+                <a16:creationId xmlns:a16="http://schemas.microsoft.com/office/drawing/2014/main" id="{EC89B389-F3CF-91D6-DB9A-B7FA7DE026C2}"/>
+              </a:ext>
+            </a:extLst>
+          </p:cNvPr>
+          <p:cNvCxnSpPr>
+            <a:cxnSpLocks/>
+            <a:stCxn id="13" idx="2"/>
+            <a:endCxn id="49" idx="0"/>
+          </p:cNvCxnSpPr>
+          <p:nvPr/>
+        </p:nvCxnSpPr>
+        <p:spPr>
+          <a:xfrm flipH="1">
+            <a:off x="5199955" y="2912207"/>
+            <a:ext cx="896044" cy="467544"/>
+          </a:xfrm>
+          <a:prstGeom prst="straightConnector1">
+            <a:avLst/>
+          </a:prstGeom>
+          <a:ln>
+            <a:tailEnd type="triangle"/>
+          </a:ln>
+        </p:spPr>
+        <p:style>
+          <a:lnRef idx="2">
+            <a:schemeClr val="accent1"/>
+          </a:lnRef>
+          <a:fillRef idx="0">
+            <a:schemeClr val="accent1"/>
+          </a:fillRef>
+          <a:effectRef idx="1">
+            <a:schemeClr val="accent1"/>
+          </a:effectRef>
+          <a:fontRef idx="minor">
+            <a:schemeClr val="tx1"/>
+          </a:fontRef>
+        </p:style>
+      </p:cxnSp>
     </p:spTree>
     <p:extLst>
       <p:ext uri="{BB962C8B-B14F-4D97-AF65-F5344CB8AC3E}">
         <p14:creationId xmlns:p14="http://schemas.microsoft.com/office/powerpoint/2010/main" val="4077904148"/>
+      </p:ext>
+    </p:extLst>
+  </p:cSld>
+  <p:clrMapOvr>
+    <a:masterClrMapping/>
+  </p:clrMapOvr>
+</p:sld>
+</file>
+
+<file path=ppt/slides/slide2.xml><?xml version="1.0" encoding="utf-8"?>
+<p:sld xmlns:a="http://schemas.openxmlformats.org/drawingml/2006/main" xmlns:r="http://schemas.openxmlformats.org/officeDocument/2006/relationships" xmlns:p="http://schemas.openxmlformats.org/presentationml/2006/main">
+  <p:cSld>
+    <p:spTree>
+      <p:nvGrpSpPr>
+        <p:cNvPr id="1" name=""/>
+        <p:cNvGrpSpPr/>
+        <p:nvPr/>
+      </p:nvGrpSpPr>
+      <p:grpSpPr>
+        <a:xfrm>
+          <a:off x="0" y="0"/>
+          <a:ext cx="0" cy="0"/>
+          <a:chOff x="0" y="0"/>
+          <a:chExt cx="0" cy="0"/>
+        </a:xfrm>
+      </p:grpSpPr>
+      <p:sp>
+        <p:nvSpPr>
+          <p:cNvPr id="2" name="Başlık 1">
+            <a:extLst>
+              <a:ext uri="{FF2B5EF4-FFF2-40B4-BE49-F238E27FC236}">
+                <a16:creationId xmlns:a16="http://schemas.microsoft.com/office/drawing/2014/main" id="{06340E6F-8D9B-A29F-8D57-3D62D3B9A931}"/>
+              </a:ext>
+            </a:extLst>
+          </p:cNvPr>
+          <p:cNvSpPr>
+            <a:spLocks noGrp="1"/>
+          </p:cNvSpPr>
+          <p:nvPr>
+            <p:ph type="title"/>
+          </p:nvPr>
+        </p:nvSpPr>
+        <p:spPr>
+          <a:solidFill>
+            <a:schemeClr val="accent4">
+              <a:lumMod val="75000"/>
+            </a:schemeClr>
+          </a:solidFill>
+        </p:spPr>
+        <p:txBody>
+          <a:bodyPr/>
+          <a:lstStyle/>
+          <a:p>
+            <a:pPr algn="ctr"/>
+            <a:r>
+              <a:rPr lang="tr-TR" sz="6000" dirty="0">
+                <a:solidFill>
+                  <a:schemeClr val="bg1"/>
+                </a:solidFill>
+                <a:latin typeface="Algerian" panose="04020705040A02060702" pitchFamily="82" charset="0"/>
+              </a:rPr>
+              <a:t>AMİL</a:t>
+            </a:r>
+            <a:endParaRPr lang="tr-TR" dirty="0">
+              <a:solidFill>
+                <a:schemeClr val="bg1"/>
+              </a:solidFill>
+              <a:latin typeface="Algerian" panose="04020705040A02060702" pitchFamily="82" charset="0"/>
+            </a:endParaRPr>
+          </a:p>
+        </p:txBody>
+      </p:sp>
+      <p:sp>
+        <p:nvSpPr>
+          <p:cNvPr id="4" name="Metin kutusu 3">
+            <a:extLst>
+              <a:ext uri="{FF2B5EF4-FFF2-40B4-BE49-F238E27FC236}">
+                <a16:creationId xmlns:a16="http://schemas.microsoft.com/office/drawing/2014/main" id="{AD1C7C5E-8792-A0AD-A3DE-F02AD22702E4}"/>
+              </a:ext>
+            </a:extLst>
+          </p:cNvPr>
+          <p:cNvSpPr txBox="1"/>
+          <p:nvPr/>
+        </p:nvSpPr>
+        <p:spPr>
+          <a:xfrm>
+            <a:off x="5751194" y="1321356"/>
+            <a:ext cx="689612" cy="369332"/>
+          </a:xfrm>
+          <a:prstGeom prst="rect">
+            <a:avLst/>
+          </a:prstGeom>
+          <a:noFill/>
+        </p:spPr>
+        <p:txBody>
+          <a:bodyPr wrap="none" rtlCol="0">
+            <a:spAutoFit/>
+          </a:bodyPr>
+          <a:lstStyle/>
+          <a:p>
+            <a:r>
+              <a:rPr lang="tr-TR" dirty="0">
+                <a:solidFill>
+                  <a:schemeClr val="bg1"/>
+                </a:solidFill>
+              </a:rPr>
+              <a:t>(100)</a:t>
+            </a:r>
+          </a:p>
+        </p:txBody>
+      </p:sp>
+      <p:cxnSp>
+        <p:nvCxnSpPr>
+          <p:cNvPr id="6" name="Düz Ok Bağlayıcısı 5">
+            <a:extLst>
+              <a:ext uri="{FF2B5EF4-FFF2-40B4-BE49-F238E27FC236}">
+                <a16:creationId xmlns:a16="http://schemas.microsoft.com/office/drawing/2014/main" id="{8AB07830-DC11-5A85-C7BC-9A30681F4237}"/>
+              </a:ext>
+            </a:extLst>
+          </p:cNvPr>
+          <p:cNvCxnSpPr>
+            <a:cxnSpLocks/>
+            <a:stCxn id="4" idx="2"/>
+            <a:endCxn id="10" idx="0"/>
+          </p:cNvCxnSpPr>
+          <p:nvPr/>
+        </p:nvCxnSpPr>
+        <p:spPr>
+          <a:xfrm flipH="1">
+            <a:off x="1698409" y="1690688"/>
+            <a:ext cx="4397591" cy="1060978"/>
+          </a:xfrm>
+          <a:prstGeom prst="straightConnector1">
+            <a:avLst/>
+          </a:prstGeom>
+          <a:ln>
+            <a:tailEnd type="triangle"/>
+          </a:ln>
+        </p:spPr>
+        <p:style>
+          <a:lnRef idx="2">
+            <a:schemeClr val="accent1"/>
+          </a:lnRef>
+          <a:fillRef idx="0">
+            <a:schemeClr val="accent1"/>
+          </a:fillRef>
+          <a:effectRef idx="1">
+            <a:schemeClr val="accent1"/>
+          </a:effectRef>
+          <a:fontRef idx="minor">
+            <a:schemeClr val="tx1"/>
+          </a:fontRef>
+        </p:style>
+      </p:cxnSp>
+      <p:cxnSp>
+        <p:nvCxnSpPr>
+          <p:cNvPr id="7" name="Düz Ok Bağlayıcısı 6">
+            <a:extLst>
+              <a:ext uri="{FF2B5EF4-FFF2-40B4-BE49-F238E27FC236}">
+                <a16:creationId xmlns:a16="http://schemas.microsoft.com/office/drawing/2014/main" id="{D9440D5A-70BF-3483-C118-886AD9EFC05E}"/>
+              </a:ext>
+            </a:extLst>
+          </p:cNvPr>
+          <p:cNvCxnSpPr>
+            <a:cxnSpLocks/>
+            <a:stCxn id="4" idx="2"/>
+            <a:endCxn id="13" idx="0"/>
+          </p:cNvCxnSpPr>
+          <p:nvPr/>
+        </p:nvCxnSpPr>
+        <p:spPr>
+          <a:xfrm>
+            <a:off x="6096000" y="1690688"/>
+            <a:ext cx="4393712" cy="1060978"/>
+          </a:xfrm>
+          <a:prstGeom prst="straightConnector1">
+            <a:avLst/>
+          </a:prstGeom>
+          <a:ln>
+            <a:tailEnd type="triangle"/>
+          </a:ln>
+        </p:spPr>
+        <p:style>
+          <a:lnRef idx="2">
+            <a:schemeClr val="accent1"/>
+          </a:lnRef>
+          <a:fillRef idx="0">
+            <a:schemeClr val="accent1"/>
+          </a:fillRef>
+          <a:effectRef idx="1">
+            <a:schemeClr val="accent1"/>
+          </a:effectRef>
+          <a:fontRef idx="minor">
+            <a:schemeClr val="tx1"/>
+          </a:fontRef>
+        </p:style>
+      </p:cxnSp>
+      <p:sp>
+        <p:nvSpPr>
+          <p:cNvPr id="13" name="Metin kutusu 12">
+            <a:extLst>
+              <a:ext uri="{FF2B5EF4-FFF2-40B4-BE49-F238E27FC236}">
+                <a16:creationId xmlns:a16="http://schemas.microsoft.com/office/drawing/2014/main" id="{6F86D03A-C3EA-C4B1-B00E-5124D5FFF473}"/>
+              </a:ext>
+            </a:extLst>
+          </p:cNvPr>
+          <p:cNvSpPr txBox="1"/>
+          <p:nvPr/>
+        </p:nvSpPr>
+        <p:spPr>
+          <a:xfrm>
+            <a:off x="9743450" y="2751666"/>
+            <a:ext cx="1492524" cy="369332"/>
+          </a:xfrm>
+          <a:prstGeom prst="rect">
+            <a:avLst/>
+          </a:prstGeom>
+          <a:noFill/>
+        </p:spPr>
+        <p:txBody>
+          <a:bodyPr wrap="none" rtlCol="0">
+            <a:spAutoFit/>
+          </a:bodyPr>
+          <a:lstStyle/>
+          <a:p>
+            <a:r>
+              <a:rPr lang="tr-TR" dirty="0"/>
+              <a:t>AMİL-İ KIYASİ</a:t>
+            </a:r>
+          </a:p>
+        </p:txBody>
+      </p:sp>
+      <p:cxnSp>
+        <p:nvCxnSpPr>
+          <p:cNvPr id="18" name="Düz Bağlayıcı 17">
+            <a:extLst>
+              <a:ext uri="{FF2B5EF4-FFF2-40B4-BE49-F238E27FC236}">
+                <a16:creationId xmlns:a16="http://schemas.microsoft.com/office/drawing/2014/main" id="{90531D68-8147-D837-8DB6-C31868192631}"/>
+              </a:ext>
+            </a:extLst>
+          </p:cNvPr>
+          <p:cNvCxnSpPr>
+            <a:cxnSpLocks/>
+          </p:cNvCxnSpPr>
+          <p:nvPr/>
+        </p:nvCxnSpPr>
+        <p:spPr>
+          <a:xfrm>
+            <a:off x="9743450" y="3120998"/>
+            <a:ext cx="1500283" cy="0"/>
+          </a:xfrm>
+          <a:prstGeom prst="line">
+            <a:avLst/>
+          </a:prstGeom>
+        </p:spPr>
+        <p:style>
+          <a:lnRef idx="2">
+            <a:schemeClr val="accent1"/>
+          </a:lnRef>
+          <a:fillRef idx="0">
+            <a:schemeClr val="accent1"/>
+          </a:fillRef>
+          <a:effectRef idx="1">
+            <a:schemeClr val="accent1"/>
+          </a:effectRef>
+          <a:fontRef idx="minor">
+            <a:schemeClr val="tx1"/>
+          </a:fontRef>
+        </p:style>
+      </p:cxnSp>
+      <p:sp>
+        <p:nvSpPr>
+          <p:cNvPr id="10" name="Metin kutusu 9">
+            <a:extLst>
+              <a:ext uri="{FF2B5EF4-FFF2-40B4-BE49-F238E27FC236}">
+                <a16:creationId xmlns:a16="http://schemas.microsoft.com/office/drawing/2014/main" id="{008A38E2-FE3A-8F8B-11A9-B6F3A96EF53A}"/>
+              </a:ext>
+            </a:extLst>
+          </p:cNvPr>
+          <p:cNvSpPr txBox="1"/>
+          <p:nvPr/>
+        </p:nvSpPr>
+        <p:spPr>
+          <a:xfrm>
+            <a:off x="948267" y="2751666"/>
+            <a:ext cx="1500283" cy="369332"/>
+          </a:xfrm>
+          <a:prstGeom prst="rect">
+            <a:avLst/>
+          </a:prstGeom>
+          <a:noFill/>
+        </p:spPr>
+        <p:txBody>
+          <a:bodyPr wrap="none" rtlCol="0">
+            <a:spAutoFit/>
+          </a:bodyPr>
+          <a:lstStyle/>
+          <a:p>
+            <a:r>
+              <a:rPr lang="tr-TR" dirty="0"/>
+              <a:t>AMİL-İ SEMAİ</a:t>
+            </a:r>
+          </a:p>
+        </p:txBody>
+      </p:sp>
+      <p:cxnSp>
+        <p:nvCxnSpPr>
+          <p:cNvPr id="16" name="Düz Bağlayıcı 15">
+            <a:extLst>
+              <a:ext uri="{FF2B5EF4-FFF2-40B4-BE49-F238E27FC236}">
+                <a16:creationId xmlns:a16="http://schemas.microsoft.com/office/drawing/2014/main" id="{E4C1E75D-F209-62FE-A4DB-1C2910FCAC16}"/>
+              </a:ext>
+            </a:extLst>
+          </p:cNvPr>
+          <p:cNvCxnSpPr>
+            <a:cxnSpLocks/>
+          </p:cNvCxnSpPr>
+          <p:nvPr/>
+        </p:nvCxnSpPr>
+        <p:spPr>
+          <a:xfrm>
+            <a:off x="948267" y="3112531"/>
+            <a:ext cx="1500283" cy="0"/>
+          </a:xfrm>
+          <a:prstGeom prst="line">
+            <a:avLst/>
+          </a:prstGeom>
+        </p:spPr>
+        <p:style>
+          <a:lnRef idx="2">
+            <a:schemeClr val="accent1"/>
+          </a:lnRef>
+          <a:fillRef idx="0">
+            <a:schemeClr val="accent1"/>
+          </a:fillRef>
+          <a:effectRef idx="1">
+            <a:schemeClr val="accent1"/>
+          </a:effectRef>
+          <a:fontRef idx="minor">
+            <a:schemeClr val="tx1"/>
+          </a:fontRef>
+        </p:style>
+      </p:cxnSp>
+      <p:sp>
+        <p:nvSpPr>
+          <p:cNvPr id="19" name="Metin kutusu 18">
+            <a:extLst>
+              <a:ext uri="{FF2B5EF4-FFF2-40B4-BE49-F238E27FC236}">
+                <a16:creationId xmlns:a16="http://schemas.microsoft.com/office/drawing/2014/main" id="{5C229175-2B92-A2B6-2CD1-610852973B0F}"/>
+              </a:ext>
+            </a:extLst>
+          </p:cNvPr>
+          <p:cNvSpPr txBox="1"/>
+          <p:nvPr/>
+        </p:nvSpPr>
+        <p:spPr>
+          <a:xfrm>
+            <a:off x="1007534" y="3240101"/>
+            <a:ext cx="1911101" cy="338554"/>
+          </a:xfrm>
+          <a:prstGeom prst="rect">
+            <a:avLst/>
+          </a:prstGeom>
+          <a:noFill/>
+        </p:spPr>
+        <p:txBody>
+          <a:bodyPr wrap="none" rtlCol="0">
+            <a:spAutoFit/>
+          </a:bodyPr>
+          <a:lstStyle/>
+          <a:p>
+            <a:r>
+              <a:rPr lang="tr-TR" sz="1600" dirty="0"/>
+              <a:t>HARF-İ CERLER(20)</a:t>
+            </a:r>
+          </a:p>
+        </p:txBody>
+      </p:sp>
+      <p:sp>
+        <p:nvSpPr>
+          <p:cNvPr id="20" name="Metin kutusu 19">
+            <a:extLst>
+              <a:ext uri="{FF2B5EF4-FFF2-40B4-BE49-F238E27FC236}">
+                <a16:creationId xmlns:a16="http://schemas.microsoft.com/office/drawing/2014/main" id="{149ADE37-2B73-80AC-001C-A70B37952EED}"/>
+              </a:ext>
+            </a:extLst>
+          </p:cNvPr>
+          <p:cNvSpPr txBox="1"/>
+          <p:nvPr/>
+        </p:nvSpPr>
+        <p:spPr>
+          <a:xfrm>
+            <a:off x="1007534" y="3649135"/>
+            <a:ext cx="2509020" cy="338554"/>
+          </a:xfrm>
+          <a:prstGeom prst="rect">
+            <a:avLst/>
+          </a:prstGeom>
+          <a:noFill/>
+        </p:spPr>
+        <p:txBody>
+          <a:bodyPr wrap="none" rtlCol="0">
+            <a:spAutoFit/>
+          </a:bodyPr>
+          <a:lstStyle/>
+          <a:p>
+            <a:r>
+              <a:rPr lang="tr-TR" sz="1600" dirty="0"/>
+              <a:t>İSMİ NASB, HABERİ REF(8)</a:t>
+            </a:r>
+          </a:p>
+        </p:txBody>
+      </p:sp>
+      <p:sp>
+        <p:nvSpPr>
+          <p:cNvPr id="21" name="Metin kutusu 20">
+            <a:extLst>
+              <a:ext uri="{FF2B5EF4-FFF2-40B4-BE49-F238E27FC236}">
+                <a16:creationId xmlns:a16="http://schemas.microsoft.com/office/drawing/2014/main" id="{46898670-7EFA-ED2D-251A-AB1D62DE7A09}"/>
+              </a:ext>
+            </a:extLst>
+          </p:cNvPr>
+          <p:cNvSpPr txBox="1"/>
+          <p:nvPr/>
+        </p:nvSpPr>
+        <p:spPr>
+          <a:xfrm>
+            <a:off x="1007534" y="4058169"/>
+            <a:ext cx="2490490" cy="338554"/>
+          </a:xfrm>
+          <a:prstGeom prst="rect">
+            <a:avLst/>
+          </a:prstGeom>
+          <a:noFill/>
+        </p:spPr>
+        <p:txBody>
+          <a:bodyPr wrap="none" rtlCol="0">
+            <a:spAutoFit/>
+          </a:bodyPr>
+          <a:lstStyle/>
+          <a:p>
+            <a:r>
+              <a:rPr lang="tr-TR" sz="1600" dirty="0"/>
+              <a:t>İSMİ REF, HABERİ NASB(2)</a:t>
+            </a:r>
+          </a:p>
+        </p:txBody>
+      </p:sp>
+      <p:sp>
+        <p:nvSpPr>
+          <p:cNvPr id="22" name="Metin kutusu 21">
+            <a:extLst>
+              <a:ext uri="{FF2B5EF4-FFF2-40B4-BE49-F238E27FC236}">
+                <a16:creationId xmlns:a16="http://schemas.microsoft.com/office/drawing/2014/main" id="{87925643-1D9B-A0B1-AFB0-3A582BC7F162}"/>
+              </a:ext>
+            </a:extLst>
+          </p:cNvPr>
+          <p:cNvSpPr txBox="1"/>
+          <p:nvPr/>
+        </p:nvSpPr>
+        <p:spPr>
+          <a:xfrm>
+            <a:off x="1007534" y="4467203"/>
+            <a:ext cx="2147576" cy="338554"/>
+          </a:xfrm>
+          <a:prstGeom prst="rect">
+            <a:avLst/>
+          </a:prstGeom>
+          <a:noFill/>
+        </p:spPr>
+        <p:txBody>
+          <a:bodyPr wrap="none" rtlCol="0">
+            <a:spAutoFit/>
+          </a:bodyPr>
+          <a:lstStyle/>
+          <a:p>
+            <a:r>
+              <a:rPr lang="tr-TR" sz="1600" dirty="0"/>
+              <a:t>FİİL-İ MUZARİ NASB(4)</a:t>
+            </a:r>
+          </a:p>
+        </p:txBody>
+      </p:sp>
+      <p:sp>
+        <p:nvSpPr>
+          <p:cNvPr id="23" name="Metin kutusu 22">
+            <a:extLst>
+              <a:ext uri="{FF2B5EF4-FFF2-40B4-BE49-F238E27FC236}">
+                <a16:creationId xmlns:a16="http://schemas.microsoft.com/office/drawing/2014/main" id="{2D1ACF31-7E40-3DDA-02F4-A488856F1741}"/>
+              </a:ext>
+            </a:extLst>
+          </p:cNvPr>
+          <p:cNvSpPr txBox="1"/>
+          <p:nvPr/>
+        </p:nvSpPr>
+        <p:spPr>
+          <a:xfrm>
+            <a:off x="1007534" y="4876237"/>
+            <a:ext cx="2319289" cy="338554"/>
+          </a:xfrm>
+          <a:prstGeom prst="rect">
+            <a:avLst/>
+          </a:prstGeom>
+          <a:noFill/>
+        </p:spPr>
+        <p:txBody>
+          <a:bodyPr wrap="none" rtlCol="0">
+            <a:spAutoFit/>
+          </a:bodyPr>
+          <a:lstStyle/>
+          <a:p>
+            <a:r>
+              <a:rPr lang="tr-TR" sz="1600" dirty="0"/>
+              <a:t>FİİL-İ  MUZARİ CEZM(15)</a:t>
+            </a:r>
+          </a:p>
+        </p:txBody>
+      </p:sp>
+      <p:sp>
+        <p:nvSpPr>
+          <p:cNvPr id="25" name="Metin kutusu 24">
+            <a:extLst>
+              <a:ext uri="{FF2B5EF4-FFF2-40B4-BE49-F238E27FC236}">
+                <a16:creationId xmlns:a16="http://schemas.microsoft.com/office/drawing/2014/main" id="{35FC2671-BC94-7BF6-6200-09D975F13449}"/>
+              </a:ext>
+            </a:extLst>
+          </p:cNvPr>
+          <p:cNvSpPr txBox="1"/>
+          <p:nvPr/>
+        </p:nvSpPr>
+        <p:spPr>
+          <a:xfrm>
+            <a:off x="10414002" y="3257094"/>
+            <a:ext cx="415498" cy="338554"/>
+          </a:xfrm>
+          <a:prstGeom prst="rect">
+            <a:avLst/>
+          </a:prstGeom>
+          <a:noFill/>
+        </p:spPr>
+        <p:txBody>
+          <a:bodyPr wrap="none" rtlCol="0">
+            <a:spAutoFit/>
+          </a:bodyPr>
+          <a:lstStyle/>
+          <a:p>
+            <a:r>
+              <a:rPr lang="tr-TR" sz="1600" dirty="0"/>
+              <a:t>(9)</a:t>
+            </a:r>
+          </a:p>
+        </p:txBody>
+      </p:sp>
+      <p:sp>
+        <p:nvSpPr>
+          <p:cNvPr id="26" name="Metin kutusu 25">
+            <a:extLst>
+              <a:ext uri="{FF2B5EF4-FFF2-40B4-BE49-F238E27FC236}">
+                <a16:creationId xmlns:a16="http://schemas.microsoft.com/office/drawing/2014/main" id="{E4DD5B58-C704-3654-296F-A1C10F5B0793}"/>
+              </a:ext>
+            </a:extLst>
+          </p:cNvPr>
+          <p:cNvSpPr txBox="1"/>
+          <p:nvPr/>
+        </p:nvSpPr>
+        <p:spPr>
+          <a:xfrm>
+            <a:off x="838200" y="5536644"/>
+            <a:ext cx="11186717" cy="307777"/>
+          </a:xfrm>
+          <a:prstGeom prst="rect">
+            <a:avLst/>
+          </a:prstGeom>
+          <a:noFill/>
+        </p:spPr>
+        <p:txBody>
+          <a:bodyPr wrap="none" rtlCol="0">
+            <a:spAutoFit/>
+          </a:bodyPr>
+          <a:lstStyle/>
+          <a:p>
+            <a:r>
+              <a:rPr lang="tr-TR" sz="1400" dirty="0">
+                <a:solidFill>
+                  <a:srgbClr val="C00000"/>
+                </a:solidFill>
+              </a:rPr>
+              <a:t>Amil: </a:t>
+            </a:r>
+            <a:r>
+              <a:rPr lang="tr-TR" sz="1400" dirty="0">
+                <a:solidFill>
+                  <a:schemeClr val="tx1">
+                    <a:lumMod val="95000"/>
+                    <a:lumOff val="5000"/>
+                  </a:schemeClr>
+                </a:solidFill>
+              </a:rPr>
+              <a:t>Lügatte; tesir eden, iş gören demektir. Istılahta; vasıta sebebiyle kelimenin sonunun </a:t>
+            </a:r>
+            <a:r>
+              <a:rPr lang="tr-TR" sz="1400" u="sng" dirty="0" err="1">
+                <a:solidFill>
+                  <a:srgbClr val="FF0000"/>
+                </a:solidFill>
+              </a:rPr>
+              <a:t>İrab</a:t>
+            </a:r>
+            <a:r>
+              <a:rPr lang="tr-TR" sz="1400" dirty="0">
+                <a:solidFill>
+                  <a:schemeClr val="tx1">
+                    <a:lumMod val="95000"/>
+                    <a:lumOff val="5000"/>
+                  </a:schemeClr>
+                </a:solidFill>
+              </a:rPr>
+              <a:t>’ tan özel bir şekil üzere olmasını gerektiren şeydir.</a:t>
+            </a:r>
+            <a:endParaRPr lang="tr-TR" sz="2000" dirty="0">
+              <a:solidFill>
+                <a:schemeClr val="tx1">
+                  <a:lumMod val="95000"/>
+                  <a:lumOff val="5000"/>
+                </a:schemeClr>
+              </a:solidFill>
+            </a:endParaRPr>
+          </a:p>
+        </p:txBody>
+      </p:sp>
+    </p:spTree>
+    <p:extLst>
+      <p:ext uri="{BB962C8B-B14F-4D97-AF65-F5344CB8AC3E}">
+        <p14:creationId xmlns:p14="http://schemas.microsoft.com/office/powerpoint/2010/main" val="4058067677"/>
+      </p:ext>
+    </p:extLst>
+  </p:cSld>
+  <p:clrMapOvr>
+    <a:masterClrMapping/>
+  </p:clrMapOvr>
+</p:sld>
+</file>
+
+<file path=ppt/slides/slide3.xml><?xml version="1.0" encoding="utf-8"?>
+<p:sld xmlns:a="http://schemas.openxmlformats.org/drawingml/2006/main" xmlns:r="http://schemas.openxmlformats.org/officeDocument/2006/relationships" xmlns:p="http://schemas.openxmlformats.org/presentationml/2006/main">
+  <p:cSld>
+    <p:spTree>
+      <p:nvGrpSpPr>
+        <p:cNvPr id="1" name=""/>
+        <p:cNvGrpSpPr/>
+        <p:nvPr/>
+      </p:nvGrpSpPr>
+      <p:grpSpPr>
+        <a:xfrm>
+          <a:off x="0" y="0"/>
+          <a:ext cx="0" cy="0"/>
+          <a:chOff x="0" y="0"/>
+          <a:chExt cx="0" cy="0"/>
+        </a:xfrm>
+      </p:grpSpPr>
+      <p:sp>
+        <p:nvSpPr>
+          <p:cNvPr id="2" name="Başlık 1">
+            <a:extLst>
+              <a:ext uri="{FF2B5EF4-FFF2-40B4-BE49-F238E27FC236}">
+                <a16:creationId xmlns:a16="http://schemas.microsoft.com/office/drawing/2014/main" id="{4F31AC6B-9B8F-F79D-2B52-3A31D83E3662}"/>
+              </a:ext>
+            </a:extLst>
+          </p:cNvPr>
+          <p:cNvSpPr>
+            <a:spLocks noGrp="1"/>
+          </p:cNvSpPr>
+          <p:nvPr>
+            <p:ph type="title"/>
+          </p:nvPr>
+        </p:nvSpPr>
+        <p:spPr>
+          <a:xfrm>
+            <a:off x="139700" y="30553"/>
+            <a:ext cx="11912600" cy="580525"/>
+          </a:xfrm>
+          <a:solidFill>
+            <a:srgbClr val="0070C0"/>
+          </a:solidFill>
+        </p:spPr>
+        <p:txBody>
+          <a:bodyPr>
+            <a:normAutofit fontScale="90000"/>
+          </a:bodyPr>
+          <a:lstStyle/>
+          <a:p>
+            <a:r>
+              <a:rPr lang="tr-TR" dirty="0">
+                <a:solidFill>
+                  <a:schemeClr val="bg1">
+                    <a:lumMod val="95000"/>
+                  </a:schemeClr>
+                </a:solidFill>
+                <a:latin typeface="Algerian" panose="04020705040A02060702" pitchFamily="82" charset="0"/>
+              </a:rPr>
+              <a:t>	AMİL-İ SEMAİ</a:t>
+            </a:r>
+          </a:p>
+        </p:txBody>
+      </p:sp>
+      <p:sp>
+        <p:nvSpPr>
+          <p:cNvPr id="4" name="Metin kutusu 3">
+            <a:extLst>
+              <a:ext uri="{FF2B5EF4-FFF2-40B4-BE49-F238E27FC236}">
+                <a16:creationId xmlns:a16="http://schemas.microsoft.com/office/drawing/2014/main" id="{9668639A-0B97-AD1E-43FA-28EF8958806C}"/>
+              </a:ext>
+            </a:extLst>
+          </p:cNvPr>
+          <p:cNvSpPr txBox="1"/>
+          <p:nvPr/>
+        </p:nvSpPr>
+        <p:spPr>
+          <a:xfrm>
+            <a:off x="9137650" y="120760"/>
+            <a:ext cx="2018501" cy="400110"/>
+          </a:xfrm>
+          <a:prstGeom prst="rect">
+            <a:avLst/>
+          </a:prstGeom>
+          <a:noFill/>
+        </p:spPr>
+        <p:txBody>
+          <a:bodyPr wrap="none" rtlCol="0">
+            <a:spAutoFit/>
+          </a:bodyPr>
+          <a:lstStyle/>
+          <a:p>
+            <a:r>
+              <a:rPr lang="tr-TR" sz="2000" i="1" u="sng" dirty="0">
+                <a:solidFill>
+                  <a:schemeClr val="bg1">
+                    <a:lumMod val="95000"/>
+                  </a:schemeClr>
+                </a:solidFill>
+                <a:latin typeface="Alef" panose="00000500000000000000" pitchFamily="2" charset="-79"/>
+                <a:cs typeface="Alef" panose="00000500000000000000" pitchFamily="2" charset="-79"/>
+              </a:rPr>
+              <a:t>HARF-İ CERLER</a:t>
+            </a:r>
+          </a:p>
+        </p:txBody>
+      </p:sp>
+      <p:sp>
+        <p:nvSpPr>
+          <p:cNvPr id="5" name="Metin kutusu 4">
+            <a:extLst>
+              <a:ext uri="{FF2B5EF4-FFF2-40B4-BE49-F238E27FC236}">
+                <a16:creationId xmlns:a16="http://schemas.microsoft.com/office/drawing/2014/main" id="{D158510D-C4F3-24F0-5171-960FD2A8E88A}"/>
+              </a:ext>
+            </a:extLst>
+          </p:cNvPr>
+          <p:cNvSpPr txBox="1"/>
+          <p:nvPr/>
+        </p:nvSpPr>
+        <p:spPr>
+          <a:xfrm>
+            <a:off x="1413971" y="6488893"/>
+            <a:ext cx="9110058" cy="338554"/>
+          </a:xfrm>
+          <a:prstGeom prst="rect">
+            <a:avLst/>
+          </a:prstGeom>
+          <a:noFill/>
+        </p:spPr>
+        <p:txBody>
+          <a:bodyPr wrap="none" rtlCol="0">
+            <a:spAutoFit/>
+          </a:bodyPr>
+          <a:lstStyle/>
+          <a:p>
+            <a:r>
+              <a:rPr lang="tr-TR" sz="1600" dirty="0">
+                <a:solidFill>
+                  <a:srgbClr val="C00000"/>
+                </a:solidFill>
+              </a:rPr>
+              <a:t>Harf-i Cer: </a:t>
+            </a:r>
+            <a:r>
+              <a:rPr lang="tr-TR" sz="1600" dirty="0"/>
+              <a:t>Kelimelerin başına gelerek onları birbirine bağlayan ve son harfini </a:t>
+            </a:r>
+            <a:r>
+              <a:rPr lang="tr-TR" sz="1600" b="1" u="sng" dirty="0" err="1">
+                <a:solidFill>
+                  <a:srgbClr val="C00000"/>
+                </a:solidFill>
+              </a:rPr>
+              <a:t>mecrur</a:t>
+            </a:r>
+            <a:r>
+              <a:rPr lang="tr-TR" sz="1600" dirty="0"/>
+              <a:t> yapan edatlardır.</a:t>
+            </a:r>
+          </a:p>
+        </p:txBody>
+      </p:sp>
+      <p:graphicFrame>
+        <p:nvGraphicFramePr>
+          <p:cNvPr id="8" name="Tablo 7">
+            <a:extLst>
+              <a:ext uri="{FF2B5EF4-FFF2-40B4-BE49-F238E27FC236}">
+                <a16:creationId xmlns:a16="http://schemas.microsoft.com/office/drawing/2014/main" id="{73B81C24-4295-452A-3186-02A4ECFDE86A}"/>
+              </a:ext>
+            </a:extLst>
+          </p:cNvPr>
+          <p:cNvGraphicFramePr>
+            <a:graphicFrameLocks noGrp="1"/>
+          </p:cNvGraphicFramePr>
+          <p:nvPr>
+            <p:extLst>
+              <p:ext uri="{D42A27DB-BD31-4B8C-83A1-F6EECF244321}">
+                <p14:modId xmlns:p14="http://schemas.microsoft.com/office/powerpoint/2010/main" val="3597660086"/>
+              </p:ext>
+            </p:extLst>
+          </p:nvPr>
+        </p:nvGraphicFramePr>
+        <p:xfrm>
+          <a:off x="139700" y="658540"/>
+          <a:ext cx="5829300" cy="5816400"/>
+        </p:xfrm>
+        <a:graphic>
+          <a:graphicData uri="http://schemas.openxmlformats.org/drawingml/2006/table">
+            <a:tbl>
+              <a:tblPr firstRow="1" bandRow="1">
+                <a:tableStyleId>{5C22544A-7EE6-4342-B048-85BDC9FD1C3A}</a:tableStyleId>
+              </a:tblPr>
+              <a:tblGrid>
+                <a:gridCol w="889913">
+                  <a:extLst>
+                    <a:ext uri="{9D8B030D-6E8A-4147-A177-3AD203B41FA5}">
+                      <a16:colId xmlns:a16="http://schemas.microsoft.com/office/drawing/2014/main" val="3242288309"/>
+                    </a:ext>
+                  </a:extLst>
+                </a:gridCol>
+                <a:gridCol w="1544987">
+                  <a:extLst>
+                    <a:ext uri="{9D8B030D-6E8A-4147-A177-3AD203B41FA5}">
+                      <a16:colId xmlns:a16="http://schemas.microsoft.com/office/drawing/2014/main" val="2112445330"/>
+                    </a:ext>
+                  </a:extLst>
+                </a:gridCol>
+                <a:gridCol w="3394400">
+                  <a:extLst>
+                    <a:ext uri="{9D8B030D-6E8A-4147-A177-3AD203B41FA5}">
+                      <a16:colId xmlns:a16="http://schemas.microsoft.com/office/drawing/2014/main" val="317297140"/>
+                    </a:ext>
+                  </a:extLst>
+                </a:gridCol>
+              </a:tblGrid>
+              <a:tr h="0">
+                <a:tc>
+                  <a:txBody>
+                    <a:bodyPr/>
+                    <a:lstStyle/>
+                    <a:p>
+                      <a:r>
+                        <a:rPr lang="tr-TR" dirty="0"/>
+                        <a:t>Harf-i Cer</a:t>
+                      </a:r>
+                    </a:p>
+                  </a:txBody>
+                  <a:tcPr/>
+                </a:tc>
+                <a:tc>
+                  <a:txBody>
+                    <a:bodyPr/>
+                    <a:lstStyle/>
+                    <a:p>
+                      <a:r>
+                        <a:rPr lang="tr-TR" dirty="0"/>
+                        <a:t>Mana</a:t>
+                      </a:r>
+                    </a:p>
+                  </a:txBody>
+                  <a:tcPr/>
+                </a:tc>
+                <a:tc>
+                  <a:txBody>
+                    <a:bodyPr/>
+                    <a:lstStyle/>
+                    <a:p>
+                      <a:r>
+                        <a:rPr lang="tr-TR" dirty="0"/>
+                        <a:t>Misal</a:t>
+                      </a:r>
+                    </a:p>
+                  </a:txBody>
+                  <a:tcPr/>
+                </a:tc>
+                <a:extLst>
+                  <a:ext uri="{0D108BD9-81ED-4DB2-BD59-A6C34878D82A}">
+                    <a16:rowId xmlns:a16="http://schemas.microsoft.com/office/drawing/2014/main" val="3289731430"/>
+                  </a:ext>
+                </a:extLst>
+              </a:tr>
+              <a:tr h="418088">
+                <a:tc>
+                  <a:txBody>
+                    <a:bodyPr/>
+                    <a:lstStyle/>
+                    <a:p>
+                      <a:pPr algn="ctr"/>
+                      <a:r>
+                        <a:rPr lang="ar-AE" sz="1400" b="1" dirty="0">
+                          <a:solidFill>
+                            <a:srgbClr val="C00000"/>
+                          </a:solidFill>
+                          <a:latin typeface="Algerian" panose="04020705040A02060702" pitchFamily="82" charset="0"/>
+                        </a:rPr>
+                        <a:t>ب</a:t>
+                      </a:r>
+                      <a:endParaRPr lang="tr-TR" sz="1100" b="1" dirty="0">
+                        <a:solidFill>
+                          <a:srgbClr val="C00000"/>
+                        </a:solidFill>
+                        <a:latin typeface="Algerian" panose="04020705040A02060702" pitchFamily="82" charset="0"/>
+                      </a:endParaRPr>
+                    </a:p>
+                  </a:txBody>
+                  <a:tcPr/>
+                </a:tc>
+                <a:tc>
+                  <a:txBody>
+                    <a:bodyPr/>
+                    <a:lstStyle/>
+                    <a:p>
+                      <a:pPr algn="ctr"/>
+                      <a:r>
+                        <a:rPr lang="tr-TR" sz="1100" dirty="0"/>
+                        <a:t>İle, …e/…a</a:t>
+                      </a:r>
+                    </a:p>
+                  </a:txBody>
+                  <a:tcPr/>
+                </a:tc>
+                <a:tc>
+                  <a:txBody>
+                    <a:bodyPr/>
+                    <a:lstStyle/>
+                    <a:p>
+                      <a:pPr algn="ctr"/>
+                      <a:r>
+                        <a:rPr lang="ar-AE" sz="1200" b="1" dirty="0"/>
+                        <a:t>آمَنْتُ </a:t>
+                      </a:r>
+                      <a:r>
+                        <a:rPr lang="ar-AE" sz="1400" b="1" dirty="0">
+                          <a:solidFill>
+                            <a:srgbClr val="C00000"/>
+                          </a:solidFill>
+                        </a:rPr>
+                        <a:t>بِ</a:t>
+                      </a:r>
+                      <a:r>
+                        <a:rPr lang="ar-AE" sz="1400" b="1" dirty="0">
+                          <a:solidFill>
+                            <a:schemeClr val="tx1"/>
+                          </a:solidFill>
+                        </a:rPr>
+                        <a:t>اللهِ </a:t>
+                      </a:r>
+                    </a:p>
+                    <a:p>
+                      <a:pPr algn="ctr"/>
+                      <a:r>
+                        <a:rPr lang="tr-TR" sz="1100" dirty="0">
+                          <a:solidFill>
+                            <a:schemeClr val="tx1"/>
+                          </a:solidFill>
+                        </a:rPr>
+                        <a:t>Allah’</a:t>
+                      </a:r>
+                      <a:r>
+                        <a:rPr lang="tr-TR" sz="1100" dirty="0">
+                          <a:solidFill>
+                            <a:srgbClr val="C00000"/>
+                          </a:solidFill>
+                        </a:rPr>
+                        <a:t>a</a:t>
+                      </a:r>
+                      <a:r>
+                        <a:rPr lang="ar-AE" sz="1100" dirty="0">
+                          <a:solidFill>
+                            <a:srgbClr val="C00000"/>
+                          </a:solidFill>
+                        </a:rPr>
+                        <a:t> </a:t>
+                      </a:r>
+                      <a:r>
+                        <a:rPr lang="tr-TR" sz="1100" dirty="0">
+                          <a:solidFill>
+                            <a:srgbClr val="C00000"/>
+                          </a:solidFill>
+                        </a:rPr>
+                        <a:t> </a:t>
+                      </a:r>
+                      <a:r>
+                        <a:rPr lang="tr-TR" sz="1100" dirty="0">
+                          <a:solidFill>
+                            <a:schemeClr val="tx1"/>
+                          </a:solidFill>
+                        </a:rPr>
+                        <a:t>iman ettim.</a:t>
+                      </a:r>
+                    </a:p>
+                  </a:txBody>
+                  <a:tcPr/>
+                </a:tc>
+                <a:extLst>
+                  <a:ext uri="{0D108BD9-81ED-4DB2-BD59-A6C34878D82A}">
+                    <a16:rowId xmlns:a16="http://schemas.microsoft.com/office/drawing/2014/main" val="3625413832"/>
+                  </a:ext>
+                </a:extLst>
+              </a:tr>
+              <a:tr h="398179">
+                <a:tc>
+                  <a:txBody>
+                    <a:bodyPr/>
+                    <a:lstStyle/>
+                    <a:p>
+                      <a:pPr algn="ctr"/>
+                      <a:r>
+                        <a:rPr lang="ar-AE" sz="1400" b="1" dirty="0">
+                          <a:solidFill>
+                            <a:srgbClr val="C00000"/>
+                          </a:solidFill>
+                          <a:latin typeface="Algerian" panose="04020705040A02060702" pitchFamily="82" charset="0"/>
+                        </a:rPr>
+                        <a:t>مِنْ</a:t>
+                      </a:r>
+                      <a:endParaRPr lang="tr-TR" sz="1400" b="1" dirty="0">
+                        <a:solidFill>
+                          <a:srgbClr val="C00000"/>
+                        </a:solidFill>
+                        <a:latin typeface="Algerian" panose="04020705040A02060702" pitchFamily="82" charset="0"/>
+                      </a:endParaRPr>
+                    </a:p>
+                  </a:txBody>
+                  <a:tcPr/>
+                </a:tc>
+                <a:tc>
+                  <a:txBody>
+                    <a:bodyPr/>
+                    <a:lstStyle/>
+                    <a:p>
+                      <a:pPr algn="ctr"/>
+                      <a:r>
+                        <a:rPr lang="tr-TR" sz="1100" dirty="0"/>
+                        <a:t>…den/…dan (bağlantı/başlangıç)</a:t>
+                      </a:r>
+                    </a:p>
+                  </a:txBody>
+                  <a:tcPr/>
+                </a:tc>
+                <a:tc>
+                  <a:txBody>
+                    <a:bodyPr/>
+                    <a:lstStyle/>
+                    <a:p>
+                      <a:pPr algn="ctr"/>
+                      <a:r>
+                        <a:rPr lang="ar-AE" sz="1200" b="1" dirty="0"/>
+                        <a:t>تُبْتُ </a:t>
+                      </a:r>
+                      <a:r>
+                        <a:rPr lang="ar-AE" sz="1200" b="1" dirty="0">
+                          <a:solidFill>
+                            <a:srgbClr val="C00000"/>
+                          </a:solidFill>
+                        </a:rPr>
+                        <a:t>مِنْ </a:t>
+                      </a:r>
+                      <a:r>
+                        <a:rPr lang="ar-AE" sz="1200" b="1" dirty="0">
+                          <a:solidFill>
+                            <a:schemeClr val="tx1"/>
+                          </a:solidFill>
+                        </a:rPr>
+                        <a:t>كُلِّ ذَنْبٍ</a:t>
+                      </a:r>
+                    </a:p>
+                    <a:p>
+                      <a:pPr algn="ctr"/>
+                      <a:r>
+                        <a:rPr lang="tr-TR" sz="1100" b="0" dirty="0">
+                          <a:solidFill>
+                            <a:schemeClr val="tx1"/>
+                          </a:solidFill>
+                        </a:rPr>
+                        <a:t>Her günahtan tövbe ettim</a:t>
+                      </a:r>
+                    </a:p>
+                  </a:txBody>
+                  <a:tcPr/>
+                </a:tc>
+                <a:extLst>
+                  <a:ext uri="{0D108BD9-81ED-4DB2-BD59-A6C34878D82A}">
+                    <a16:rowId xmlns:a16="http://schemas.microsoft.com/office/drawing/2014/main" val="920756919"/>
+                  </a:ext>
+                </a:extLst>
+              </a:tr>
+              <a:tr h="418088">
+                <a:tc>
+                  <a:txBody>
+                    <a:bodyPr/>
+                    <a:lstStyle/>
+                    <a:p>
+                      <a:pPr algn="ctr"/>
+                      <a:r>
+                        <a:rPr lang="ar-AE" sz="1400" b="1" dirty="0">
+                          <a:solidFill>
+                            <a:srgbClr val="C00000"/>
+                          </a:solidFill>
+                          <a:latin typeface="Algerian" panose="04020705040A02060702" pitchFamily="82" charset="0"/>
+                        </a:rPr>
+                        <a:t>إِلَي</a:t>
+                      </a:r>
+                      <a:endParaRPr lang="tr-TR" sz="1400" b="1" dirty="0">
+                        <a:solidFill>
+                          <a:srgbClr val="C00000"/>
+                        </a:solidFill>
+                        <a:latin typeface="Algerian" panose="04020705040A02060702" pitchFamily="82" charset="0"/>
+                      </a:endParaRPr>
+                    </a:p>
+                  </a:txBody>
+                  <a:tcPr/>
+                </a:tc>
+                <a:tc>
+                  <a:txBody>
+                    <a:bodyPr/>
+                    <a:lstStyle/>
+                    <a:p>
+                      <a:pPr algn="ctr"/>
+                      <a:r>
+                        <a:rPr lang="tr-TR" sz="1100" dirty="0"/>
+                        <a:t>…e/…a; sona eriş</a:t>
+                      </a:r>
+                    </a:p>
+                  </a:txBody>
+                  <a:tcPr/>
+                </a:tc>
+                <a:tc>
+                  <a:txBody>
+                    <a:bodyPr/>
+                    <a:lstStyle/>
+                    <a:p>
+                      <a:pPr algn="ctr"/>
+                      <a:r>
+                        <a:rPr lang="ar-AE" sz="1400" b="1" kern="1200" dirty="0">
+                          <a:solidFill>
+                            <a:schemeClr val="tx1"/>
+                          </a:solidFill>
+                          <a:latin typeface="+mn-lt"/>
+                          <a:ea typeface="+mn-ea"/>
+                          <a:cs typeface="+mn-cs"/>
+                        </a:rPr>
+                        <a:t>تُلبْتُ </a:t>
+                      </a:r>
+                      <a:r>
+                        <a:rPr lang="ar-AE" sz="1400" b="1" kern="1200" dirty="0">
+                          <a:solidFill>
+                            <a:srgbClr val="C00000"/>
+                          </a:solidFill>
+                          <a:latin typeface="+mn-lt"/>
+                          <a:ea typeface="+mn-ea"/>
+                          <a:cs typeface="+mn-cs"/>
+                        </a:rPr>
+                        <a:t>إِلَي</a:t>
+                      </a:r>
+                      <a:r>
+                        <a:rPr lang="ar-AE" sz="1400" b="1" kern="1200" dirty="0">
+                          <a:solidFill>
+                            <a:schemeClr val="tx1"/>
+                          </a:solidFill>
+                          <a:latin typeface="+mn-lt"/>
+                          <a:ea typeface="+mn-ea"/>
+                          <a:cs typeface="+mn-cs"/>
+                        </a:rPr>
+                        <a:t> اللهِ</a:t>
+                      </a:r>
+                    </a:p>
+                    <a:p>
+                      <a:pPr algn="ctr"/>
+                      <a:r>
+                        <a:rPr lang="tr-TR" sz="1100" b="0" kern="1200" dirty="0" err="1">
+                          <a:solidFill>
+                            <a:schemeClr val="tx1"/>
+                          </a:solidFill>
+                          <a:latin typeface="+mn-lt"/>
+                          <a:ea typeface="+mn-ea"/>
+                          <a:cs typeface="+mn-cs"/>
+                        </a:rPr>
+                        <a:t>Allah’u</a:t>
+                      </a:r>
+                      <a:r>
+                        <a:rPr lang="tr-TR" sz="1100" b="0" kern="1200" dirty="0">
+                          <a:solidFill>
+                            <a:schemeClr val="tx1"/>
+                          </a:solidFill>
+                          <a:latin typeface="+mn-lt"/>
+                          <a:ea typeface="+mn-ea"/>
+                          <a:cs typeface="+mn-cs"/>
+                        </a:rPr>
+                        <a:t> Teala’ya tövbe ettim.</a:t>
+                      </a:r>
+                    </a:p>
+                  </a:txBody>
+                  <a:tcPr/>
+                </a:tc>
+                <a:extLst>
+                  <a:ext uri="{0D108BD9-81ED-4DB2-BD59-A6C34878D82A}">
+                    <a16:rowId xmlns:a16="http://schemas.microsoft.com/office/drawing/2014/main" val="3898272618"/>
+                  </a:ext>
+                </a:extLst>
+              </a:tr>
+              <a:tr h="418088">
+                <a:tc>
+                  <a:txBody>
+                    <a:bodyPr/>
+                    <a:lstStyle/>
+                    <a:p>
+                      <a:pPr algn="ctr"/>
+                      <a:r>
+                        <a:rPr lang="ar-AE" sz="1400" b="1" dirty="0">
+                          <a:solidFill>
+                            <a:srgbClr val="C00000"/>
+                          </a:solidFill>
+                          <a:latin typeface="Algerian" panose="04020705040A02060702" pitchFamily="82" charset="0"/>
+                        </a:rPr>
+                        <a:t>عَنْ</a:t>
+                      </a:r>
+                      <a:endParaRPr lang="tr-TR" sz="1400" b="1" dirty="0">
+                        <a:solidFill>
+                          <a:srgbClr val="C00000"/>
+                        </a:solidFill>
+                        <a:latin typeface="Algerian" panose="04020705040A02060702" pitchFamily="82" charset="0"/>
+                      </a:endParaRPr>
+                    </a:p>
+                  </a:txBody>
+                  <a:tcPr/>
+                </a:tc>
+                <a:tc>
+                  <a:txBody>
+                    <a:bodyPr/>
+                    <a:lstStyle/>
+                    <a:p>
+                      <a:pPr algn="ctr"/>
+                      <a:r>
+                        <a:rPr lang="tr-TR" sz="1100" dirty="0"/>
+                        <a:t>…den/…dan uzaklaşma</a:t>
+                      </a:r>
+                    </a:p>
+                  </a:txBody>
+                  <a:tcPr/>
+                </a:tc>
+                <a:tc>
+                  <a:txBody>
+                    <a:bodyPr/>
+                    <a:lstStyle/>
+                    <a:p>
+                      <a:pPr algn="ctr"/>
+                      <a:r>
+                        <a:rPr lang="ar-AE" sz="1400" b="1" dirty="0"/>
+                        <a:t>كُفِفْتُ </a:t>
+                      </a:r>
+                      <a:r>
+                        <a:rPr lang="ar-AE" sz="1400" b="1" dirty="0">
+                          <a:solidFill>
+                            <a:srgbClr val="C00000"/>
+                          </a:solidFill>
+                        </a:rPr>
+                        <a:t>عَنْ</a:t>
+                      </a:r>
+                      <a:r>
+                        <a:rPr lang="ar-AE" sz="1400" b="1" dirty="0"/>
+                        <a:t> الْحَرَامِ</a:t>
+                      </a:r>
+                    </a:p>
+                    <a:p>
+                      <a:pPr algn="ctr"/>
+                      <a:r>
+                        <a:rPr lang="tr-TR" sz="1100" b="0" dirty="0">
+                          <a:solidFill>
+                            <a:schemeClr val="tx1"/>
+                          </a:solidFill>
+                        </a:rPr>
+                        <a:t>Haramdan menolundum.</a:t>
+                      </a:r>
+                    </a:p>
+                  </a:txBody>
+                  <a:tcPr/>
+                </a:tc>
+                <a:extLst>
+                  <a:ext uri="{0D108BD9-81ED-4DB2-BD59-A6C34878D82A}">
+                    <a16:rowId xmlns:a16="http://schemas.microsoft.com/office/drawing/2014/main" val="2209876613"/>
+                  </a:ext>
+                </a:extLst>
+              </a:tr>
+              <a:tr h="577360">
+                <a:tc>
+                  <a:txBody>
+                    <a:bodyPr/>
+                    <a:lstStyle/>
+                    <a:p>
+                      <a:pPr algn="ctr"/>
+                      <a:r>
+                        <a:rPr lang="ar-AE" sz="1400" b="1" dirty="0">
+                          <a:solidFill>
+                            <a:srgbClr val="C00000"/>
+                          </a:solidFill>
+                          <a:latin typeface="Algerian" panose="04020705040A02060702" pitchFamily="82" charset="0"/>
+                        </a:rPr>
+                        <a:t>عَلَي</a:t>
+                      </a:r>
+                      <a:endParaRPr lang="tr-TR" sz="1400" b="1" dirty="0">
+                        <a:solidFill>
+                          <a:srgbClr val="C00000"/>
+                        </a:solidFill>
+                        <a:latin typeface="Algerian" panose="04020705040A02060702" pitchFamily="82" charset="0"/>
+                      </a:endParaRPr>
+                    </a:p>
+                  </a:txBody>
+                  <a:tcPr/>
+                </a:tc>
+                <a:tc>
+                  <a:txBody>
+                    <a:bodyPr/>
+                    <a:lstStyle/>
+                    <a:p>
+                      <a:pPr algn="ctr"/>
+                      <a:r>
+                        <a:rPr lang="tr-TR" sz="1100" dirty="0"/>
+                        <a:t>Üzerine/ Üzerinde</a:t>
+                      </a:r>
+                    </a:p>
+                  </a:txBody>
+                  <a:tcPr/>
+                </a:tc>
+                <a:tc>
+                  <a:txBody>
+                    <a:bodyPr/>
+                    <a:lstStyle/>
+                    <a:p>
+                      <a:pPr algn="ctr"/>
+                      <a:r>
+                        <a:rPr lang="ar-AE" sz="1400" dirty="0"/>
+                        <a:t>تَخِبُ التَّوْبَةُ </a:t>
+                      </a:r>
+                      <a:r>
+                        <a:rPr lang="ar-AE" sz="1400" dirty="0">
+                          <a:solidFill>
+                            <a:srgbClr val="C00000"/>
+                          </a:solidFill>
+                        </a:rPr>
+                        <a:t>عَلَي</a:t>
+                      </a:r>
+                      <a:r>
+                        <a:rPr lang="ar-AE" sz="1400" dirty="0"/>
+                        <a:t> كُلِّ مُذْنِبٍ</a:t>
+                      </a:r>
+                    </a:p>
+                    <a:p>
+                      <a:pPr algn="ctr"/>
+                      <a:r>
+                        <a:rPr lang="tr-TR" sz="1100" dirty="0"/>
+                        <a:t>Her günah işleyene tövbe etmek vacip olur.</a:t>
+                      </a:r>
+                    </a:p>
+                  </a:txBody>
+                  <a:tcPr/>
+                </a:tc>
+                <a:extLst>
+                  <a:ext uri="{0D108BD9-81ED-4DB2-BD59-A6C34878D82A}">
+                    <a16:rowId xmlns:a16="http://schemas.microsoft.com/office/drawing/2014/main" val="1718483269"/>
+                  </a:ext>
+                </a:extLst>
+              </a:tr>
+              <a:tr h="577360">
+                <a:tc>
+                  <a:txBody>
+                    <a:bodyPr/>
+                    <a:lstStyle/>
+                    <a:p>
+                      <a:pPr algn="ctr"/>
+                      <a:r>
+                        <a:rPr lang="ar-AE" sz="1400" b="1" dirty="0">
+                          <a:solidFill>
+                            <a:srgbClr val="C00000"/>
+                          </a:solidFill>
+                          <a:latin typeface="Algerian" panose="04020705040A02060702" pitchFamily="82" charset="0"/>
+                        </a:rPr>
+                        <a:t>اَلَّامُ</a:t>
+                      </a:r>
+                      <a:endParaRPr lang="tr-TR" sz="1400" b="1" dirty="0">
+                        <a:solidFill>
+                          <a:srgbClr val="C00000"/>
+                        </a:solidFill>
+                        <a:latin typeface="Algerian" panose="04020705040A02060702" pitchFamily="82" charset="0"/>
+                      </a:endParaRPr>
+                    </a:p>
+                  </a:txBody>
+                  <a:tcPr/>
+                </a:tc>
+                <a:tc>
+                  <a:txBody>
+                    <a:bodyPr/>
+                    <a:lstStyle/>
+                    <a:p>
+                      <a:pPr algn="ctr"/>
+                      <a:r>
+                        <a:rPr lang="tr-TR" sz="1100" dirty="0"/>
+                        <a:t>…için/…e ait</a:t>
+                      </a:r>
+                    </a:p>
+                  </a:txBody>
+                  <a:tcPr/>
+                </a:tc>
+                <a:tc>
+                  <a:txBody>
+                    <a:bodyPr/>
+                    <a:lstStyle/>
+                    <a:p>
+                      <a:pPr algn="ctr"/>
+                      <a:r>
+                        <a:rPr lang="ar-AE" sz="1400" dirty="0"/>
+                        <a:t>اَنَا عُبَيْدٌ </a:t>
+                      </a:r>
+                      <a:r>
+                        <a:rPr lang="ar-AE" sz="1400" dirty="0">
+                          <a:solidFill>
+                            <a:srgbClr val="C00000"/>
+                          </a:solidFill>
+                        </a:rPr>
+                        <a:t>لِلَّهِ</a:t>
+                      </a:r>
+                      <a:r>
+                        <a:rPr lang="ar-AE" sz="1400" dirty="0"/>
+                        <a:t> تَعَالَى</a:t>
+                      </a:r>
+                    </a:p>
+                    <a:p>
+                      <a:pPr algn="ctr"/>
+                      <a:r>
+                        <a:rPr lang="tr-TR" sz="1100" dirty="0"/>
+                        <a:t>Ben </a:t>
+                      </a:r>
+                      <a:r>
+                        <a:rPr lang="tr-TR" sz="1100" dirty="0" err="1"/>
+                        <a:t>Allah’u</a:t>
+                      </a:r>
+                      <a:r>
+                        <a:rPr lang="tr-TR" sz="1100" dirty="0"/>
+                        <a:t> Teala’nın bir </a:t>
+                      </a:r>
+                      <a:r>
+                        <a:rPr lang="tr-TR" sz="1100" dirty="0" err="1"/>
+                        <a:t>kulcağızıyım</a:t>
+                      </a:r>
+                      <a:endParaRPr lang="tr-TR" sz="1100" dirty="0"/>
+                    </a:p>
+                  </a:txBody>
+                  <a:tcPr/>
+                </a:tc>
+                <a:extLst>
+                  <a:ext uri="{0D108BD9-81ED-4DB2-BD59-A6C34878D82A}">
+                    <a16:rowId xmlns:a16="http://schemas.microsoft.com/office/drawing/2014/main" val="98950525"/>
+                  </a:ext>
+                </a:extLst>
+              </a:tr>
+              <a:tr h="418088">
+                <a:tc>
+                  <a:txBody>
+                    <a:bodyPr/>
+                    <a:lstStyle/>
+                    <a:p>
+                      <a:pPr algn="ctr"/>
+                      <a:r>
+                        <a:rPr lang="ar-AE" sz="1400" b="1" dirty="0">
+                          <a:solidFill>
+                            <a:srgbClr val="C00000"/>
+                          </a:solidFill>
+                          <a:latin typeface="Algerian" panose="04020705040A02060702" pitchFamily="82" charset="0"/>
+                        </a:rPr>
+                        <a:t>فِي</a:t>
+                      </a:r>
+                      <a:endParaRPr lang="tr-TR" sz="1400" b="1" dirty="0">
+                        <a:solidFill>
+                          <a:srgbClr val="C00000"/>
+                        </a:solidFill>
+                        <a:latin typeface="Algerian" panose="04020705040A02060702" pitchFamily="82" charset="0"/>
+                      </a:endParaRPr>
+                    </a:p>
+                  </a:txBody>
+                  <a:tcPr/>
+                </a:tc>
+                <a:tc>
+                  <a:txBody>
+                    <a:bodyPr/>
+                    <a:lstStyle/>
+                    <a:p>
+                      <a:pPr algn="ctr"/>
+                      <a:r>
+                        <a:rPr lang="tr-TR" sz="1100" dirty="0"/>
+                        <a:t>…de/…da içinde</a:t>
+                      </a:r>
+                    </a:p>
+                  </a:txBody>
+                  <a:tcPr/>
+                </a:tc>
+                <a:tc>
+                  <a:txBody>
+                    <a:bodyPr/>
+                    <a:lstStyle/>
+                    <a:p>
+                      <a:pPr algn="ctr"/>
+                      <a:r>
+                        <a:rPr lang="ar-AE" sz="1400" b="1" dirty="0"/>
+                        <a:t>اَلْمُطِيعُ </a:t>
+                      </a:r>
+                      <a:r>
+                        <a:rPr lang="ar-AE" sz="1400" b="1" dirty="0">
+                          <a:solidFill>
+                            <a:srgbClr val="C00000"/>
+                          </a:solidFill>
+                        </a:rPr>
+                        <a:t>فِي</a:t>
+                      </a:r>
+                      <a:r>
+                        <a:rPr lang="ar-AE" sz="1400" b="1" dirty="0"/>
+                        <a:t> الْخَنَّةِ</a:t>
+                      </a:r>
+                    </a:p>
+                    <a:p>
+                      <a:pPr algn="ctr"/>
+                      <a:r>
+                        <a:rPr lang="tr-TR" sz="1100" dirty="0"/>
+                        <a:t>İtaat eden cennettedir.</a:t>
+                      </a:r>
+                    </a:p>
+                  </a:txBody>
+                  <a:tcPr/>
+                </a:tc>
+                <a:extLst>
+                  <a:ext uri="{0D108BD9-81ED-4DB2-BD59-A6C34878D82A}">
+                    <a16:rowId xmlns:a16="http://schemas.microsoft.com/office/drawing/2014/main" val="3359397602"/>
+                  </a:ext>
+                </a:extLst>
+              </a:tr>
+              <a:tr h="418088">
+                <a:tc>
+                  <a:txBody>
+                    <a:bodyPr/>
+                    <a:lstStyle/>
+                    <a:p>
+                      <a:pPr algn="ctr"/>
+                      <a:r>
+                        <a:rPr lang="ar-AE" sz="1400" b="1" dirty="0">
+                          <a:solidFill>
+                            <a:srgbClr val="C00000"/>
+                          </a:solidFill>
+                          <a:latin typeface="Algerian" panose="04020705040A02060702" pitchFamily="82" charset="0"/>
+                        </a:rPr>
+                        <a:t>اَلْكَافُ</a:t>
+                      </a:r>
+                      <a:endParaRPr lang="tr-TR" sz="1400" b="1" dirty="0">
+                        <a:solidFill>
+                          <a:srgbClr val="C00000"/>
+                        </a:solidFill>
+                        <a:latin typeface="Algerian" panose="04020705040A02060702" pitchFamily="82" charset="0"/>
+                      </a:endParaRPr>
+                    </a:p>
+                  </a:txBody>
+                  <a:tcPr/>
+                </a:tc>
+                <a:tc>
+                  <a:txBody>
+                    <a:bodyPr/>
+                    <a:lstStyle/>
+                    <a:p>
+                      <a:pPr algn="ctr"/>
+                      <a:r>
+                        <a:rPr lang="tr-TR" sz="1100" dirty="0"/>
+                        <a:t>…gibi; teşbih</a:t>
+                      </a:r>
+                    </a:p>
+                  </a:txBody>
+                  <a:tcPr/>
+                </a:tc>
+                <a:tc>
+                  <a:txBody>
+                    <a:bodyPr/>
+                    <a:lstStyle/>
+                    <a:p>
+                      <a:pPr algn="ctr"/>
+                      <a:r>
+                        <a:rPr lang="ar-AE" sz="1400" b="1" dirty="0"/>
+                        <a:t>لَيْسَ </a:t>
+                      </a:r>
+                      <a:r>
+                        <a:rPr lang="ar-AE" sz="1400" b="1" dirty="0">
+                          <a:solidFill>
+                            <a:srgbClr val="C00000"/>
+                          </a:solidFill>
+                        </a:rPr>
+                        <a:t>كَ</a:t>
+                      </a:r>
+                      <a:r>
+                        <a:rPr lang="ar-AE" sz="1400" b="1" dirty="0"/>
+                        <a:t>مِثْلِهِ شَيْءٌ</a:t>
+                      </a:r>
+                    </a:p>
+                    <a:p>
+                      <a:pPr algn="ctr"/>
+                      <a:r>
+                        <a:rPr lang="tr-TR" sz="1100" dirty="0"/>
+                        <a:t>Onun benzeri bir şey yoktur.</a:t>
+                      </a:r>
+                    </a:p>
+                  </a:txBody>
+                  <a:tcPr/>
+                </a:tc>
+                <a:extLst>
+                  <a:ext uri="{0D108BD9-81ED-4DB2-BD59-A6C34878D82A}">
+                    <a16:rowId xmlns:a16="http://schemas.microsoft.com/office/drawing/2014/main" val="4078668120"/>
+                  </a:ext>
+                </a:extLst>
+              </a:tr>
+              <a:tr h="577360">
+                <a:tc>
+                  <a:txBody>
+                    <a:bodyPr/>
+                    <a:lstStyle/>
+                    <a:p>
+                      <a:pPr algn="ctr"/>
+                      <a:r>
+                        <a:rPr lang="ar-AE" sz="1400" b="1" dirty="0">
+                          <a:solidFill>
+                            <a:srgbClr val="C00000"/>
+                          </a:solidFill>
+                          <a:latin typeface="Algerian" panose="04020705040A02060702" pitchFamily="82" charset="0"/>
+                        </a:rPr>
+                        <a:t>حَتَّي</a:t>
+                      </a:r>
+                      <a:endParaRPr lang="tr-TR" sz="1400" b="1" dirty="0">
+                        <a:solidFill>
+                          <a:srgbClr val="C00000"/>
+                        </a:solidFill>
+                        <a:latin typeface="Algerian" panose="04020705040A02060702" pitchFamily="82" charset="0"/>
+                      </a:endParaRPr>
+                    </a:p>
+                  </a:txBody>
+                  <a:tcPr/>
+                </a:tc>
+                <a:tc>
+                  <a:txBody>
+                    <a:bodyPr/>
+                    <a:lstStyle/>
+                    <a:p>
+                      <a:pPr algn="ctr"/>
+                      <a:r>
+                        <a:rPr lang="tr-TR" sz="1100" dirty="0"/>
+                        <a:t>…e/…a kadar; zaman/mekan bitiş</a:t>
+                      </a:r>
+                    </a:p>
+                  </a:txBody>
+                  <a:tcPr/>
+                </a:tc>
+                <a:tc>
+                  <a:txBody>
+                    <a:bodyPr/>
+                    <a:lstStyle/>
+                    <a:p>
+                      <a:pPr algn="ctr"/>
+                      <a:r>
+                        <a:rPr lang="ar-AE" sz="1400" b="1" dirty="0"/>
+                        <a:t>اَعْبُدُ اللّهَ تَعَالَى </a:t>
+                      </a:r>
+                      <a:r>
+                        <a:rPr lang="ar-AE" sz="1400" b="1" dirty="0">
+                          <a:solidFill>
+                            <a:srgbClr val="C00000"/>
+                          </a:solidFill>
+                        </a:rPr>
+                        <a:t>حَتَّي</a:t>
+                      </a:r>
+                      <a:r>
+                        <a:rPr lang="ar-AE" sz="1400" b="1" dirty="0"/>
+                        <a:t> الْمَوْتِ</a:t>
+                      </a:r>
+                    </a:p>
+                    <a:p>
+                      <a:pPr algn="ctr"/>
+                      <a:r>
+                        <a:rPr lang="tr-TR" sz="1100" dirty="0"/>
+                        <a:t>Ölünceye kadar </a:t>
+                      </a:r>
+                      <a:r>
+                        <a:rPr lang="tr-TR" sz="1100" dirty="0" err="1"/>
+                        <a:t>Allah’u</a:t>
+                      </a:r>
+                      <a:r>
+                        <a:rPr lang="tr-TR" sz="1100" dirty="0"/>
+                        <a:t> Teala’ya ibadet edeceğim.</a:t>
+                      </a:r>
+                    </a:p>
+                  </a:txBody>
+                  <a:tcPr/>
+                </a:tc>
+                <a:extLst>
+                  <a:ext uri="{0D108BD9-81ED-4DB2-BD59-A6C34878D82A}">
+                    <a16:rowId xmlns:a16="http://schemas.microsoft.com/office/drawing/2014/main" val="3184782361"/>
+                  </a:ext>
+                </a:extLst>
+              </a:tr>
+              <a:tr h="577360">
+                <a:tc>
+                  <a:txBody>
+                    <a:bodyPr/>
+                    <a:lstStyle/>
+                    <a:p>
+                      <a:pPr algn="ctr"/>
+                      <a:r>
+                        <a:rPr lang="ar-AE" sz="1400" b="1" dirty="0">
+                          <a:solidFill>
+                            <a:srgbClr val="C00000"/>
+                          </a:solidFill>
+                          <a:latin typeface="Algerian" panose="04020705040A02060702" pitchFamily="82" charset="0"/>
+                        </a:rPr>
+                        <a:t>رُبَّ</a:t>
+                      </a:r>
+                      <a:endParaRPr lang="tr-TR" sz="1400" b="1" dirty="0">
+                        <a:solidFill>
+                          <a:srgbClr val="C00000"/>
+                        </a:solidFill>
+                        <a:latin typeface="Algerian" panose="04020705040A02060702" pitchFamily="82" charset="0"/>
+                      </a:endParaRPr>
+                    </a:p>
+                  </a:txBody>
+                  <a:tcPr/>
+                </a:tc>
+                <a:tc>
+                  <a:txBody>
+                    <a:bodyPr/>
+                    <a:lstStyle/>
+                    <a:p>
+                      <a:pPr algn="ctr"/>
+                      <a:r>
+                        <a:rPr lang="tr-TR" sz="1100" dirty="0"/>
+                        <a:t>Nice/Bazen</a:t>
+                      </a:r>
+                    </a:p>
+                  </a:txBody>
+                  <a:tcPr/>
+                </a:tc>
+                <a:tc>
+                  <a:txBody>
+                    <a:bodyPr/>
+                    <a:lstStyle/>
+                    <a:p>
+                      <a:pPr algn="ctr"/>
+                      <a:r>
+                        <a:rPr lang="ar-AE" sz="1400" b="1" dirty="0">
+                          <a:solidFill>
+                            <a:srgbClr val="C00000"/>
+                          </a:solidFill>
+                        </a:rPr>
+                        <a:t>رُبَّ</a:t>
+                      </a:r>
+                      <a:r>
+                        <a:rPr lang="ar-AE" sz="1400" b="1" dirty="0"/>
+                        <a:t> تَالٍ يَلْعَنُهُ اَلْقُرآنُ</a:t>
+                      </a:r>
+                    </a:p>
+                    <a:p>
+                      <a:pPr algn="ctr"/>
+                      <a:r>
+                        <a:rPr lang="tr-TR" sz="1100" dirty="0"/>
+                        <a:t>Kur’an’ın kendisine lanet ettiği nice okuyucularla(karşılaştım).</a:t>
+                      </a:r>
+                    </a:p>
+                  </a:txBody>
+                  <a:tcPr/>
+                </a:tc>
+                <a:extLst>
+                  <a:ext uri="{0D108BD9-81ED-4DB2-BD59-A6C34878D82A}">
+                    <a16:rowId xmlns:a16="http://schemas.microsoft.com/office/drawing/2014/main" val="4010344171"/>
+                  </a:ext>
+                </a:extLst>
+              </a:tr>
+            </a:tbl>
+          </a:graphicData>
+        </a:graphic>
+      </p:graphicFrame>
+      <p:graphicFrame>
+        <p:nvGraphicFramePr>
+          <p:cNvPr id="9" name="Tablo 8">
+            <a:extLst>
+              <a:ext uri="{FF2B5EF4-FFF2-40B4-BE49-F238E27FC236}">
+                <a16:creationId xmlns:a16="http://schemas.microsoft.com/office/drawing/2014/main" id="{A9FEB907-20A7-2D65-95C7-F8C5370DE7F9}"/>
+              </a:ext>
+            </a:extLst>
+          </p:cNvPr>
+          <p:cNvGraphicFramePr>
+            <a:graphicFrameLocks noGrp="1"/>
+          </p:cNvGraphicFramePr>
+          <p:nvPr>
+            <p:extLst>
+              <p:ext uri="{D42A27DB-BD31-4B8C-83A1-F6EECF244321}">
+                <p14:modId xmlns:p14="http://schemas.microsoft.com/office/powerpoint/2010/main" val="559751896"/>
+              </p:ext>
+            </p:extLst>
+          </p:nvPr>
+        </p:nvGraphicFramePr>
+        <p:xfrm>
+          <a:off x="6223000" y="657062"/>
+          <a:ext cx="5829300" cy="5816400"/>
+        </p:xfrm>
+        <a:graphic>
+          <a:graphicData uri="http://schemas.openxmlformats.org/drawingml/2006/table">
+            <a:tbl>
+              <a:tblPr firstRow="1" bandRow="1">
+                <a:tableStyleId>{5C22544A-7EE6-4342-B048-85BDC9FD1C3A}</a:tableStyleId>
+              </a:tblPr>
+              <a:tblGrid>
+                <a:gridCol w="889913">
+                  <a:extLst>
+                    <a:ext uri="{9D8B030D-6E8A-4147-A177-3AD203B41FA5}">
+                      <a16:colId xmlns:a16="http://schemas.microsoft.com/office/drawing/2014/main" val="3242288309"/>
+                    </a:ext>
+                  </a:extLst>
+                </a:gridCol>
+                <a:gridCol w="1544987">
+                  <a:extLst>
+                    <a:ext uri="{9D8B030D-6E8A-4147-A177-3AD203B41FA5}">
+                      <a16:colId xmlns:a16="http://schemas.microsoft.com/office/drawing/2014/main" val="2112445330"/>
+                    </a:ext>
+                  </a:extLst>
+                </a:gridCol>
+                <a:gridCol w="3394400">
+                  <a:extLst>
+                    <a:ext uri="{9D8B030D-6E8A-4147-A177-3AD203B41FA5}">
+                      <a16:colId xmlns:a16="http://schemas.microsoft.com/office/drawing/2014/main" val="317297140"/>
+                    </a:ext>
+                  </a:extLst>
+                </a:gridCol>
+              </a:tblGrid>
+              <a:tr h="557784">
+                <a:tc>
+                  <a:txBody>
+                    <a:bodyPr/>
+                    <a:lstStyle/>
+                    <a:p>
+                      <a:r>
+                        <a:rPr lang="tr-TR" dirty="0"/>
+                        <a:t>Harf-i Cer</a:t>
+                      </a:r>
+                    </a:p>
+                  </a:txBody>
+                  <a:tcPr/>
+                </a:tc>
+                <a:tc>
+                  <a:txBody>
+                    <a:bodyPr/>
+                    <a:lstStyle/>
+                    <a:p>
+                      <a:r>
+                        <a:rPr lang="tr-TR" dirty="0"/>
+                        <a:t>Mana</a:t>
+                      </a:r>
+                    </a:p>
+                  </a:txBody>
+                  <a:tcPr/>
+                </a:tc>
+                <a:tc>
+                  <a:txBody>
+                    <a:bodyPr/>
+                    <a:lstStyle/>
+                    <a:p>
+                      <a:r>
+                        <a:rPr lang="tr-TR" dirty="0"/>
+                        <a:t>Misal</a:t>
+                      </a:r>
+                    </a:p>
+                  </a:txBody>
+                  <a:tcPr/>
+                </a:tc>
+                <a:extLst>
+                  <a:ext uri="{0D108BD9-81ED-4DB2-BD59-A6C34878D82A}">
+                    <a16:rowId xmlns:a16="http://schemas.microsoft.com/office/drawing/2014/main" val="3289731430"/>
+                  </a:ext>
+                </a:extLst>
+              </a:tr>
+              <a:tr h="418088">
+                <a:tc>
+                  <a:txBody>
+                    <a:bodyPr/>
+                    <a:lstStyle/>
+                    <a:p>
+                      <a:pPr algn="ctr"/>
+                      <a:endParaRPr lang="tr-TR" sz="1100" b="1" dirty="0">
+                        <a:solidFill>
+                          <a:srgbClr val="C00000"/>
+                        </a:solidFill>
+                        <a:latin typeface="Algerian" panose="04020705040A02060702" pitchFamily="82" charset="0"/>
+                      </a:endParaRPr>
+                    </a:p>
+                  </a:txBody>
+                  <a:tcPr/>
+                </a:tc>
+                <a:tc>
+                  <a:txBody>
+                    <a:bodyPr/>
+                    <a:lstStyle/>
+                    <a:p>
+                      <a:pPr algn="ctr"/>
+                      <a:endParaRPr lang="tr-TR" sz="1100" dirty="0"/>
+                    </a:p>
+                  </a:txBody>
+                  <a:tcPr/>
+                </a:tc>
+                <a:tc>
+                  <a:txBody>
+                    <a:bodyPr/>
+                    <a:lstStyle/>
+                    <a:p>
+                      <a:pPr algn="ctr"/>
+                      <a:r>
+                        <a:rPr lang="ar-AE" sz="1200" b="1" dirty="0"/>
+                        <a:t>آمَنْتُ </a:t>
+                      </a:r>
+                      <a:r>
+                        <a:rPr lang="ar-AE" sz="1400" b="1" dirty="0">
+                          <a:solidFill>
+                            <a:srgbClr val="C00000"/>
+                          </a:solidFill>
+                        </a:rPr>
+                        <a:t>بِ</a:t>
+                      </a:r>
+                      <a:r>
+                        <a:rPr lang="ar-AE" sz="1400" b="1" dirty="0">
+                          <a:solidFill>
+                            <a:schemeClr val="tx1"/>
+                          </a:solidFill>
+                        </a:rPr>
+                        <a:t>اللهِ </a:t>
+                      </a:r>
+                    </a:p>
+                    <a:p>
+                      <a:pPr algn="ctr"/>
+                      <a:r>
+                        <a:rPr lang="tr-TR" sz="1100" dirty="0">
+                          <a:solidFill>
+                            <a:schemeClr val="tx1"/>
+                          </a:solidFill>
+                        </a:rPr>
+                        <a:t>Allah’</a:t>
+                      </a:r>
+                      <a:r>
+                        <a:rPr lang="tr-TR" sz="1100" dirty="0">
+                          <a:solidFill>
+                            <a:srgbClr val="C00000"/>
+                          </a:solidFill>
+                        </a:rPr>
+                        <a:t>a</a:t>
+                      </a:r>
+                      <a:r>
+                        <a:rPr lang="ar-AE" sz="1100" dirty="0">
+                          <a:solidFill>
+                            <a:srgbClr val="C00000"/>
+                          </a:solidFill>
+                        </a:rPr>
+                        <a:t> </a:t>
+                      </a:r>
+                      <a:r>
+                        <a:rPr lang="tr-TR" sz="1100" dirty="0">
+                          <a:solidFill>
+                            <a:srgbClr val="C00000"/>
+                          </a:solidFill>
+                        </a:rPr>
+                        <a:t> </a:t>
+                      </a:r>
+                      <a:r>
+                        <a:rPr lang="tr-TR" sz="1100" dirty="0">
+                          <a:solidFill>
+                            <a:schemeClr val="tx1"/>
+                          </a:solidFill>
+                        </a:rPr>
+                        <a:t>iman ettim.</a:t>
+                      </a:r>
+                    </a:p>
+                  </a:txBody>
+                  <a:tcPr/>
+                </a:tc>
+                <a:extLst>
+                  <a:ext uri="{0D108BD9-81ED-4DB2-BD59-A6C34878D82A}">
+                    <a16:rowId xmlns:a16="http://schemas.microsoft.com/office/drawing/2014/main" val="3625413832"/>
+                  </a:ext>
+                </a:extLst>
+              </a:tr>
+              <a:tr h="398179">
+                <a:tc>
+                  <a:txBody>
+                    <a:bodyPr/>
+                    <a:lstStyle/>
+                    <a:p>
+                      <a:pPr algn="ctr"/>
+                      <a:endParaRPr lang="tr-TR" sz="1400" b="1" dirty="0">
+                        <a:solidFill>
+                          <a:srgbClr val="C00000"/>
+                        </a:solidFill>
+                        <a:latin typeface="Algerian" panose="04020705040A02060702" pitchFamily="82" charset="0"/>
+                      </a:endParaRPr>
+                    </a:p>
+                  </a:txBody>
+                  <a:tcPr/>
+                </a:tc>
+                <a:tc>
+                  <a:txBody>
+                    <a:bodyPr/>
+                    <a:lstStyle/>
+                    <a:p>
+                      <a:pPr algn="ctr"/>
+                      <a:endParaRPr lang="tr-TR" sz="1100" dirty="0"/>
+                    </a:p>
+                  </a:txBody>
+                  <a:tcPr/>
+                </a:tc>
+                <a:tc>
+                  <a:txBody>
+                    <a:bodyPr/>
+                    <a:lstStyle/>
+                    <a:p>
+                      <a:pPr algn="ctr"/>
+                      <a:r>
+                        <a:rPr lang="ar-AE" sz="1200" b="1" dirty="0"/>
+                        <a:t>تُبْتُ </a:t>
+                      </a:r>
+                      <a:r>
+                        <a:rPr lang="ar-AE" sz="1200" b="1" dirty="0">
+                          <a:solidFill>
+                            <a:srgbClr val="C00000"/>
+                          </a:solidFill>
+                        </a:rPr>
+                        <a:t>مِنْ </a:t>
+                      </a:r>
+                      <a:r>
+                        <a:rPr lang="ar-AE" sz="1200" b="1" dirty="0">
+                          <a:solidFill>
+                            <a:schemeClr val="tx1"/>
+                          </a:solidFill>
+                        </a:rPr>
+                        <a:t>كُلِّ ذَنْبٍ</a:t>
+                      </a:r>
+                    </a:p>
+                    <a:p>
+                      <a:pPr algn="ctr"/>
+                      <a:r>
+                        <a:rPr lang="tr-TR" sz="1100" b="0" dirty="0">
+                          <a:solidFill>
+                            <a:schemeClr val="tx1"/>
+                          </a:solidFill>
+                        </a:rPr>
+                        <a:t>Her günahtan tövbe ettim</a:t>
+                      </a:r>
+                    </a:p>
+                  </a:txBody>
+                  <a:tcPr/>
+                </a:tc>
+                <a:extLst>
+                  <a:ext uri="{0D108BD9-81ED-4DB2-BD59-A6C34878D82A}">
+                    <a16:rowId xmlns:a16="http://schemas.microsoft.com/office/drawing/2014/main" val="920756919"/>
+                  </a:ext>
+                </a:extLst>
+              </a:tr>
+              <a:tr h="418088">
+                <a:tc>
+                  <a:txBody>
+                    <a:bodyPr/>
+                    <a:lstStyle/>
+                    <a:p>
+                      <a:pPr algn="ctr"/>
+                      <a:endParaRPr lang="tr-TR" sz="1400" b="1" dirty="0">
+                        <a:solidFill>
+                          <a:srgbClr val="C00000"/>
+                        </a:solidFill>
+                        <a:latin typeface="Algerian" panose="04020705040A02060702" pitchFamily="82" charset="0"/>
+                      </a:endParaRPr>
+                    </a:p>
+                  </a:txBody>
+                  <a:tcPr/>
+                </a:tc>
+                <a:tc>
+                  <a:txBody>
+                    <a:bodyPr/>
+                    <a:lstStyle/>
+                    <a:p>
+                      <a:pPr algn="ctr"/>
+                      <a:endParaRPr lang="tr-TR" sz="1100" dirty="0"/>
+                    </a:p>
+                  </a:txBody>
+                  <a:tcPr/>
+                </a:tc>
+                <a:tc>
+                  <a:txBody>
+                    <a:bodyPr/>
+                    <a:lstStyle/>
+                    <a:p>
+                      <a:pPr algn="ctr"/>
+                      <a:r>
+                        <a:rPr lang="ar-AE" sz="1400" b="1" kern="1200" dirty="0">
+                          <a:solidFill>
+                            <a:schemeClr val="tx1"/>
+                          </a:solidFill>
+                          <a:latin typeface="+mn-lt"/>
+                          <a:ea typeface="+mn-ea"/>
+                          <a:cs typeface="+mn-cs"/>
+                        </a:rPr>
+                        <a:t>تُلبْتُ </a:t>
+                      </a:r>
+                      <a:r>
+                        <a:rPr lang="ar-AE" sz="1400" b="1" kern="1200" dirty="0">
+                          <a:solidFill>
+                            <a:srgbClr val="C00000"/>
+                          </a:solidFill>
+                          <a:latin typeface="+mn-lt"/>
+                          <a:ea typeface="+mn-ea"/>
+                          <a:cs typeface="+mn-cs"/>
+                        </a:rPr>
+                        <a:t>إِلَي</a:t>
+                      </a:r>
+                      <a:r>
+                        <a:rPr lang="ar-AE" sz="1400" b="1" kern="1200" dirty="0">
+                          <a:solidFill>
+                            <a:schemeClr val="tx1"/>
+                          </a:solidFill>
+                          <a:latin typeface="+mn-lt"/>
+                          <a:ea typeface="+mn-ea"/>
+                          <a:cs typeface="+mn-cs"/>
+                        </a:rPr>
+                        <a:t> اللهِ</a:t>
+                      </a:r>
+                    </a:p>
+                    <a:p>
+                      <a:pPr algn="ctr"/>
+                      <a:r>
+                        <a:rPr lang="tr-TR" sz="1100" b="0" kern="1200" dirty="0" err="1">
+                          <a:solidFill>
+                            <a:schemeClr val="tx1"/>
+                          </a:solidFill>
+                          <a:latin typeface="+mn-lt"/>
+                          <a:ea typeface="+mn-ea"/>
+                          <a:cs typeface="+mn-cs"/>
+                        </a:rPr>
+                        <a:t>Allah’u</a:t>
+                      </a:r>
+                      <a:r>
+                        <a:rPr lang="tr-TR" sz="1100" b="0" kern="1200" dirty="0">
+                          <a:solidFill>
+                            <a:schemeClr val="tx1"/>
+                          </a:solidFill>
+                          <a:latin typeface="+mn-lt"/>
+                          <a:ea typeface="+mn-ea"/>
+                          <a:cs typeface="+mn-cs"/>
+                        </a:rPr>
+                        <a:t> Teala’ya tövbe ettim.</a:t>
+                      </a:r>
+                    </a:p>
+                  </a:txBody>
+                  <a:tcPr/>
+                </a:tc>
+                <a:extLst>
+                  <a:ext uri="{0D108BD9-81ED-4DB2-BD59-A6C34878D82A}">
+                    <a16:rowId xmlns:a16="http://schemas.microsoft.com/office/drawing/2014/main" val="3898272618"/>
+                  </a:ext>
+                </a:extLst>
+              </a:tr>
+              <a:tr h="418088">
+                <a:tc>
+                  <a:txBody>
+                    <a:bodyPr/>
+                    <a:lstStyle/>
+                    <a:p>
+                      <a:pPr algn="ctr"/>
+                      <a:endParaRPr lang="tr-TR" sz="1400" b="1" dirty="0">
+                        <a:solidFill>
+                          <a:srgbClr val="C00000"/>
+                        </a:solidFill>
+                        <a:latin typeface="Algerian" panose="04020705040A02060702" pitchFamily="82" charset="0"/>
+                      </a:endParaRPr>
+                    </a:p>
+                  </a:txBody>
+                  <a:tcPr/>
+                </a:tc>
+                <a:tc>
+                  <a:txBody>
+                    <a:bodyPr/>
+                    <a:lstStyle/>
+                    <a:p>
+                      <a:pPr algn="ctr"/>
+                      <a:endParaRPr lang="tr-TR" sz="1100" dirty="0"/>
+                    </a:p>
+                  </a:txBody>
+                  <a:tcPr/>
+                </a:tc>
+                <a:tc>
+                  <a:txBody>
+                    <a:bodyPr/>
+                    <a:lstStyle/>
+                    <a:p>
+                      <a:pPr algn="ctr"/>
+                      <a:r>
+                        <a:rPr lang="ar-AE" sz="1400" b="1" dirty="0"/>
+                        <a:t>كُفِفْتُ </a:t>
+                      </a:r>
+                      <a:r>
+                        <a:rPr lang="ar-AE" sz="1400" b="1" dirty="0">
+                          <a:solidFill>
+                            <a:srgbClr val="C00000"/>
+                          </a:solidFill>
+                        </a:rPr>
+                        <a:t>عَنْ</a:t>
+                      </a:r>
+                      <a:r>
+                        <a:rPr lang="ar-AE" sz="1400" b="1" dirty="0"/>
+                        <a:t> الْحَرَامِ</a:t>
+                      </a:r>
+                    </a:p>
+                    <a:p>
+                      <a:pPr algn="ctr"/>
+                      <a:r>
+                        <a:rPr lang="tr-TR" sz="1100" b="0" dirty="0">
+                          <a:solidFill>
+                            <a:schemeClr val="tx1"/>
+                          </a:solidFill>
+                        </a:rPr>
+                        <a:t>Haramdan menolundum.</a:t>
+                      </a:r>
+                    </a:p>
+                  </a:txBody>
+                  <a:tcPr/>
+                </a:tc>
+                <a:extLst>
+                  <a:ext uri="{0D108BD9-81ED-4DB2-BD59-A6C34878D82A}">
+                    <a16:rowId xmlns:a16="http://schemas.microsoft.com/office/drawing/2014/main" val="2209876613"/>
+                  </a:ext>
+                </a:extLst>
+              </a:tr>
+              <a:tr h="577360">
+                <a:tc>
+                  <a:txBody>
+                    <a:bodyPr/>
+                    <a:lstStyle/>
+                    <a:p>
+                      <a:pPr algn="ctr"/>
+                      <a:endParaRPr lang="tr-TR" sz="1400" b="1" dirty="0">
+                        <a:solidFill>
+                          <a:srgbClr val="C00000"/>
+                        </a:solidFill>
+                        <a:latin typeface="Algerian" panose="04020705040A02060702" pitchFamily="82" charset="0"/>
+                      </a:endParaRPr>
+                    </a:p>
+                  </a:txBody>
+                  <a:tcPr/>
+                </a:tc>
+                <a:tc>
+                  <a:txBody>
+                    <a:bodyPr/>
+                    <a:lstStyle/>
+                    <a:p>
+                      <a:pPr algn="ctr"/>
+                      <a:endParaRPr lang="tr-TR" sz="1100" dirty="0"/>
+                    </a:p>
+                  </a:txBody>
+                  <a:tcPr/>
+                </a:tc>
+                <a:tc>
+                  <a:txBody>
+                    <a:bodyPr/>
+                    <a:lstStyle/>
+                    <a:p>
+                      <a:pPr algn="ctr"/>
+                      <a:r>
+                        <a:rPr lang="ar-AE" sz="1400" dirty="0"/>
+                        <a:t>تَخِبُ التَّوْبَةُ </a:t>
+                      </a:r>
+                      <a:r>
+                        <a:rPr lang="ar-AE" sz="1400" dirty="0">
+                          <a:solidFill>
+                            <a:srgbClr val="C00000"/>
+                          </a:solidFill>
+                        </a:rPr>
+                        <a:t>عَلَي</a:t>
+                      </a:r>
+                      <a:r>
+                        <a:rPr lang="ar-AE" sz="1400" dirty="0"/>
+                        <a:t> كُلِّ مُذْنِبٍ</a:t>
+                      </a:r>
+                    </a:p>
+                    <a:p>
+                      <a:pPr algn="ctr"/>
+                      <a:r>
+                        <a:rPr lang="tr-TR" sz="1100" dirty="0"/>
+                        <a:t>Her günah işleyene tövbe etmek vacip olur.</a:t>
+                      </a:r>
+                    </a:p>
+                  </a:txBody>
+                  <a:tcPr/>
+                </a:tc>
+                <a:extLst>
+                  <a:ext uri="{0D108BD9-81ED-4DB2-BD59-A6C34878D82A}">
+                    <a16:rowId xmlns:a16="http://schemas.microsoft.com/office/drawing/2014/main" val="1718483269"/>
+                  </a:ext>
+                </a:extLst>
+              </a:tr>
+              <a:tr h="577360">
+                <a:tc>
+                  <a:txBody>
+                    <a:bodyPr/>
+                    <a:lstStyle/>
+                    <a:p>
+                      <a:pPr algn="ctr"/>
+                      <a:endParaRPr lang="tr-TR" sz="1400" b="1" dirty="0">
+                        <a:solidFill>
+                          <a:srgbClr val="C00000"/>
+                        </a:solidFill>
+                        <a:latin typeface="Algerian" panose="04020705040A02060702" pitchFamily="82" charset="0"/>
+                      </a:endParaRPr>
+                    </a:p>
+                  </a:txBody>
+                  <a:tcPr/>
+                </a:tc>
+                <a:tc>
+                  <a:txBody>
+                    <a:bodyPr/>
+                    <a:lstStyle/>
+                    <a:p>
+                      <a:pPr algn="ctr"/>
+                      <a:endParaRPr lang="tr-TR" sz="1100" dirty="0"/>
+                    </a:p>
+                  </a:txBody>
+                  <a:tcPr/>
+                </a:tc>
+                <a:tc>
+                  <a:txBody>
+                    <a:bodyPr/>
+                    <a:lstStyle/>
+                    <a:p>
+                      <a:pPr algn="ctr"/>
+                      <a:r>
+                        <a:rPr lang="ar-AE" sz="1400" dirty="0"/>
+                        <a:t>اَنَا عُبَيْدٌ </a:t>
+                      </a:r>
+                      <a:r>
+                        <a:rPr lang="ar-AE" sz="1400" dirty="0">
+                          <a:solidFill>
+                            <a:srgbClr val="C00000"/>
+                          </a:solidFill>
+                        </a:rPr>
+                        <a:t>لِلَّهِ</a:t>
+                      </a:r>
+                      <a:r>
+                        <a:rPr lang="ar-AE" sz="1400" dirty="0"/>
+                        <a:t> تَعَالَى</a:t>
+                      </a:r>
+                    </a:p>
+                    <a:p>
+                      <a:pPr algn="ctr"/>
+                      <a:r>
+                        <a:rPr lang="tr-TR" sz="1100" dirty="0"/>
+                        <a:t>Ben </a:t>
+                      </a:r>
+                      <a:r>
+                        <a:rPr lang="tr-TR" sz="1100" dirty="0" err="1"/>
+                        <a:t>Allah’u</a:t>
+                      </a:r>
+                      <a:r>
+                        <a:rPr lang="tr-TR" sz="1100" dirty="0"/>
+                        <a:t> Teala’nın bir </a:t>
+                      </a:r>
+                      <a:r>
+                        <a:rPr lang="tr-TR" sz="1100" dirty="0" err="1"/>
+                        <a:t>kulcağızıyım</a:t>
+                      </a:r>
+                      <a:endParaRPr lang="tr-TR" sz="1100" dirty="0"/>
+                    </a:p>
+                  </a:txBody>
+                  <a:tcPr/>
+                </a:tc>
+                <a:extLst>
+                  <a:ext uri="{0D108BD9-81ED-4DB2-BD59-A6C34878D82A}">
+                    <a16:rowId xmlns:a16="http://schemas.microsoft.com/office/drawing/2014/main" val="98950525"/>
+                  </a:ext>
+                </a:extLst>
+              </a:tr>
+              <a:tr h="418088">
+                <a:tc>
+                  <a:txBody>
+                    <a:bodyPr/>
+                    <a:lstStyle/>
+                    <a:p>
+                      <a:pPr algn="ctr"/>
+                      <a:endParaRPr lang="tr-TR" sz="1400" b="1" dirty="0">
+                        <a:solidFill>
+                          <a:srgbClr val="C00000"/>
+                        </a:solidFill>
+                        <a:latin typeface="Algerian" panose="04020705040A02060702" pitchFamily="82" charset="0"/>
+                      </a:endParaRPr>
+                    </a:p>
+                  </a:txBody>
+                  <a:tcPr/>
+                </a:tc>
+                <a:tc>
+                  <a:txBody>
+                    <a:bodyPr/>
+                    <a:lstStyle/>
+                    <a:p>
+                      <a:pPr algn="ctr"/>
+                      <a:endParaRPr lang="tr-TR" sz="1100" dirty="0"/>
+                    </a:p>
+                  </a:txBody>
+                  <a:tcPr/>
+                </a:tc>
+                <a:tc>
+                  <a:txBody>
+                    <a:bodyPr/>
+                    <a:lstStyle/>
+                    <a:p>
+                      <a:pPr algn="ctr"/>
+                      <a:r>
+                        <a:rPr lang="ar-AE" sz="1400" b="1" dirty="0"/>
+                        <a:t>اَلْمُطِيعُ </a:t>
+                      </a:r>
+                      <a:r>
+                        <a:rPr lang="ar-AE" sz="1400" b="1" dirty="0">
+                          <a:solidFill>
+                            <a:srgbClr val="C00000"/>
+                          </a:solidFill>
+                        </a:rPr>
+                        <a:t>فِي</a:t>
+                      </a:r>
+                      <a:r>
+                        <a:rPr lang="ar-AE" sz="1400" b="1" dirty="0"/>
+                        <a:t> الْخَنَّةِ</a:t>
+                      </a:r>
+                    </a:p>
+                    <a:p>
+                      <a:pPr algn="ctr"/>
+                      <a:r>
+                        <a:rPr lang="tr-TR" sz="1100" dirty="0"/>
+                        <a:t>İtaat eden cennettedir.</a:t>
+                      </a:r>
+                    </a:p>
+                  </a:txBody>
+                  <a:tcPr/>
+                </a:tc>
+                <a:extLst>
+                  <a:ext uri="{0D108BD9-81ED-4DB2-BD59-A6C34878D82A}">
+                    <a16:rowId xmlns:a16="http://schemas.microsoft.com/office/drawing/2014/main" val="3359397602"/>
+                  </a:ext>
+                </a:extLst>
+              </a:tr>
+              <a:tr h="418088">
+                <a:tc>
+                  <a:txBody>
+                    <a:bodyPr/>
+                    <a:lstStyle/>
+                    <a:p>
+                      <a:pPr algn="ctr"/>
+                      <a:endParaRPr lang="tr-TR" sz="1400" b="1" dirty="0">
+                        <a:solidFill>
+                          <a:srgbClr val="C00000"/>
+                        </a:solidFill>
+                        <a:latin typeface="Algerian" panose="04020705040A02060702" pitchFamily="82" charset="0"/>
+                      </a:endParaRPr>
+                    </a:p>
+                  </a:txBody>
+                  <a:tcPr/>
+                </a:tc>
+                <a:tc>
+                  <a:txBody>
+                    <a:bodyPr/>
+                    <a:lstStyle/>
+                    <a:p>
+                      <a:pPr algn="ctr"/>
+                      <a:endParaRPr lang="tr-TR" sz="1100" dirty="0"/>
+                    </a:p>
+                  </a:txBody>
+                  <a:tcPr/>
+                </a:tc>
+                <a:tc>
+                  <a:txBody>
+                    <a:bodyPr/>
+                    <a:lstStyle/>
+                    <a:p>
+                      <a:pPr algn="ctr"/>
+                      <a:r>
+                        <a:rPr lang="ar-AE" sz="1400" b="1" dirty="0"/>
+                        <a:t>لَيْسَ </a:t>
+                      </a:r>
+                      <a:r>
+                        <a:rPr lang="ar-AE" sz="1400" b="1" dirty="0">
+                          <a:solidFill>
+                            <a:srgbClr val="C00000"/>
+                          </a:solidFill>
+                        </a:rPr>
+                        <a:t>كَ</a:t>
+                      </a:r>
+                      <a:r>
+                        <a:rPr lang="ar-AE" sz="1400" b="1" dirty="0"/>
+                        <a:t>مِثْلِهِ شَيْءٌ</a:t>
+                      </a:r>
+                    </a:p>
+                    <a:p>
+                      <a:pPr algn="ctr"/>
+                      <a:r>
+                        <a:rPr lang="tr-TR" sz="1100" dirty="0"/>
+                        <a:t>Onun benzeri bir şey yoktur.</a:t>
+                      </a:r>
+                    </a:p>
+                  </a:txBody>
+                  <a:tcPr/>
+                </a:tc>
+                <a:extLst>
+                  <a:ext uri="{0D108BD9-81ED-4DB2-BD59-A6C34878D82A}">
+                    <a16:rowId xmlns:a16="http://schemas.microsoft.com/office/drawing/2014/main" val="4078668120"/>
+                  </a:ext>
+                </a:extLst>
+              </a:tr>
+              <a:tr h="577360">
+                <a:tc>
+                  <a:txBody>
+                    <a:bodyPr/>
+                    <a:lstStyle/>
+                    <a:p>
+                      <a:pPr algn="ctr"/>
+                      <a:endParaRPr lang="tr-TR" sz="1400" b="1" dirty="0">
+                        <a:solidFill>
+                          <a:srgbClr val="C00000"/>
+                        </a:solidFill>
+                        <a:latin typeface="Algerian" panose="04020705040A02060702" pitchFamily="82" charset="0"/>
+                      </a:endParaRPr>
+                    </a:p>
+                  </a:txBody>
+                  <a:tcPr/>
+                </a:tc>
+                <a:tc>
+                  <a:txBody>
+                    <a:bodyPr/>
+                    <a:lstStyle/>
+                    <a:p>
+                      <a:pPr algn="ctr"/>
+                      <a:endParaRPr lang="tr-TR" sz="1100" dirty="0"/>
+                    </a:p>
+                  </a:txBody>
+                  <a:tcPr/>
+                </a:tc>
+                <a:tc>
+                  <a:txBody>
+                    <a:bodyPr/>
+                    <a:lstStyle/>
+                    <a:p>
+                      <a:pPr algn="ctr"/>
+                      <a:r>
+                        <a:rPr lang="ar-AE" sz="1400" b="1" dirty="0"/>
+                        <a:t>اَعْبُدُ اللّهَ تَعَالَى </a:t>
+                      </a:r>
+                      <a:r>
+                        <a:rPr lang="ar-AE" sz="1400" b="1" dirty="0">
+                          <a:solidFill>
+                            <a:srgbClr val="C00000"/>
+                          </a:solidFill>
+                        </a:rPr>
+                        <a:t>حَتَّي</a:t>
+                      </a:r>
+                      <a:r>
+                        <a:rPr lang="ar-AE" sz="1400" b="1" dirty="0"/>
+                        <a:t> الْمَوْتِ</a:t>
+                      </a:r>
+                    </a:p>
+                    <a:p>
+                      <a:pPr algn="ctr"/>
+                      <a:r>
+                        <a:rPr lang="tr-TR" sz="1100" dirty="0"/>
+                        <a:t>Ölünceye kadar </a:t>
+                      </a:r>
+                      <a:r>
+                        <a:rPr lang="tr-TR" sz="1100" dirty="0" err="1"/>
+                        <a:t>Allah’u</a:t>
+                      </a:r>
+                      <a:r>
+                        <a:rPr lang="tr-TR" sz="1100" dirty="0"/>
+                        <a:t> Teala’ya ibadet edeceğim.</a:t>
+                      </a:r>
+                    </a:p>
+                  </a:txBody>
+                  <a:tcPr/>
+                </a:tc>
+                <a:extLst>
+                  <a:ext uri="{0D108BD9-81ED-4DB2-BD59-A6C34878D82A}">
+                    <a16:rowId xmlns:a16="http://schemas.microsoft.com/office/drawing/2014/main" val="3184782361"/>
+                  </a:ext>
+                </a:extLst>
+              </a:tr>
+              <a:tr h="577360">
+                <a:tc>
+                  <a:txBody>
+                    <a:bodyPr/>
+                    <a:lstStyle/>
+                    <a:p>
+                      <a:pPr algn="ctr"/>
+                      <a:endParaRPr lang="tr-TR" sz="1400" b="1" dirty="0">
+                        <a:solidFill>
+                          <a:srgbClr val="C00000"/>
+                        </a:solidFill>
+                        <a:latin typeface="Algerian" panose="04020705040A02060702" pitchFamily="82" charset="0"/>
+                      </a:endParaRPr>
+                    </a:p>
+                  </a:txBody>
+                  <a:tcPr/>
+                </a:tc>
+                <a:tc>
+                  <a:txBody>
+                    <a:bodyPr/>
+                    <a:lstStyle/>
+                    <a:p>
+                      <a:pPr algn="ctr"/>
+                      <a:endParaRPr lang="tr-TR" sz="1100" dirty="0"/>
+                    </a:p>
+                  </a:txBody>
+                  <a:tcPr/>
+                </a:tc>
+                <a:tc>
+                  <a:txBody>
+                    <a:bodyPr/>
+                    <a:lstStyle/>
+                    <a:p>
+                      <a:pPr algn="ctr"/>
+                      <a:r>
+                        <a:rPr lang="ar-AE" sz="1400" b="1" dirty="0">
+                          <a:solidFill>
+                            <a:srgbClr val="C00000"/>
+                          </a:solidFill>
+                        </a:rPr>
+                        <a:t>رُبَّ</a:t>
+                      </a:r>
+                      <a:r>
+                        <a:rPr lang="ar-AE" sz="1400" b="1" dirty="0"/>
+                        <a:t> تَالٍ يَلْعَنُهُ اَلْقُرآنُ</a:t>
+                      </a:r>
+                    </a:p>
+                    <a:p>
+                      <a:pPr algn="ctr"/>
+                      <a:r>
+                        <a:rPr lang="tr-TR" sz="1100" dirty="0"/>
+                        <a:t>Kur’an’ın kendisine lanet ettiği nice okuyucularla(karşılaştım).</a:t>
+                      </a:r>
+                    </a:p>
+                  </a:txBody>
+                  <a:tcPr/>
+                </a:tc>
+                <a:extLst>
+                  <a:ext uri="{0D108BD9-81ED-4DB2-BD59-A6C34878D82A}">
+                    <a16:rowId xmlns:a16="http://schemas.microsoft.com/office/drawing/2014/main" val="4010344171"/>
+                  </a:ext>
+                </a:extLst>
+              </a:tr>
+            </a:tbl>
+          </a:graphicData>
+        </a:graphic>
+      </p:graphicFrame>
+    </p:spTree>
+    <p:extLst>
+      <p:ext uri="{BB962C8B-B14F-4D97-AF65-F5344CB8AC3E}">
+        <p14:creationId xmlns:p14="http://schemas.microsoft.com/office/powerpoint/2010/main" val="512067248"/>
       </p:ext>
     </p:extLst>
   </p:cSld>

--- a/Nahiv/Avamil/Amil.pptx
+++ b/Nahiv/Avamil/Amil.pptx
@@ -4,10 +4,15 @@
   <p:sldMasterIdLst>
     <p:sldMasterId id="2147483648" r:id="rId1"/>
   </p:sldMasterIdLst>
+  <p:notesMasterIdLst>
+    <p:notesMasterId r:id="rId7"/>
+  </p:notesMasterIdLst>
   <p:sldIdLst>
     <p:sldId id="256" r:id="rId2"/>
     <p:sldId id="257" r:id="rId3"/>
     <p:sldId id="258" r:id="rId4"/>
+    <p:sldId id="259" r:id="rId5"/>
+    <p:sldId id="260" r:id="rId6"/>
   </p:sldIdLst>
   <p:sldSz cx="12192000" cy="6858000"/>
   <p:notesSz cx="6858000" cy="9144000"/>
@@ -119,7 +124,7 @@
   <pc:docChgLst>
     <pc:chgData name="Ayhan Karaman" userId="ec277a7f08761a62" providerId="LiveId" clId="{A7318BDB-BC3B-435E-9587-295F14AD73EF}"/>
     <pc:docChg chg="undo redo custSel addSld modSld">
-      <pc:chgData name="Ayhan Karaman" userId="ec277a7f08761a62" providerId="LiveId" clId="{A7318BDB-BC3B-435E-9587-295F14AD73EF}" dt="2026-10-11T20:39:06.415" v="2893" actId="6549"/>
+      <pc:chgData name="Ayhan Karaman" userId="ec277a7f08761a62" providerId="LiveId" clId="{A7318BDB-BC3B-435E-9587-295F14AD73EF}" dt="2026-10-12T18:36:10.923" v="4523" actId="115"/>
       <pc:docMkLst>
         <pc:docMk/>
       </pc:docMkLst>
@@ -762,13 +767,13 @@
         </pc:cxnChg>
       </pc:sldChg>
       <pc:sldChg chg="addSp delSp modSp new mod">
-        <pc:chgData name="Ayhan Karaman" userId="ec277a7f08761a62" providerId="LiveId" clId="{A7318BDB-BC3B-435E-9587-295F14AD73EF}" dt="2026-10-11T20:39:06.415" v="2893" actId="6549"/>
+        <pc:chgData name="Ayhan Karaman" userId="ec277a7f08761a62" providerId="LiveId" clId="{A7318BDB-BC3B-435E-9587-295F14AD73EF}" dt="2026-10-12T18:28:02.783" v="4418" actId="113"/>
         <pc:sldMkLst>
           <pc:docMk/>
           <pc:sldMk cId="512067248" sldId="258"/>
         </pc:sldMkLst>
         <pc:spChg chg="mod">
-          <ac:chgData name="Ayhan Karaman" userId="ec277a7f08761a62" providerId="LiveId" clId="{A7318BDB-BC3B-435E-9587-295F14AD73EF}" dt="2026-10-11T20:37:50.455" v="2885" actId="14100"/>
+          <ac:chgData name="Ayhan Karaman" userId="ec277a7f08761a62" providerId="LiveId" clId="{A7318BDB-BC3B-435E-9587-295F14AD73EF}" dt="2026-10-12T18:27:17.021" v="4415" actId="14100"/>
           <ac:spMkLst>
             <pc:docMk/>
             <pc:sldMk cId="512067248" sldId="258"/>
@@ -792,7 +797,7 @@
           </ac:spMkLst>
         </pc:spChg>
         <pc:spChg chg="add mod">
-          <ac:chgData name="Ayhan Karaman" userId="ec277a7f08761a62" providerId="LiveId" clId="{A7318BDB-BC3B-435E-9587-295F14AD73EF}" dt="2026-10-11T20:38:35.526" v="2891" actId="207"/>
+          <ac:chgData name="Ayhan Karaman" userId="ec277a7f08761a62" providerId="LiveId" clId="{A7318BDB-BC3B-435E-9587-295F14AD73EF}" dt="2026-10-12T18:28:02.783" v="4418" actId="113"/>
           <ac:spMkLst>
             <pc:docMk/>
             <pc:sldMk cId="512067248" sldId="258"/>
@@ -816,7 +821,7 @@
           </ac:spMkLst>
         </pc:spChg>
         <pc:graphicFrameChg chg="add mod modGraphic">
-          <ac:chgData name="Ayhan Karaman" userId="ec277a7f08761a62" providerId="LiveId" clId="{A7318BDB-BC3B-435E-9587-295F14AD73EF}" dt="2026-10-11T20:37:40.728" v="2883" actId="1076"/>
+          <ac:chgData name="Ayhan Karaman" userId="ec277a7f08761a62" providerId="LiveId" clId="{A7318BDB-BC3B-435E-9587-295F14AD73EF}" dt="2026-10-12T18:19:37.345" v="4134" actId="1076"/>
           <ac:graphicFrameMkLst>
             <pc:docMk/>
             <pc:sldMk cId="512067248" sldId="258"/>
@@ -824,7 +829,7 @@
           </ac:graphicFrameMkLst>
         </pc:graphicFrameChg>
         <pc:graphicFrameChg chg="add mod modGraphic">
-          <ac:chgData name="Ayhan Karaman" userId="ec277a7f08761a62" providerId="LiveId" clId="{A7318BDB-BC3B-435E-9587-295F14AD73EF}" dt="2026-10-11T20:39:06.415" v="2893" actId="6549"/>
+          <ac:chgData name="Ayhan Karaman" userId="ec277a7f08761a62" providerId="LiveId" clId="{A7318BDB-BC3B-435E-9587-295F14AD73EF}" dt="2026-10-12T18:26:35.195" v="4413" actId="20577"/>
           <ac:graphicFrameMkLst>
             <pc:docMk/>
             <pc:sldMk cId="512067248" sldId="258"/>
@@ -832,9 +837,672 @@
           </ac:graphicFrameMkLst>
         </pc:graphicFrameChg>
       </pc:sldChg>
+      <pc:sldChg chg="addSp delSp modSp add mod">
+        <pc:chgData name="Ayhan Karaman" userId="ec277a7f08761a62" providerId="LiveId" clId="{A7318BDB-BC3B-435E-9587-295F14AD73EF}" dt="2026-10-12T18:36:10.923" v="4523" actId="115"/>
+        <pc:sldMkLst>
+          <pc:docMk/>
+          <pc:sldMk cId="2335362230" sldId="259"/>
+        </pc:sldMkLst>
+        <pc:spChg chg="add mod">
+          <ac:chgData name="Ayhan Karaman" userId="ec277a7f08761a62" providerId="LiveId" clId="{A7318BDB-BC3B-435E-9587-295F14AD73EF}" dt="2026-10-12T18:36:10.923" v="4523" actId="115"/>
+          <ac:spMkLst>
+            <pc:docMk/>
+            <pc:sldMk cId="2335362230" sldId="259"/>
+            <ac:spMk id="3" creationId="{35112F64-3A23-98AD-0458-483DC26669BC}"/>
+          </ac:spMkLst>
+        </pc:spChg>
+        <pc:spChg chg="mod">
+          <ac:chgData name="Ayhan Karaman" userId="ec277a7f08761a62" providerId="LiveId" clId="{A7318BDB-BC3B-435E-9587-295F14AD73EF}" dt="2026-10-12T18:28:58.733" v="4455" actId="20577"/>
+          <ac:spMkLst>
+            <pc:docMk/>
+            <pc:sldMk cId="2335362230" sldId="259"/>
+            <ac:spMk id="4" creationId="{9668639A-0B97-AD1E-43FA-28EF8958806C}"/>
+          </ac:spMkLst>
+        </pc:spChg>
+        <pc:spChg chg="del mod">
+          <ac:chgData name="Ayhan Karaman" userId="ec277a7f08761a62" providerId="LiveId" clId="{A7318BDB-BC3B-435E-9587-295F14AD73EF}" dt="2026-10-12T18:28:36.565" v="4423" actId="478"/>
+          <ac:spMkLst>
+            <pc:docMk/>
+            <pc:sldMk cId="2335362230" sldId="259"/>
+            <ac:spMk id="5" creationId="{D158510D-C4F3-24F0-5171-960FD2A8E88A}"/>
+          </ac:spMkLst>
+        </pc:spChg>
+        <pc:graphicFrameChg chg="del">
+          <ac:chgData name="Ayhan Karaman" userId="ec277a7f08761a62" providerId="LiveId" clId="{A7318BDB-BC3B-435E-9587-295F14AD73EF}" dt="2026-10-12T18:28:29.326" v="4420" actId="478"/>
+          <ac:graphicFrameMkLst>
+            <pc:docMk/>
+            <pc:sldMk cId="2335362230" sldId="259"/>
+            <ac:graphicFrameMk id="8" creationId="{73B81C24-4295-452A-3186-02A4ECFDE86A}"/>
+          </ac:graphicFrameMkLst>
+        </pc:graphicFrameChg>
+        <pc:graphicFrameChg chg="del">
+          <ac:chgData name="Ayhan Karaman" userId="ec277a7f08761a62" providerId="LiveId" clId="{A7318BDB-BC3B-435E-9587-295F14AD73EF}" dt="2026-10-12T18:28:32.339" v="4421" actId="478"/>
+          <ac:graphicFrameMkLst>
+            <pc:docMk/>
+            <pc:sldMk cId="2335362230" sldId="259"/>
+            <ac:graphicFrameMk id="9" creationId="{A9FEB907-20A7-2D65-95C7-F8C5370DE7F9}"/>
+          </ac:graphicFrameMkLst>
+        </pc:graphicFrameChg>
+      </pc:sldChg>
+      <pc:sldChg chg="modSp add mod">
+        <pc:chgData name="Ayhan Karaman" userId="ec277a7f08761a62" providerId="LiveId" clId="{A7318BDB-BC3B-435E-9587-295F14AD73EF}" dt="2026-10-12T18:29:25.697" v="4475" actId="20577"/>
+        <pc:sldMkLst>
+          <pc:docMk/>
+          <pc:sldMk cId="3809376876" sldId="260"/>
+        </pc:sldMkLst>
+        <pc:spChg chg="mod">
+          <ac:chgData name="Ayhan Karaman" userId="ec277a7f08761a62" providerId="LiveId" clId="{A7318BDB-BC3B-435E-9587-295F14AD73EF}" dt="2026-10-12T18:29:25.697" v="4475" actId="20577"/>
+          <ac:spMkLst>
+            <pc:docMk/>
+            <pc:sldMk cId="3809376876" sldId="260"/>
+            <ac:spMk id="4" creationId="{9668639A-0B97-AD1E-43FA-28EF8958806C}"/>
+          </ac:spMkLst>
+        </pc:spChg>
+      </pc:sldChg>
     </pc:docChg>
   </pc:docChgLst>
 </pc:chgInfo>
+</file>
+
+<file path=ppt/notesMasters/notesMaster1.xml><?xml version="1.0" encoding="utf-8"?>
+<p:notesMaster xmlns:a="http://schemas.openxmlformats.org/drawingml/2006/main" xmlns:r="http://schemas.openxmlformats.org/officeDocument/2006/relationships" xmlns:p="http://schemas.openxmlformats.org/presentationml/2006/main">
+  <p:cSld>
+    <p:bg>
+      <p:bgRef idx="1001">
+        <a:schemeClr val="bg1"/>
+      </p:bgRef>
+    </p:bg>
+    <p:spTree>
+      <p:nvGrpSpPr>
+        <p:cNvPr id="1" name=""/>
+        <p:cNvGrpSpPr/>
+        <p:nvPr/>
+      </p:nvGrpSpPr>
+      <p:grpSpPr>
+        <a:xfrm>
+          <a:off x="0" y="0"/>
+          <a:ext cx="0" cy="0"/>
+          <a:chOff x="0" y="0"/>
+          <a:chExt cx="0" cy="0"/>
+        </a:xfrm>
+      </p:grpSpPr>
+      <p:sp>
+        <p:nvSpPr>
+          <p:cNvPr id="2" name="Üst Bilgi Yer Tutucusu 1"/>
+          <p:cNvSpPr>
+            <a:spLocks noGrp="1"/>
+          </p:cNvSpPr>
+          <p:nvPr>
+            <p:ph type="hdr" sz="quarter"/>
+          </p:nvPr>
+        </p:nvSpPr>
+        <p:spPr>
+          <a:xfrm>
+            <a:off x="0" y="0"/>
+            <a:ext cx="2971800" cy="458788"/>
+          </a:xfrm>
+          <a:prstGeom prst="rect">
+            <a:avLst/>
+          </a:prstGeom>
+        </p:spPr>
+        <p:txBody>
+          <a:bodyPr vert="horz" lIns="91440" tIns="45720" rIns="91440" bIns="45720" rtlCol="0"/>
+          <a:lstStyle>
+            <a:lvl1pPr algn="l">
+              <a:defRPr sz="1200"/>
+            </a:lvl1pPr>
+          </a:lstStyle>
+          <a:p>
+            <a:endParaRPr lang="tr-TR"/>
+          </a:p>
+        </p:txBody>
+      </p:sp>
+      <p:sp>
+        <p:nvSpPr>
+          <p:cNvPr id="3" name="Veri Yer Tutucusu 2"/>
+          <p:cNvSpPr>
+            <a:spLocks noGrp="1"/>
+          </p:cNvSpPr>
+          <p:nvPr>
+            <p:ph type="dt" idx="1"/>
+          </p:nvPr>
+        </p:nvSpPr>
+        <p:spPr>
+          <a:xfrm>
+            <a:off x="3884613" y="0"/>
+            <a:ext cx="2971800" cy="458788"/>
+          </a:xfrm>
+          <a:prstGeom prst="rect">
+            <a:avLst/>
+          </a:prstGeom>
+        </p:spPr>
+        <p:txBody>
+          <a:bodyPr vert="horz" lIns="91440" tIns="45720" rIns="91440" bIns="45720" rtlCol="0"/>
+          <a:lstStyle>
+            <a:lvl1pPr algn="r">
+              <a:defRPr sz="1200"/>
+            </a:lvl1pPr>
+          </a:lstStyle>
+          <a:p>
+            <a:fld id="{FA2DF9BE-F4DC-4902-9C94-926DFEDD4A7A}" type="datetimeFigureOut">
+              <a:rPr lang="tr-TR" smtClean="0"/>
+              <a:t>12.10.2026</a:t>
+            </a:fld>
+            <a:endParaRPr lang="tr-TR"/>
+          </a:p>
+        </p:txBody>
+      </p:sp>
+      <p:sp>
+        <p:nvSpPr>
+          <p:cNvPr id="4" name="Slayt Resmi Yer Tutucusu 3"/>
+          <p:cNvSpPr>
+            <a:spLocks noGrp="1" noRot="1" noChangeAspect="1"/>
+          </p:cNvSpPr>
+          <p:nvPr>
+            <p:ph type="sldImg" idx="2"/>
+          </p:nvPr>
+        </p:nvSpPr>
+        <p:spPr>
+          <a:xfrm>
+            <a:off x="685800" y="1143000"/>
+            <a:ext cx="5486400" cy="3086100"/>
+          </a:xfrm>
+          <a:prstGeom prst="rect">
+            <a:avLst/>
+          </a:prstGeom>
+          <a:noFill/>
+          <a:ln w="12700">
+            <a:solidFill>
+              <a:prstClr val="black"/>
+            </a:solidFill>
+          </a:ln>
+        </p:spPr>
+        <p:txBody>
+          <a:bodyPr vert="horz" lIns="91440" tIns="45720" rIns="91440" bIns="45720" rtlCol="0" anchor="ctr"/>
+          <a:lstStyle/>
+          <a:p>
+            <a:endParaRPr lang="tr-TR"/>
+          </a:p>
+        </p:txBody>
+      </p:sp>
+      <p:sp>
+        <p:nvSpPr>
+          <p:cNvPr id="5" name="Not Yer Tutucusu 4"/>
+          <p:cNvSpPr>
+            <a:spLocks noGrp="1"/>
+          </p:cNvSpPr>
+          <p:nvPr>
+            <p:ph type="body" sz="quarter" idx="3"/>
+          </p:nvPr>
+        </p:nvSpPr>
+        <p:spPr>
+          <a:xfrm>
+            <a:off x="685800" y="4400550"/>
+            <a:ext cx="5486400" cy="3600450"/>
+          </a:xfrm>
+          <a:prstGeom prst="rect">
+            <a:avLst/>
+          </a:prstGeom>
+        </p:spPr>
+        <p:txBody>
+          <a:bodyPr vert="horz" lIns="91440" tIns="45720" rIns="91440" bIns="45720" rtlCol="0"/>
+          <a:lstStyle/>
+          <a:p>
+            <a:pPr lvl="0"/>
+            <a:r>
+              <a:rPr lang="tr-TR"/>
+              <a:t>Asıl metin stillerini düzenlemek için tıklayın</a:t>
+            </a:r>
+          </a:p>
+          <a:p>
+            <a:pPr lvl="1"/>
+            <a:r>
+              <a:rPr lang="tr-TR"/>
+              <a:t>İkinci düzey</a:t>
+            </a:r>
+          </a:p>
+          <a:p>
+            <a:pPr lvl="2"/>
+            <a:r>
+              <a:rPr lang="tr-TR"/>
+              <a:t>Üçüncü düzey</a:t>
+            </a:r>
+          </a:p>
+          <a:p>
+            <a:pPr lvl="3"/>
+            <a:r>
+              <a:rPr lang="tr-TR"/>
+              <a:t>Dördüncü düzey</a:t>
+            </a:r>
+          </a:p>
+          <a:p>
+            <a:pPr lvl="4"/>
+            <a:r>
+              <a:rPr lang="tr-TR"/>
+              <a:t>Beşinci düzey</a:t>
+            </a:r>
+          </a:p>
+        </p:txBody>
+      </p:sp>
+      <p:sp>
+        <p:nvSpPr>
+          <p:cNvPr id="6" name="Alt Bilgi Yer Tutucusu 5"/>
+          <p:cNvSpPr>
+            <a:spLocks noGrp="1"/>
+          </p:cNvSpPr>
+          <p:nvPr>
+            <p:ph type="ftr" sz="quarter" idx="4"/>
+          </p:nvPr>
+        </p:nvSpPr>
+        <p:spPr>
+          <a:xfrm>
+            <a:off x="0" y="8685213"/>
+            <a:ext cx="2971800" cy="458787"/>
+          </a:xfrm>
+          <a:prstGeom prst="rect">
+            <a:avLst/>
+          </a:prstGeom>
+        </p:spPr>
+        <p:txBody>
+          <a:bodyPr vert="horz" lIns="91440" tIns="45720" rIns="91440" bIns="45720" rtlCol="0" anchor="b"/>
+          <a:lstStyle>
+            <a:lvl1pPr algn="l">
+              <a:defRPr sz="1200"/>
+            </a:lvl1pPr>
+          </a:lstStyle>
+          <a:p>
+            <a:endParaRPr lang="tr-TR"/>
+          </a:p>
+        </p:txBody>
+      </p:sp>
+      <p:sp>
+        <p:nvSpPr>
+          <p:cNvPr id="7" name="Slayt Numarası Yer Tutucusu 6"/>
+          <p:cNvSpPr>
+            <a:spLocks noGrp="1"/>
+          </p:cNvSpPr>
+          <p:nvPr>
+            <p:ph type="sldNum" sz="quarter" idx="5"/>
+          </p:nvPr>
+        </p:nvSpPr>
+        <p:spPr>
+          <a:xfrm>
+            <a:off x="3884613" y="8685213"/>
+            <a:ext cx="2971800" cy="458787"/>
+          </a:xfrm>
+          <a:prstGeom prst="rect">
+            <a:avLst/>
+          </a:prstGeom>
+        </p:spPr>
+        <p:txBody>
+          <a:bodyPr vert="horz" lIns="91440" tIns="45720" rIns="91440" bIns="45720" rtlCol="0" anchor="b"/>
+          <a:lstStyle>
+            <a:lvl1pPr algn="r">
+              <a:defRPr sz="1200"/>
+            </a:lvl1pPr>
+          </a:lstStyle>
+          <a:p>
+            <a:fld id="{638F92E4-635E-4B69-8547-655F7F9D76B7}" type="slidenum">
+              <a:rPr lang="tr-TR" smtClean="0"/>
+              <a:t>‹#›</a:t>
+            </a:fld>
+            <a:endParaRPr lang="tr-TR"/>
+          </a:p>
+        </p:txBody>
+      </p:sp>
+    </p:spTree>
+    <p:extLst>
+      <p:ext uri="{BB962C8B-B14F-4D97-AF65-F5344CB8AC3E}">
+        <p14:creationId xmlns:p14="http://schemas.microsoft.com/office/powerpoint/2010/main" val="3808119915"/>
+      </p:ext>
+    </p:extLst>
+  </p:cSld>
+  <p:clrMap bg1="lt1" tx1="dk1" bg2="lt2" tx2="dk2" accent1="accent1" accent2="accent2" accent3="accent3" accent4="accent4" accent5="accent5" accent6="accent6" hlink="hlink" folHlink="folHlink"/>
+  <p:notesStyle>
+    <a:lvl1pPr marL="0" algn="l" defTabSz="914400" rtl="0" eaLnBrk="1" latinLnBrk="0" hangingPunct="1">
+      <a:defRPr sz="1200" kern="1200">
+        <a:solidFill>
+          <a:schemeClr val="tx1"/>
+        </a:solidFill>
+        <a:latin typeface="+mn-lt"/>
+        <a:ea typeface="+mn-ea"/>
+        <a:cs typeface="+mn-cs"/>
+      </a:defRPr>
+    </a:lvl1pPr>
+    <a:lvl2pPr marL="457200" algn="l" defTabSz="914400" rtl="0" eaLnBrk="1" latinLnBrk="0" hangingPunct="1">
+      <a:defRPr sz="1200" kern="1200">
+        <a:solidFill>
+          <a:schemeClr val="tx1"/>
+        </a:solidFill>
+        <a:latin typeface="+mn-lt"/>
+        <a:ea typeface="+mn-ea"/>
+        <a:cs typeface="+mn-cs"/>
+      </a:defRPr>
+    </a:lvl2pPr>
+    <a:lvl3pPr marL="914400" algn="l" defTabSz="914400" rtl="0" eaLnBrk="1" latinLnBrk="0" hangingPunct="1">
+      <a:defRPr sz="1200" kern="1200">
+        <a:solidFill>
+          <a:schemeClr val="tx1"/>
+        </a:solidFill>
+        <a:latin typeface="+mn-lt"/>
+        <a:ea typeface="+mn-ea"/>
+        <a:cs typeface="+mn-cs"/>
+      </a:defRPr>
+    </a:lvl3pPr>
+    <a:lvl4pPr marL="1371600" algn="l" defTabSz="914400" rtl="0" eaLnBrk="1" latinLnBrk="0" hangingPunct="1">
+      <a:defRPr sz="1200" kern="1200">
+        <a:solidFill>
+          <a:schemeClr val="tx1"/>
+        </a:solidFill>
+        <a:latin typeface="+mn-lt"/>
+        <a:ea typeface="+mn-ea"/>
+        <a:cs typeface="+mn-cs"/>
+      </a:defRPr>
+    </a:lvl4pPr>
+    <a:lvl5pPr marL="1828800" algn="l" defTabSz="914400" rtl="0" eaLnBrk="1" latinLnBrk="0" hangingPunct="1">
+      <a:defRPr sz="1200" kern="1200">
+        <a:solidFill>
+          <a:schemeClr val="tx1"/>
+        </a:solidFill>
+        <a:latin typeface="+mn-lt"/>
+        <a:ea typeface="+mn-ea"/>
+        <a:cs typeface="+mn-cs"/>
+      </a:defRPr>
+    </a:lvl5pPr>
+    <a:lvl6pPr marL="2286000" algn="l" defTabSz="914400" rtl="0" eaLnBrk="1" latinLnBrk="0" hangingPunct="1">
+      <a:defRPr sz="1200" kern="1200">
+        <a:solidFill>
+          <a:schemeClr val="tx1"/>
+        </a:solidFill>
+        <a:latin typeface="+mn-lt"/>
+        <a:ea typeface="+mn-ea"/>
+        <a:cs typeface="+mn-cs"/>
+      </a:defRPr>
+    </a:lvl6pPr>
+    <a:lvl7pPr marL="2743200" algn="l" defTabSz="914400" rtl="0" eaLnBrk="1" latinLnBrk="0" hangingPunct="1">
+      <a:defRPr sz="1200" kern="1200">
+        <a:solidFill>
+          <a:schemeClr val="tx1"/>
+        </a:solidFill>
+        <a:latin typeface="+mn-lt"/>
+        <a:ea typeface="+mn-ea"/>
+        <a:cs typeface="+mn-cs"/>
+      </a:defRPr>
+    </a:lvl7pPr>
+    <a:lvl8pPr marL="3200400" algn="l" defTabSz="914400" rtl="0" eaLnBrk="1" latinLnBrk="0" hangingPunct="1">
+      <a:defRPr sz="1200" kern="1200">
+        <a:solidFill>
+          <a:schemeClr val="tx1"/>
+        </a:solidFill>
+        <a:latin typeface="+mn-lt"/>
+        <a:ea typeface="+mn-ea"/>
+        <a:cs typeface="+mn-cs"/>
+      </a:defRPr>
+    </a:lvl8pPr>
+    <a:lvl9pPr marL="3657600" algn="l" defTabSz="914400" rtl="0" eaLnBrk="1" latinLnBrk="0" hangingPunct="1">
+      <a:defRPr sz="1200" kern="1200">
+        <a:solidFill>
+          <a:schemeClr val="tx1"/>
+        </a:solidFill>
+        <a:latin typeface="+mn-lt"/>
+        <a:ea typeface="+mn-ea"/>
+        <a:cs typeface="+mn-cs"/>
+      </a:defRPr>
+    </a:lvl9pPr>
+  </p:notesStyle>
+</p:notesMaster>
+</file>
+
+<file path=ppt/notesSlides/notesSlide1.xml><?xml version="1.0" encoding="utf-8"?>
+<p:notes xmlns:a="http://schemas.openxmlformats.org/drawingml/2006/main" xmlns:r="http://schemas.openxmlformats.org/officeDocument/2006/relationships" xmlns:p="http://schemas.openxmlformats.org/presentationml/2006/main">
+  <p:cSld>
+    <p:spTree>
+      <p:nvGrpSpPr>
+        <p:cNvPr id="1" name=""/>
+        <p:cNvGrpSpPr/>
+        <p:nvPr/>
+      </p:nvGrpSpPr>
+      <p:grpSpPr>
+        <a:xfrm>
+          <a:off x="0" y="0"/>
+          <a:ext cx="0" cy="0"/>
+          <a:chOff x="0" y="0"/>
+          <a:chExt cx="0" cy="0"/>
+        </a:xfrm>
+      </p:grpSpPr>
+      <p:sp>
+        <p:nvSpPr>
+          <p:cNvPr id="2" name="Slayt Resmi Yer Tutucusu 1"/>
+          <p:cNvSpPr>
+            <a:spLocks noGrp="1" noRot="1" noChangeAspect="1"/>
+          </p:cNvSpPr>
+          <p:nvPr>
+            <p:ph type="sldImg"/>
+          </p:nvPr>
+        </p:nvSpPr>
+        <p:spPr/>
+      </p:sp>
+      <p:sp>
+        <p:nvSpPr>
+          <p:cNvPr id="3" name="Not Yer Tutucusu 2"/>
+          <p:cNvSpPr>
+            <a:spLocks noGrp="1"/>
+          </p:cNvSpPr>
+          <p:nvPr>
+            <p:ph type="body" idx="1"/>
+          </p:nvPr>
+        </p:nvSpPr>
+        <p:spPr/>
+        <p:txBody>
+          <a:bodyPr/>
+          <a:lstStyle/>
+          <a:p>
+            <a:endParaRPr lang="tr-TR" dirty="0"/>
+          </a:p>
+        </p:txBody>
+      </p:sp>
+      <p:sp>
+        <p:nvSpPr>
+          <p:cNvPr id="4" name="Slayt Numarası Yer Tutucusu 3"/>
+          <p:cNvSpPr>
+            <a:spLocks noGrp="1"/>
+          </p:cNvSpPr>
+          <p:nvPr>
+            <p:ph type="sldNum" sz="quarter" idx="5"/>
+          </p:nvPr>
+        </p:nvSpPr>
+        <p:spPr/>
+        <p:txBody>
+          <a:bodyPr/>
+          <a:lstStyle/>
+          <a:p>
+            <a:fld id="{638F92E4-635E-4B69-8547-655F7F9D76B7}" type="slidenum">
+              <a:rPr lang="tr-TR" smtClean="0"/>
+              <a:t>3</a:t>
+            </a:fld>
+            <a:endParaRPr lang="tr-TR"/>
+          </a:p>
+        </p:txBody>
+      </p:sp>
+    </p:spTree>
+    <p:extLst>
+      <p:ext uri="{BB962C8B-B14F-4D97-AF65-F5344CB8AC3E}">
+        <p14:creationId xmlns:p14="http://schemas.microsoft.com/office/powerpoint/2010/main" val="1843590690"/>
+      </p:ext>
+    </p:extLst>
+  </p:cSld>
+  <p:clrMapOvr>
+    <a:masterClrMapping/>
+  </p:clrMapOvr>
+</p:notes>
+</file>
+
+<file path=ppt/notesSlides/notesSlide2.xml><?xml version="1.0" encoding="utf-8"?>
+<p:notes xmlns:a="http://schemas.openxmlformats.org/drawingml/2006/main" xmlns:r="http://schemas.openxmlformats.org/officeDocument/2006/relationships" xmlns:p="http://schemas.openxmlformats.org/presentationml/2006/main">
+  <p:cSld>
+    <p:spTree>
+      <p:nvGrpSpPr>
+        <p:cNvPr id="1" name=""/>
+        <p:cNvGrpSpPr/>
+        <p:nvPr/>
+      </p:nvGrpSpPr>
+      <p:grpSpPr>
+        <a:xfrm>
+          <a:off x="0" y="0"/>
+          <a:ext cx="0" cy="0"/>
+          <a:chOff x="0" y="0"/>
+          <a:chExt cx="0" cy="0"/>
+        </a:xfrm>
+      </p:grpSpPr>
+      <p:sp>
+        <p:nvSpPr>
+          <p:cNvPr id="2" name="Slayt Resmi Yer Tutucusu 1"/>
+          <p:cNvSpPr>
+            <a:spLocks noGrp="1" noRot="1" noChangeAspect="1"/>
+          </p:cNvSpPr>
+          <p:nvPr>
+            <p:ph type="sldImg"/>
+          </p:nvPr>
+        </p:nvSpPr>
+        <p:spPr/>
+      </p:sp>
+      <p:sp>
+        <p:nvSpPr>
+          <p:cNvPr id="3" name="Not Yer Tutucusu 2"/>
+          <p:cNvSpPr>
+            <a:spLocks noGrp="1"/>
+          </p:cNvSpPr>
+          <p:nvPr>
+            <p:ph type="body" idx="1"/>
+          </p:nvPr>
+        </p:nvSpPr>
+        <p:spPr/>
+        <p:txBody>
+          <a:bodyPr/>
+          <a:lstStyle/>
+          <a:p>
+            <a:endParaRPr lang="tr-TR" dirty="0"/>
+          </a:p>
+        </p:txBody>
+      </p:sp>
+      <p:sp>
+        <p:nvSpPr>
+          <p:cNvPr id="4" name="Slayt Numarası Yer Tutucusu 3"/>
+          <p:cNvSpPr>
+            <a:spLocks noGrp="1"/>
+          </p:cNvSpPr>
+          <p:nvPr>
+            <p:ph type="sldNum" sz="quarter" idx="5"/>
+          </p:nvPr>
+        </p:nvSpPr>
+        <p:spPr/>
+        <p:txBody>
+          <a:bodyPr/>
+          <a:lstStyle/>
+          <a:p>
+            <a:fld id="{638F92E4-635E-4B69-8547-655F7F9D76B7}" type="slidenum">
+              <a:rPr lang="tr-TR" smtClean="0"/>
+              <a:t>4</a:t>
+            </a:fld>
+            <a:endParaRPr lang="tr-TR"/>
+          </a:p>
+        </p:txBody>
+      </p:sp>
+    </p:spTree>
+    <p:extLst>
+      <p:ext uri="{BB962C8B-B14F-4D97-AF65-F5344CB8AC3E}">
+        <p14:creationId xmlns:p14="http://schemas.microsoft.com/office/powerpoint/2010/main" val="4128107198"/>
+      </p:ext>
+    </p:extLst>
+  </p:cSld>
+  <p:clrMapOvr>
+    <a:masterClrMapping/>
+  </p:clrMapOvr>
+</p:notes>
+</file>
+
+<file path=ppt/notesSlides/notesSlide3.xml><?xml version="1.0" encoding="utf-8"?>
+<p:notes xmlns:a="http://schemas.openxmlformats.org/drawingml/2006/main" xmlns:r="http://schemas.openxmlformats.org/officeDocument/2006/relationships" xmlns:p="http://schemas.openxmlformats.org/presentationml/2006/main">
+  <p:cSld>
+    <p:spTree>
+      <p:nvGrpSpPr>
+        <p:cNvPr id="1" name=""/>
+        <p:cNvGrpSpPr/>
+        <p:nvPr/>
+      </p:nvGrpSpPr>
+      <p:grpSpPr>
+        <a:xfrm>
+          <a:off x="0" y="0"/>
+          <a:ext cx="0" cy="0"/>
+          <a:chOff x="0" y="0"/>
+          <a:chExt cx="0" cy="0"/>
+        </a:xfrm>
+      </p:grpSpPr>
+      <p:sp>
+        <p:nvSpPr>
+          <p:cNvPr id="2" name="Slayt Resmi Yer Tutucusu 1"/>
+          <p:cNvSpPr>
+            <a:spLocks noGrp="1" noRot="1" noChangeAspect="1"/>
+          </p:cNvSpPr>
+          <p:nvPr>
+            <p:ph type="sldImg"/>
+          </p:nvPr>
+        </p:nvSpPr>
+        <p:spPr/>
+      </p:sp>
+      <p:sp>
+        <p:nvSpPr>
+          <p:cNvPr id="3" name="Not Yer Tutucusu 2"/>
+          <p:cNvSpPr>
+            <a:spLocks noGrp="1"/>
+          </p:cNvSpPr>
+          <p:nvPr>
+            <p:ph type="body" idx="1"/>
+          </p:nvPr>
+        </p:nvSpPr>
+        <p:spPr/>
+        <p:txBody>
+          <a:bodyPr/>
+          <a:lstStyle/>
+          <a:p>
+            <a:endParaRPr lang="tr-TR" dirty="0"/>
+          </a:p>
+        </p:txBody>
+      </p:sp>
+      <p:sp>
+        <p:nvSpPr>
+          <p:cNvPr id="4" name="Slayt Numarası Yer Tutucusu 3"/>
+          <p:cNvSpPr>
+            <a:spLocks noGrp="1"/>
+          </p:cNvSpPr>
+          <p:nvPr>
+            <p:ph type="sldNum" sz="quarter" idx="5"/>
+          </p:nvPr>
+        </p:nvSpPr>
+        <p:spPr/>
+        <p:txBody>
+          <a:bodyPr/>
+          <a:lstStyle/>
+          <a:p>
+            <a:fld id="{638F92E4-635E-4B69-8547-655F7F9D76B7}" type="slidenum">
+              <a:rPr lang="tr-TR" smtClean="0"/>
+              <a:t>5</a:t>
+            </a:fld>
+            <a:endParaRPr lang="tr-TR"/>
+          </a:p>
+        </p:txBody>
+      </p:sp>
+    </p:spTree>
+    <p:extLst>
+      <p:ext uri="{BB962C8B-B14F-4D97-AF65-F5344CB8AC3E}">
+        <p14:creationId xmlns:p14="http://schemas.microsoft.com/office/powerpoint/2010/main" val="3720486292"/>
+      </p:ext>
+    </p:extLst>
+  </p:cSld>
+  <p:clrMapOvr>
+    <a:masterClrMapping/>
+  </p:clrMapOvr>
+</p:notes>
 </file>
 
 <file path=ppt/slideLayouts/slideLayout1.xml><?xml version="1.0" encoding="utf-8"?>
@@ -984,7 +1652,7 @@
           <a:p>
             <a:fld id="{47B4E739-70D6-40BD-B9BF-46BF9FC7432A}" type="datetimeFigureOut">
               <a:rPr lang="tr-TR" smtClean="0"/>
-              <a:t>11.10.2026</a:t>
+              <a:t>12.10.2026</a:t>
             </a:fld>
             <a:endParaRPr lang="tr-TR"/>
           </a:p>
@@ -1182,7 +1850,7 @@
           <a:p>
             <a:fld id="{47B4E739-70D6-40BD-B9BF-46BF9FC7432A}" type="datetimeFigureOut">
               <a:rPr lang="tr-TR" smtClean="0"/>
-              <a:t>11.10.2026</a:t>
+              <a:t>12.10.2026</a:t>
             </a:fld>
             <a:endParaRPr lang="tr-TR"/>
           </a:p>
@@ -1390,7 +2058,7 @@
           <a:p>
             <a:fld id="{47B4E739-70D6-40BD-B9BF-46BF9FC7432A}" type="datetimeFigureOut">
               <a:rPr lang="tr-TR" smtClean="0"/>
-              <a:t>11.10.2026</a:t>
+              <a:t>12.10.2026</a:t>
             </a:fld>
             <a:endParaRPr lang="tr-TR"/>
           </a:p>
@@ -1588,7 +2256,7 @@
           <a:p>
             <a:fld id="{47B4E739-70D6-40BD-B9BF-46BF9FC7432A}" type="datetimeFigureOut">
               <a:rPr lang="tr-TR" smtClean="0"/>
-              <a:t>11.10.2026</a:t>
+              <a:t>12.10.2026</a:t>
             </a:fld>
             <a:endParaRPr lang="tr-TR"/>
           </a:p>
@@ -1863,7 +2531,7 @@
           <a:p>
             <a:fld id="{47B4E739-70D6-40BD-B9BF-46BF9FC7432A}" type="datetimeFigureOut">
               <a:rPr lang="tr-TR" smtClean="0"/>
-              <a:t>11.10.2026</a:t>
+              <a:t>12.10.2026</a:t>
             </a:fld>
             <a:endParaRPr lang="tr-TR"/>
           </a:p>
@@ -2128,7 +2796,7 @@
           <a:p>
             <a:fld id="{47B4E739-70D6-40BD-B9BF-46BF9FC7432A}" type="datetimeFigureOut">
               <a:rPr lang="tr-TR" smtClean="0"/>
-              <a:t>11.10.2026</a:t>
+              <a:t>12.10.2026</a:t>
             </a:fld>
             <a:endParaRPr lang="tr-TR"/>
           </a:p>
@@ -2540,7 +3208,7 @@
           <a:p>
             <a:fld id="{47B4E739-70D6-40BD-B9BF-46BF9FC7432A}" type="datetimeFigureOut">
               <a:rPr lang="tr-TR" smtClean="0"/>
-              <a:t>11.10.2026</a:t>
+              <a:t>12.10.2026</a:t>
             </a:fld>
             <a:endParaRPr lang="tr-TR"/>
           </a:p>
@@ -2681,7 +3349,7 @@
           <a:p>
             <a:fld id="{47B4E739-70D6-40BD-B9BF-46BF9FC7432A}" type="datetimeFigureOut">
               <a:rPr lang="tr-TR" smtClean="0"/>
-              <a:t>11.10.2026</a:t>
+              <a:t>12.10.2026</a:t>
             </a:fld>
             <a:endParaRPr lang="tr-TR"/>
           </a:p>
@@ -2794,7 +3462,7 @@
           <a:p>
             <a:fld id="{47B4E739-70D6-40BD-B9BF-46BF9FC7432A}" type="datetimeFigureOut">
               <a:rPr lang="tr-TR" smtClean="0"/>
-              <a:t>11.10.2026</a:t>
+              <a:t>12.10.2026</a:t>
             </a:fld>
             <a:endParaRPr lang="tr-TR"/>
           </a:p>
@@ -3105,7 +3773,7 @@
           <a:p>
             <a:fld id="{47B4E739-70D6-40BD-B9BF-46BF9FC7432A}" type="datetimeFigureOut">
               <a:rPr lang="tr-TR" smtClean="0"/>
-              <a:t>11.10.2026</a:t>
+              <a:t>12.10.2026</a:t>
             </a:fld>
             <a:endParaRPr lang="tr-TR"/>
           </a:p>
@@ -3393,7 +4061,7 @@
           <a:p>
             <a:fld id="{47B4E739-70D6-40BD-B9BF-46BF9FC7432A}" type="datetimeFigureOut">
               <a:rPr lang="tr-TR" smtClean="0"/>
-              <a:t>11.10.2026</a:t>
+              <a:t>12.10.2026</a:t>
             </a:fld>
             <a:endParaRPr lang="tr-TR"/>
           </a:p>
@@ -3634,7 +4302,7 @@
           <a:p>
             <a:fld id="{47B4E739-70D6-40BD-B9BF-46BF9FC7432A}" type="datetimeFigureOut">
               <a:rPr lang="tr-TR" smtClean="0"/>
-              <a:t>11.10.2026</a:t>
+              <a:t>12.10.2026</a:t>
             </a:fld>
             <a:endParaRPr lang="tr-TR"/>
           </a:p>
@@ -6913,8 +7581,8 @@
         </p:nvSpPr>
         <p:spPr>
           <a:xfrm>
-            <a:off x="139700" y="30553"/>
-            <a:ext cx="11912600" cy="580525"/>
+            <a:off x="59267" y="30553"/>
+            <a:ext cx="12073465" cy="580525"/>
           </a:xfrm>
           <a:solidFill>
             <a:srgbClr val="0070C0"/>
@@ -7012,12 +7680,20 @@
           <a:lstStyle/>
           <a:p>
             <a:r>
+              <a:rPr lang="tr-TR" sz="1600" b="1" dirty="0">
+                <a:solidFill>
+                  <a:srgbClr val="C00000"/>
+                </a:solidFill>
+              </a:rPr>
+              <a:t>Harf-i Cer:</a:t>
+            </a:r>
+            <a:r>
               <a:rPr lang="tr-TR" sz="1600" dirty="0">
                 <a:solidFill>
                   <a:srgbClr val="C00000"/>
                 </a:solidFill>
               </a:rPr>
-              <a:t>Harf-i Cer: </a:t>
+              <a:t> </a:t>
             </a:r>
             <a:r>
               <a:rPr lang="tr-TR" sz="1600" dirty="0"/>
@@ -7028,6 +7704,9 @@
                 <a:solidFill>
                   <a:srgbClr val="C00000"/>
                 </a:solidFill>
+                <a:highlight>
+                  <a:srgbClr val="C0C0C0"/>
+                </a:highlight>
               </a:rPr>
               <a:t>mecrur</a:t>
             </a:r>
@@ -7053,13 +7732,13 @@
           <p:nvPr>
             <p:extLst>
               <p:ext uri="{D42A27DB-BD31-4B8C-83A1-F6EECF244321}">
-                <p14:modId xmlns:p14="http://schemas.microsoft.com/office/powerpoint/2010/main" val="3597660086"/>
+                <p14:modId xmlns:p14="http://schemas.microsoft.com/office/powerpoint/2010/main" val="783655880"/>
               </p:ext>
             </p:extLst>
           </p:nvPr>
         </p:nvGraphicFramePr>
         <p:xfrm>
-          <a:off x="139700" y="658540"/>
+          <a:off x="59267" y="657062"/>
           <a:ext cx="5829300" cy="5816400"/>
         </p:xfrm>
         <a:graphic>
@@ -8050,14 +8729,14 @@
           <p:nvPr>
             <p:extLst>
               <p:ext uri="{D42A27DB-BD31-4B8C-83A1-F6EECF244321}">
-                <p14:modId xmlns:p14="http://schemas.microsoft.com/office/powerpoint/2010/main" val="559751896"/>
+                <p14:modId xmlns:p14="http://schemas.microsoft.com/office/powerpoint/2010/main" val="3587308790"/>
               </p:ext>
             </p:extLst>
           </p:nvPr>
         </p:nvGraphicFramePr>
         <p:xfrm>
-          <a:off x="6223000" y="657062"/>
-          <a:ext cx="5829300" cy="5816400"/>
+          <a:off x="5968999" y="653487"/>
+          <a:ext cx="6163733" cy="5816403"/>
         </p:xfrm>
         <a:graphic>
           <a:graphicData uri="http://schemas.openxmlformats.org/drawingml/2006/table">
@@ -8066,21 +8745,21 @@
                 <a:tableStyleId>{5C22544A-7EE6-4342-B048-85BDC9FD1C3A}</a:tableStyleId>
               </a:tblPr>
               <a:tblGrid>
-                <a:gridCol w="889913">
+                <a:gridCol w="940968">
                   <a:extLst>
                     <a:ext uri="{9D8B030D-6E8A-4147-A177-3AD203B41FA5}">
                       <a16:colId xmlns:a16="http://schemas.microsoft.com/office/drawing/2014/main" val="3242288309"/>
                     </a:ext>
                   </a:extLst>
                 </a:gridCol>
-                <a:gridCol w="1544987">
+                <a:gridCol w="1572868">
                   <a:extLst>
                     <a:ext uri="{9D8B030D-6E8A-4147-A177-3AD203B41FA5}">
                       <a16:colId xmlns:a16="http://schemas.microsoft.com/office/drawing/2014/main" val="2112445330"/>
                     </a:ext>
                   </a:extLst>
                 </a:gridCol>
-                <a:gridCol w="3394400">
+                <a:gridCol w="3649897">
                   <a:extLst>
                     <a:ext uri="{9D8B030D-6E8A-4147-A177-3AD203B41FA5}">
                       <a16:colId xmlns:a16="http://schemas.microsoft.com/office/drawing/2014/main" val="317297140"/>
@@ -8088,7 +8767,7 @@
                   </a:extLst>
                 </a:gridCol>
               </a:tblGrid>
-              <a:tr h="557784">
+              <a:tr h="642666">
                 <a:tc>
                   <a:txBody>
                     <a:bodyPr/>
@@ -8134,13 +8813,22 @@
                   </a:ext>
                 </a:extLst>
               </a:tr>
-              <a:tr h="418088">
+              <a:tr h="642666">
                 <a:tc>
                   <a:txBody>
                     <a:bodyPr/>
                     <a:lstStyle/>
                     <a:p>
                       <a:pPr algn="ctr"/>
+                      <a:r>
+                        <a:rPr lang="ar-AE" sz="1100" b="1" dirty="0">
+                          <a:solidFill>
+                            <a:srgbClr val="C00000"/>
+                          </a:solidFill>
+                          <a:latin typeface="Algerian" panose="04020705040A02060702" pitchFamily="82" charset="0"/>
+                        </a:rPr>
+                        <a:t>وَاوُ الْقَسَمِ</a:t>
+                      </a:r>
                       <a:endParaRPr lang="tr-TR" sz="1100" b="1" dirty="0">
                         <a:solidFill>
                           <a:srgbClr val="C00000"/>
@@ -8157,6 +8845,116 @@
                     <a:lstStyle/>
                     <a:p>
                       <a:pPr algn="ctr"/>
+                      <a:r>
+                        <a:rPr lang="tr-TR" sz="1100" dirty="0"/>
+                        <a:t>Yemin: …e/…a;  Vallahi</a:t>
+                      </a:r>
+                    </a:p>
+                  </a:txBody>
+                  <a:tcPr/>
+                </a:tc>
+                <a:tc>
+                  <a:txBody>
+                    <a:bodyPr/>
+                    <a:lstStyle/>
+                    <a:p>
+                      <a:pPr algn="ctr"/>
+                      <a:r>
+                        <a:rPr lang="ar-AE" sz="1200" b="1" dirty="0">
+                          <a:solidFill>
+                            <a:srgbClr val="FF0000"/>
+                          </a:solidFill>
+                        </a:rPr>
+                        <a:t>وَ</a:t>
+                      </a:r>
+                      <a:r>
+                        <a:rPr lang="ar-AE" sz="1200" b="1" dirty="0"/>
+                        <a:t> </a:t>
+                      </a:r>
+                      <a:r>
+                        <a:rPr lang="ar-AE" sz="1400" b="1" dirty="0">
+                          <a:solidFill>
+                            <a:schemeClr val="tx1"/>
+                          </a:solidFill>
+                        </a:rPr>
+                        <a:t>اللهِ لَا أَفْعَلَنَّ الْكَبَائِرَ</a:t>
+                      </a:r>
+                    </a:p>
+                    <a:p>
+                      <a:pPr algn="ctr"/>
+                      <a:r>
+                        <a:rPr lang="tr-TR" sz="1100" dirty="0">
+                          <a:solidFill>
+                            <a:schemeClr val="tx1"/>
+                          </a:solidFill>
+                        </a:rPr>
+                        <a:t>Allah’a yemin ederim ki büyük günahları elbette işlemeyeceğim</a:t>
+                      </a:r>
+                    </a:p>
+                  </a:txBody>
+                  <a:tcPr/>
+                </a:tc>
+                <a:extLst>
+                  <a:ext uri="{0D108BD9-81ED-4DB2-BD59-A6C34878D82A}">
+                    <a16:rowId xmlns:a16="http://schemas.microsoft.com/office/drawing/2014/main" val="3625413832"/>
+                  </a:ext>
+                </a:extLst>
+              </a:tr>
+              <a:tr h="443746">
+                <a:tc>
+                  <a:txBody>
+                    <a:bodyPr/>
+                    <a:lstStyle/>
+                    <a:p>
+                      <a:pPr algn="ctr"/>
+                      <a:r>
+                        <a:rPr lang="ar-AE" sz="1400" b="1" dirty="0">
+                          <a:solidFill>
+                            <a:srgbClr val="C00000"/>
+                          </a:solidFill>
+                          <a:latin typeface="Algerian" panose="04020705040A02060702" pitchFamily="82" charset="0"/>
+                        </a:rPr>
+                        <a:t>تَاءُ الْقَسَمِ</a:t>
+                      </a:r>
+                      <a:endParaRPr lang="tr-TR" sz="1400" b="1" dirty="0">
+                        <a:solidFill>
+                          <a:srgbClr val="C00000"/>
+                        </a:solidFill>
+                        <a:latin typeface="Algerian" panose="04020705040A02060702" pitchFamily="82" charset="0"/>
+                      </a:endParaRPr>
+                    </a:p>
+                  </a:txBody>
+                  <a:tcPr/>
+                </a:tc>
+                <a:tc>
+                  <a:txBody>
+                    <a:bodyPr/>
+                    <a:lstStyle/>
+                    <a:p>
+                      <a:pPr marL="0" marR="0" lvl="0" indent="0" algn="ctr" defTabSz="914400" rtl="0" eaLnBrk="1" fontAlgn="auto" latinLnBrk="0" hangingPunct="1">
+                        <a:lnSpc>
+                          <a:spcPct val="100000"/>
+                        </a:lnSpc>
+                        <a:spcBef>
+                          <a:spcPts val="0"/>
+                        </a:spcBef>
+                        <a:spcAft>
+                          <a:spcPts val="0"/>
+                        </a:spcAft>
+                        <a:buClrTx/>
+                        <a:buSzTx/>
+                        <a:buFontTx/>
+                        <a:buNone/>
+                        <a:tabLst/>
+                        <a:defRPr/>
+                      </a:pPr>
+                      <a:r>
+                        <a:rPr lang="tr-TR" sz="1100" dirty="0"/>
+                        <a:t>Yemin: …e/…a;  Tallahi</a:t>
+                      </a:r>
+                    </a:p>
+                    <a:p>
+                      <a:pPr algn="ctr"/>
                       <a:endParaRPr lang="tr-TR" sz="1100" dirty="0"/>
                     </a:p>
                   </a:txBody>
@@ -8169,67 +8967,31 @@
                     <a:p>
                       <a:pPr algn="ctr"/>
                       <a:r>
-                        <a:rPr lang="ar-AE" sz="1200" b="1" dirty="0"/>
-                        <a:t>آمَنْتُ </a:t>
-                      </a:r>
-                      <a:r>
-                        <a:rPr lang="ar-AE" sz="1400" b="1" dirty="0">
+                        <a:rPr lang="ar-AE" sz="1200" b="1" dirty="0">
                           <a:solidFill>
                             <a:srgbClr val="C00000"/>
                           </a:solidFill>
                         </a:rPr>
-                        <a:t>بِ</a:t>
-                      </a:r>
-                      <a:r>
-                        <a:rPr lang="ar-AE" sz="1400" b="1" dirty="0">
+                        <a:t>تَ</a:t>
+                      </a:r>
+                      <a:r>
+                        <a:rPr lang="ar-AE" sz="1200" b="1" dirty="0">
                           <a:solidFill>
                             <a:schemeClr val="tx1"/>
                           </a:solidFill>
                         </a:rPr>
-                        <a:t>اللهِ </a:t>
+                        <a:t>اللَّهِ لَا أَفْعَلَنَّ الْفَرَائِضَ </a:t>
                       </a:r>
                     </a:p>
                     <a:p>
                       <a:pPr algn="ctr"/>
                       <a:r>
-                        <a:rPr lang="tr-TR" sz="1100" dirty="0">
+                        <a:rPr lang="tr-TR" sz="1100" b="0" dirty="0">
                           <a:solidFill>
                             <a:schemeClr val="tx1"/>
                           </a:solidFill>
                         </a:rPr>
-                        <a:t>Allah’</a:t>
-                      </a:r>
-                      <a:r>
-                        <a:rPr lang="tr-TR" sz="1100" dirty="0">
-                          <a:solidFill>
-                            <a:srgbClr val="C00000"/>
-                          </a:solidFill>
-                        </a:rPr>
-                        <a:t>a</a:t>
-                      </a:r>
-                      <a:r>
-                        <a:rPr lang="ar-AE" sz="1100" dirty="0">
-                          <a:solidFill>
-                            <a:srgbClr val="C00000"/>
-                          </a:solidFill>
-                        </a:rPr>
-                        <a:t> </a:t>
-                      </a:r>
-                      <a:r>
-                        <a:rPr lang="tr-TR" sz="1100" dirty="0">
-                          <a:solidFill>
-                            <a:srgbClr val="C00000"/>
-                          </a:solidFill>
-                        </a:rPr>
-                        <a:t> </a:t>
-                      </a:r>
-                      <a:r>
-                        <a:rPr lang="tr-TR" sz="1100" dirty="0">
-                          <a:solidFill>
-                            <a:schemeClr val="tx1"/>
-                          </a:solidFill>
-                        </a:rPr>
-                        <a:t>iman ettim.</a:t>
+                        <a:t>Allah’a yemin ederim ki elbette farzları yapacağım.</a:t>
                       </a:r>
                     </a:p>
                   </a:txBody>
@@ -8237,17 +8999,26 @@
                 </a:tc>
                 <a:extLst>
                   <a:ext uri="{0D108BD9-81ED-4DB2-BD59-A6C34878D82A}">
-                    <a16:rowId xmlns:a16="http://schemas.microsoft.com/office/drawing/2014/main" val="3625413832"/>
+                    <a16:rowId xmlns:a16="http://schemas.microsoft.com/office/drawing/2014/main" val="920756919"/>
                   </a:ext>
                 </a:extLst>
               </a:tr>
-              <a:tr h="398179">
+              <a:tr h="474349">
                 <a:tc>
                   <a:txBody>
                     <a:bodyPr/>
                     <a:lstStyle/>
                     <a:p>
                       <a:pPr algn="ctr"/>
+                      <a:r>
+                        <a:rPr lang="ar-AE" sz="1400" b="1" dirty="0">
+                          <a:solidFill>
+                            <a:srgbClr val="C00000"/>
+                          </a:solidFill>
+                          <a:latin typeface="Algerian" panose="04020705040A02060702" pitchFamily="82" charset="0"/>
+                        </a:rPr>
+                        <a:t>حَاشَا</a:t>
+                      </a:r>
                       <a:endParaRPr lang="tr-TR" sz="1400" b="1" dirty="0">
                         <a:solidFill>
                           <a:srgbClr val="C00000"/>
@@ -8264,7 +9035,10 @@
                     <a:lstStyle/>
                     <a:p>
                       <a:pPr algn="ctr"/>
-                      <a:endParaRPr lang="tr-TR" sz="1100" dirty="0"/>
+                      <a:r>
+                        <a:rPr lang="tr-TR" sz="1100" dirty="0"/>
+                        <a:t>Hariç, Müstesna</a:t>
+                      </a:r>
                     </a:p>
                   </a:txBody>
                   <a:tcPr/>
@@ -8276,35 +9050,51 @@
                     <a:p>
                       <a:pPr algn="ctr"/>
                       <a:r>
-                        <a:rPr lang="ar-AE" sz="1200" b="1" dirty="0"/>
-                        <a:t>تُبْتُ </a:t>
-                      </a:r>
-                      <a:r>
-                        <a:rPr lang="ar-AE" sz="1200" b="1" dirty="0">
+                        <a:rPr lang="ar-AE" sz="1400" b="1" kern="1200" dirty="0">
+                          <a:solidFill>
+                            <a:schemeClr val="tx1"/>
+                          </a:solidFill>
+                          <a:latin typeface="+mn-lt"/>
+                          <a:ea typeface="+mn-ea"/>
+                          <a:cs typeface="+mn-cs"/>
+                        </a:rPr>
+                        <a:t>هَلَكَ النَّاسُ </a:t>
+                      </a:r>
+                      <a:r>
+                        <a:rPr lang="ar-AE" sz="1400" b="1" kern="1200" dirty="0">
                           <a:solidFill>
                             <a:srgbClr val="C00000"/>
                           </a:solidFill>
+                          <a:latin typeface="+mn-lt"/>
+                          <a:ea typeface="+mn-ea"/>
+                          <a:cs typeface="+mn-cs"/>
                         </a:rPr>
-                        <a:t>مِنْ </a:t>
-                      </a:r>
-                      <a:r>
-                        <a:rPr lang="ar-AE" sz="1200" b="1" dirty="0">
+                        <a:t>حَاشَا</a:t>
+                      </a:r>
+                      <a:r>
+                        <a:rPr lang="ar-AE" sz="1400" b="1" kern="1200" dirty="0">
                           <a:solidFill>
                             <a:schemeClr val="tx1"/>
                           </a:solidFill>
+                          <a:latin typeface="+mn-lt"/>
+                          <a:ea typeface="+mn-ea"/>
+                          <a:cs typeface="+mn-cs"/>
                         </a:rPr>
-                        <a:t>كُلِّ ذَنْبٍ</a:t>
+                        <a:t> العَالِمِ</a:t>
                       </a:r>
                     </a:p>
                     <a:p>
                       <a:pPr algn="ctr"/>
                       <a:r>
-                        <a:rPr lang="tr-TR" sz="1100" b="0" dirty="0">
+                        <a:rPr lang="tr-TR" sz="1100" b="0" kern="1200" dirty="0">
                           <a:solidFill>
                             <a:schemeClr val="tx1"/>
                           </a:solidFill>
+                          <a:latin typeface="+mn-lt"/>
+                          <a:ea typeface="+mn-ea"/>
+                          <a:cs typeface="+mn-cs"/>
                         </a:rPr>
-                        <a:t>Her günahtan tövbe ettim</a:t>
+                        <a:t>Alimler hariç bütün insanlar helak oldu.</a:t>
                       </a:r>
                     </a:p>
                   </a:txBody>
@@ -8312,17 +9102,26 @@
                 </a:tc>
                 <a:extLst>
                   <a:ext uri="{0D108BD9-81ED-4DB2-BD59-A6C34878D82A}">
-                    <a16:rowId xmlns:a16="http://schemas.microsoft.com/office/drawing/2014/main" val="920756919"/>
+                    <a16:rowId xmlns:a16="http://schemas.microsoft.com/office/drawing/2014/main" val="3898272618"/>
                   </a:ext>
                 </a:extLst>
               </a:tr>
-              <a:tr h="418088">
+              <a:tr h="474349">
                 <a:tc>
                   <a:txBody>
                     <a:bodyPr/>
                     <a:lstStyle/>
                     <a:p>
                       <a:pPr algn="ctr"/>
+                      <a:r>
+                        <a:rPr lang="ar-AE" sz="1400" b="1" dirty="0">
+                          <a:solidFill>
+                            <a:srgbClr val="C00000"/>
+                          </a:solidFill>
+                          <a:latin typeface="Algerian" panose="04020705040A02060702" pitchFamily="82" charset="0"/>
+                        </a:rPr>
+                        <a:t>مُذْ</a:t>
+                      </a:r>
                       <a:endParaRPr lang="tr-TR" sz="1400" b="1" dirty="0">
                         <a:solidFill>
                           <a:srgbClr val="C00000"/>
@@ -8339,7 +9138,10 @@
                     <a:lstStyle/>
                     <a:p>
                       <a:pPr algn="ctr"/>
-                      <a:endParaRPr lang="tr-TR" sz="1100" dirty="0"/>
+                      <a:r>
+                        <a:rPr lang="tr-TR" sz="1100" dirty="0"/>
+                        <a:t>…den beri, …den bu yana</a:t>
+                      </a:r>
                     </a:p>
                   </a:txBody>
                   <a:tcPr/>
@@ -8351,62 +9153,31 @@
                     <a:p>
                       <a:pPr algn="ctr"/>
                       <a:r>
-                        <a:rPr lang="ar-AE" sz="1400" b="1" kern="1200" dirty="0">
+                        <a:rPr lang="ar-AE" sz="1400" b="1" dirty="0"/>
+                        <a:t>تُبْتُ مِنْ كُلِّ ذَنْبٍ فَعَلْتُهُ </a:t>
+                      </a:r>
+                      <a:r>
+                        <a:rPr lang="ar-AE" sz="1400" b="1" dirty="0">
+                          <a:solidFill>
+                            <a:srgbClr val="C00000"/>
+                          </a:solidFill>
+                        </a:rPr>
+                        <a:t>مُذْ</a:t>
+                      </a:r>
+                      <a:r>
+                        <a:rPr lang="ar-AE" sz="1400" b="1" dirty="0"/>
+                        <a:t> يَوْمِ الْبُلُوغِ</a:t>
+                      </a:r>
+                    </a:p>
+                    <a:p>
+                      <a:pPr algn="ctr"/>
+                      <a:r>
+                        <a:rPr lang="tr-TR" sz="1100" b="0" dirty="0">
                           <a:solidFill>
                             <a:schemeClr val="tx1"/>
                           </a:solidFill>
-                          <a:latin typeface="+mn-lt"/>
-                          <a:ea typeface="+mn-ea"/>
-                          <a:cs typeface="+mn-cs"/>
                         </a:rPr>
-                        <a:t>تُلبْتُ </a:t>
-                      </a:r>
-                      <a:r>
-                        <a:rPr lang="ar-AE" sz="1400" b="1" kern="1200" dirty="0">
-                          <a:solidFill>
-                            <a:srgbClr val="C00000"/>
-                          </a:solidFill>
-                          <a:latin typeface="+mn-lt"/>
-                          <a:ea typeface="+mn-ea"/>
-                          <a:cs typeface="+mn-cs"/>
-                        </a:rPr>
-                        <a:t>إِلَي</a:t>
-                      </a:r>
-                      <a:r>
-                        <a:rPr lang="ar-AE" sz="1400" b="1" kern="1200" dirty="0">
-                          <a:solidFill>
-                            <a:schemeClr val="tx1"/>
-                          </a:solidFill>
-                          <a:latin typeface="+mn-lt"/>
-                          <a:ea typeface="+mn-ea"/>
-                          <a:cs typeface="+mn-cs"/>
-                        </a:rPr>
-                        <a:t> اللهِ</a:t>
-                      </a:r>
-                    </a:p>
-                    <a:p>
-                      <a:pPr algn="ctr"/>
-                      <a:r>
-                        <a:rPr lang="tr-TR" sz="1100" b="0" kern="1200" dirty="0" err="1">
-                          <a:solidFill>
-                            <a:schemeClr val="tx1"/>
-                          </a:solidFill>
-                          <a:latin typeface="+mn-lt"/>
-                          <a:ea typeface="+mn-ea"/>
-                          <a:cs typeface="+mn-cs"/>
-                        </a:rPr>
-                        <a:t>Allah’u</a:t>
-                      </a:r>
-                      <a:r>
-                        <a:rPr lang="tr-TR" sz="1100" b="0" kern="1200" dirty="0">
-                          <a:solidFill>
-                            <a:schemeClr val="tx1"/>
-                          </a:solidFill>
-                          <a:latin typeface="+mn-lt"/>
-                          <a:ea typeface="+mn-ea"/>
-                          <a:cs typeface="+mn-cs"/>
-                        </a:rPr>
-                        <a:t> Teala’ya tövbe ettim.</a:t>
+                        <a:t>Buluğ çağından beri işlediğim her günahtan tövbe ettim.</a:t>
                       </a:r>
                     </a:p>
                   </a:txBody>
@@ -8414,17 +9185,26 @@
                 </a:tc>
                 <a:extLst>
                   <a:ext uri="{0D108BD9-81ED-4DB2-BD59-A6C34878D82A}">
-                    <a16:rowId xmlns:a16="http://schemas.microsoft.com/office/drawing/2014/main" val="3898272618"/>
+                    <a16:rowId xmlns:a16="http://schemas.microsoft.com/office/drawing/2014/main" val="2209876613"/>
                   </a:ext>
                 </a:extLst>
               </a:tr>
-              <a:tr h="418088">
+              <a:tr h="505403">
                 <a:tc>
                   <a:txBody>
                     <a:bodyPr/>
                     <a:lstStyle/>
                     <a:p>
                       <a:pPr algn="ctr"/>
+                      <a:r>
+                        <a:rPr lang="ar-AE" sz="1400" b="1" dirty="0">
+                          <a:solidFill>
+                            <a:srgbClr val="C00000"/>
+                          </a:solidFill>
+                          <a:latin typeface="Algerian" panose="04020705040A02060702" pitchFamily="82" charset="0"/>
+                        </a:rPr>
+                        <a:t>مُنْذُ</a:t>
+                      </a:r>
                       <a:endParaRPr lang="tr-TR" sz="1400" b="1" dirty="0">
                         <a:solidFill>
                           <a:srgbClr val="C00000"/>
@@ -8441,7 +9221,10 @@
                     <a:lstStyle/>
                     <a:p>
                       <a:pPr algn="ctr"/>
-                      <a:endParaRPr lang="tr-TR" sz="1100" dirty="0"/>
+                      <a:r>
+                        <a:rPr lang="tr-TR" sz="1100" dirty="0"/>
+                        <a:t>…den beri, …den bu yana</a:t>
+                      </a:r>
                     </a:p>
                   </a:txBody>
                   <a:tcPr/>
@@ -8454,7 +9237,7 @@
                       <a:pPr algn="ctr"/>
                       <a:r>
                         <a:rPr lang="ar-AE" sz="1400" b="1" dirty="0"/>
-                        <a:t>كُفِفْتُ </a:t>
+                        <a:t>تَجِبُ الصَّلَاةُ </a:t>
                       </a:r>
                       <a:r>
                         <a:rPr lang="ar-AE" sz="1400" b="1" dirty="0">
@@ -8462,22 +9245,18 @@
                             <a:srgbClr val="C00000"/>
                           </a:solidFill>
                         </a:rPr>
-                        <a:t>عَنْ</a:t>
+                        <a:t>مُنْذُ</a:t>
                       </a:r>
                       <a:r>
                         <a:rPr lang="ar-AE" sz="1400" b="1" dirty="0"/>
-                        <a:t> الْحَرَامِ</a:t>
+                        <a:t> يَوْمِ الْبُلُوغِ </a:t>
                       </a:r>
                     </a:p>
                     <a:p>
                       <a:pPr algn="ctr"/>
                       <a:r>
-                        <a:rPr lang="tr-TR" sz="1100" b="0" dirty="0">
-                          <a:solidFill>
-                            <a:schemeClr val="tx1"/>
-                          </a:solidFill>
-                        </a:rPr>
-                        <a:t>Haramdan menolundum.</a:t>
+                        <a:rPr lang="tr-TR" sz="1100" dirty="0"/>
+                        <a:t>Buluğ çağından itibaren namaz vacip olur.</a:t>
                       </a:r>
                     </a:p>
                   </a:txBody>
@@ -8485,17 +9264,26 @@
                 </a:tc>
                 <a:extLst>
                   <a:ext uri="{0D108BD9-81ED-4DB2-BD59-A6C34878D82A}">
-                    <a16:rowId xmlns:a16="http://schemas.microsoft.com/office/drawing/2014/main" val="2209876613"/>
+                    <a16:rowId xmlns:a16="http://schemas.microsoft.com/office/drawing/2014/main" val="1718483269"/>
                   </a:ext>
                 </a:extLst>
               </a:tr>
-              <a:tr h="577360">
+              <a:tr h="505403">
                 <a:tc>
                   <a:txBody>
                     <a:bodyPr/>
                     <a:lstStyle/>
                     <a:p>
                       <a:pPr algn="ctr"/>
+                      <a:r>
+                        <a:rPr lang="ar-AE" sz="1400" b="1" dirty="0">
+                          <a:solidFill>
+                            <a:srgbClr val="C00000"/>
+                          </a:solidFill>
+                          <a:latin typeface="Algerian" panose="04020705040A02060702" pitchFamily="82" charset="0"/>
+                        </a:rPr>
+                        <a:t>خَلَا</a:t>
+                      </a:r>
                       <a:endParaRPr lang="tr-TR" sz="1400" b="1" dirty="0">
                         <a:solidFill>
                           <a:srgbClr val="C00000"/>
@@ -8512,7 +9300,10 @@
                     <a:lstStyle/>
                     <a:p>
                       <a:pPr algn="ctr"/>
-                      <a:endParaRPr lang="tr-TR" sz="1100" dirty="0"/>
+                      <a:r>
+                        <a:rPr lang="tr-TR" sz="1100" dirty="0"/>
+                        <a:t>Hariç, Müstesna </a:t>
+                      </a:r>
                     </a:p>
                   </a:txBody>
                   <a:tcPr/>
@@ -8524,27 +9315,27 @@
                     <a:p>
                       <a:pPr algn="ctr"/>
                       <a:r>
-                        <a:rPr lang="ar-AE" sz="1400" dirty="0"/>
-                        <a:t>تَخِبُ التَّوْبَةُ </a:t>
-                      </a:r>
-                      <a:r>
-                        <a:rPr lang="ar-AE" sz="1400" dirty="0">
+                        <a:rPr lang="ar-AE" sz="1400" b="1" dirty="0"/>
+                        <a:t>هَلَكَ الْعَالِمُونَ </a:t>
+                      </a:r>
+                      <a:r>
+                        <a:rPr lang="ar-AE" sz="1400" b="1" dirty="0">
                           <a:solidFill>
                             <a:srgbClr val="C00000"/>
                           </a:solidFill>
                         </a:rPr>
-                        <a:t>عَلَي</a:t>
-                      </a:r>
-                      <a:r>
-                        <a:rPr lang="ar-AE" sz="1400" dirty="0"/>
-                        <a:t> كُلِّ مُذْنِبٍ</a:t>
+                        <a:t>خَلَا</a:t>
+                      </a:r>
+                      <a:r>
+                        <a:rPr lang="ar-AE" sz="1400" b="1" dirty="0"/>
+                        <a:t> الْعَامِلِ بِعِلْمِهِ</a:t>
                       </a:r>
                     </a:p>
                     <a:p>
                       <a:pPr algn="ctr"/>
                       <a:r>
                         <a:rPr lang="tr-TR" sz="1100" dirty="0"/>
-                        <a:t>Her günah işleyene tövbe etmek vacip olur.</a:t>
+                        <a:t>İlmiyle amel edenler hariç alimler helak oldu.</a:t>
                       </a:r>
                     </a:p>
                   </a:txBody>
@@ -8552,17 +9343,26 @@
                 </a:tc>
                 <a:extLst>
                   <a:ext uri="{0D108BD9-81ED-4DB2-BD59-A6C34878D82A}">
-                    <a16:rowId xmlns:a16="http://schemas.microsoft.com/office/drawing/2014/main" val="1718483269"/>
+                    <a16:rowId xmlns:a16="http://schemas.microsoft.com/office/drawing/2014/main" val="98950525"/>
                   </a:ext>
                 </a:extLst>
               </a:tr>
-              <a:tr h="577360">
+              <a:tr h="474349">
                 <a:tc>
                   <a:txBody>
                     <a:bodyPr/>
                     <a:lstStyle/>
                     <a:p>
                       <a:pPr algn="ctr"/>
+                      <a:r>
+                        <a:rPr lang="ar-AE" sz="1400" b="1" dirty="0">
+                          <a:solidFill>
+                            <a:srgbClr val="C00000"/>
+                          </a:solidFill>
+                          <a:latin typeface="Algerian" panose="04020705040A02060702" pitchFamily="82" charset="0"/>
+                        </a:rPr>
+                        <a:t>عَدَا</a:t>
+                      </a:r>
                       <a:endParaRPr lang="tr-TR" sz="1400" b="1" dirty="0">
                         <a:solidFill>
                           <a:srgbClr val="C00000"/>
@@ -8579,7 +9379,10 @@
                     <a:lstStyle/>
                     <a:p>
                       <a:pPr algn="ctr"/>
-                      <a:endParaRPr lang="tr-TR" sz="1100" dirty="0"/>
+                      <a:r>
+                        <a:rPr lang="tr-TR" sz="1100" dirty="0"/>
+                        <a:t>Hariç, Müstesna</a:t>
+                      </a:r>
                     </a:p>
                   </a:txBody>
                   <a:tcPr/>
@@ -8591,58 +9394,54 @@
                     <a:p>
                       <a:pPr algn="ctr"/>
                       <a:r>
-                        <a:rPr lang="ar-AE" sz="1400" dirty="0"/>
-                        <a:t>اَنَا عُبَيْدٌ </a:t>
-                      </a:r>
-                      <a:r>
-                        <a:rPr lang="ar-AE" sz="1400" dirty="0">
+                        <a:rPr lang="ar-AE" sz="1400" b="1" dirty="0"/>
+                        <a:t>هَلَكَ الْعَالِمُونَ </a:t>
+                      </a:r>
+                      <a:r>
+                        <a:rPr lang="ar-AE" sz="1400" b="1" dirty="0">
                           <a:solidFill>
                             <a:srgbClr val="C00000"/>
                           </a:solidFill>
                         </a:rPr>
-                        <a:t>لِلَّهِ</a:t>
-                      </a:r>
-                      <a:r>
-                        <a:rPr lang="ar-AE" sz="1400" dirty="0"/>
-                        <a:t> تَعَالَى</a:t>
+                        <a:t>عَدَا</a:t>
+                      </a:r>
+                      <a:r>
+                        <a:rPr lang="ar-AE" sz="1400" b="1" dirty="0"/>
+                        <a:t> الْمُخْلِصِ</a:t>
                       </a:r>
                     </a:p>
                     <a:p>
                       <a:pPr algn="ctr"/>
                       <a:r>
                         <a:rPr lang="tr-TR" sz="1100" dirty="0"/>
-                        <a:t>Ben </a:t>
-                      </a:r>
-                      <a:r>
-                        <a:rPr lang="tr-TR" sz="1100" dirty="0" err="1"/>
-                        <a:t>Allah’u</a:t>
-                      </a:r>
-                      <a:r>
-                        <a:rPr lang="tr-TR" sz="1100" dirty="0"/>
-                        <a:t> Teala’nın bir </a:t>
-                      </a:r>
-                      <a:r>
-                        <a:rPr lang="tr-TR" sz="1100" dirty="0" err="1"/>
-                        <a:t>kulcağızıyım</a:t>
-                      </a:r>
-                      <a:endParaRPr lang="tr-TR" sz="1100" dirty="0"/>
+                        <a:t>Muhlis olanlar müstesna amel edenler helak oldu.</a:t>
+                      </a:r>
                     </a:p>
                   </a:txBody>
                   <a:tcPr/>
                 </a:tc>
                 <a:extLst>
                   <a:ext uri="{0D108BD9-81ED-4DB2-BD59-A6C34878D82A}">
-                    <a16:rowId xmlns:a16="http://schemas.microsoft.com/office/drawing/2014/main" val="98950525"/>
+                    <a16:rowId xmlns:a16="http://schemas.microsoft.com/office/drawing/2014/main" val="3359397602"/>
                   </a:ext>
                 </a:extLst>
               </a:tr>
-              <a:tr h="418088">
+              <a:tr h="642666">
                 <a:tc>
                   <a:txBody>
                     <a:bodyPr/>
                     <a:lstStyle/>
                     <a:p>
                       <a:pPr algn="ctr"/>
+                      <a:r>
+                        <a:rPr lang="ar-AE" sz="1400" b="1" dirty="0">
+                          <a:solidFill>
+                            <a:srgbClr val="C00000"/>
+                          </a:solidFill>
+                          <a:latin typeface="Algerian" panose="04020705040A02060702" pitchFamily="82" charset="0"/>
+                        </a:rPr>
+                        <a:t>لَوْلَا</a:t>
+                      </a:r>
                       <a:endParaRPr lang="tr-TR" sz="1400" b="1" dirty="0">
                         <a:solidFill>
                           <a:srgbClr val="C00000"/>
@@ -8659,7 +9458,10 @@
                     <a:lstStyle/>
                     <a:p>
                       <a:pPr algn="ctr"/>
-                      <a:endParaRPr lang="tr-TR" sz="1100" dirty="0"/>
+                      <a:r>
+                        <a:rPr lang="tr-TR" sz="1100" dirty="0"/>
+                        <a:t>Olmasaydı; Mani Olma/Şart</a:t>
+                      </a:r>
                     </a:p>
                   </a:txBody>
                   <a:tcPr/>
@@ -8671,27 +9473,23 @@
                     <a:p>
                       <a:pPr algn="ctr"/>
                       <a:r>
-                        <a:rPr lang="ar-AE" sz="1400" b="1" dirty="0"/>
-                        <a:t>اَلْمُطِيعُ </a:t>
-                      </a:r>
-                      <a:r>
                         <a:rPr lang="ar-AE" sz="1400" b="1" dirty="0">
                           <a:solidFill>
                             <a:srgbClr val="C00000"/>
                           </a:solidFill>
                         </a:rPr>
-                        <a:t>فِي</a:t>
+                        <a:t>لَوْلَا</a:t>
                       </a:r>
                       <a:r>
                         <a:rPr lang="ar-AE" sz="1400" b="1" dirty="0"/>
-                        <a:t> الْخَنَّةِ</a:t>
+                        <a:t>كَ يَا رَحْمَةَ اللَّهِ لَهَلَكَ النَّاسُ </a:t>
                       </a:r>
                     </a:p>
                     <a:p>
                       <a:pPr algn="ctr"/>
                       <a:r>
                         <a:rPr lang="tr-TR" sz="1100" dirty="0"/>
-                        <a:t>İtaat eden cennettedir.</a:t>
+                        <a:t>Ey Allah’ın rahmeti eğer sen olmasaydın elbette insanlar helak olurdu.</a:t>
                       </a:r>
                     </a:p>
                   </a:txBody>
@@ -8699,17 +9497,26 @@
                 </a:tc>
                 <a:extLst>
                   <a:ext uri="{0D108BD9-81ED-4DB2-BD59-A6C34878D82A}">
-                    <a16:rowId xmlns:a16="http://schemas.microsoft.com/office/drawing/2014/main" val="3359397602"/>
+                    <a16:rowId xmlns:a16="http://schemas.microsoft.com/office/drawing/2014/main" val="4078668120"/>
                   </a:ext>
                 </a:extLst>
               </a:tr>
-              <a:tr h="418088">
+              <a:tr h="505403">
                 <a:tc>
                   <a:txBody>
                     <a:bodyPr/>
                     <a:lstStyle/>
                     <a:p>
                       <a:pPr algn="ctr"/>
+                      <a:r>
+                        <a:rPr lang="ar-AE" sz="1400" b="1" dirty="0">
+                          <a:solidFill>
+                            <a:srgbClr val="C00000"/>
+                          </a:solidFill>
+                          <a:latin typeface="Algerian" panose="04020705040A02060702" pitchFamily="82" charset="0"/>
+                        </a:rPr>
+                        <a:t>كَيْمَه</a:t>
+                      </a:r>
                       <a:endParaRPr lang="tr-TR" sz="1400" b="1" dirty="0">
                         <a:solidFill>
                           <a:srgbClr val="C00000"/>
@@ -8726,6 +9533,14 @@
                     <a:lstStyle/>
                     <a:p>
                       <a:pPr algn="ctr"/>
+                      <a:r>
+                        <a:rPr lang="tr-TR" sz="1100" dirty="0"/>
+                        <a:t>Niçin, Hangi sebeple; </a:t>
+                      </a:r>
+                      <a:r>
+                        <a:rPr lang="tr-TR" sz="1100" dirty="0" err="1"/>
+                        <a:t>Ta’lil</a:t>
+                      </a:r>
                       <a:endParaRPr lang="tr-TR" sz="1100" dirty="0"/>
                     </a:p>
                   </a:txBody>
@@ -8738,27 +9553,23 @@
                     <a:p>
                       <a:pPr algn="ctr"/>
                       <a:r>
-                        <a:rPr lang="ar-AE" sz="1400" b="1" dirty="0"/>
-                        <a:t>لَيْسَ </a:t>
-                      </a:r>
-                      <a:r>
                         <a:rPr lang="ar-AE" sz="1400" b="1" dirty="0">
                           <a:solidFill>
                             <a:srgbClr val="C00000"/>
                           </a:solidFill>
                         </a:rPr>
-                        <a:t>كَ</a:t>
+                        <a:t>كَيْمَ</a:t>
                       </a:r>
                       <a:r>
                         <a:rPr lang="ar-AE" sz="1400" b="1" dirty="0"/>
-                        <a:t>مِثْلِهِ شَيْءٌ</a:t>
+                        <a:t> عَصَيْتَ</a:t>
                       </a:r>
                     </a:p>
                     <a:p>
                       <a:pPr algn="ctr"/>
                       <a:r>
                         <a:rPr lang="tr-TR" sz="1100" dirty="0"/>
-                        <a:t>Onun benzeri bir şey yoktur.</a:t>
+                        <a:t>Niçin asi oldun?</a:t>
                       </a:r>
                     </a:p>
                   </a:txBody>
@@ -8766,17 +9577,26 @@
                 </a:tc>
                 <a:extLst>
                   <a:ext uri="{0D108BD9-81ED-4DB2-BD59-A6C34878D82A}">
-                    <a16:rowId xmlns:a16="http://schemas.microsoft.com/office/drawing/2014/main" val="4078668120"/>
+                    <a16:rowId xmlns:a16="http://schemas.microsoft.com/office/drawing/2014/main" val="3184782361"/>
                   </a:ext>
                 </a:extLst>
               </a:tr>
-              <a:tr h="577360">
+              <a:tr h="505403">
                 <a:tc>
                   <a:txBody>
                     <a:bodyPr/>
                     <a:lstStyle/>
                     <a:p>
                       <a:pPr algn="ctr"/>
+                      <a:r>
+                        <a:rPr lang="ar-AE" sz="1400" b="1" dirty="0">
+                          <a:solidFill>
+                            <a:srgbClr val="C00000"/>
+                          </a:solidFill>
+                          <a:latin typeface="Algerian" panose="04020705040A02060702" pitchFamily="82" charset="0"/>
+                        </a:rPr>
+                        <a:t>لَعَلَّ</a:t>
+                      </a:r>
                       <a:endParaRPr lang="tr-TR" sz="1400" b="1" dirty="0">
                         <a:solidFill>
                           <a:srgbClr val="C00000"/>
@@ -8793,6 +9613,14 @@
                     <a:lstStyle/>
                     <a:p>
                       <a:pPr algn="ctr"/>
+                      <a:r>
+                        <a:rPr lang="tr-TR" sz="1100" dirty="0"/>
+                        <a:t>Umulur ki; </a:t>
+                      </a:r>
+                      <a:r>
+                        <a:rPr lang="tr-TR" sz="1100" dirty="0" err="1"/>
+                        <a:t>Terecci</a:t>
+                      </a:r>
                       <a:endParaRPr lang="tr-TR" sz="1100" dirty="0"/>
                     </a:p>
                   </a:txBody>
@@ -8805,27 +9633,23 @@
                     <a:p>
                       <a:pPr algn="ctr"/>
                       <a:r>
-                        <a:rPr lang="ar-AE" sz="1400" b="1" dirty="0"/>
-                        <a:t>اَعْبُدُ اللّهَ تَعَالَى </a:t>
-                      </a:r>
-                      <a:r>
                         <a:rPr lang="ar-AE" sz="1400" b="1" dirty="0">
                           <a:solidFill>
                             <a:srgbClr val="C00000"/>
                           </a:solidFill>
                         </a:rPr>
-                        <a:t>حَتَّي</a:t>
+                        <a:t>لَعَلَّ</a:t>
                       </a:r>
                       <a:r>
                         <a:rPr lang="ar-AE" sz="1400" b="1" dirty="0"/>
-                        <a:t> الْمَوْتِ</a:t>
+                        <a:t> اللَّهِ تَعَالَى يَغْفِرُ ذَنْبِي</a:t>
                       </a:r>
                     </a:p>
                     <a:p>
                       <a:pPr algn="ctr"/>
                       <a:r>
                         <a:rPr lang="tr-TR" sz="1100" dirty="0"/>
-                        <a:t>Ölünceye kadar </a:t>
+                        <a:t>Umulur ki </a:t>
                       </a:r>
                       <a:r>
                         <a:rPr lang="tr-TR" sz="1100" dirty="0" err="1"/>
@@ -8833,70 +9657,7 @@
                       </a:r>
                       <a:r>
                         <a:rPr lang="tr-TR" sz="1100" dirty="0"/>
-                        <a:t> Teala’ya ibadet edeceğim.</a:t>
-                      </a:r>
-                    </a:p>
-                  </a:txBody>
-                  <a:tcPr/>
-                </a:tc>
-                <a:extLst>
-                  <a:ext uri="{0D108BD9-81ED-4DB2-BD59-A6C34878D82A}">
-                    <a16:rowId xmlns:a16="http://schemas.microsoft.com/office/drawing/2014/main" val="3184782361"/>
-                  </a:ext>
-                </a:extLst>
-              </a:tr>
-              <a:tr h="577360">
-                <a:tc>
-                  <a:txBody>
-                    <a:bodyPr/>
-                    <a:lstStyle/>
-                    <a:p>
-                      <a:pPr algn="ctr"/>
-                      <a:endParaRPr lang="tr-TR" sz="1400" b="1" dirty="0">
-                        <a:solidFill>
-                          <a:srgbClr val="C00000"/>
-                        </a:solidFill>
-                        <a:latin typeface="Algerian" panose="04020705040A02060702" pitchFamily="82" charset="0"/>
-                      </a:endParaRPr>
-                    </a:p>
-                  </a:txBody>
-                  <a:tcPr/>
-                </a:tc>
-                <a:tc>
-                  <a:txBody>
-                    <a:bodyPr/>
-                    <a:lstStyle/>
-                    <a:p>
-                      <a:pPr algn="ctr"/>
-                      <a:endParaRPr lang="tr-TR" sz="1100" dirty="0"/>
-                    </a:p>
-                  </a:txBody>
-                  <a:tcPr/>
-                </a:tc>
-                <a:tc>
-                  <a:txBody>
-                    <a:bodyPr/>
-                    <a:lstStyle/>
-                    <a:p>
-                      <a:pPr algn="ctr"/>
-                      <a:r>
-                        <a:rPr lang="ar-AE" sz="1400" b="1" dirty="0">
-                          <a:solidFill>
-                            <a:srgbClr val="C00000"/>
-                          </a:solidFill>
-                        </a:rPr>
-                        <a:t>رُبَّ</a:t>
-                      </a:r>
-                      <a:r>
-                        <a:rPr lang="ar-AE" sz="1400" b="1" dirty="0"/>
-                        <a:t> تَالٍ يَلْعَنُهُ اَلْقُرآنُ</a:t>
-                      </a:r>
-                    </a:p>
-                    <a:p>
-                      <a:pPr algn="ctr"/>
-                      <a:r>
-                        <a:rPr lang="tr-TR" sz="1100" dirty="0"/>
-                        <a:t>Kur’an’ın kendisine lanet ettiği nice okuyucularla(karşılaştım).</a:t>
+                        <a:t> Teala günahımı mağfiret eder.</a:t>
                       </a:r>
                     </a:p>
                   </a:txBody>
@@ -8916,6 +9677,440 @@
     <p:extLst>
       <p:ext uri="{BB962C8B-B14F-4D97-AF65-F5344CB8AC3E}">
         <p14:creationId xmlns:p14="http://schemas.microsoft.com/office/powerpoint/2010/main" val="512067248"/>
+      </p:ext>
+    </p:extLst>
+  </p:cSld>
+  <p:clrMapOvr>
+    <a:masterClrMapping/>
+  </p:clrMapOvr>
+</p:sld>
+</file>
+
+<file path=ppt/slides/slide4.xml><?xml version="1.0" encoding="utf-8"?>
+<p:sld xmlns:a="http://schemas.openxmlformats.org/drawingml/2006/main" xmlns:r="http://schemas.openxmlformats.org/officeDocument/2006/relationships" xmlns:p="http://schemas.openxmlformats.org/presentationml/2006/main">
+  <p:cSld>
+    <p:spTree>
+      <p:nvGrpSpPr>
+        <p:cNvPr id="1" name=""/>
+        <p:cNvGrpSpPr/>
+        <p:nvPr/>
+      </p:nvGrpSpPr>
+      <p:grpSpPr>
+        <a:xfrm>
+          <a:off x="0" y="0"/>
+          <a:ext cx="0" cy="0"/>
+          <a:chOff x="0" y="0"/>
+          <a:chExt cx="0" cy="0"/>
+        </a:xfrm>
+      </p:grpSpPr>
+      <p:sp>
+        <p:nvSpPr>
+          <p:cNvPr id="2" name="Başlık 1">
+            <a:extLst>
+              <a:ext uri="{FF2B5EF4-FFF2-40B4-BE49-F238E27FC236}">
+                <a16:creationId xmlns:a16="http://schemas.microsoft.com/office/drawing/2014/main" id="{4F31AC6B-9B8F-F79D-2B52-3A31D83E3662}"/>
+              </a:ext>
+            </a:extLst>
+          </p:cNvPr>
+          <p:cNvSpPr>
+            <a:spLocks noGrp="1"/>
+          </p:cNvSpPr>
+          <p:nvPr>
+            <p:ph type="title"/>
+          </p:nvPr>
+        </p:nvSpPr>
+        <p:spPr>
+          <a:xfrm>
+            <a:off x="59267" y="30553"/>
+            <a:ext cx="12073465" cy="580525"/>
+          </a:xfrm>
+          <a:solidFill>
+            <a:srgbClr val="0070C0"/>
+          </a:solidFill>
+        </p:spPr>
+        <p:txBody>
+          <a:bodyPr>
+            <a:normAutofit fontScale="90000"/>
+          </a:bodyPr>
+          <a:lstStyle/>
+          <a:p>
+            <a:r>
+              <a:rPr lang="tr-TR" dirty="0">
+                <a:solidFill>
+                  <a:schemeClr val="bg1">
+                    <a:lumMod val="95000"/>
+                  </a:schemeClr>
+                </a:solidFill>
+                <a:latin typeface="Algerian" panose="04020705040A02060702" pitchFamily="82" charset="0"/>
+              </a:rPr>
+              <a:t>	AMİL-İ SEMAİ</a:t>
+            </a:r>
+          </a:p>
+        </p:txBody>
+      </p:sp>
+      <p:sp>
+        <p:nvSpPr>
+          <p:cNvPr id="4" name="Metin kutusu 3">
+            <a:extLst>
+              <a:ext uri="{FF2B5EF4-FFF2-40B4-BE49-F238E27FC236}">
+                <a16:creationId xmlns:a16="http://schemas.microsoft.com/office/drawing/2014/main" id="{9668639A-0B97-AD1E-43FA-28EF8958806C}"/>
+              </a:ext>
+            </a:extLst>
+          </p:cNvPr>
+          <p:cNvSpPr txBox="1"/>
+          <p:nvPr/>
+        </p:nvSpPr>
+        <p:spPr>
+          <a:xfrm>
+            <a:off x="9137650" y="120760"/>
+            <a:ext cx="2728632" cy="400110"/>
+          </a:xfrm>
+          <a:prstGeom prst="rect">
+            <a:avLst/>
+          </a:prstGeom>
+          <a:noFill/>
+        </p:spPr>
+        <p:txBody>
+          <a:bodyPr wrap="none" rtlCol="0">
+            <a:spAutoFit/>
+          </a:bodyPr>
+          <a:lstStyle/>
+          <a:p>
+            <a:r>
+              <a:rPr lang="tr-TR" sz="2000" i="1" u="sng" dirty="0">
+                <a:solidFill>
+                  <a:schemeClr val="bg1">
+                    <a:lumMod val="95000"/>
+                  </a:schemeClr>
+                </a:solidFill>
+                <a:latin typeface="Alef" panose="00000500000000000000" pitchFamily="2" charset="-79"/>
+                <a:cs typeface="Alef" panose="00000500000000000000" pitchFamily="2" charset="-79"/>
+              </a:rPr>
+              <a:t>İsmi </a:t>
+            </a:r>
+            <a:r>
+              <a:rPr lang="tr-TR" sz="2000" i="1" u="sng" dirty="0" err="1">
+                <a:solidFill>
+                  <a:schemeClr val="bg1">
+                    <a:lumMod val="95000"/>
+                  </a:schemeClr>
+                </a:solidFill>
+                <a:latin typeface="Alef" panose="00000500000000000000" pitchFamily="2" charset="-79"/>
+                <a:cs typeface="Alef" panose="00000500000000000000" pitchFamily="2" charset="-79"/>
+              </a:rPr>
+              <a:t>Nasb</a:t>
+            </a:r>
+            <a:r>
+              <a:rPr lang="tr-TR" sz="2000" i="1" u="sng" dirty="0">
+                <a:solidFill>
+                  <a:schemeClr val="bg1">
+                    <a:lumMod val="95000"/>
+                  </a:schemeClr>
+                </a:solidFill>
+                <a:latin typeface="Alef" panose="00000500000000000000" pitchFamily="2" charset="-79"/>
+                <a:cs typeface="Alef" panose="00000500000000000000" pitchFamily="2" charset="-79"/>
+              </a:rPr>
+              <a:t>, Haberi </a:t>
+            </a:r>
+            <a:r>
+              <a:rPr lang="tr-TR" sz="2000" i="1" u="sng" dirty="0" err="1">
+                <a:solidFill>
+                  <a:schemeClr val="bg1">
+                    <a:lumMod val="95000"/>
+                  </a:schemeClr>
+                </a:solidFill>
+                <a:latin typeface="Alef" panose="00000500000000000000" pitchFamily="2" charset="-79"/>
+                <a:cs typeface="Alef" panose="00000500000000000000" pitchFamily="2" charset="-79"/>
+              </a:rPr>
+              <a:t>Ref</a:t>
+            </a:r>
+            <a:endParaRPr lang="tr-TR" sz="2000" i="1" u="sng" dirty="0">
+              <a:solidFill>
+                <a:schemeClr val="bg1">
+                  <a:lumMod val="95000"/>
+                </a:schemeClr>
+              </a:solidFill>
+              <a:latin typeface="Alef" panose="00000500000000000000" pitchFamily="2" charset="-79"/>
+              <a:cs typeface="Alef" panose="00000500000000000000" pitchFamily="2" charset="-79"/>
+            </a:endParaRPr>
+          </a:p>
+        </p:txBody>
+      </p:sp>
+      <p:sp>
+        <p:nvSpPr>
+          <p:cNvPr id="3" name="Metin kutusu 2">
+            <a:extLst>
+              <a:ext uri="{FF2B5EF4-FFF2-40B4-BE49-F238E27FC236}">
+                <a16:creationId xmlns:a16="http://schemas.microsoft.com/office/drawing/2014/main" id="{35112F64-3A23-98AD-0458-483DC26669BC}"/>
+              </a:ext>
+            </a:extLst>
+          </p:cNvPr>
+          <p:cNvSpPr txBox="1"/>
+          <p:nvPr/>
+        </p:nvSpPr>
+        <p:spPr>
+          <a:xfrm>
+            <a:off x="1092200" y="6367908"/>
+            <a:ext cx="10706349" cy="369332"/>
+          </a:xfrm>
+          <a:prstGeom prst="rect">
+            <a:avLst/>
+          </a:prstGeom>
+          <a:noFill/>
+        </p:spPr>
+        <p:txBody>
+          <a:bodyPr wrap="square" rtlCol="0">
+            <a:spAutoFit/>
+          </a:bodyPr>
+          <a:lstStyle/>
+          <a:p>
+            <a:r>
+              <a:rPr lang="tr-TR" b="1" dirty="0">
+                <a:solidFill>
+                  <a:srgbClr val="C00000"/>
+                </a:solidFill>
+              </a:rPr>
+              <a:t>İsmi </a:t>
+            </a:r>
+            <a:r>
+              <a:rPr lang="tr-TR" b="1" dirty="0" err="1">
+                <a:solidFill>
+                  <a:srgbClr val="C00000"/>
+                </a:solidFill>
+              </a:rPr>
+              <a:t>Nasb</a:t>
+            </a:r>
+            <a:r>
+              <a:rPr lang="tr-TR" b="1" dirty="0">
+                <a:solidFill>
+                  <a:srgbClr val="C00000"/>
+                </a:solidFill>
+              </a:rPr>
+              <a:t>, Haberi </a:t>
+            </a:r>
+            <a:r>
+              <a:rPr lang="tr-TR" b="1" dirty="0" err="1">
+                <a:solidFill>
+                  <a:srgbClr val="C00000"/>
+                </a:solidFill>
+              </a:rPr>
+              <a:t>Ref</a:t>
+            </a:r>
+            <a:r>
+              <a:rPr lang="tr-TR" b="1" dirty="0">
+                <a:solidFill>
+                  <a:srgbClr val="C00000"/>
+                </a:solidFill>
+              </a:rPr>
+              <a:t>: </a:t>
+            </a:r>
+            <a:r>
+              <a:rPr lang="tr-TR" dirty="0"/>
+              <a:t>Kendinden sonra gelen </a:t>
+            </a:r>
+            <a:r>
+              <a:rPr lang="tr-TR" u="sng" dirty="0"/>
+              <a:t>kelimenin(ismin) harekesini </a:t>
+            </a:r>
+            <a:r>
+              <a:rPr lang="tr-TR" u="sng" dirty="0" err="1"/>
+              <a:t>nasb</a:t>
+            </a:r>
+            <a:r>
+              <a:rPr lang="tr-TR" dirty="0"/>
+              <a:t>, </a:t>
+            </a:r>
+            <a:r>
+              <a:rPr lang="tr-TR" u="sng" dirty="0"/>
+              <a:t>haberini ise </a:t>
+            </a:r>
+            <a:r>
+              <a:rPr lang="tr-TR" u="sng" dirty="0" err="1"/>
+              <a:t>ref</a:t>
+            </a:r>
+            <a:r>
+              <a:rPr lang="tr-TR" u="sng" dirty="0"/>
+              <a:t> </a:t>
+            </a:r>
+            <a:r>
+              <a:rPr lang="tr-TR" dirty="0"/>
+              <a:t>eder.</a:t>
+            </a:r>
+            <a:endParaRPr lang="tr-TR" b="1" dirty="0">
+              <a:solidFill>
+                <a:srgbClr val="C00000"/>
+              </a:solidFill>
+            </a:endParaRPr>
+          </a:p>
+        </p:txBody>
+      </p:sp>
+    </p:spTree>
+    <p:extLst>
+      <p:ext uri="{BB962C8B-B14F-4D97-AF65-F5344CB8AC3E}">
+        <p14:creationId xmlns:p14="http://schemas.microsoft.com/office/powerpoint/2010/main" val="2335362230"/>
+      </p:ext>
+    </p:extLst>
+  </p:cSld>
+  <p:clrMapOvr>
+    <a:masterClrMapping/>
+  </p:clrMapOvr>
+</p:sld>
+</file>
+
+<file path=ppt/slides/slide5.xml><?xml version="1.0" encoding="utf-8"?>
+<p:sld xmlns:a="http://schemas.openxmlformats.org/drawingml/2006/main" xmlns:r="http://schemas.openxmlformats.org/officeDocument/2006/relationships" xmlns:p="http://schemas.openxmlformats.org/presentationml/2006/main">
+  <p:cSld>
+    <p:spTree>
+      <p:nvGrpSpPr>
+        <p:cNvPr id="1" name=""/>
+        <p:cNvGrpSpPr/>
+        <p:nvPr/>
+      </p:nvGrpSpPr>
+      <p:grpSpPr>
+        <a:xfrm>
+          <a:off x="0" y="0"/>
+          <a:ext cx="0" cy="0"/>
+          <a:chOff x="0" y="0"/>
+          <a:chExt cx="0" cy="0"/>
+        </a:xfrm>
+      </p:grpSpPr>
+      <p:sp>
+        <p:nvSpPr>
+          <p:cNvPr id="2" name="Başlık 1">
+            <a:extLst>
+              <a:ext uri="{FF2B5EF4-FFF2-40B4-BE49-F238E27FC236}">
+                <a16:creationId xmlns:a16="http://schemas.microsoft.com/office/drawing/2014/main" id="{4F31AC6B-9B8F-F79D-2B52-3A31D83E3662}"/>
+              </a:ext>
+            </a:extLst>
+          </p:cNvPr>
+          <p:cNvSpPr>
+            <a:spLocks noGrp="1"/>
+          </p:cNvSpPr>
+          <p:nvPr>
+            <p:ph type="title"/>
+          </p:nvPr>
+        </p:nvSpPr>
+        <p:spPr>
+          <a:xfrm>
+            <a:off x="59267" y="30553"/>
+            <a:ext cx="12073465" cy="580525"/>
+          </a:xfrm>
+          <a:solidFill>
+            <a:srgbClr val="0070C0"/>
+          </a:solidFill>
+        </p:spPr>
+        <p:txBody>
+          <a:bodyPr>
+            <a:normAutofit fontScale="90000"/>
+          </a:bodyPr>
+          <a:lstStyle/>
+          <a:p>
+            <a:r>
+              <a:rPr lang="tr-TR" dirty="0">
+                <a:solidFill>
+                  <a:schemeClr val="bg1">
+                    <a:lumMod val="95000"/>
+                  </a:schemeClr>
+                </a:solidFill>
+                <a:latin typeface="Algerian" panose="04020705040A02060702" pitchFamily="82" charset="0"/>
+              </a:rPr>
+              <a:t>	AMİL-İ SEMAİ</a:t>
+            </a:r>
+          </a:p>
+        </p:txBody>
+      </p:sp>
+      <p:sp>
+        <p:nvSpPr>
+          <p:cNvPr id="4" name="Metin kutusu 3">
+            <a:extLst>
+              <a:ext uri="{FF2B5EF4-FFF2-40B4-BE49-F238E27FC236}">
+                <a16:creationId xmlns:a16="http://schemas.microsoft.com/office/drawing/2014/main" id="{9668639A-0B97-AD1E-43FA-28EF8958806C}"/>
+              </a:ext>
+            </a:extLst>
+          </p:cNvPr>
+          <p:cNvSpPr txBox="1"/>
+          <p:nvPr/>
+        </p:nvSpPr>
+        <p:spPr>
+          <a:xfrm>
+            <a:off x="9137650" y="120760"/>
+            <a:ext cx="2728632" cy="400110"/>
+          </a:xfrm>
+          <a:prstGeom prst="rect">
+            <a:avLst/>
+          </a:prstGeom>
+          <a:noFill/>
+        </p:spPr>
+        <p:txBody>
+          <a:bodyPr wrap="none" rtlCol="0">
+            <a:spAutoFit/>
+          </a:bodyPr>
+          <a:lstStyle/>
+          <a:p>
+            <a:r>
+              <a:rPr lang="tr-TR" sz="2000" i="1" u="sng" dirty="0">
+                <a:solidFill>
+                  <a:schemeClr val="bg1">
+                    <a:lumMod val="95000"/>
+                  </a:schemeClr>
+                </a:solidFill>
+                <a:latin typeface="Alef" panose="00000500000000000000" pitchFamily="2" charset="-79"/>
+                <a:cs typeface="Alef" panose="00000500000000000000" pitchFamily="2" charset="-79"/>
+              </a:rPr>
+              <a:t>İsmi </a:t>
+            </a:r>
+            <a:r>
+              <a:rPr lang="tr-TR" sz="2000" i="1" u="sng" dirty="0" err="1">
+                <a:solidFill>
+                  <a:schemeClr val="bg1">
+                    <a:lumMod val="95000"/>
+                  </a:schemeClr>
+                </a:solidFill>
+                <a:latin typeface="Alef" panose="00000500000000000000" pitchFamily="2" charset="-79"/>
+                <a:cs typeface="Alef" panose="00000500000000000000" pitchFamily="2" charset="-79"/>
+              </a:rPr>
+              <a:t>Ref</a:t>
+            </a:r>
+            <a:r>
+              <a:rPr lang="tr-TR" sz="2000" i="1" u="sng" dirty="0">
+                <a:solidFill>
+                  <a:schemeClr val="bg1">
+                    <a:lumMod val="95000"/>
+                  </a:schemeClr>
+                </a:solidFill>
+                <a:latin typeface="Alef" panose="00000500000000000000" pitchFamily="2" charset="-79"/>
+                <a:cs typeface="Alef" panose="00000500000000000000" pitchFamily="2" charset="-79"/>
+              </a:rPr>
+              <a:t>, Haberi </a:t>
+            </a:r>
+            <a:r>
+              <a:rPr lang="tr-TR" sz="2000" i="1" u="sng" dirty="0" err="1">
+                <a:solidFill>
+                  <a:schemeClr val="bg1">
+                    <a:lumMod val="95000"/>
+                  </a:schemeClr>
+                </a:solidFill>
+                <a:latin typeface="Alef" panose="00000500000000000000" pitchFamily="2" charset="-79"/>
+                <a:cs typeface="Alef" panose="00000500000000000000" pitchFamily="2" charset="-79"/>
+              </a:rPr>
+              <a:t>Nasb</a:t>
+            </a:r>
+            <a:endParaRPr lang="tr-TR" sz="2000" i="1" u="sng" dirty="0">
+              <a:solidFill>
+                <a:schemeClr val="bg1">
+                  <a:lumMod val="95000"/>
+                </a:schemeClr>
+              </a:solidFill>
+              <a:latin typeface="Alef" panose="00000500000000000000" pitchFamily="2" charset="-79"/>
+              <a:cs typeface="Alef" panose="00000500000000000000" pitchFamily="2" charset="-79"/>
+            </a:endParaRPr>
+          </a:p>
+        </p:txBody>
+      </p:sp>
+    </p:spTree>
+    <p:extLst>
+      <p:ext uri="{BB962C8B-B14F-4D97-AF65-F5344CB8AC3E}">
+        <p14:creationId xmlns:p14="http://schemas.microsoft.com/office/powerpoint/2010/main" val="3809376876"/>
       </p:ext>
     </p:extLst>
   </p:cSld>
@@ -9238,4 +10433,319 @@
     </a:ext>
   </a:extLst>
 </a:theme>
+</file>
+
+<file path=ppt/theme/theme2.xml><?xml version="1.0" encoding="utf-8"?>
+<a:theme xmlns:a="http://schemas.openxmlformats.org/drawingml/2006/main" name="Office Teması">
+  <a:themeElements>
+    <a:clrScheme name="Office">
+      <a:dk1>
+        <a:sysClr val="windowText" lastClr="000000"/>
+      </a:dk1>
+      <a:lt1>
+        <a:sysClr val="window" lastClr="FFFFFF"/>
+      </a:lt1>
+      <a:dk2>
+        <a:srgbClr val="0E2841"/>
+      </a:dk2>
+      <a:lt2>
+        <a:srgbClr val="E8E8E8"/>
+      </a:lt2>
+      <a:accent1>
+        <a:srgbClr val="156082"/>
+      </a:accent1>
+      <a:accent2>
+        <a:srgbClr val="E97132"/>
+      </a:accent2>
+      <a:accent3>
+        <a:srgbClr val="196B24"/>
+      </a:accent3>
+      <a:accent4>
+        <a:srgbClr val="0F9ED5"/>
+      </a:accent4>
+      <a:accent5>
+        <a:srgbClr val="A02B93"/>
+      </a:accent5>
+      <a:accent6>
+        <a:srgbClr val="4EA72E"/>
+      </a:accent6>
+      <a:hlink>
+        <a:srgbClr val="467886"/>
+      </a:hlink>
+      <a:folHlink>
+        <a:srgbClr val="96607D"/>
+      </a:folHlink>
+    </a:clrScheme>
+    <a:fontScheme name="Office">
+      <a:majorFont>
+        <a:latin typeface="Aptos Display" panose="02110004020202020204"/>
+        <a:ea typeface=""/>
+        <a:cs typeface=""/>
+        <a:font script="Jpan" typeface="游ゴシック Light"/>
+        <a:font script="Hang" typeface="맑은 고딕"/>
+        <a:font script="Hans" typeface="等线 Light"/>
+        <a:font script="Hant" typeface="新細明體"/>
+        <a:font script="Arab" typeface="Times New Roman"/>
+        <a:font script="Hebr" typeface="Times New Roman"/>
+        <a:font script="Thai" typeface="Angsana New"/>
+        <a:font script="Ethi" typeface="Nyala"/>
+        <a:font script="Beng" typeface="Vrinda"/>
+        <a:font script="Gujr" typeface="Shruti"/>
+        <a:font script="Khmr" typeface="MoolBoran"/>
+        <a:font script="Knda" typeface="Tunga"/>
+        <a:font script="Guru" typeface="Raavi"/>
+        <a:font script="Cans" typeface="Euphemia"/>
+        <a:font script="Cher" typeface="Plantagenet Cherokee"/>
+        <a:font script="Yiii" typeface="Microsoft Yi Baiti"/>
+        <a:font script="Tibt" typeface="Microsoft Himalaya"/>
+        <a:font script="Thaa" typeface="MV Boli"/>
+        <a:font script="Deva" typeface="Mangal"/>
+        <a:font script="Telu" typeface="Gautami"/>
+        <a:font script="Taml" typeface="Latha"/>
+        <a:font script="Syrc" typeface="Estrangelo Edessa"/>
+        <a:font script="Orya" typeface="Kalinga"/>
+        <a:font script="Mlym" typeface="Kartika"/>
+        <a:font script="Laoo" typeface="DokChampa"/>
+        <a:font script="Sinh" typeface="Iskoola Pota"/>
+        <a:font script="Mong" typeface="Mongolian Baiti"/>
+        <a:font script="Viet" typeface="Times New Roman"/>
+        <a:font script="Uigh" typeface="Microsoft Uighur"/>
+        <a:font script="Geor" typeface="Sylfaen"/>
+        <a:font script="Armn" typeface="Arial"/>
+        <a:font script="Bugi" typeface="Leelawadee UI"/>
+        <a:font script="Bopo" typeface="Microsoft JhengHei"/>
+        <a:font script="Java" typeface="Javanese Text"/>
+        <a:font script="Lisu" typeface="Segoe UI"/>
+        <a:font script="Mymr" typeface="Myanmar Text"/>
+        <a:font script="Nkoo" typeface="Ebrima"/>
+        <a:font script="Olck" typeface="Nirmala UI"/>
+        <a:font script="Osma" typeface="Ebrima"/>
+        <a:font script="Phag" typeface="Phagspa"/>
+        <a:font script="Syrn" typeface="Estrangelo Edessa"/>
+        <a:font script="Syrj" typeface="Estrangelo Edessa"/>
+        <a:font script="Syre" typeface="Estrangelo Edessa"/>
+        <a:font script="Sora" typeface="Nirmala UI"/>
+        <a:font script="Tale" typeface="Microsoft Tai Le"/>
+        <a:font script="Talu" typeface="Microsoft New Tai Lue"/>
+        <a:font script="Tfng" typeface="Ebrima"/>
+      </a:majorFont>
+      <a:minorFont>
+        <a:latin typeface="Aptos" panose="02110004020202020204"/>
+        <a:ea typeface=""/>
+        <a:cs typeface=""/>
+        <a:font script="Jpan" typeface="游ゴシック"/>
+        <a:font script="Hang" typeface="맑은 고딕"/>
+        <a:font script="Hans" typeface="等线"/>
+        <a:font script="Hant" typeface="新細明體"/>
+        <a:font script="Arab" typeface="Arial"/>
+        <a:font script="Hebr" typeface="Arial"/>
+        <a:font script="Thai" typeface="Cordia New"/>
+        <a:font script="Ethi" typeface="Nyala"/>
+        <a:font script="Beng" typeface="Vrinda"/>
+        <a:font script="Gujr" typeface="Shruti"/>
+        <a:font script="Khmr" typeface="DaunPenh"/>
+        <a:font script="Knda" typeface="Tunga"/>
+        <a:font script="Guru" typeface="Raavi"/>
+        <a:font script="Cans" typeface="Euphemia"/>
+        <a:font script="Cher" typeface="Plantagenet Cherokee"/>
+        <a:font script="Yiii" typeface="Microsoft Yi Baiti"/>
+        <a:font script="Tibt" typeface="Microsoft Himalaya"/>
+        <a:font script="Thaa" typeface="MV Boli"/>
+        <a:font script="Deva" typeface="Mangal"/>
+        <a:font script="Telu" typeface="Gautami"/>
+        <a:font script="Taml" typeface="Latha"/>
+        <a:font script="Syrc" typeface="Estrangelo Edessa"/>
+        <a:font script="Orya" typeface="Kalinga"/>
+        <a:font script="Mlym" typeface="Kartika"/>
+        <a:font script="Laoo" typeface="DokChampa"/>
+        <a:font script="Sinh" typeface="Iskoola Pota"/>
+        <a:font script="Mong" typeface="Mongolian Baiti"/>
+        <a:font script="Viet" typeface="Arial"/>
+        <a:font script="Uigh" typeface="Microsoft Uighur"/>
+        <a:font script="Geor" typeface="Sylfaen"/>
+        <a:font script="Armn" typeface="Arial"/>
+        <a:font script="Bugi" typeface="Leelawadee UI"/>
+        <a:font script="Bopo" typeface="Microsoft JhengHei"/>
+        <a:font script="Java" typeface="Javanese Text"/>
+        <a:font script="Lisu" typeface="Segoe UI"/>
+        <a:font script="Mymr" typeface="Myanmar Text"/>
+        <a:font script="Nkoo" typeface="Ebrima"/>
+        <a:font script="Olck" typeface="Nirmala UI"/>
+        <a:font script="Osma" typeface="Ebrima"/>
+        <a:font script="Phag" typeface="Phagspa"/>
+        <a:font script="Syrn" typeface="Estrangelo Edessa"/>
+        <a:font script="Syrj" typeface="Estrangelo Edessa"/>
+        <a:font script="Syre" typeface="Estrangelo Edessa"/>
+        <a:font script="Sora" typeface="Nirmala UI"/>
+        <a:font script="Tale" typeface="Microsoft Tai Le"/>
+        <a:font script="Talu" typeface="Microsoft New Tai Lue"/>
+        <a:font script="Tfng" typeface="Ebrima"/>
+      </a:minorFont>
+    </a:fontScheme>
+    <a:fmtScheme name="Office">
+      <a:fillStyleLst>
+        <a:solidFill>
+          <a:schemeClr val="phClr"/>
+        </a:solidFill>
+        <a:gradFill rotWithShape="1">
+          <a:gsLst>
+            <a:gs pos="0">
+              <a:schemeClr val="phClr">
+                <a:lumMod val="110000"/>
+                <a:satMod val="105000"/>
+                <a:tint val="67000"/>
+              </a:schemeClr>
+            </a:gs>
+            <a:gs pos="50000">
+              <a:schemeClr val="phClr">
+                <a:lumMod val="105000"/>
+                <a:satMod val="103000"/>
+                <a:tint val="73000"/>
+              </a:schemeClr>
+            </a:gs>
+            <a:gs pos="100000">
+              <a:schemeClr val="phClr">
+                <a:lumMod val="105000"/>
+                <a:satMod val="109000"/>
+                <a:tint val="81000"/>
+              </a:schemeClr>
+            </a:gs>
+          </a:gsLst>
+          <a:lin ang="5400000" scaled="0"/>
+        </a:gradFill>
+        <a:gradFill rotWithShape="1">
+          <a:gsLst>
+            <a:gs pos="0">
+              <a:schemeClr val="phClr">
+                <a:satMod val="103000"/>
+                <a:lumMod val="102000"/>
+                <a:tint val="94000"/>
+              </a:schemeClr>
+            </a:gs>
+            <a:gs pos="50000">
+              <a:schemeClr val="phClr">
+                <a:satMod val="110000"/>
+                <a:lumMod val="100000"/>
+                <a:shade val="100000"/>
+              </a:schemeClr>
+            </a:gs>
+            <a:gs pos="100000">
+              <a:schemeClr val="phClr">
+                <a:lumMod val="99000"/>
+                <a:satMod val="120000"/>
+                <a:shade val="78000"/>
+              </a:schemeClr>
+            </a:gs>
+          </a:gsLst>
+          <a:lin ang="5400000" scaled="0"/>
+        </a:gradFill>
+      </a:fillStyleLst>
+      <a:lnStyleLst>
+        <a:ln w="12700" cap="flat" cmpd="sng" algn="ctr">
+          <a:solidFill>
+            <a:schemeClr val="phClr"/>
+          </a:solidFill>
+          <a:prstDash val="solid"/>
+          <a:miter lim="800000"/>
+        </a:ln>
+        <a:ln w="19050" cap="flat" cmpd="sng" algn="ctr">
+          <a:solidFill>
+            <a:schemeClr val="phClr"/>
+          </a:solidFill>
+          <a:prstDash val="solid"/>
+          <a:miter lim="800000"/>
+        </a:ln>
+        <a:ln w="25400" cap="flat" cmpd="sng" algn="ctr">
+          <a:solidFill>
+            <a:schemeClr val="phClr"/>
+          </a:solidFill>
+          <a:prstDash val="solid"/>
+          <a:miter lim="800000"/>
+        </a:ln>
+      </a:lnStyleLst>
+      <a:effectStyleLst>
+        <a:effectStyle>
+          <a:effectLst/>
+        </a:effectStyle>
+        <a:effectStyle>
+          <a:effectLst/>
+        </a:effectStyle>
+        <a:effectStyle>
+          <a:effectLst>
+            <a:outerShdw blurRad="57150" dist="19050" dir="5400000" algn="ctr" rotWithShape="0">
+              <a:srgbClr val="000000">
+                <a:alpha val="63000"/>
+              </a:srgbClr>
+            </a:outerShdw>
+          </a:effectLst>
+        </a:effectStyle>
+      </a:effectStyleLst>
+      <a:bgFillStyleLst>
+        <a:solidFill>
+          <a:schemeClr val="phClr"/>
+        </a:solidFill>
+        <a:solidFill>
+          <a:schemeClr val="phClr">
+            <a:tint val="95000"/>
+            <a:satMod val="170000"/>
+          </a:schemeClr>
+        </a:solidFill>
+        <a:gradFill rotWithShape="1">
+          <a:gsLst>
+            <a:gs pos="0">
+              <a:schemeClr val="phClr">
+                <a:tint val="93000"/>
+                <a:satMod val="150000"/>
+                <a:shade val="98000"/>
+                <a:lumMod val="102000"/>
+              </a:schemeClr>
+            </a:gs>
+            <a:gs pos="50000">
+              <a:schemeClr val="phClr">
+                <a:tint val="98000"/>
+                <a:satMod val="130000"/>
+                <a:shade val="90000"/>
+                <a:lumMod val="103000"/>
+              </a:schemeClr>
+            </a:gs>
+            <a:gs pos="100000">
+              <a:schemeClr val="phClr">
+                <a:shade val="63000"/>
+                <a:satMod val="120000"/>
+              </a:schemeClr>
+            </a:gs>
+          </a:gsLst>
+          <a:lin ang="5400000" scaled="0"/>
+        </a:gradFill>
+      </a:bgFillStyleLst>
+    </a:fmtScheme>
+  </a:themeElements>
+  <a:objectDefaults>
+    <a:lnDef>
+      <a:spPr/>
+      <a:bodyPr/>
+      <a:lstStyle/>
+      <a:style>
+        <a:lnRef idx="2">
+          <a:schemeClr val="accent1"/>
+        </a:lnRef>
+        <a:fillRef idx="0">
+          <a:schemeClr val="accent1"/>
+        </a:fillRef>
+        <a:effectRef idx="1">
+          <a:schemeClr val="accent1"/>
+        </a:effectRef>
+        <a:fontRef idx="minor">
+          <a:schemeClr val="tx1"/>
+        </a:fontRef>
+      </a:style>
+    </a:lnDef>
+  </a:objectDefaults>
+  <a:extraClrSchemeLst/>
+  <a:extLst>
+    <a:ext uri="{05A4C25C-085E-4340-85A3-A5531E510DB2}">
+      <thm15:themeFamily xmlns:thm15="http://schemas.microsoft.com/office/thememl/2012/main" name="Office Theme" id="{2E142A2C-CD16-42D6-873A-C26D2A0506FA}" vid="{1BDDFF52-6CD6-40A5-AB3C-68EB2F1E4D0A}"/>
+    </a:ext>
+  </a:extLst>
+</a:theme>
 </file>
--- a/Nahiv/Avamil/Amil.pptx
+++ b/Nahiv/Avamil/Amil.pptx
@@ -124,7 +124,7 @@
   <pc:docChgLst>
     <pc:chgData name="Ayhan Karaman" userId="ec277a7f08761a62" providerId="LiveId" clId="{A7318BDB-BC3B-435E-9587-295F14AD73EF}"/>
     <pc:docChg chg="undo redo custSel addSld modSld">
-      <pc:chgData name="Ayhan Karaman" userId="ec277a7f08761a62" providerId="LiveId" clId="{A7318BDB-BC3B-435E-9587-295F14AD73EF}" dt="2026-10-12T18:36:10.923" v="4523" actId="115"/>
+      <pc:chgData name="Ayhan Karaman" userId="ec277a7f08761a62" providerId="LiveId" clId="{A7318BDB-BC3B-435E-9587-295F14AD73EF}" dt="2026-10-13T20:23:03.563" v="5932" actId="207"/>
       <pc:docMkLst>
         <pc:docMk/>
       </pc:docMkLst>
@@ -838,7 +838,7 @@
         </pc:graphicFrameChg>
       </pc:sldChg>
       <pc:sldChg chg="addSp delSp modSp add mod">
-        <pc:chgData name="Ayhan Karaman" userId="ec277a7f08761a62" providerId="LiveId" clId="{A7318BDB-BC3B-435E-9587-295F14AD73EF}" dt="2026-10-12T18:36:10.923" v="4523" actId="115"/>
+        <pc:chgData name="Ayhan Karaman" userId="ec277a7f08761a62" providerId="LiveId" clId="{A7318BDB-BC3B-435E-9587-295F14AD73EF}" dt="2026-10-13T20:23:03.563" v="5932" actId="207"/>
         <pc:sldMkLst>
           <pc:docMk/>
           <pc:sldMk cId="2335362230" sldId="259"/>
@@ -867,6 +867,78 @@
             <ac:spMk id="5" creationId="{D158510D-C4F3-24F0-5171-960FD2A8E88A}"/>
           </ac:spMkLst>
         </pc:spChg>
+        <pc:spChg chg="add mod">
+          <ac:chgData name="Ayhan Karaman" userId="ec277a7f08761a62" providerId="LiveId" clId="{A7318BDB-BC3B-435E-9587-295F14AD73EF}" dt="2026-10-13T19:40:58.711" v="4762" actId="164"/>
+          <ac:spMkLst>
+            <pc:docMk/>
+            <pc:sldMk cId="2335362230" sldId="259"/>
+            <ac:spMk id="6" creationId="{7D2E4C20-0447-30E0-F29F-D327E050685C}"/>
+          </ac:spMkLst>
+        </pc:spChg>
+        <pc:spChg chg="add mod">
+          <ac:chgData name="Ayhan Karaman" userId="ec277a7f08761a62" providerId="LiveId" clId="{A7318BDB-BC3B-435E-9587-295F14AD73EF}" dt="2026-10-13T19:40:58.711" v="4762" actId="164"/>
+          <ac:spMkLst>
+            <pc:docMk/>
+            <pc:sldMk cId="2335362230" sldId="259"/>
+            <ac:spMk id="18" creationId="{AAEF7D8B-3751-A359-3592-43BB2EEDE25A}"/>
+          </ac:spMkLst>
+        </pc:spChg>
+        <pc:spChg chg="add mod">
+          <ac:chgData name="Ayhan Karaman" userId="ec277a7f08761a62" providerId="LiveId" clId="{A7318BDB-BC3B-435E-9587-295F14AD73EF}" dt="2026-10-13T19:40:58.711" v="4762" actId="164"/>
+          <ac:spMkLst>
+            <pc:docMk/>
+            <pc:sldMk cId="2335362230" sldId="259"/>
+            <ac:spMk id="19" creationId="{3A52134C-2DF9-E525-0458-CA2866B3D0B4}"/>
+          </ac:spMkLst>
+        </pc:spChg>
+        <pc:spChg chg="add mod">
+          <ac:chgData name="Ayhan Karaman" userId="ec277a7f08761a62" providerId="LiveId" clId="{A7318BDB-BC3B-435E-9587-295F14AD73EF}" dt="2026-10-13T19:40:58.711" v="4762" actId="164"/>
+          <ac:spMkLst>
+            <pc:docMk/>
+            <pc:sldMk cId="2335362230" sldId="259"/>
+            <ac:spMk id="21" creationId="{4DB9819B-6F8F-25E8-EA01-12F8FC009ACF}"/>
+          </ac:spMkLst>
+        </pc:spChg>
+        <pc:spChg chg="add mod">
+          <ac:chgData name="Ayhan Karaman" userId="ec277a7f08761a62" providerId="LiveId" clId="{A7318BDB-BC3B-435E-9587-295F14AD73EF}" dt="2026-10-13T19:40:58.711" v="4762" actId="164"/>
+          <ac:spMkLst>
+            <pc:docMk/>
+            <pc:sldMk cId="2335362230" sldId="259"/>
+            <ac:spMk id="23" creationId="{6A0DFB13-2457-0871-2E76-D73848627200}"/>
+          </ac:spMkLst>
+        </pc:spChg>
+        <pc:spChg chg="add mod">
+          <ac:chgData name="Ayhan Karaman" userId="ec277a7f08761a62" providerId="LiveId" clId="{A7318BDB-BC3B-435E-9587-295F14AD73EF}" dt="2026-10-13T19:40:58.711" v="4762" actId="164"/>
+          <ac:spMkLst>
+            <pc:docMk/>
+            <pc:sldMk cId="2335362230" sldId="259"/>
+            <ac:spMk id="24" creationId="{8FAB844F-4D13-E1EA-A687-13F47F27F642}"/>
+          </ac:spMkLst>
+        </pc:spChg>
+        <pc:spChg chg="add del mod">
+          <ac:chgData name="Ayhan Karaman" userId="ec277a7f08761a62" providerId="LiveId" clId="{A7318BDB-BC3B-435E-9587-295F14AD73EF}" dt="2026-10-13T19:40:29.803" v="4758" actId="478"/>
+          <ac:spMkLst>
+            <pc:docMk/>
+            <pc:sldMk cId="2335362230" sldId="259"/>
+            <ac:spMk id="25" creationId="{E9C27C40-AA62-37E5-8E8E-9E5A79167D02}"/>
+          </ac:spMkLst>
+        </pc:spChg>
+        <pc:grpChg chg="add mod">
+          <ac:chgData name="Ayhan Karaman" userId="ec277a7f08761a62" providerId="LiveId" clId="{A7318BDB-BC3B-435E-9587-295F14AD73EF}" dt="2026-10-13T19:41:28.664" v="4765" actId="1076"/>
+          <ac:grpSpMkLst>
+            <pc:docMk/>
+            <pc:sldMk cId="2335362230" sldId="259"/>
+            <ac:grpSpMk id="26" creationId="{C710EE87-673A-5270-A032-BCB969695A0A}"/>
+          </ac:grpSpMkLst>
+        </pc:grpChg>
+        <pc:graphicFrameChg chg="add mod modGraphic">
+          <ac:chgData name="Ayhan Karaman" userId="ec277a7f08761a62" providerId="LiveId" clId="{A7318BDB-BC3B-435E-9587-295F14AD73EF}" dt="2026-10-13T20:23:03.563" v="5932" actId="207"/>
+          <ac:graphicFrameMkLst>
+            <pc:docMk/>
+            <pc:sldMk cId="2335362230" sldId="259"/>
+            <ac:graphicFrameMk id="5" creationId="{EF0AB340-BD1A-30F4-C1A2-8B28285BD2A8}"/>
+          </ac:graphicFrameMkLst>
+        </pc:graphicFrameChg>
         <pc:graphicFrameChg chg="del">
           <ac:chgData name="Ayhan Karaman" userId="ec277a7f08761a62" providerId="LiveId" clId="{A7318BDB-BC3B-435E-9587-295F14AD73EF}" dt="2026-10-12T18:28:29.326" v="4420" actId="478"/>
           <ac:graphicFrameMkLst>
@@ -883,6 +955,62 @@
             <ac:graphicFrameMk id="9" creationId="{A9FEB907-20A7-2D65-95C7-F8C5370DE7F9}"/>
           </ac:graphicFrameMkLst>
         </pc:graphicFrameChg>
+        <pc:cxnChg chg="add del mod">
+          <ac:chgData name="Ayhan Karaman" userId="ec277a7f08761a62" providerId="LiveId" clId="{A7318BDB-BC3B-435E-9587-295F14AD73EF}" dt="2026-10-13T19:30:30.547" v="4681" actId="478"/>
+          <ac:cxnSpMkLst>
+            <pc:docMk/>
+            <pc:sldMk cId="2335362230" sldId="259"/>
+            <ac:cxnSpMk id="8" creationId="{DAFDC77C-5583-E233-A857-F5CF60F21A7C}"/>
+          </ac:cxnSpMkLst>
+        </pc:cxnChg>
+        <pc:cxnChg chg="add mod">
+          <ac:chgData name="Ayhan Karaman" userId="ec277a7f08761a62" providerId="LiveId" clId="{A7318BDB-BC3B-435E-9587-295F14AD73EF}" dt="2026-10-13T19:40:58.711" v="4762" actId="164"/>
+          <ac:cxnSpMkLst>
+            <pc:docMk/>
+            <pc:sldMk cId="2335362230" sldId="259"/>
+            <ac:cxnSpMk id="10" creationId="{54B335BC-75BE-B895-AA95-8A0C7D1A9158}"/>
+          </ac:cxnSpMkLst>
+        </pc:cxnChg>
+        <pc:cxnChg chg="add mod">
+          <ac:chgData name="Ayhan Karaman" userId="ec277a7f08761a62" providerId="LiveId" clId="{A7318BDB-BC3B-435E-9587-295F14AD73EF}" dt="2026-10-13T19:40:58.711" v="4762" actId="164"/>
+          <ac:cxnSpMkLst>
+            <pc:docMk/>
+            <pc:sldMk cId="2335362230" sldId="259"/>
+            <ac:cxnSpMk id="13" creationId="{34F3F4C2-B117-D13B-74F8-078083DF1478}"/>
+          </ac:cxnSpMkLst>
+        </pc:cxnChg>
+        <pc:cxnChg chg="add mod">
+          <ac:chgData name="Ayhan Karaman" userId="ec277a7f08761a62" providerId="LiveId" clId="{A7318BDB-BC3B-435E-9587-295F14AD73EF}" dt="2026-10-13T19:40:58.711" v="4762" actId="164"/>
+          <ac:cxnSpMkLst>
+            <pc:docMk/>
+            <pc:sldMk cId="2335362230" sldId="259"/>
+            <ac:cxnSpMk id="14" creationId="{EA7D8A47-4B37-E726-3821-AE46DCF8E07A}"/>
+          </ac:cxnSpMkLst>
+        </pc:cxnChg>
+        <pc:cxnChg chg="add mod">
+          <ac:chgData name="Ayhan Karaman" userId="ec277a7f08761a62" providerId="LiveId" clId="{A7318BDB-BC3B-435E-9587-295F14AD73EF}" dt="2026-10-13T19:40:58.711" v="4762" actId="164"/>
+          <ac:cxnSpMkLst>
+            <pc:docMk/>
+            <pc:sldMk cId="2335362230" sldId="259"/>
+            <ac:cxnSpMk id="16" creationId="{4914C597-8D81-E8AB-1541-9A985D6B3C17}"/>
+          </ac:cxnSpMkLst>
+        </pc:cxnChg>
+        <pc:cxnChg chg="add mod">
+          <ac:chgData name="Ayhan Karaman" userId="ec277a7f08761a62" providerId="LiveId" clId="{A7318BDB-BC3B-435E-9587-295F14AD73EF}" dt="2026-10-13T19:40:58.711" v="4762" actId="164"/>
+          <ac:cxnSpMkLst>
+            <pc:docMk/>
+            <pc:sldMk cId="2335362230" sldId="259"/>
+            <ac:cxnSpMk id="20" creationId="{7120F408-8A67-1554-9455-83827E9F4530}"/>
+          </ac:cxnSpMkLst>
+        </pc:cxnChg>
+        <pc:cxnChg chg="add mod">
+          <ac:chgData name="Ayhan Karaman" userId="ec277a7f08761a62" providerId="LiveId" clId="{A7318BDB-BC3B-435E-9587-295F14AD73EF}" dt="2026-10-13T19:40:58.711" v="4762" actId="164"/>
+          <ac:cxnSpMkLst>
+            <pc:docMk/>
+            <pc:sldMk cId="2335362230" sldId="259"/>
+            <ac:cxnSpMk id="22" creationId="{5DC911A5-27EB-C920-4711-36CEE11BE77B}"/>
+          </ac:cxnSpMkLst>
+        </pc:cxnChg>
       </pc:sldChg>
       <pc:sldChg chg="modSp add mod">
         <pc:chgData name="Ayhan Karaman" userId="ec277a7f08761a62" providerId="LiveId" clId="{A7318BDB-BC3B-435E-9587-295F14AD73EF}" dt="2026-10-12T18:29:25.697" v="4475" actId="20577"/>
@@ -986,7 +1114,7 @@
           <a:p>
             <a:fld id="{FA2DF9BE-F4DC-4902-9C94-926DFEDD4A7A}" type="datetimeFigureOut">
               <a:rPr lang="tr-TR" smtClean="0"/>
-              <a:t>12.10.2026</a:t>
+              <a:t>13.10.2026</a:t>
             </a:fld>
             <a:endParaRPr lang="tr-TR"/>
           </a:p>
@@ -1652,7 +1780,7 @@
           <a:p>
             <a:fld id="{47B4E739-70D6-40BD-B9BF-46BF9FC7432A}" type="datetimeFigureOut">
               <a:rPr lang="tr-TR" smtClean="0"/>
-              <a:t>12.10.2026</a:t>
+              <a:t>13.10.2026</a:t>
             </a:fld>
             <a:endParaRPr lang="tr-TR"/>
           </a:p>
@@ -1850,7 +1978,7 @@
           <a:p>
             <a:fld id="{47B4E739-70D6-40BD-B9BF-46BF9FC7432A}" type="datetimeFigureOut">
               <a:rPr lang="tr-TR" smtClean="0"/>
-              <a:t>12.10.2026</a:t>
+              <a:t>13.10.2026</a:t>
             </a:fld>
             <a:endParaRPr lang="tr-TR"/>
           </a:p>
@@ -2058,7 +2186,7 @@
           <a:p>
             <a:fld id="{47B4E739-70D6-40BD-B9BF-46BF9FC7432A}" type="datetimeFigureOut">
               <a:rPr lang="tr-TR" smtClean="0"/>
-              <a:t>12.10.2026</a:t>
+              <a:t>13.10.2026</a:t>
             </a:fld>
             <a:endParaRPr lang="tr-TR"/>
           </a:p>
@@ -2256,7 +2384,7 @@
           <a:p>
             <a:fld id="{47B4E739-70D6-40BD-B9BF-46BF9FC7432A}" type="datetimeFigureOut">
               <a:rPr lang="tr-TR" smtClean="0"/>
-              <a:t>12.10.2026</a:t>
+              <a:t>13.10.2026</a:t>
             </a:fld>
             <a:endParaRPr lang="tr-TR"/>
           </a:p>
@@ -2531,7 +2659,7 @@
           <a:p>
             <a:fld id="{47B4E739-70D6-40BD-B9BF-46BF9FC7432A}" type="datetimeFigureOut">
               <a:rPr lang="tr-TR" smtClean="0"/>
-              <a:t>12.10.2026</a:t>
+              <a:t>13.10.2026</a:t>
             </a:fld>
             <a:endParaRPr lang="tr-TR"/>
           </a:p>
@@ -2796,7 +2924,7 @@
           <a:p>
             <a:fld id="{47B4E739-70D6-40BD-B9BF-46BF9FC7432A}" type="datetimeFigureOut">
               <a:rPr lang="tr-TR" smtClean="0"/>
-              <a:t>12.10.2026</a:t>
+              <a:t>13.10.2026</a:t>
             </a:fld>
             <a:endParaRPr lang="tr-TR"/>
           </a:p>
@@ -3208,7 +3336,7 @@
           <a:p>
             <a:fld id="{47B4E739-70D6-40BD-B9BF-46BF9FC7432A}" type="datetimeFigureOut">
               <a:rPr lang="tr-TR" smtClean="0"/>
-              <a:t>12.10.2026</a:t>
+              <a:t>13.10.2026</a:t>
             </a:fld>
             <a:endParaRPr lang="tr-TR"/>
           </a:p>
@@ -3349,7 +3477,7 @@
           <a:p>
             <a:fld id="{47B4E739-70D6-40BD-B9BF-46BF9FC7432A}" type="datetimeFigureOut">
               <a:rPr lang="tr-TR" smtClean="0"/>
-              <a:t>12.10.2026</a:t>
+              <a:t>13.10.2026</a:t>
             </a:fld>
             <a:endParaRPr lang="tr-TR"/>
           </a:p>
@@ -3462,7 +3590,7 @@
           <a:p>
             <a:fld id="{47B4E739-70D6-40BD-B9BF-46BF9FC7432A}" type="datetimeFigureOut">
               <a:rPr lang="tr-TR" smtClean="0"/>
-              <a:t>12.10.2026</a:t>
+              <a:t>13.10.2026</a:t>
             </a:fld>
             <a:endParaRPr lang="tr-TR"/>
           </a:p>
@@ -3773,7 +3901,7 @@
           <a:p>
             <a:fld id="{47B4E739-70D6-40BD-B9BF-46BF9FC7432A}" type="datetimeFigureOut">
               <a:rPr lang="tr-TR" smtClean="0"/>
-              <a:t>12.10.2026</a:t>
+              <a:t>13.10.2026</a:t>
             </a:fld>
             <a:endParaRPr lang="tr-TR"/>
           </a:p>
@@ -4061,7 +4189,7 @@
           <a:p>
             <a:fld id="{47B4E739-70D6-40BD-B9BF-46BF9FC7432A}" type="datetimeFigureOut">
               <a:rPr lang="tr-TR" smtClean="0"/>
-              <a:t>12.10.2026</a:t>
+              <a:t>13.10.2026</a:t>
             </a:fld>
             <a:endParaRPr lang="tr-TR"/>
           </a:p>
@@ -4302,7 +4430,7 @@
           <a:p>
             <a:fld id="{47B4E739-70D6-40BD-B9BF-46BF9FC7432A}" type="datetimeFigureOut">
               <a:rPr lang="tr-TR" smtClean="0"/>
-              <a:t>12.10.2026</a:t>
+              <a:t>13.10.2026</a:t>
             </a:fld>
             <a:endParaRPr lang="tr-TR"/>
           </a:p>
@@ -9944,6 +10072,1876 @@
           </a:p>
         </p:txBody>
       </p:sp>
+      <p:graphicFrame>
+        <p:nvGraphicFramePr>
+          <p:cNvPr id="5" name="Tablo 4">
+            <a:extLst>
+              <a:ext uri="{FF2B5EF4-FFF2-40B4-BE49-F238E27FC236}">
+                <a16:creationId xmlns:a16="http://schemas.microsoft.com/office/drawing/2014/main" id="{EF0AB340-BD1A-30F4-C1A2-8B28285BD2A8}"/>
+              </a:ext>
+            </a:extLst>
+          </p:cNvPr>
+          <p:cNvGraphicFramePr>
+            <a:graphicFrameLocks noGrp="1"/>
+          </p:cNvGraphicFramePr>
+          <p:nvPr>
+            <p:extLst>
+              <p:ext uri="{D42A27DB-BD31-4B8C-83A1-F6EECF244321}">
+                <p14:modId xmlns:p14="http://schemas.microsoft.com/office/powerpoint/2010/main" val="2471447212"/>
+              </p:ext>
+            </p:extLst>
+          </p:nvPr>
+        </p:nvGraphicFramePr>
+        <p:xfrm>
+          <a:off x="59267" y="667258"/>
+          <a:ext cx="12073464" cy="4311147"/>
+        </p:xfrm>
+        <a:graphic>
+          <a:graphicData uri="http://schemas.openxmlformats.org/drawingml/2006/table">
+            <a:tbl>
+              <a:tblPr firstRow="1" bandRow="1">
+                <a:tableStyleId>{5C22544A-7EE6-4342-B048-85BDC9FD1C3A}</a:tableStyleId>
+              </a:tblPr>
+              <a:tblGrid>
+                <a:gridCol w="1247019">
+                  <a:extLst>
+                    <a:ext uri="{9D8B030D-6E8A-4147-A177-3AD203B41FA5}">
+                      <a16:colId xmlns:a16="http://schemas.microsoft.com/office/drawing/2014/main" val="3242288309"/>
+                    </a:ext>
+                  </a:extLst>
+                </a:gridCol>
+                <a:gridCol w="1750423">
+                  <a:extLst>
+                    <a:ext uri="{9D8B030D-6E8A-4147-A177-3AD203B41FA5}">
+                      <a16:colId xmlns:a16="http://schemas.microsoft.com/office/drawing/2014/main" val="2112445330"/>
+                    </a:ext>
+                  </a:extLst>
+                </a:gridCol>
+                <a:gridCol w="9076022">
+                  <a:extLst>
+                    <a:ext uri="{9D8B030D-6E8A-4147-A177-3AD203B41FA5}">
+                      <a16:colId xmlns:a16="http://schemas.microsoft.com/office/drawing/2014/main" val="317297140"/>
+                    </a:ext>
+                  </a:extLst>
+                </a:gridCol>
+              </a:tblGrid>
+              <a:tr h="629067">
+                <a:tc>
+                  <a:txBody>
+                    <a:bodyPr/>
+                    <a:lstStyle/>
+                    <a:p>
+                      <a:r>
+                        <a:rPr lang="tr-TR" dirty="0"/>
+                        <a:t>Harf-i Cer</a:t>
+                      </a:r>
+                    </a:p>
+                  </a:txBody>
+                  <a:tcPr/>
+                </a:tc>
+                <a:tc>
+                  <a:txBody>
+                    <a:bodyPr/>
+                    <a:lstStyle/>
+                    <a:p>
+                      <a:r>
+                        <a:rPr lang="tr-TR" dirty="0"/>
+                        <a:t>Mana</a:t>
+                      </a:r>
+                    </a:p>
+                  </a:txBody>
+                  <a:tcPr/>
+                </a:tc>
+                <a:tc>
+                  <a:txBody>
+                    <a:bodyPr/>
+                    <a:lstStyle/>
+                    <a:p>
+                      <a:r>
+                        <a:rPr lang="tr-TR" dirty="0"/>
+                        <a:t>Misal</a:t>
+                      </a:r>
+                    </a:p>
+                  </a:txBody>
+                  <a:tcPr/>
+                </a:tc>
+                <a:extLst>
+                  <a:ext uri="{0D108BD9-81ED-4DB2-BD59-A6C34878D82A}">
+                    <a16:rowId xmlns:a16="http://schemas.microsoft.com/office/drawing/2014/main" val="3289731430"/>
+                  </a:ext>
+                </a:extLst>
+              </a:tr>
+              <a:tr h="449333">
+                <a:tc>
+                  <a:txBody>
+                    <a:bodyPr/>
+                    <a:lstStyle/>
+                    <a:p>
+                      <a:pPr algn="ctr"/>
+                      <a:r>
+                        <a:rPr lang="ar-AE" sz="2400" b="1" dirty="0">
+                          <a:solidFill>
+                            <a:srgbClr val="C00000"/>
+                          </a:solidFill>
+                          <a:latin typeface="Algerian" panose="04020705040A02060702" pitchFamily="82" charset="0"/>
+                        </a:rPr>
+                        <a:t>إِنَّ</a:t>
+                      </a:r>
+                      <a:endParaRPr lang="tr-TR" sz="2400" b="1" dirty="0">
+                        <a:solidFill>
+                          <a:srgbClr val="C00000"/>
+                        </a:solidFill>
+                        <a:latin typeface="Algerian" panose="04020705040A02060702" pitchFamily="82" charset="0"/>
+                      </a:endParaRPr>
+                    </a:p>
+                  </a:txBody>
+                  <a:tcPr/>
+                </a:tc>
+                <a:tc>
+                  <a:txBody>
+                    <a:bodyPr/>
+                    <a:lstStyle/>
+                    <a:p>
+                      <a:pPr algn="ctr"/>
+                      <a:r>
+                        <a:rPr lang="tr-TR" sz="1800" dirty="0"/>
+                        <a:t>Muhakkak Ki </a:t>
+                      </a:r>
+                    </a:p>
+                  </a:txBody>
+                  <a:tcPr/>
+                </a:tc>
+                <a:tc>
+                  <a:txBody>
+                    <a:bodyPr/>
+                    <a:lstStyle/>
+                    <a:p>
+                      <a:pPr algn="ctr"/>
+                      <a:r>
+                        <a:rPr lang="ar-AE" sz="1600" b="1" kern="1200" dirty="0">
+                          <a:solidFill>
+                            <a:srgbClr val="FF0000"/>
+                          </a:solidFill>
+                          <a:latin typeface="Arabic Typesetting" panose="03020402040406030203" pitchFamily="66" charset="-78"/>
+                          <a:ea typeface="Amiri" panose="00000500000000000000" pitchFamily="2" charset="-78"/>
+                          <a:cs typeface="Arabic Typesetting" panose="03020402040406030203" pitchFamily="66" charset="-78"/>
+                        </a:rPr>
+                        <a:t>إِنَّ</a:t>
+                      </a:r>
+                      <a:r>
+                        <a:rPr lang="ar-AE" sz="1600" b="1" kern="1200" dirty="0">
+                          <a:solidFill>
+                            <a:schemeClr val="tx1"/>
+                          </a:solidFill>
+                          <a:latin typeface="Arabic Typesetting" panose="03020402040406030203" pitchFamily="66" charset="-78"/>
+                          <a:ea typeface="Amiri" panose="00000500000000000000" pitchFamily="2" charset="-78"/>
+                          <a:cs typeface="Arabic Typesetting" panose="03020402040406030203" pitchFamily="66" charset="-78"/>
+                        </a:rPr>
+                        <a:t> </a:t>
+                      </a:r>
+                      <a:r>
+                        <a:rPr lang="ar-AE" sz="1600" b="1" kern="1200" dirty="0">
+                          <a:solidFill>
+                            <a:srgbClr val="0000CC"/>
+                          </a:solidFill>
+                          <a:latin typeface="Arabic Typesetting" panose="03020402040406030203" pitchFamily="66" charset="-78"/>
+                          <a:ea typeface="Amiri" panose="00000500000000000000" pitchFamily="2" charset="-78"/>
+                          <a:cs typeface="Arabic Typesetting" panose="03020402040406030203" pitchFamily="66" charset="-78"/>
+                        </a:rPr>
+                        <a:t>اللَّهَ</a:t>
+                      </a:r>
+                      <a:r>
+                        <a:rPr lang="ar-AE" sz="1600" b="1" kern="1200" dirty="0">
+                          <a:solidFill>
+                            <a:schemeClr val="tx1"/>
+                          </a:solidFill>
+                          <a:latin typeface="Arabic Typesetting" panose="03020402040406030203" pitchFamily="66" charset="-78"/>
+                          <a:ea typeface="Amiri" panose="00000500000000000000" pitchFamily="2" charset="-78"/>
+                          <a:cs typeface="Arabic Typesetting" panose="03020402040406030203" pitchFamily="66" charset="-78"/>
+                        </a:rPr>
+                        <a:t> تَعَالَى </a:t>
+                      </a:r>
+                      <a:r>
+                        <a:rPr lang="ar-AE" sz="1600" b="1" kern="1200" dirty="0">
+                          <a:solidFill>
+                            <a:schemeClr val="accent6">
+                              <a:lumMod val="50000"/>
+                            </a:schemeClr>
+                          </a:solidFill>
+                          <a:latin typeface="Arabic Typesetting" panose="03020402040406030203" pitchFamily="66" charset="-78"/>
+                          <a:ea typeface="Amiri" panose="00000500000000000000" pitchFamily="2" charset="-78"/>
+                          <a:cs typeface="Arabic Typesetting" panose="03020402040406030203" pitchFamily="66" charset="-78"/>
+                        </a:rPr>
+                        <a:t>عَالِمُ </a:t>
+                      </a:r>
+                      <a:r>
+                        <a:rPr lang="ar-AE" sz="1600" b="1" kern="1200" dirty="0">
+                          <a:solidFill>
+                            <a:schemeClr val="tx1"/>
+                          </a:solidFill>
+                          <a:latin typeface="Arabic Typesetting" panose="03020402040406030203" pitchFamily="66" charset="-78"/>
+                          <a:ea typeface="Amiri" panose="00000500000000000000" pitchFamily="2" charset="-78"/>
+                          <a:cs typeface="Arabic Typesetting" panose="03020402040406030203" pitchFamily="66" charset="-78"/>
+                        </a:rPr>
+                        <a:t>كُلِّ شَيْءٍ</a:t>
+                      </a:r>
+                      <a:r>
+                        <a:rPr lang="ar-AE" sz="1600" b="1" kern="1200" dirty="0">
+                          <a:solidFill>
+                            <a:schemeClr val="accent6">
+                              <a:lumMod val="50000"/>
+                            </a:schemeClr>
+                          </a:solidFill>
+                          <a:latin typeface="Arabic Typesetting" panose="03020402040406030203" pitchFamily="66" charset="-78"/>
+                          <a:ea typeface="Amiri" panose="00000500000000000000" pitchFamily="2" charset="-78"/>
+                          <a:cs typeface="Arabic Typesetting" panose="03020402040406030203" pitchFamily="66" charset="-78"/>
+                        </a:rPr>
+                        <a:t>  </a:t>
+                      </a:r>
+                      <a:r>
+                        <a:rPr lang="tr-TR" sz="1600" b="1" kern="1200" dirty="0">
+                          <a:solidFill>
+                            <a:schemeClr val="accent6">
+                              <a:lumMod val="50000"/>
+                            </a:schemeClr>
+                          </a:solidFill>
+                          <a:latin typeface="Arabic Typesetting" panose="03020402040406030203" pitchFamily="66" charset="-78"/>
+                          <a:ea typeface="Amiri" panose="00000500000000000000" pitchFamily="2" charset="-78"/>
+                          <a:cs typeface="Arabic Typesetting" panose="03020402040406030203" pitchFamily="66" charset="-78"/>
+                        </a:rPr>
+                        <a:t>   </a:t>
+                      </a:r>
+                      <a:r>
+                        <a:rPr lang="tr-TR" sz="1600" b="1" kern="1200" dirty="0">
+                          <a:solidFill>
+                            <a:schemeClr val="tx1"/>
+                          </a:solidFill>
+                          <a:latin typeface="Arabic Typesetting" panose="03020402040406030203" pitchFamily="66" charset="-78"/>
+                          <a:ea typeface="Amiri" panose="00000500000000000000" pitchFamily="2" charset="-78"/>
+                          <a:cs typeface="Arabic Typesetting" panose="03020402040406030203" pitchFamily="66" charset="-78"/>
+                        </a:rPr>
+                        <a:t>/</a:t>
+                      </a:r>
+                      <a:r>
+                        <a:rPr lang="tr-TR" sz="1600" b="1" kern="1200" dirty="0">
+                          <a:solidFill>
+                            <a:schemeClr val="accent6">
+                              <a:lumMod val="50000"/>
+                            </a:schemeClr>
+                          </a:solidFill>
+                          <a:latin typeface="Arabic Typesetting" panose="03020402040406030203" pitchFamily="66" charset="-78"/>
+                          <a:ea typeface="Amiri" panose="00000500000000000000" pitchFamily="2" charset="-78"/>
+                          <a:cs typeface="Arabic Typesetting" panose="03020402040406030203" pitchFamily="66" charset="-78"/>
+                        </a:rPr>
+                        <a:t>  </a:t>
+                      </a:r>
+                      <a:r>
+                        <a:rPr lang="tr-TR" sz="1600" b="1" kern="1200" dirty="0">
+                          <a:solidFill>
+                            <a:schemeClr val="tx1"/>
+                          </a:solidFill>
+                          <a:latin typeface="Arabic Typesetting" panose="03020402040406030203" pitchFamily="66" charset="-78"/>
+                          <a:ea typeface="Amiri" panose="00000500000000000000" pitchFamily="2" charset="-78"/>
+                          <a:cs typeface="Arabic Typesetting" panose="03020402040406030203" pitchFamily="66" charset="-78"/>
+                        </a:rPr>
+                        <a:t>Muhakkak ki </a:t>
+                      </a:r>
+                      <a:r>
+                        <a:rPr lang="tr-TR" sz="1600" b="1" kern="1200" dirty="0" err="1">
+                          <a:solidFill>
+                            <a:schemeClr val="tx1"/>
+                          </a:solidFill>
+                          <a:latin typeface="Arabic Typesetting" panose="03020402040406030203" pitchFamily="66" charset="-78"/>
+                          <a:ea typeface="Amiri" panose="00000500000000000000" pitchFamily="2" charset="-78"/>
+                          <a:cs typeface="Arabic Typesetting" panose="03020402040406030203" pitchFamily="66" charset="-78"/>
+                        </a:rPr>
+                        <a:t>Allah’u</a:t>
+                      </a:r>
+                      <a:r>
+                        <a:rPr lang="tr-TR" sz="1600" b="1" kern="1200" dirty="0">
+                          <a:solidFill>
+                            <a:schemeClr val="tx1"/>
+                          </a:solidFill>
+                          <a:latin typeface="Arabic Typesetting" panose="03020402040406030203" pitchFamily="66" charset="-78"/>
+                          <a:ea typeface="Amiri" panose="00000500000000000000" pitchFamily="2" charset="-78"/>
+                          <a:cs typeface="Arabic Typesetting" panose="03020402040406030203" pitchFamily="66" charset="-78"/>
+                        </a:rPr>
+                        <a:t> Teala her şeyi bilicidir.</a:t>
+                      </a:r>
+                      <a:endParaRPr lang="tr-TR" sz="1600" b="1" kern="1200" dirty="0">
+                        <a:solidFill>
+                          <a:schemeClr val="accent6">
+                            <a:lumMod val="50000"/>
+                          </a:schemeClr>
+                        </a:solidFill>
+                        <a:latin typeface="Arabic Typesetting" panose="03020402040406030203" pitchFamily="66" charset="-78"/>
+                        <a:ea typeface="Amiri" panose="00000500000000000000" pitchFamily="2" charset="-78"/>
+                        <a:cs typeface="Arabic Typesetting" panose="03020402040406030203" pitchFamily="66" charset="-78"/>
+                      </a:endParaRPr>
+                    </a:p>
+                  </a:txBody>
+                  <a:tcPr/>
+                </a:tc>
+                <a:extLst>
+                  <a:ext uri="{0D108BD9-81ED-4DB2-BD59-A6C34878D82A}">
+                    <a16:rowId xmlns:a16="http://schemas.microsoft.com/office/drawing/2014/main" val="3898272618"/>
+                  </a:ext>
+                </a:extLst>
+              </a:tr>
+              <a:tr h="449333">
+                <a:tc>
+                  <a:txBody>
+                    <a:bodyPr/>
+                    <a:lstStyle/>
+                    <a:p>
+                      <a:pPr algn="ctr"/>
+                      <a:r>
+                        <a:rPr lang="ar-AE" sz="2400" b="1" dirty="0">
+                          <a:solidFill>
+                            <a:srgbClr val="C00000"/>
+                          </a:solidFill>
+                          <a:latin typeface="Algerian" panose="04020705040A02060702" pitchFamily="82" charset="0"/>
+                        </a:rPr>
+                        <a:t>أَنَّ</a:t>
+                      </a:r>
+                      <a:endParaRPr lang="tr-TR" sz="2400" b="1" dirty="0">
+                        <a:solidFill>
+                          <a:srgbClr val="C00000"/>
+                        </a:solidFill>
+                        <a:latin typeface="Algerian" panose="04020705040A02060702" pitchFamily="82" charset="0"/>
+                      </a:endParaRPr>
+                    </a:p>
+                  </a:txBody>
+                  <a:tcPr/>
+                </a:tc>
+                <a:tc>
+                  <a:txBody>
+                    <a:bodyPr/>
+                    <a:lstStyle/>
+                    <a:p>
+                      <a:pPr algn="ctr"/>
+                      <a:r>
+                        <a:rPr lang="tr-TR" sz="1800" dirty="0"/>
+                        <a:t>Muhakkak Ki </a:t>
+                      </a:r>
+                    </a:p>
+                  </a:txBody>
+                  <a:tcPr/>
+                </a:tc>
+                <a:tc>
+                  <a:txBody>
+                    <a:bodyPr/>
+                    <a:lstStyle/>
+                    <a:p>
+                      <a:pPr algn="ctr"/>
+                      <a:r>
+                        <a:rPr lang="ar-AE" sz="1600" b="1" dirty="0">
+                          <a:solidFill>
+                            <a:schemeClr val="tx1"/>
+                          </a:solidFill>
+                          <a:latin typeface="Arabic Typesetting" panose="03020402040406030203" pitchFamily="66" charset="-78"/>
+                          <a:cs typeface="Arabic Typesetting" panose="03020402040406030203" pitchFamily="66" charset="-78"/>
+                        </a:rPr>
+                        <a:t>إِعْتَقَدْتُ </a:t>
+                      </a:r>
+                      <a:r>
+                        <a:rPr lang="ar-AE" sz="1600" b="1" dirty="0">
+                          <a:solidFill>
+                            <a:srgbClr val="C00000"/>
+                          </a:solidFill>
+                          <a:latin typeface="Arabic Typesetting" panose="03020402040406030203" pitchFamily="66" charset="-78"/>
+                          <a:cs typeface="Arabic Typesetting" panose="03020402040406030203" pitchFamily="66" charset="-78"/>
+                        </a:rPr>
+                        <a:t>أَنَّ</a:t>
+                      </a:r>
+                      <a:r>
+                        <a:rPr lang="ar-AE" sz="1600" b="1" dirty="0">
+                          <a:solidFill>
+                            <a:schemeClr val="tx1"/>
+                          </a:solidFill>
+                          <a:latin typeface="Arabic Typesetting" panose="03020402040406030203" pitchFamily="66" charset="-78"/>
+                          <a:cs typeface="Arabic Typesetting" panose="03020402040406030203" pitchFamily="66" charset="-78"/>
+                        </a:rPr>
+                        <a:t> </a:t>
+                      </a:r>
+                      <a:r>
+                        <a:rPr lang="ar-AE" sz="1600" b="1" dirty="0">
+                          <a:solidFill>
+                            <a:srgbClr val="0000CC"/>
+                          </a:solidFill>
+                          <a:latin typeface="Arabic Typesetting" panose="03020402040406030203" pitchFamily="66" charset="-78"/>
+                          <a:cs typeface="Arabic Typesetting" panose="03020402040406030203" pitchFamily="66" charset="-78"/>
+                        </a:rPr>
+                        <a:t>اللَّهَ</a:t>
+                      </a:r>
+                      <a:r>
+                        <a:rPr lang="ar-AE" sz="1600" b="1" dirty="0">
+                          <a:solidFill>
+                            <a:schemeClr val="tx1"/>
+                          </a:solidFill>
+                          <a:latin typeface="Arabic Typesetting" panose="03020402040406030203" pitchFamily="66" charset="-78"/>
+                          <a:cs typeface="Arabic Typesetting" panose="03020402040406030203" pitchFamily="66" charset="-78"/>
+                        </a:rPr>
+                        <a:t> تَعَالَى </a:t>
+                      </a:r>
+                      <a:r>
+                        <a:rPr lang="ar-AE" sz="1600" b="1" dirty="0">
+                          <a:solidFill>
+                            <a:schemeClr val="accent6">
+                              <a:lumMod val="50000"/>
+                            </a:schemeClr>
+                          </a:solidFill>
+                          <a:latin typeface="Arabic Typesetting" panose="03020402040406030203" pitchFamily="66" charset="-78"/>
+                          <a:cs typeface="Arabic Typesetting" panose="03020402040406030203" pitchFamily="66" charset="-78"/>
+                        </a:rPr>
+                        <a:t>قَادِرٌ</a:t>
+                      </a:r>
+                      <a:r>
+                        <a:rPr lang="ar-AE" sz="1600" b="1" dirty="0">
+                          <a:solidFill>
+                            <a:schemeClr val="tx1"/>
+                          </a:solidFill>
+                          <a:latin typeface="Arabic Typesetting" panose="03020402040406030203" pitchFamily="66" charset="-78"/>
+                          <a:cs typeface="Arabic Typesetting" panose="03020402040406030203" pitchFamily="66" charset="-78"/>
+                        </a:rPr>
+                        <a:t> عَلَي كُلِّ شَيْءٍ</a:t>
+                      </a:r>
+                      <a:r>
+                        <a:rPr lang="tr-TR" sz="1600" b="1" dirty="0">
+                          <a:solidFill>
+                            <a:schemeClr val="tx1"/>
+                          </a:solidFill>
+                          <a:latin typeface="Arabic Typesetting" panose="03020402040406030203" pitchFamily="66" charset="-78"/>
+                          <a:cs typeface="Arabic Typesetting" panose="03020402040406030203" pitchFamily="66" charset="-78"/>
+                        </a:rPr>
+                        <a:t>  / Muhakkak ki </a:t>
+                      </a:r>
+                      <a:r>
+                        <a:rPr lang="tr-TR" sz="1600" b="1" dirty="0" err="1">
+                          <a:solidFill>
+                            <a:schemeClr val="tx1"/>
+                          </a:solidFill>
+                          <a:latin typeface="Arabic Typesetting" panose="03020402040406030203" pitchFamily="66" charset="-78"/>
+                          <a:cs typeface="Arabic Typesetting" panose="03020402040406030203" pitchFamily="66" charset="-78"/>
+                        </a:rPr>
+                        <a:t>Allah’u</a:t>
+                      </a:r>
+                      <a:r>
+                        <a:rPr lang="tr-TR" sz="1600" b="1" dirty="0">
+                          <a:solidFill>
+                            <a:schemeClr val="tx1"/>
+                          </a:solidFill>
+                          <a:latin typeface="Arabic Typesetting" panose="03020402040406030203" pitchFamily="66" charset="-78"/>
+                          <a:cs typeface="Arabic Typesetting" panose="03020402040406030203" pitchFamily="66" charset="-78"/>
+                        </a:rPr>
+                        <a:t> Teala’nın her şey üzerine kadir olduğuna itikat ettim.</a:t>
+                      </a:r>
+                    </a:p>
+                  </a:txBody>
+                  <a:tcPr/>
+                </a:tc>
+                <a:extLst>
+                  <a:ext uri="{0D108BD9-81ED-4DB2-BD59-A6C34878D82A}">
+                    <a16:rowId xmlns:a16="http://schemas.microsoft.com/office/drawing/2014/main" val="2209876613"/>
+                  </a:ext>
+                </a:extLst>
+              </a:tr>
+              <a:tr h="463320">
+                <a:tc>
+                  <a:txBody>
+                    <a:bodyPr/>
+                    <a:lstStyle/>
+                    <a:p>
+                      <a:pPr algn="ctr"/>
+                      <a:r>
+                        <a:rPr lang="ar-AE" sz="2400" b="1" dirty="0">
+                          <a:solidFill>
+                            <a:srgbClr val="C00000"/>
+                          </a:solidFill>
+                          <a:latin typeface="Algerian" panose="04020705040A02060702" pitchFamily="82" charset="0"/>
+                        </a:rPr>
+                        <a:t>كَأَنَّ</a:t>
+                      </a:r>
+                      <a:endParaRPr lang="tr-TR" sz="2400" b="1" dirty="0">
+                        <a:solidFill>
+                          <a:srgbClr val="C00000"/>
+                        </a:solidFill>
+                        <a:latin typeface="Algerian" panose="04020705040A02060702" pitchFamily="82" charset="0"/>
+                      </a:endParaRPr>
+                    </a:p>
+                  </a:txBody>
+                  <a:tcPr/>
+                </a:tc>
+                <a:tc>
+                  <a:txBody>
+                    <a:bodyPr/>
+                    <a:lstStyle/>
+                    <a:p>
+                      <a:pPr algn="ctr"/>
+                      <a:r>
+                        <a:rPr lang="tr-TR" sz="1800" dirty="0"/>
+                        <a:t>Gibi </a:t>
+                      </a:r>
+                    </a:p>
+                  </a:txBody>
+                  <a:tcPr/>
+                </a:tc>
+                <a:tc>
+                  <a:txBody>
+                    <a:bodyPr/>
+                    <a:lstStyle/>
+                    <a:p>
+                      <a:pPr algn="ctr"/>
+                      <a:r>
+                        <a:rPr lang="ar-AE" sz="1600" b="1" dirty="0">
+                          <a:solidFill>
+                            <a:srgbClr val="C00000"/>
+                          </a:solidFill>
+                          <a:latin typeface="Arabic Typesetting" panose="03020402040406030203" pitchFamily="66" charset="-78"/>
+                          <a:cs typeface="Arabic Typesetting" panose="03020402040406030203" pitchFamily="66" charset="-78"/>
+                        </a:rPr>
+                        <a:t>كَأَنَّ</a:t>
+                      </a:r>
+                      <a:r>
+                        <a:rPr lang="ar-AE" sz="1600" b="1" dirty="0">
+                          <a:latin typeface="Arabic Typesetting" panose="03020402040406030203" pitchFamily="66" charset="-78"/>
+                          <a:cs typeface="Arabic Typesetting" panose="03020402040406030203" pitchFamily="66" charset="-78"/>
+                        </a:rPr>
+                        <a:t> </a:t>
+                      </a:r>
+                      <a:r>
+                        <a:rPr lang="ar-AE" sz="1600" b="1" dirty="0">
+                          <a:solidFill>
+                            <a:srgbClr val="0000CC"/>
+                          </a:solidFill>
+                          <a:latin typeface="Arabic Typesetting" panose="03020402040406030203" pitchFamily="66" charset="-78"/>
+                          <a:cs typeface="Arabic Typesetting" panose="03020402040406030203" pitchFamily="66" charset="-78"/>
+                        </a:rPr>
+                        <a:t>الْحَرَامَ</a:t>
+                      </a:r>
+                      <a:r>
+                        <a:rPr lang="ar-AE" sz="1600" b="1" dirty="0">
+                          <a:latin typeface="Arabic Typesetting" panose="03020402040406030203" pitchFamily="66" charset="-78"/>
+                          <a:cs typeface="Arabic Typesetting" panose="03020402040406030203" pitchFamily="66" charset="-78"/>
+                        </a:rPr>
+                        <a:t> </a:t>
+                      </a:r>
+                      <a:r>
+                        <a:rPr lang="ar-AE" sz="1600" b="1" dirty="0">
+                          <a:solidFill>
+                            <a:schemeClr val="accent6">
+                              <a:lumMod val="50000"/>
+                            </a:schemeClr>
+                          </a:solidFill>
+                          <a:latin typeface="Arabic Typesetting" panose="03020402040406030203" pitchFamily="66" charset="-78"/>
+                          <a:cs typeface="Arabic Typesetting" panose="03020402040406030203" pitchFamily="66" charset="-78"/>
+                        </a:rPr>
+                        <a:t>نَارٌ</a:t>
+                      </a:r>
+                      <a:r>
+                        <a:rPr lang="tr-TR" sz="1600" b="1" dirty="0">
+                          <a:solidFill>
+                            <a:schemeClr val="accent6">
+                              <a:lumMod val="50000"/>
+                            </a:schemeClr>
+                          </a:solidFill>
+                          <a:latin typeface="Arabic Typesetting" panose="03020402040406030203" pitchFamily="66" charset="-78"/>
+                          <a:cs typeface="Arabic Typesetting" panose="03020402040406030203" pitchFamily="66" charset="-78"/>
+                        </a:rPr>
+                        <a:t>  </a:t>
+                      </a:r>
+                      <a:r>
+                        <a:rPr lang="tr-TR" sz="1600" b="1" dirty="0">
+                          <a:solidFill>
+                            <a:schemeClr val="tx1"/>
+                          </a:solidFill>
+                          <a:latin typeface="Arabic Typesetting" panose="03020402040406030203" pitchFamily="66" charset="-78"/>
+                          <a:cs typeface="Arabic Typesetting" panose="03020402040406030203" pitchFamily="66" charset="-78"/>
+                        </a:rPr>
+                        <a:t>/</a:t>
+                      </a:r>
+                      <a:r>
+                        <a:rPr lang="tr-TR" sz="1600" b="1" dirty="0">
+                          <a:solidFill>
+                            <a:schemeClr val="accent6">
+                              <a:lumMod val="50000"/>
+                            </a:schemeClr>
+                          </a:solidFill>
+                          <a:latin typeface="Arabic Typesetting" panose="03020402040406030203" pitchFamily="66" charset="-78"/>
+                          <a:cs typeface="Arabic Typesetting" panose="03020402040406030203" pitchFamily="66" charset="-78"/>
+                        </a:rPr>
+                        <a:t>  </a:t>
+                      </a:r>
+                      <a:r>
+                        <a:rPr lang="tr-TR" sz="1600" b="1" dirty="0">
+                          <a:solidFill>
+                            <a:schemeClr val="tx1"/>
+                          </a:solidFill>
+                          <a:latin typeface="Arabic Typesetting" panose="03020402040406030203" pitchFamily="66" charset="-78"/>
+                          <a:cs typeface="Arabic Typesetting" panose="03020402040406030203" pitchFamily="66" charset="-78"/>
+                        </a:rPr>
+                        <a:t>Haram sanki ateş gibidir.</a:t>
+                      </a:r>
+                    </a:p>
+                  </a:txBody>
+                  <a:tcPr/>
+                </a:tc>
+                <a:extLst>
+                  <a:ext uri="{0D108BD9-81ED-4DB2-BD59-A6C34878D82A}">
+                    <a16:rowId xmlns:a16="http://schemas.microsoft.com/office/drawing/2014/main" val="1718483269"/>
+                  </a:ext>
+                </a:extLst>
+              </a:tr>
+              <a:tr h="463320">
+                <a:tc>
+                  <a:txBody>
+                    <a:bodyPr/>
+                    <a:lstStyle/>
+                    <a:p>
+                      <a:pPr algn="ctr"/>
+                      <a:r>
+                        <a:rPr lang="ar-AE" sz="2400" b="1" dirty="0">
+                          <a:solidFill>
+                            <a:srgbClr val="C00000"/>
+                          </a:solidFill>
+                          <a:latin typeface="Algerian" panose="04020705040A02060702" pitchFamily="82" charset="0"/>
+                        </a:rPr>
+                        <a:t>لَكِنَّ</a:t>
+                      </a:r>
+                      <a:endParaRPr lang="tr-TR" sz="2400" b="1" dirty="0">
+                        <a:solidFill>
+                          <a:srgbClr val="C00000"/>
+                        </a:solidFill>
+                        <a:latin typeface="Algerian" panose="04020705040A02060702" pitchFamily="82" charset="0"/>
+                      </a:endParaRPr>
+                    </a:p>
+                  </a:txBody>
+                  <a:tcPr/>
+                </a:tc>
+                <a:tc>
+                  <a:txBody>
+                    <a:bodyPr/>
+                    <a:lstStyle/>
+                    <a:p>
+                      <a:pPr algn="ctr"/>
+                      <a:r>
+                        <a:rPr lang="tr-TR" sz="1800" dirty="0"/>
+                        <a:t>Ancak</a:t>
+                      </a:r>
+                    </a:p>
+                  </a:txBody>
+                  <a:tcPr/>
+                </a:tc>
+                <a:tc>
+                  <a:txBody>
+                    <a:bodyPr/>
+                    <a:lstStyle/>
+                    <a:p>
+                      <a:pPr algn="ctr"/>
+                      <a:r>
+                        <a:rPr lang="ar-AE" sz="1600" b="1" dirty="0">
+                          <a:latin typeface="Arabic Typesetting" panose="03020402040406030203" pitchFamily="66" charset="-78"/>
+                          <a:cs typeface="Arabic Typesetting" panose="03020402040406030203" pitchFamily="66" charset="-78"/>
+                        </a:rPr>
+                        <a:t>مَا فَازَ الْجَاهِلُ </a:t>
+                      </a:r>
+                      <a:r>
+                        <a:rPr lang="ar-AE" sz="1600" b="1" dirty="0">
+                          <a:solidFill>
+                            <a:srgbClr val="C00000"/>
+                          </a:solidFill>
+                          <a:latin typeface="Arabic Typesetting" panose="03020402040406030203" pitchFamily="66" charset="-78"/>
+                          <a:cs typeface="Arabic Typesetting" panose="03020402040406030203" pitchFamily="66" charset="-78"/>
+                        </a:rPr>
+                        <a:t>لَكِنَّ</a:t>
+                      </a:r>
+                      <a:r>
+                        <a:rPr lang="ar-AE" sz="1600" b="1" dirty="0">
+                          <a:latin typeface="Arabic Typesetting" panose="03020402040406030203" pitchFamily="66" charset="-78"/>
+                          <a:cs typeface="Arabic Typesetting" panose="03020402040406030203" pitchFamily="66" charset="-78"/>
+                        </a:rPr>
+                        <a:t> </a:t>
+                      </a:r>
+                      <a:r>
+                        <a:rPr lang="ar-AE" sz="1600" b="1" dirty="0">
+                          <a:solidFill>
+                            <a:srgbClr val="0000CC"/>
+                          </a:solidFill>
+                          <a:latin typeface="Arabic Typesetting" panose="03020402040406030203" pitchFamily="66" charset="-78"/>
+                          <a:cs typeface="Arabic Typesetting" panose="03020402040406030203" pitchFamily="66" charset="-78"/>
+                        </a:rPr>
+                        <a:t>الْعَالِمَ</a:t>
+                      </a:r>
+                      <a:r>
+                        <a:rPr lang="ar-AE" sz="1600" b="1" dirty="0">
+                          <a:latin typeface="Arabic Typesetting" panose="03020402040406030203" pitchFamily="66" charset="-78"/>
+                          <a:cs typeface="Arabic Typesetting" panose="03020402040406030203" pitchFamily="66" charset="-78"/>
+                        </a:rPr>
+                        <a:t> </a:t>
+                      </a:r>
+                      <a:r>
+                        <a:rPr lang="ar-AE" sz="1600" b="1" dirty="0">
+                          <a:solidFill>
+                            <a:schemeClr val="accent6">
+                              <a:lumMod val="50000"/>
+                            </a:schemeClr>
+                          </a:solidFill>
+                          <a:latin typeface="Arabic Typesetting" panose="03020402040406030203" pitchFamily="66" charset="-78"/>
+                          <a:cs typeface="Arabic Typesetting" panose="03020402040406030203" pitchFamily="66" charset="-78"/>
+                        </a:rPr>
+                        <a:t>فَائِزٌ</a:t>
+                      </a:r>
+                      <a:r>
+                        <a:rPr lang="tr-TR" sz="1600" b="1" dirty="0">
+                          <a:solidFill>
+                            <a:schemeClr val="accent6">
+                              <a:lumMod val="50000"/>
+                            </a:schemeClr>
+                          </a:solidFill>
+                          <a:latin typeface="Arabic Typesetting" panose="03020402040406030203" pitchFamily="66" charset="-78"/>
+                          <a:cs typeface="Arabic Typesetting" panose="03020402040406030203" pitchFamily="66" charset="-78"/>
+                        </a:rPr>
+                        <a:t> </a:t>
+                      </a:r>
+                      <a:r>
+                        <a:rPr lang="tr-TR" sz="1600" b="1" dirty="0">
+                          <a:solidFill>
+                            <a:schemeClr val="tx1"/>
+                          </a:solidFill>
+                          <a:latin typeface="Arabic Typesetting" panose="03020402040406030203" pitchFamily="66" charset="-78"/>
+                          <a:cs typeface="Arabic Typesetting" panose="03020402040406030203" pitchFamily="66" charset="-78"/>
+                        </a:rPr>
+                        <a:t>/ Cahil kurtulmadı fakat alim </a:t>
+                      </a:r>
+                      <a:r>
+                        <a:rPr lang="tr-TR" sz="1600" b="1" dirty="0" err="1">
+                          <a:solidFill>
+                            <a:schemeClr val="tx1"/>
+                          </a:solidFill>
+                          <a:latin typeface="Arabic Typesetting" panose="03020402040406030203" pitchFamily="66" charset="-78"/>
+                          <a:cs typeface="Arabic Typesetting" panose="03020402040406030203" pitchFamily="66" charset="-78"/>
+                        </a:rPr>
+                        <a:t>kurtulucudur</a:t>
+                      </a:r>
+                      <a:r>
+                        <a:rPr lang="tr-TR" sz="1600" b="1" dirty="0">
+                          <a:solidFill>
+                            <a:schemeClr val="tx1"/>
+                          </a:solidFill>
+                          <a:latin typeface="Arabic Typesetting" panose="03020402040406030203" pitchFamily="66" charset="-78"/>
+                          <a:cs typeface="Arabic Typesetting" panose="03020402040406030203" pitchFamily="66" charset="-78"/>
+                        </a:rPr>
+                        <a:t>.</a:t>
+                      </a:r>
+                    </a:p>
+                  </a:txBody>
+                  <a:tcPr/>
+                </a:tc>
+                <a:extLst>
+                  <a:ext uri="{0D108BD9-81ED-4DB2-BD59-A6C34878D82A}">
+                    <a16:rowId xmlns:a16="http://schemas.microsoft.com/office/drawing/2014/main" val="98950525"/>
+                  </a:ext>
+                </a:extLst>
+              </a:tr>
+              <a:tr h="449333">
+                <a:tc>
+                  <a:txBody>
+                    <a:bodyPr/>
+                    <a:lstStyle/>
+                    <a:p>
+                      <a:pPr algn="ctr"/>
+                      <a:r>
+                        <a:rPr lang="ar-AE" sz="2400" b="1" dirty="0">
+                          <a:solidFill>
+                            <a:srgbClr val="C00000"/>
+                          </a:solidFill>
+                          <a:latin typeface="Algerian" panose="04020705040A02060702" pitchFamily="82" charset="0"/>
+                        </a:rPr>
+                        <a:t>لَيْتَ</a:t>
+                      </a:r>
+                      <a:endParaRPr lang="tr-TR" sz="2400" b="1" dirty="0">
+                        <a:solidFill>
+                          <a:srgbClr val="C00000"/>
+                        </a:solidFill>
+                        <a:latin typeface="Algerian" panose="04020705040A02060702" pitchFamily="82" charset="0"/>
+                      </a:endParaRPr>
+                    </a:p>
+                  </a:txBody>
+                  <a:tcPr/>
+                </a:tc>
+                <a:tc>
+                  <a:txBody>
+                    <a:bodyPr/>
+                    <a:lstStyle/>
+                    <a:p>
+                      <a:pPr algn="ctr"/>
+                      <a:r>
+                        <a:rPr lang="tr-TR" sz="1800" dirty="0"/>
+                        <a:t>Keşke</a:t>
+                      </a:r>
+                    </a:p>
+                  </a:txBody>
+                  <a:tcPr/>
+                </a:tc>
+                <a:tc>
+                  <a:txBody>
+                    <a:bodyPr/>
+                    <a:lstStyle/>
+                    <a:p>
+                      <a:pPr algn="ctr"/>
+                      <a:r>
+                        <a:rPr lang="ar-AE" sz="1600" b="1" dirty="0">
+                          <a:solidFill>
+                            <a:srgbClr val="C00000"/>
+                          </a:solidFill>
+                          <a:latin typeface="Arabic Typesetting" panose="03020402040406030203" pitchFamily="66" charset="-78"/>
+                          <a:cs typeface="Arabic Typesetting" panose="03020402040406030203" pitchFamily="66" charset="-78"/>
+                        </a:rPr>
+                        <a:t>لَيْتَ</a:t>
+                      </a:r>
+                      <a:r>
+                        <a:rPr lang="ar-AE" sz="1600" b="1" dirty="0">
+                          <a:latin typeface="Arabic Typesetting" panose="03020402040406030203" pitchFamily="66" charset="-78"/>
+                          <a:cs typeface="Arabic Typesetting" panose="03020402040406030203" pitchFamily="66" charset="-78"/>
+                        </a:rPr>
+                        <a:t> </a:t>
+                      </a:r>
+                      <a:r>
+                        <a:rPr lang="ar-AE" sz="1600" b="1" dirty="0">
+                          <a:solidFill>
+                            <a:srgbClr val="0000CC"/>
+                          </a:solidFill>
+                          <a:latin typeface="Arabic Typesetting" panose="03020402040406030203" pitchFamily="66" charset="-78"/>
+                          <a:cs typeface="Arabic Typesetting" panose="03020402040406030203" pitchFamily="66" charset="-78"/>
+                        </a:rPr>
+                        <a:t>الْعِلْمَ</a:t>
+                      </a:r>
+                      <a:r>
+                        <a:rPr lang="ar-AE" sz="1600" b="1" dirty="0">
+                          <a:latin typeface="Arabic Typesetting" panose="03020402040406030203" pitchFamily="66" charset="-78"/>
+                          <a:cs typeface="Arabic Typesetting" panose="03020402040406030203" pitchFamily="66" charset="-78"/>
+                        </a:rPr>
+                        <a:t> </a:t>
+                      </a:r>
+                      <a:r>
+                        <a:rPr lang="ar-AE" sz="1600" b="1" dirty="0">
+                          <a:solidFill>
+                            <a:schemeClr val="accent6">
+                              <a:lumMod val="50000"/>
+                            </a:schemeClr>
+                          </a:solidFill>
+                          <a:latin typeface="Arabic Typesetting" panose="03020402040406030203" pitchFamily="66" charset="-78"/>
+                          <a:cs typeface="Arabic Typesetting" panose="03020402040406030203" pitchFamily="66" charset="-78"/>
+                        </a:rPr>
+                        <a:t>مَرْزُوقٌ</a:t>
+                      </a:r>
+                      <a:r>
+                        <a:rPr lang="ar-AE" sz="1600" b="1" dirty="0">
+                          <a:latin typeface="Arabic Typesetting" panose="03020402040406030203" pitchFamily="66" charset="-78"/>
+                          <a:cs typeface="Arabic Typesetting" panose="03020402040406030203" pitchFamily="66" charset="-78"/>
+                        </a:rPr>
+                        <a:t> لِكُلِّ أَحَدٍ</a:t>
+                      </a:r>
+                      <a:r>
+                        <a:rPr lang="tr-TR" sz="1600" b="1" dirty="0">
+                          <a:latin typeface="Arabic Typesetting" panose="03020402040406030203" pitchFamily="66" charset="-78"/>
+                          <a:cs typeface="Arabic Typesetting" panose="03020402040406030203" pitchFamily="66" charset="-78"/>
+                        </a:rPr>
+                        <a:t> / Keşke ilim herkese rızık olsaydı.</a:t>
+                      </a:r>
+                    </a:p>
+                  </a:txBody>
+                  <a:tcPr/>
+                </a:tc>
+                <a:extLst>
+                  <a:ext uri="{0D108BD9-81ED-4DB2-BD59-A6C34878D82A}">
+                    <a16:rowId xmlns:a16="http://schemas.microsoft.com/office/drawing/2014/main" val="3359397602"/>
+                  </a:ext>
+                </a:extLst>
+              </a:tr>
+              <a:tr h="449333">
+                <a:tc>
+                  <a:txBody>
+                    <a:bodyPr/>
+                    <a:lstStyle/>
+                    <a:p>
+                      <a:pPr algn="ctr"/>
+                      <a:r>
+                        <a:rPr lang="ar-AE" sz="2400" b="1" dirty="0">
+                          <a:solidFill>
+                            <a:srgbClr val="C00000"/>
+                          </a:solidFill>
+                          <a:latin typeface="Algerian" panose="04020705040A02060702" pitchFamily="82" charset="0"/>
+                        </a:rPr>
+                        <a:t>لَعَلَّ</a:t>
+                      </a:r>
+                      <a:endParaRPr lang="tr-TR" sz="2400" b="1" dirty="0">
+                        <a:solidFill>
+                          <a:srgbClr val="C00000"/>
+                        </a:solidFill>
+                        <a:latin typeface="Algerian" panose="04020705040A02060702" pitchFamily="82" charset="0"/>
+                      </a:endParaRPr>
+                    </a:p>
+                  </a:txBody>
+                  <a:tcPr/>
+                </a:tc>
+                <a:tc>
+                  <a:txBody>
+                    <a:bodyPr/>
+                    <a:lstStyle/>
+                    <a:p>
+                      <a:pPr algn="ctr"/>
+                      <a:r>
+                        <a:rPr lang="tr-TR" sz="1800" dirty="0"/>
+                        <a:t>Umulur ki</a:t>
+                      </a:r>
+                    </a:p>
+                  </a:txBody>
+                  <a:tcPr/>
+                </a:tc>
+                <a:tc>
+                  <a:txBody>
+                    <a:bodyPr/>
+                    <a:lstStyle/>
+                    <a:p>
+                      <a:pPr algn="ctr"/>
+                      <a:r>
+                        <a:rPr lang="ar-AE" sz="1600" b="1" dirty="0">
+                          <a:solidFill>
+                            <a:srgbClr val="C00000"/>
+                          </a:solidFill>
+                          <a:latin typeface="Arabic Typesetting" panose="03020402040406030203" pitchFamily="66" charset="-78"/>
+                          <a:cs typeface="Arabic Typesetting" panose="03020402040406030203" pitchFamily="66" charset="-78"/>
+                        </a:rPr>
+                        <a:t>لَعَلَّ</a:t>
+                      </a:r>
+                      <a:r>
+                        <a:rPr lang="ar-AE" sz="1600" b="1" dirty="0">
+                          <a:latin typeface="Arabic Typesetting" panose="03020402040406030203" pitchFamily="66" charset="-78"/>
+                          <a:cs typeface="Arabic Typesetting" panose="03020402040406030203" pitchFamily="66" charset="-78"/>
+                        </a:rPr>
+                        <a:t> </a:t>
+                      </a:r>
+                      <a:r>
+                        <a:rPr lang="ar-AE" sz="1600" b="1" dirty="0">
+                          <a:solidFill>
+                            <a:srgbClr val="0000CC"/>
+                          </a:solidFill>
+                          <a:latin typeface="Arabic Typesetting" panose="03020402040406030203" pitchFamily="66" charset="-78"/>
+                          <a:cs typeface="Arabic Typesetting" panose="03020402040406030203" pitchFamily="66" charset="-78"/>
+                        </a:rPr>
+                        <a:t>اللَّهَ</a:t>
+                      </a:r>
+                      <a:r>
+                        <a:rPr lang="ar-AE" sz="1600" b="1" dirty="0">
+                          <a:latin typeface="Arabic Typesetting" panose="03020402040406030203" pitchFamily="66" charset="-78"/>
+                          <a:cs typeface="Arabic Typesetting" panose="03020402040406030203" pitchFamily="66" charset="-78"/>
+                        </a:rPr>
+                        <a:t> تَعَالَى </a:t>
+                      </a:r>
+                      <a:r>
+                        <a:rPr lang="ar-AE" sz="1600" b="1" dirty="0">
+                          <a:solidFill>
+                            <a:schemeClr val="accent6">
+                              <a:lumMod val="50000"/>
+                            </a:schemeClr>
+                          </a:solidFill>
+                          <a:latin typeface="Arabic Typesetting" panose="03020402040406030203" pitchFamily="66" charset="-78"/>
+                          <a:cs typeface="Arabic Typesetting" panose="03020402040406030203" pitchFamily="66" charset="-78"/>
+                        </a:rPr>
+                        <a:t>غَافِرُ</a:t>
+                      </a:r>
+                      <a:r>
+                        <a:rPr lang="ar-AE" sz="1600" b="1" dirty="0">
+                          <a:latin typeface="Arabic Typesetting" panose="03020402040406030203" pitchFamily="66" charset="-78"/>
+                          <a:cs typeface="Arabic Typesetting" panose="03020402040406030203" pitchFamily="66" charset="-78"/>
+                        </a:rPr>
+                        <a:t> ذَنْبِي</a:t>
+                      </a:r>
+                      <a:r>
+                        <a:rPr lang="tr-TR" sz="1600" b="1" dirty="0">
+                          <a:latin typeface="Arabic Typesetting" panose="03020402040406030203" pitchFamily="66" charset="-78"/>
+                          <a:cs typeface="Arabic Typesetting" panose="03020402040406030203" pitchFamily="66" charset="-78"/>
+                        </a:rPr>
+                        <a:t> / Umulur ki Allah Teala günahımı mağfiret eder.</a:t>
+                      </a:r>
+                    </a:p>
+                  </a:txBody>
+                  <a:tcPr/>
+                </a:tc>
+                <a:extLst>
+                  <a:ext uri="{0D108BD9-81ED-4DB2-BD59-A6C34878D82A}">
+                    <a16:rowId xmlns:a16="http://schemas.microsoft.com/office/drawing/2014/main" val="4078668120"/>
+                  </a:ext>
+                </a:extLst>
+              </a:tr>
+              <a:tr h="463320">
+                <a:tc>
+                  <a:txBody>
+                    <a:bodyPr/>
+                    <a:lstStyle/>
+                    <a:p>
+                      <a:pPr algn="ctr"/>
+                      <a:r>
+                        <a:rPr lang="ar-AE" sz="2400" b="1" dirty="0">
+                          <a:solidFill>
+                            <a:srgbClr val="C00000"/>
+                          </a:solidFill>
+                          <a:latin typeface="Algerian" panose="04020705040A02060702" pitchFamily="82" charset="0"/>
+                        </a:rPr>
+                        <a:t>إِلَّا</a:t>
+                      </a:r>
+                      <a:endParaRPr lang="tr-TR" sz="2400" b="1" dirty="0">
+                        <a:solidFill>
+                          <a:srgbClr val="C00000"/>
+                        </a:solidFill>
+                        <a:latin typeface="Algerian" panose="04020705040A02060702" pitchFamily="82" charset="0"/>
+                      </a:endParaRPr>
+                    </a:p>
+                  </a:txBody>
+                  <a:tcPr/>
+                </a:tc>
+                <a:tc>
+                  <a:txBody>
+                    <a:bodyPr/>
+                    <a:lstStyle/>
+                    <a:p>
+                      <a:pPr algn="ctr"/>
+                      <a:r>
+                        <a:rPr lang="tr-TR" sz="1800" dirty="0"/>
+                        <a:t>Ancak</a:t>
+                      </a:r>
+                    </a:p>
+                  </a:txBody>
+                  <a:tcPr/>
+                </a:tc>
+                <a:tc>
+                  <a:txBody>
+                    <a:bodyPr/>
+                    <a:lstStyle/>
+                    <a:p>
+                      <a:pPr algn="ctr"/>
+                      <a:r>
+                        <a:rPr lang="ar-AE" sz="1600" b="1" dirty="0">
+                          <a:latin typeface="Arabic Typesetting" panose="03020402040406030203" pitchFamily="66" charset="-78"/>
+                          <a:cs typeface="Arabic Typesetting" panose="03020402040406030203" pitchFamily="66" charset="-78"/>
+                        </a:rPr>
+                        <a:t>اَلْمَعْصِيَّةُ مُبَعِّدَةٌ عَنِ الْجَنَّةِ </a:t>
+                      </a:r>
+                      <a:r>
+                        <a:rPr lang="ar-AE" sz="1600" b="1" dirty="0">
+                          <a:solidFill>
+                            <a:srgbClr val="C00000"/>
+                          </a:solidFill>
+                          <a:latin typeface="Arabic Typesetting" panose="03020402040406030203" pitchFamily="66" charset="-78"/>
+                          <a:cs typeface="Arabic Typesetting" panose="03020402040406030203" pitchFamily="66" charset="-78"/>
+                        </a:rPr>
+                        <a:t>إِلَّا</a:t>
+                      </a:r>
+                      <a:r>
+                        <a:rPr lang="ar-AE" sz="1600" b="1" dirty="0">
+                          <a:latin typeface="Arabic Typesetting" panose="03020402040406030203" pitchFamily="66" charset="-78"/>
+                          <a:cs typeface="Arabic Typesetting" panose="03020402040406030203" pitchFamily="66" charset="-78"/>
+                        </a:rPr>
+                        <a:t> </a:t>
+                      </a:r>
+                      <a:r>
+                        <a:rPr lang="ar-AE" sz="1600" b="1" dirty="0">
+                          <a:solidFill>
+                            <a:srgbClr val="0000CC"/>
+                          </a:solidFill>
+                          <a:latin typeface="Arabic Typesetting" panose="03020402040406030203" pitchFamily="66" charset="-78"/>
+                          <a:cs typeface="Arabic Typesetting" panose="03020402040406030203" pitchFamily="66" charset="-78"/>
+                        </a:rPr>
+                        <a:t>الطَّاعَةَ</a:t>
+                      </a:r>
+                      <a:r>
+                        <a:rPr lang="ar-AE" sz="1600" b="1" dirty="0">
+                          <a:latin typeface="Arabic Typesetting" panose="03020402040406030203" pitchFamily="66" charset="-78"/>
+                          <a:cs typeface="Arabic Typesetting" panose="03020402040406030203" pitchFamily="66" charset="-78"/>
+                        </a:rPr>
+                        <a:t> </a:t>
+                      </a:r>
+                      <a:r>
+                        <a:rPr lang="ar-AE" sz="1600" b="1" dirty="0">
+                          <a:solidFill>
+                            <a:schemeClr val="accent6">
+                              <a:lumMod val="50000"/>
+                            </a:schemeClr>
+                          </a:solidFill>
+                          <a:latin typeface="Arabic Typesetting" panose="03020402040406030203" pitchFamily="66" charset="-78"/>
+                          <a:cs typeface="Arabic Typesetting" panose="03020402040406030203" pitchFamily="66" charset="-78"/>
+                        </a:rPr>
+                        <a:t>مُقَرَّبَةٌ</a:t>
+                      </a:r>
+                      <a:r>
+                        <a:rPr lang="ar-AE" sz="1600" b="1" dirty="0">
+                          <a:latin typeface="Arabic Typesetting" panose="03020402040406030203" pitchFamily="66" charset="-78"/>
+                          <a:cs typeface="Arabic Typesetting" panose="03020402040406030203" pitchFamily="66" charset="-78"/>
+                        </a:rPr>
+                        <a:t> مِنْهَا</a:t>
+                      </a:r>
+                      <a:r>
+                        <a:rPr lang="tr-TR" sz="1600" b="1" dirty="0">
+                          <a:latin typeface="Arabic Typesetting" panose="03020402040406030203" pitchFamily="66" charset="-78"/>
+                          <a:cs typeface="Arabic Typesetting" panose="03020402040406030203" pitchFamily="66" charset="-78"/>
+                        </a:rPr>
+                        <a:t> / Günah cennetten uzaklaştırıcıdır. Ancak itaat ise ona yaklaştırıcıdır. </a:t>
+                      </a:r>
+                      <a:r>
+                        <a:rPr lang="tr-TR" sz="1600" b="1" u="sng" dirty="0">
+                          <a:solidFill>
+                            <a:schemeClr val="accent2">
+                              <a:lumMod val="50000"/>
+                            </a:schemeClr>
+                          </a:solidFill>
+                          <a:latin typeface="Arabic Typesetting" panose="03020402040406030203" pitchFamily="66" charset="-78"/>
+                          <a:cs typeface="Arabic Typesetting" panose="03020402040406030203" pitchFamily="66" charset="-78"/>
+                        </a:rPr>
+                        <a:t>(İstisna-i </a:t>
+                      </a:r>
+                      <a:r>
+                        <a:rPr lang="tr-TR" sz="1600" b="1" u="sng" dirty="0" err="1">
+                          <a:solidFill>
+                            <a:schemeClr val="accent2">
+                              <a:lumMod val="50000"/>
+                            </a:schemeClr>
+                          </a:solidFill>
+                          <a:latin typeface="Arabic Typesetting" panose="03020402040406030203" pitchFamily="66" charset="-78"/>
+                          <a:cs typeface="Arabic Typesetting" panose="03020402040406030203" pitchFamily="66" charset="-78"/>
+                        </a:rPr>
+                        <a:t>Munkatı</a:t>
+                      </a:r>
+                      <a:r>
+                        <a:rPr lang="tr-TR" sz="1600" b="1" u="sng" dirty="0">
+                          <a:solidFill>
+                            <a:schemeClr val="accent2">
+                              <a:lumMod val="50000"/>
+                            </a:schemeClr>
+                          </a:solidFill>
+                          <a:latin typeface="Arabic Typesetting" panose="03020402040406030203" pitchFamily="66" charset="-78"/>
+                          <a:cs typeface="Arabic Typesetting" panose="03020402040406030203" pitchFamily="66" charset="-78"/>
+                        </a:rPr>
+                        <a:t>)</a:t>
+                      </a:r>
+                    </a:p>
+                  </a:txBody>
+                  <a:tcPr/>
+                </a:tc>
+                <a:extLst>
+                  <a:ext uri="{0D108BD9-81ED-4DB2-BD59-A6C34878D82A}">
+                    <a16:rowId xmlns:a16="http://schemas.microsoft.com/office/drawing/2014/main" val="3184782361"/>
+                  </a:ext>
+                </a:extLst>
+              </a:tr>
+              <a:tr h="463320">
+                <a:tc>
+                  <a:txBody>
+                    <a:bodyPr/>
+                    <a:lstStyle/>
+                    <a:p>
+                      <a:pPr algn="ctr"/>
+                      <a:r>
+                        <a:rPr lang="ar-AE" sz="2400" b="1" dirty="0">
+                          <a:solidFill>
+                            <a:srgbClr val="C00000"/>
+                          </a:solidFill>
+                          <a:latin typeface="Algerian" panose="04020705040A02060702" pitchFamily="82" charset="0"/>
+                        </a:rPr>
+                        <a:t>لَا</a:t>
+                      </a:r>
+                      <a:endParaRPr lang="tr-TR" sz="2400" b="1" dirty="0">
+                        <a:solidFill>
+                          <a:srgbClr val="C00000"/>
+                        </a:solidFill>
+                        <a:latin typeface="Algerian" panose="04020705040A02060702" pitchFamily="82" charset="0"/>
+                      </a:endParaRPr>
+                    </a:p>
+                  </a:txBody>
+                  <a:tcPr/>
+                </a:tc>
+                <a:tc>
+                  <a:txBody>
+                    <a:bodyPr/>
+                    <a:lstStyle/>
+                    <a:p>
+                      <a:pPr algn="ctr"/>
+                      <a:r>
+                        <a:rPr lang="tr-TR" sz="1800" dirty="0"/>
+                        <a:t>Hiçbir</a:t>
+                      </a:r>
+                    </a:p>
+                  </a:txBody>
+                  <a:tcPr/>
+                </a:tc>
+                <a:tc>
+                  <a:txBody>
+                    <a:bodyPr/>
+                    <a:lstStyle/>
+                    <a:p>
+                      <a:pPr algn="ctr"/>
+                      <a:r>
+                        <a:rPr lang="ar-AE" sz="1600" b="1" dirty="0">
+                          <a:solidFill>
+                            <a:srgbClr val="C00000"/>
+                          </a:solidFill>
+                          <a:latin typeface="Arabic Typesetting" panose="03020402040406030203" pitchFamily="66" charset="-78"/>
+                          <a:cs typeface="Arabic Typesetting" panose="03020402040406030203" pitchFamily="66" charset="-78"/>
+                        </a:rPr>
+                        <a:t>لَا</a:t>
+                      </a:r>
+                      <a:r>
+                        <a:rPr lang="ar-AE" sz="1600" b="1" dirty="0">
+                          <a:latin typeface="Arabic Typesetting" panose="03020402040406030203" pitchFamily="66" charset="-78"/>
+                          <a:cs typeface="Arabic Typesetting" panose="03020402040406030203" pitchFamily="66" charset="-78"/>
+                        </a:rPr>
+                        <a:t> </a:t>
+                      </a:r>
+                      <a:r>
+                        <a:rPr lang="ar-AE" sz="1600" b="1" dirty="0">
+                          <a:solidFill>
+                            <a:srgbClr val="0000CC"/>
+                          </a:solidFill>
+                          <a:latin typeface="Arabic Typesetting" panose="03020402040406030203" pitchFamily="66" charset="-78"/>
+                          <a:cs typeface="Arabic Typesetting" panose="03020402040406030203" pitchFamily="66" charset="-78"/>
+                        </a:rPr>
+                        <a:t>فَاعِلَ</a:t>
+                      </a:r>
+                      <a:r>
+                        <a:rPr lang="ar-AE" sz="1600" b="1" dirty="0">
+                          <a:latin typeface="Arabic Typesetting" panose="03020402040406030203" pitchFamily="66" charset="-78"/>
+                          <a:cs typeface="Arabic Typesetting" panose="03020402040406030203" pitchFamily="66" charset="-78"/>
+                        </a:rPr>
+                        <a:t> شَرٍّ </a:t>
+                      </a:r>
+                      <a:r>
+                        <a:rPr lang="ar-AE" sz="1600" b="1" dirty="0">
+                          <a:solidFill>
+                            <a:schemeClr val="accent6">
+                              <a:lumMod val="50000"/>
+                            </a:schemeClr>
+                          </a:solidFill>
+                          <a:latin typeface="Arabic Typesetting" panose="03020402040406030203" pitchFamily="66" charset="-78"/>
+                          <a:cs typeface="Arabic Typesetting" panose="03020402040406030203" pitchFamily="66" charset="-78"/>
+                        </a:rPr>
+                        <a:t>فَائِزٌ</a:t>
+                      </a:r>
+                      <a:r>
+                        <a:rPr lang="tr-TR" sz="1600" b="1" dirty="0">
+                          <a:solidFill>
+                            <a:schemeClr val="accent6">
+                              <a:lumMod val="50000"/>
+                            </a:schemeClr>
+                          </a:solidFill>
+                          <a:latin typeface="Arabic Typesetting" panose="03020402040406030203" pitchFamily="66" charset="-78"/>
+                          <a:cs typeface="Arabic Typesetting" panose="03020402040406030203" pitchFamily="66" charset="-78"/>
+                        </a:rPr>
+                        <a:t> </a:t>
+                      </a:r>
+                      <a:r>
+                        <a:rPr lang="tr-TR" sz="1600" b="1" dirty="0">
+                          <a:solidFill>
+                            <a:schemeClr val="tx1"/>
+                          </a:solidFill>
+                          <a:latin typeface="Arabic Typesetting" panose="03020402040406030203" pitchFamily="66" charset="-78"/>
+                          <a:cs typeface="Arabic Typesetting" panose="03020402040406030203" pitchFamily="66" charset="-78"/>
+                        </a:rPr>
+                        <a:t>/ Şerri yapan hiç kimse </a:t>
+                      </a:r>
+                      <a:r>
+                        <a:rPr lang="tr-TR" sz="1600" b="1" dirty="0" err="1">
+                          <a:solidFill>
+                            <a:schemeClr val="tx1"/>
+                          </a:solidFill>
+                          <a:latin typeface="Arabic Typesetting" panose="03020402040406030203" pitchFamily="66" charset="-78"/>
+                          <a:cs typeface="Arabic Typesetting" panose="03020402040406030203" pitchFamily="66" charset="-78"/>
+                        </a:rPr>
+                        <a:t>kurtulucu</a:t>
+                      </a:r>
+                      <a:r>
+                        <a:rPr lang="tr-TR" sz="1600" b="1" dirty="0">
+                          <a:solidFill>
+                            <a:schemeClr val="tx1"/>
+                          </a:solidFill>
+                          <a:latin typeface="Arabic Typesetting" panose="03020402040406030203" pitchFamily="66" charset="-78"/>
+                          <a:cs typeface="Arabic Typesetting" panose="03020402040406030203" pitchFamily="66" charset="-78"/>
+                        </a:rPr>
+                        <a:t> olmadı. </a:t>
+                      </a:r>
+                      <a:r>
+                        <a:rPr lang="tr-TR" sz="1600" b="1" u="sng" dirty="0">
+                          <a:solidFill>
+                            <a:schemeClr val="accent2">
+                              <a:lumMod val="50000"/>
+                            </a:schemeClr>
+                          </a:solidFill>
+                          <a:latin typeface="Arabic Typesetting" panose="03020402040406030203" pitchFamily="66" charset="-78"/>
+                          <a:cs typeface="Arabic Typesetting" panose="03020402040406030203" pitchFamily="66" charset="-78"/>
+                        </a:rPr>
+                        <a:t>(Cinsin </a:t>
+                      </a:r>
+                      <a:r>
+                        <a:rPr lang="tr-TR" sz="1600" b="1" u="sng" dirty="0" err="1">
+                          <a:solidFill>
+                            <a:schemeClr val="accent2">
+                              <a:lumMod val="50000"/>
+                            </a:schemeClr>
+                          </a:solidFill>
+                          <a:latin typeface="Arabic Typesetting" panose="03020402040406030203" pitchFamily="66" charset="-78"/>
+                          <a:cs typeface="Arabic Typesetting" panose="03020402040406030203" pitchFamily="66" charset="-78"/>
+                        </a:rPr>
+                        <a:t>Nefy</a:t>
+                      </a:r>
+                      <a:r>
+                        <a:rPr lang="tr-TR" sz="1600" b="1" u="sng" dirty="0">
+                          <a:solidFill>
+                            <a:schemeClr val="accent2">
+                              <a:lumMod val="50000"/>
+                            </a:schemeClr>
+                          </a:solidFill>
+                          <a:latin typeface="Arabic Typesetting" panose="03020402040406030203" pitchFamily="66" charset="-78"/>
+                          <a:cs typeface="Arabic Typesetting" panose="03020402040406030203" pitchFamily="66" charset="-78"/>
+                        </a:rPr>
+                        <a:t> Eden)</a:t>
+                      </a:r>
+                    </a:p>
+                  </a:txBody>
+                  <a:tcPr/>
+                </a:tc>
+                <a:extLst>
+                  <a:ext uri="{0D108BD9-81ED-4DB2-BD59-A6C34878D82A}">
+                    <a16:rowId xmlns:a16="http://schemas.microsoft.com/office/drawing/2014/main" val="4010344171"/>
+                  </a:ext>
+                </a:extLst>
+              </a:tr>
+            </a:tbl>
+          </a:graphicData>
+        </a:graphic>
+      </p:graphicFrame>
+      <p:grpSp>
+        <p:nvGrpSpPr>
+          <p:cNvPr id="26" name="Grup 25">
+            <a:extLst>
+              <a:ext uri="{FF2B5EF4-FFF2-40B4-BE49-F238E27FC236}">
+                <a16:creationId xmlns:a16="http://schemas.microsoft.com/office/drawing/2014/main" id="{C710EE87-673A-5270-A032-BCB969695A0A}"/>
+              </a:ext>
+            </a:extLst>
+          </p:cNvPr>
+          <p:cNvGrpSpPr/>
+          <p:nvPr/>
+        </p:nvGrpSpPr>
+        <p:grpSpPr>
+          <a:xfrm>
+            <a:off x="3690256" y="5198247"/>
+            <a:ext cx="4811485" cy="1034475"/>
+            <a:chOff x="5347062" y="5259977"/>
+            <a:chExt cx="4811485" cy="1034475"/>
+          </a:xfrm>
+        </p:grpSpPr>
+        <p:sp>
+          <p:nvSpPr>
+            <p:cNvPr id="6" name="Dikdörtgen: Köşeleri Yuvarlatılmış 5">
+              <a:extLst>
+                <a:ext uri="{FF2B5EF4-FFF2-40B4-BE49-F238E27FC236}">
+                  <a16:creationId xmlns:a16="http://schemas.microsoft.com/office/drawing/2014/main" id="{7D2E4C20-0447-30E0-F29F-D327E050685C}"/>
+                </a:ext>
+              </a:extLst>
+            </p:cNvPr>
+            <p:cNvSpPr/>
+            <p:nvPr/>
+          </p:nvSpPr>
+          <p:spPr>
+            <a:xfrm>
+              <a:off x="5347062" y="5259977"/>
+              <a:ext cx="4811485" cy="1027611"/>
+            </a:xfrm>
+            <a:prstGeom prst="roundRect">
+              <a:avLst/>
+            </a:prstGeom>
+            <a:solidFill>
+              <a:srgbClr val="156082">
+                <a:alpha val="38039"/>
+              </a:srgbClr>
+            </a:solidFill>
+          </p:spPr>
+          <p:style>
+            <a:lnRef idx="2">
+              <a:schemeClr val="accent1">
+                <a:shade val="15000"/>
+              </a:schemeClr>
+            </a:lnRef>
+            <a:fillRef idx="1">
+              <a:schemeClr val="accent1"/>
+            </a:fillRef>
+            <a:effectRef idx="0">
+              <a:schemeClr val="accent1"/>
+            </a:effectRef>
+            <a:fontRef idx="minor">
+              <a:schemeClr val="lt1"/>
+            </a:fontRef>
+          </p:style>
+          <p:txBody>
+            <a:bodyPr rtlCol="0" anchor="ctr"/>
+            <a:lstStyle/>
+            <a:p>
+              <a:pPr algn="ctr"/>
+              <a:endParaRPr lang="tr-TR" dirty="0"/>
+            </a:p>
+          </p:txBody>
+        </p:sp>
+        <p:cxnSp>
+          <p:nvCxnSpPr>
+            <p:cNvPr id="10" name="Düz Bağlayıcı 9">
+              <a:extLst>
+                <a:ext uri="{FF2B5EF4-FFF2-40B4-BE49-F238E27FC236}">
+                  <a16:creationId xmlns:a16="http://schemas.microsoft.com/office/drawing/2014/main" id="{54B335BC-75BE-B895-AA95-8A0C7D1A9158}"/>
+                </a:ext>
+              </a:extLst>
+            </p:cNvPr>
+            <p:cNvCxnSpPr>
+              <a:cxnSpLocks/>
+            </p:cNvCxnSpPr>
+            <p:nvPr/>
+          </p:nvCxnSpPr>
+          <p:spPr>
+            <a:xfrm>
+              <a:off x="8774248" y="5834526"/>
+              <a:ext cx="909683" cy="0"/>
+            </a:xfrm>
+            <a:prstGeom prst="line">
+              <a:avLst/>
+            </a:prstGeom>
+            <a:ln w="57150">
+              <a:solidFill>
+                <a:schemeClr val="tx1">
+                  <a:lumMod val="95000"/>
+                  <a:lumOff val="5000"/>
+                </a:schemeClr>
+              </a:solidFill>
+              <a:prstDash val="sysDot"/>
+            </a:ln>
+          </p:spPr>
+          <p:style>
+            <a:lnRef idx="2">
+              <a:schemeClr val="accent1"/>
+            </a:lnRef>
+            <a:fillRef idx="0">
+              <a:schemeClr val="accent1"/>
+            </a:fillRef>
+            <a:effectRef idx="1">
+              <a:schemeClr val="accent1"/>
+            </a:effectRef>
+            <a:fontRef idx="minor">
+              <a:schemeClr val="tx1"/>
+            </a:fontRef>
+          </p:style>
+        </p:cxnSp>
+        <p:cxnSp>
+          <p:nvCxnSpPr>
+            <p:cNvPr id="13" name="Düz Bağlayıcı 12">
+              <a:extLst>
+                <a:ext uri="{FF2B5EF4-FFF2-40B4-BE49-F238E27FC236}">
+                  <a16:creationId xmlns:a16="http://schemas.microsoft.com/office/drawing/2014/main" id="{34F3F4C2-B117-D13B-74F8-078083DF1478}"/>
+                </a:ext>
+              </a:extLst>
+            </p:cNvPr>
+            <p:cNvCxnSpPr>
+              <a:cxnSpLocks/>
+            </p:cNvCxnSpPr>
+            <p:nvPr/>
+          </p:nvCxnSpPr>
+          <p:spPr>
+            <a:xfrm>
+              <a:off x="7537631" y="5834526"/>
+              <a:ext cx="909683" cy="0"/>
+            </a:xfrm>
+            <a:prstGeom prst="line">
+              <a:avLst/>
+            </a:prstGeom>
+            <a:ln w="57150">
+              <a:solidFill>
+                <a:schemeClr val="tx1">
+                  <a:lumMod val="95000"/>
+                  <a:lumOff val="5000"/>
+                </a:schemeClr>
+              </a:solidFill>
+              <a:prstDash val="sysDot"/>
+            </a:ln>
+          </p:spPr>
+          <p:style>
+            <a:lnRef idx="2">
+              <a:schemeClr val="accent1"/>
+            </a:lnRef>
+            <a:fillRef idx="0">
+              <a:schemeClr val="accent1"/>
+            </a:fillRef>
+            <a:effectRef idx="1">
+              <a:schemeClr val="accent1"/>
+            </a:effectRef>
+            <a:fontRef idx="minor">
+              <a:schemeClr val="tx1"/>
+            </a:fontRef>
+          </p:style>
+        </p:cxnSp>
+        <p:cxnSp>
+          <p:nvCxnSpPr>
+            <p:cNvPr id="14" name="Düz Bağlayıcı 13">
+              <a:extLst>
+                <a:ext uri="{FF2B5EF4-FFF2-40B4-BE49-F238E27FC236}">
+                  <a16:creationId xmlns:a16="http://schemas.microsoft.com/office/drawing/2014/main" id="{EA7D8A47-4B37-E726-3821-AE46DCF8E07A}"/>
+                </a:ext>
+              </a:extLst>
+            </p:cNvPr>
+            <p:cNvCxnSpPr>
+              <a:cxnSpLocks/>
+            </p:cNvCxnSpPr>
+            <p:nvPr/>
+          </p:nvCxnSpPr>
+          <p:spPr>
+            <a:xfrm>
+              <a:off x="6095999" y="5834526"/>
+              <a:ext cx="909683" cy="0"/>
+            </a:xfrm>
+            <a:prstGeom prst="line">
+              <a:avLst/>
+            </a:prstGeom>
+            <a:ln w="57150">
+              <a:solidFill>
+                <a:schemeClr val="tx1">
+                  <a:lumMod val="95000"/>
+                  <a:lumOff val="5000"/>
+                </a:schemeClr>
+              </a:solidFill>
+              <a:prstDash val="sysDot"/>
+            </a:ln>
+          </p:spPr>
+          <p:style>
+            <a:lnRef idx="2">
+              <a:schemeClr val="accent1"/>
+            </a:lnRef>
+            <a:fillRef idx="0">
+              <a:schemeClr val="accent1"/>
+            </a:fillRef>
+            <a:effectRef idx="1">
+              <a:schemeClr val="accent1"/>
+            </a:effectRef>
+            <a:fontRef idx="minor">
+              <a:schemeClr val="tx1"/>
+            </a:fontRef>
+          </p:style>
+        </p:cxnSp>
+        <p:cxnSp>
+          <p:nvCxnSpPr>
+            <p:cNvPr id="16" name="Düz Bağlayıcı 15">
+              <a:extLst>
+                <a:ext uri="{FF2B5EF4-FFF2-40B4-BE49-F238E27FC236}">
+                  <a16:creationId xmlns:a16="http://schemas.microsoft.com/office/drawing/2014/main" id="{4914C597-8D81-E8AB-1541-9A985D6B3C17}"/>
+                </a:ext>
+              </a:extLst>
+            </p:cNvPr>
+            <p:cNvCxnSpPr>
+              <a:cxnSpLocks/>
+            </p:cNvCxnSpPr>
+            <p:nvPr/>
+          </p:nvCxnSpPr>
+          <p:spPr>
+            <a:xfrm>
+              <a:off x="8682808" y="5926965"/>
+              <a:ext cx="1062083" cy="0"/>
+            </a:xfrm>
+            <a:prstGeom prst="line">
+              <a:avLst/>
+            </a:prstGeom>
+          </p:spPr>
+          <p:style>
+            <a:lnRef idx="2">
+              <a:schemeClr val="accent1"/>
+            </a:lnRef>
+            <a:fillRef idx="0">
+              <a:schemeClr val="accent1"/>
+            </a:fillRef>
+            <a:effectRef idx="1">
+              <a:schemeClr val="accent1"/>
+            </a:effectRef>
+            <a:fontRef idx="minor">
+              <a:schemeClr val="tx1"/>
+            </a:fontRef>
+          </p:style>
+        </p:cxnSp>
+        <p:sp>
+          <p:nvSpPr>
+            <p:cNvPr id="18" name="Metin kutusu 17">
+              <a:extLst>
+                <a:ext uri="{FF2B5EF4-FFF2-40B4-BE49-F238E27FC236}">
+                  <a16:creationId xmlns:a16="http://schemas.microsoft.com/office/drawing/2014/main" id="{AAEF7D8B-3751-A359-3592-43BB2EEDE25A}"/>
+                </a:ext>
+              </a:extLst>
+            </p:cNvPr>
+            <p:cNvSpPr txBox="1"/>
+            <p:nvPr/>
+          </p:nvSpPr>
+          <p:spPr>
+            <a:xfrm>
+              <a:off x="8848089" y="5898832"/>
+              <a:ext cx="678391" cy="369332"/>
+            </a:xfrm>
+            <a:prstGeom prst="rect">
+              <a:avLst/>
+            </a:prstGeom>
+            <a:noFill/>
+          </p:spPr>
+          <p:txBody>
+            <a:bodyPr wrap="none" rtlCol="0">
+              <a:spAutoFit/>
+            </a:bodyPr>
+            <a:lstStyle/>
+            <a:p>
+              <a:r>
+                <a:rPr lang="tr-TR" dirty="0">
+                  <a:solidFill>
+                    <a:srgbClr val="FF0000"/>
+                  </a:solidFill>
+                </a:rPr>
+                <a:t>AMİL</a:t>
+              </a:r>
+            </a:p>
+          </p:txBody>
+        </p:sp>
+        <p:sp>
+          <p:nvSpPr>
+            <p:cNvPr id="19" name="Metin kutusu 18">
+              <a:extLst>
+                <a:ext uri="{FF2B5EF4-FFF2-40B4-BE49-F238E27FC236}">
+                  <a16:creationId xmlns:a16="http://schemas.microsoft.com/office/drawing/2014/main" id="{3A52134C-2DF9-E525-0458-CA2866B3D0B4}"/>
+                </a:ext>
+              </a:extLst>
+            </p:cNvPr>
+            <p:cNvSpPr txBox="1"/>
+            <p:nvPr/>
+          </p:nvSpPr>
+          <p:spPr>
+            <a:xfrm>
+              <a:off x="7537631" y="5923393"/>
+              <a:ext cx="607859" cy="369332"/>
+            </a:xfrm>
+            <a:prstGeom prst="rect">
+              <a:avLst/>
+            </a:prstGeom>
+            <a:noFill/>
+          </p:spPr>
+          <p:txBody>
+            <a:bodyPr wrap="none" rtlCol="0">
+              <a:spAutoFit/>
+            </a:bodyPr>
+            <a:lstStyle/>
+            <a:p>
+              <a:r>
+                <a:rPr lang="tr-TR" dirty="0">
+                  <a:solidFill>
+                    <a:srgbClr val="0000CC"/>
+                  </a:solidFill>
+                </a:rPr>
+                <a:t>İsmi</a:t>
+              </a:r>
+            </a:p>
+          </p:txBody>
+        </p:sp>
+        <p:cxnSp>
+          <p:nvCxnSpPr>
+            <p:cNvPr id="20" name="Düz Bağlayıcı 19">
+              <a:extLst>
+                <a:ext uri="{FF2B5EF4-FFF2-40B4-BE49-F238E27FC236}">
+                  <a16:creationId xmlns:a16="http://schemas.microsoft.com/office/drawing/2014/main" id="{7120F408-8A67-1554-9455-83827E9F4530}"/>
+                </a:ext>
+              </a:extLst>
+            </p:cNvPr>
+            <p:cNvCxnSpPr>
+              <a:cxnSpLocks/>
+            </p:cNvCxnSpPr>
+            <p:nvPr/>
+          </p:nvCxnSpPr>
+          <p:spPr>
+            <a:xfrm>
+              <a:off x="7461430" y="5923393"/>
+              <a:ext cx="1062083" cy="0"/>
+            </a:xfrm>
+            <a:prstGeom prst="line">
+              <a:avLst/>
+            </a:prstGeom>
+          </p:spPr>
+          <p:style>
+            <a:lnRef idx="2">
+              <a:schemeClr val="accent1"/>
+            </a:lnRef>
+            <a:fillRef idx="0">
+              <a:schemeClr val="accent1"/>
+            </a:fillRef>
+            <a:effectRef idx="1">
+              <a:schemeClr val="accent1"/>
+            </a:effectRef>
+            <a:fontRef idx="minor">
+              <a:schemeClr val="tx1"/>
+            </a:fontRef>
+          </p:style>
+        </p:cxnSp>
+        <p:sp>
+          <p:nvSpPr>
+            <p:cNvPr id="21" name="Metin kutusu 20">
+              <a:extLst>
+                <a:ext uri="{FF2B5EF4-FFF2-40B4-BE49-F238E27FC236}">
+                  <a16:creationId xmlns:a16="http://schemas.microsoft.com/office/drawing/2014/main" id="{4DB9819B-6F8F-25E8-EA01-12F8FC009ACF}"/>
+                </a:ext>
+              </a:extLst>
+            </p:cNvPr>
+            <p:cNvSpPr txBox="1"/>
+            <p:nvPr/>
+          </p:nvSpPr>
+          <p:spPr>
+            <a:xfrm>
+              <a:off x="6095999" y="5925120"/>
+              <a:ext cx="854721" cy="369332"/>
+            </a:xfrm>
+            <a:prstGeom prst="rect">
+              <a:avLst/>
+            </a:prstGeom>
+            <a:noFill/>
+          </p:spPr>
+          <p:txBody>
+            <a:bodyPr wrap="none" rtlCol="0">
+              <a:spAutoFit/>
+            </a:bodyPr>
+            <a:lstStyle/>
+            <a:p>
+              <a:r>
+                <a:rPr lang="tr-TR" dirty="0"/>
+                <a:t>Haberi</a:t>
+              </a:r>
+            </a:p>
+          </p:txBody>
+        </p:sp>
+        <p:cxnSp>
+          <p:nvCxnSpPr>
+            <p:cNvPr id="22" name="Düz Bağlayıcı 21">
+              <a:extLst>
+                <a:ext uri="{FF2B5EF4-FFF2-40B4-BE49-F238E27FC236}">
+                  <a16:creationId xmlns:a16="http://schemas.microsoft.com/office/drawing/2014/main" id="{5DC911A5-27EB-C920-4711-36CEE11BE77B}"/>
+                </a:ext>
+              </a:extLst>
+            </p:cNvPr>
+            <p:cNvCxnSpPr>
+              <a:cxnSpLocks/>
+            </p:cNvCxnSpPr>
+            <p:nvPr/>
+          </p:nvCxnSpPr>
+          <p:spPr>
+            <a:xfrm>
+              <a:off x="6019798" y="5925120"/>
+              <a:ext cx="1062083" cy="0"/>
+            </a:xfrm>
+            <a:prstGeom prst="line">
+              <a:avLst/>
+            </a:prstGeom>
+          </p:spPr>
+          <p:style>
+            <a:lnRef idx="2">
+              <a:schemeClr val="accent1"/>
+            </a:lnRef>
+            <a:fillRef idx="0">
+              <a:schemeClr val="accent1"/>
+            </a:fillRef>
+            <a:effectRef idx="1">
+              <a:schemeClr val="accent1"/>
+            </a:effectRef>
+            <a:fontRef idx="minor">
+              <a:schemeClr val="tx1"/>
+            </a:fontRef>
+          </p:style>
+        </p:cxnSp>
+        <p:sp>
+          <p:nvSpPr>
+            <p:cNvPr id="23" name="Metin kutusu 22">
+              <a:extLst>
+                <a:ext uri="{FF2B5EF4-FFF2-40B4-BE49-F238E27FC236}">
+                  <a16:creationId xmlns:a16="http://schemas.microsoft.com/office/drawing/2014/main" id="{6A0DFB13-2457-0871-2E76-D73848627200}"/>
+                </a:ext>
+              </a:extLst>
+            </p:cNvPr>
+            <p:cNvSpPr txBox="1"/>
+            <p:nvPr/>
+          </p:nvSpPr>
+          <p:spPr>
+            <a:xfrm>
+              <a:off x="7407830" y="5417295"/>
+              <a:ext cx="435191" cy="461665"/>
+            </a:xfrm>
+            <a:prstGeom prst="rect">
+              <a:avLst/>
+            </a:prstGeom>
+            <a:noFill/>
+          </p:spPr>
+          <p:txBody>
+            <a:bodyPr wrap="square" rtlCol="0">
+              <a:spAutoFit/>
+            </a:bodyPr>
+            <a:lstStyle/>
+            <a:p>
+              <a:r>
+                <a:rPr lang="ar-AE" sz="2400" b="1" dirty="0">
+                  <a:latin typeface="Amiri Quran" panose="00000500000000000000" pitchFamily="2" charset="-78"/>
+                  <a:cs typeface="Amiri Quran" panose="00000500000000000000" pitchFamily="2" charset="-78"/>
+                </a:rPr>
+                <a:t>ً</a:t>
+              </a:r>
+              <a:endParaRPr lang="tr-TR" sz="2400" b="1" dirty="0">
+                <a:latin typeface="Amiri Quran" panose="00000500000000000000" pitchFamily="2" charset="-78"/>
+                <a:cs typeface="Amiri Quran" panose="00000500000000000000" pitchFamily="2" charset="-78"/>
+              </a:endParaRPr>
+            </a:p>
+          </p:txBody>
+        </p:sp>
+        <p:sp>
+          <p:nvSpPr>
+            <p:cNvPr id="24" name="Metin kutusu 23">
+              <a:extLst>
+                <a:ext uri="{FF2B5EF4-FFF2-40B4-BE49-F238E27FC236}">
+                  <a16:creationId xmlns:a16="http://schemas.microsoft.com/office/drawing/2014/main" id="{8FAB844F-4D13-E1EA-A687-13F47F27F642}"/>
+                </a:ext>
+              </a:extLst>
+            </p:cNvPr>
+            <p:cNvSpPr txBox="1"/>
+            <p:nvPr/>
+          </p:nvSpPr>
+          <p:spPr>
+            <a:xfrm>
+              <a:off x="5949223" y="5413857"/>
+              <a:ext cx="435191" cy="461665"/>
+            </a:xfrm>
+            <a:prstGeom prst="rect">
+              <a:avLst/>
+            </a:prstGeom>
+            <a:noFill/>
+          </p:spPr>
+          <p:txBody>
+            <a:bodyPr wrap="square" rtlCol="0">
+              <a:spAutoFit/>
+            </a:bodyPr>
+            <a:lstStyle/>
+            <a:p>
+              <a:r>
+                <a:rPr lang="ar-AE" sz="2400" b="1" dirty="0">
+                  <a:latin typeface="Amiri Quran" panose="00000500000000000000" pitchFamily="2" charset="-78"/>
+                  <a:cs typeface="Amiri Quran" panose="00000500000000000000" pitchFamily="2" charset="-78"/>
+                </a:rPr>
+                <a:t>ٌ</a:t>
+              </a:r>
+              <a:endParaRPr lang="tr-TR" sz="2400" b="1" dirty="0">
+                <a:latin typeface="Amiri Quran" panose="00000500000000000000" pitchFamily="2" charset="-78"/>
+                <a:cs typeface="Amiri Quran" panose="00000500000000000000" pitchFamily="2" charset="-78"/>
+              </a:endParaRPr>
+            </a:p>
+          </p:txBody>
+        </p:sp>
+      </p:grpSp>
     </p:spTree>
     <p:extLst>
       <p:ext uri="{BB962C8B-B14F-4D97-AF65-F5344CB8AC3E}">

--- a/Nahiv/Avamil/Amil.pptx
+++ b/Nahiv/Avamil/Amil.pptx
@@ -5,7 +5,7 @@
     <p:sldMasterId id="2147483648" r:id="rId1"/>
   </p:sldMasterIdLst>
   <p:notesMasterIdLst>
-    <p:notesMasterId r:id="rId7"/>
+    <p:notesMasterId r:id="rId8"/>
   </p:notesMasterIdLst>
   <p:sldIdLst>
     <p:sldId id="256" r:id="rId2"/>
@@ -13,6 +13,7 @@
     <p:sldId id="258" r:id="rId4"/>
     <p:sldId id="259" r:id="rId5"/>
     <p:sldId id="260" r:id="rId6"/>
+    <p:sldId id="261" r:id="rId7"/>
   </p:sldIdLst>
   <p:sldSz cx="12192000" cy="6858000"/>
   <p:notesSz cx="6858000" cy="9144000"/>
@@ -1114,7 +1115,7 @@
           <a:p>
             <a:fld id="{FA2DF9BE-F4DC-4902-9C94-926DFEDD4A7A}" type="datetimeFigureOut">
               <a:rPr lang="tr-TR" smtClean="0"/>
-              <a:t>13.10.2026</a:t>
+              <a:t>18.10.2026</a:t>
             </a:fld>
             <a:endParaRPr lang="tr-TR"/>
           </a:p>
@@ -1633,6 +1634,90 @@
 </p:notes>
 </file>
 
+<file path=ppt/notesSlides/notesSlide4.xml><?xml version="1.0" encoding="utf-8"?>
+<p:notes xmlns:a="http://schemas.openxmlformats.org/drawingml/2006/main" xmlns:r="http://schemas.openxmlformats.org/officeDocument/2006/relationships" xmlns:p="http://schemas.openxmlformats.org/presentationml/2006/main">
+  <p:cSld>
+    <p:spTree>
+      <p:nvGrpSpPr>
+        <p:cNvPr id="1" name=""/>
+        <p:cNvGrpSpPr/>
+        <p:nvPr/>
+      </p:nvGrpSpPr>
+      <p:grpSpPr>
+        <a:xfrm>
+          <a:off x="0" y="0"/>
+          <a:ext cx="0" cy="0"/>
+          <a:chOff x="0" y="0"/>
+          <a:chExt cx="0" cy="0"/>
+        </a:xfrm>
+      </p:grpSpPr>
+      <p:sp>
+        <p:nvSpPr>
+          <p:cNvPr id="2" name="Slayt Resmi Yer Tutucusu 1"/>
+          <p:cNvSpPr>
+            <a:spLocks noGrp="1" noRot="1" noChangeAspect="1"/>
+          </p:cNvSpPr>
+          <p:nvPr>
+            <p:ph type="sldImg"/>
+          </p:nvPr>
+        </p:nvSpPr>
+        <p:spPr/>
+      </p:sp>
+      <p:sp>
+        <p:nvSpPr>
+          <p:cNvPr id="3" name="Not Yer Tutucusu 2"/>
+          <p:cNvSpPr>
+            <a:spLocks noGrp="1"/>
+          </p:cNvSpPr>
+          <p:nvPr>
+            <p:ph type="body" idx="1"/>
+          </p:nvPr>
+        </p:nvSpPr>
+        <p:spPr/>
+        <p:txBody>
+          <a:bodyPr/>
+          <a:lstStyle/>
+          <a:p>
+            <a:endParaRPr lang="tr-TR" dirty="0"/>
+          </a:p>
+        </p:txBody>
+      </p:sp>
+      <p:sp>
+        <p:nvSpPr>
+          <p:cNvPr id="4" name="Slayt Numarası Yer Tutucusu 3"/>
+          <p:cNvSpPr>
+            <a:spLocks noGrp="1"/>
+          </p:cNvSpPr>
+          <p:nvPr>
+            <p:ph type="sldNum" sz="quarter" idx="5"/>
+          </p:nvPr>
+        </p:nvSpPr>
+        <p:spPr/>
+        <p:txBody>
+          <a:bodyPr/>
+          <a:lstStyle/>
+          <a:p>
+            <a:fld id="{638F92E4-635E-4B69-8547-655F7F9D76B7}" type="slidenum">
+              <a:rPr lang="tr-TR" smtClean="0"/>
+              <a:t>6</a:t>
+            </a:fld>
+            <a:endParaRPr lang="tr-TR"/>
+          </a:p>
+        </p:txBody>
+      </p:sp>
+    </p:spTree>
+    <p:extLst>
+      <p:ext uri="{BB962C8B-B14F-4D97-AF65-F5344CB8AC3E}">
+        <p14:creationId xmlns:p14="http://schemas.microsoft.com/office/powerpoint/2010/main" val="2755003743"/>
+      </p:ext>
+    </p:extLst>
+  </p:cSld>
+  <p:clrMapOvr>
+    <a:masterClrMapping/>
+  </p:clrMapOvr>
+</p:notes>
+</file>
+
 <file path=ppt/slideLayouts/slideLayout1.xml><?xml version="1.0" encoding="utf-8"?>
 <p:sldLayout xmlns:a="http://schemas.openxmlformats.org/drawingml/2006/main" xmlns:r="http://schemas.openxmlformats.org/officeDocument/2006/relationships" xmlns:p="http://schemas.openxmlformats.org/presentationml/2006/main" type="title" preserve="1">
   <p:cSld name="Başlık Slaydı">
@@ -1780,7 +1865,7 @@
           <a:p>
             <a:fld id="{47B4E739-70D6-40BD-B9BF-46BF9FC7432A}" type="datetimeFigureOut">
               <a:rPr lang="tr-TR" smtClean="0"/>
-              <a:t>13.10.2026</a:t>
+              <a:t>18.10.2026</a:t>
             </a:fld>
             <a:endParaRPr lang="tr-TR"/>
           </a:p>
@@ -1978,7 +2063,7 @@
           <a:p>
             <a:fld id="{47B4E739-70D6-40BD-B9BF-46BF9FC7432A}" type="datetimeFigureOut">
               <a:rPr lang="tr-TR" smtClean="0"/>
-              <a:t>13.10.2026</a:t>
+              <a:t>18.10.2026</a:t>
             </a:fld>
             <a:endParaRPr lang="tr-TR"/>
           </a:p>
@@ -2186,7 +2271,7 @@
           <a:p>
             <a:fld id="{47B4E739-70D6-40BD-B9BF-46BF9FC7432A}" type="datetimeFigureOut">
               <a:rPr lang="tr-TR" smtClean="0"/>
-              <a:t>13.10.2026</a:t>
+              <a:t>18.10.2026</a:t>
             </a:fld>
             <a:endParaRPr lang="tr-TR"/>
           </a:p>
@@ -2384,7 +2469,7 @@
           <a:p>
             <a:fld id="{47B4E739-70D6-40BD-B9BF-46BF9FC7432A}" type="datetimeFigureOut">
               <a:rPr lang="tr-TR" smtClean="0"/>
-              <a:t>13.10.2026</a:t>
+              <a:t>18.10.2026</a:t>
             </a:fld>
             <a:endParaRPr lang="tr-TR"/>
           </a:p>
@@ -2659,7 +2744,7 @@
           <a:p>
             <a:fld id="{47B4E739-70D6-40BD-B9BF-46BF9FC7432A}" type="datetimeFigureOut">
               <a:rPr lang="tr-TR" smtClean="0"/>
-              <a:t>13.10.2026</a:t>
+              <a:t>18.10.2026</a:t>
             </a:fld>
             <a:endParaRPr lang="tr-TR"/>
           </a:p>
@@ -2924,7 +3009,7 @@
           <a:p>
             <a:fld id="{47B4E739-70D6-40BD-B9BF-46BF9FC7432A}" type="datetimeFigureOut">
               <a:rPr lang="tr-TR" smtClean="0"/>
-              <a:t>13.10.2026</a:t>
+              <a:t>18.10.2026</a:t>
             </a:fld>
             <a:endParaRPr lang="tr-TR"/>
           </a:p>
@@ -3336,7 +3421,7 @@
           <a:p>
             <a:fld id="{47B4E739-70D6-40BD-B9BF-46BF9FC7432A}" type="datetimeFigureOut">
               <a:rPr lang="tr-TR" smtClean="0"/>
-              <a:t>13.10.2026</a:t>
+              <a:t>18.10.2026</a:t>
             </a:fld>
             <a:endParaRPr lang="tr-TR"/>
           </a:p>
@@ -3477,7 +3562,7 @@
           <a:p>
             <a:fld id="{47B4E739-70D6-40BD-B9BF-46BF9FC7432A}" type="datetimeFigureOut">
               <a:rPr lang="tr-TR" smtClean="0"/>
-              <a:t>13.10.2026</a:t>
+              <a:t>18.10.2026</a:t>
             </a:fld>
             <a:endParaRPr lang="tr-TR"/>
           </a:p>
@@ -3590,7 +3675,7 @@
           <a:p>
             <a:fld id="{47B4E739-70D6-40BD-B9BF-46BF9FC7432A}" type="datetimeFigureOut">
               <a:rPr lang="tr-TR" smtClean="0"/>
-              <a:t>13.10.2026</a:t>
+              <a:t>18.10.2026</a:t>
             </a:fld>
             <a:endParaRPr lang="tr-TR"/>
           </a:p>
@@ -3901,7 +3986,7 @@
           <a:p>
             <a:fld id="{47B4E739-70D6-40BD-B9BF-46BF9FC7432A}" type="datetimeFigureOut">
               <a:rPr lang="tr-TR" smtClean="0"/>
-              <a:t>13.10.2026</a:t>
+              <a:t>18.10.2026</a:t>
             </a:fld>
             <a:endParaRPr lang="tr-TR"/>
           </a:p>
@@ -4189,7 +4274,7 @@
           <a:p>
             <a:fld id="{47B4E739-70D6-40BD-B9BF-46BF9FC7432A}" type="datetimeFigureOut">
               <a:rPr lang="tr-TR" smtClean="0"/>
-              <a:t>13.10.2026</a:t>
+              <a:t>18.10.2026</a:t>
             </a:fld>
             <a:endParaRPr lang="tr-TR"/>
           </a:p>
@@ -4430,7 +4515,7 @@
           <a:p>
             <a:fld id="{47B4E739-70D6-40BD-B9BF-46BF9FC7432A}" type="datetimeFigureOut">
               <a:rPr lang="tr-TR" smtClean="0"/>
-              <a:t>13.10.2026</a:t>
+              <a:t>18.10.2026</a:t>
             </a:fld>
             <a:endParaRPr lang="tr-TR"/>
           </a:p>
@@ -9890,8 +9975,8 @@
         </p:nvSpPr>
         <p:spPr>
           <a:xfrm>
-            <a:off x="9137650" y="120760"/>
-            <a:ext cx="2728632" cy="400110"/>
+            <a:off x="8027125" y="120760"/>
+            <a:ext cx="4089581" cy="400110"/>
           </a:xfrm>
           <a:prstGeom prst="rect">
             <a:avLst/>
@@ -9914,7 +9999,7 @@
                 <a:latin typeface="Alef" panose="00000500000000000000" pitchFamily="2" charset="-79"/>
                 <a:cs typeface="Alef" panose="00000500000000000000" pitchFamily="2" charset="-79"/>
               </a:rPr>
-              <a:t>İsmi </a:t>
+              <a:t>İsmini </a:t>
             </a:r>
             <a:r>
               <a:rPr lang="tr-TR" sz="2000" i="1" u="sng" dirty="0" err="1">
@@ -9938,7 +10023,7 @@
                 <a:latin typeface="Alef" panose="00000500000000000000" pitchFamily="2" charset="-79"/>
                 <a:cs typeface="Alef" panose="00000500000000000000" pitchFamily="2" charset="-79"/>
               </a:rPr>
-              <a:t>, Haberi </a:t>
+              <a:t>, Haberini </a:t>
             </a:r>
             <a:r>
               <a:rPr lang="tr-TR" sz="2000" i="1" u="sng" dirty="0" err="1">
@@ -9952,15 +10037,18 @@
               </a:rPr>
               <a:t>Ref</a:t>
             </a:r>
-            <a:endParaRPr lang="tr-TR" sz="2000" i="1" u="sng" dirty="0">
-              <a:solidFill>
-                <a:schemeClr val="bg1">
-                  <a:lumMod val="95000"/>
-                </a:schemeClr>
-              </a:solidFill>
-              <a:latin typeface="Alef" panose="00000500000000000000" pitchFamily="2" charset="-79"/>
-              <a:cs typeface="Alef" panose="00000500000000000000" pitchFamily="2" charset="-79"/>
-            </a:endParaRPr>
+            <a:r>
+              <a:rPr lang="tr-TR" sz="2000" i="1" u="sng" dirty="0">
+                <a:solidFill>
+                  <a:schemeClr val="bg1">
+                    <a:lumMod val="95000"/>
+                  </a:schemeClr>
+                </a:solidFill>
+                <a:latin typeface="Alef" panose="00000500000000000000" pitchFamily="2" charset="-79"/>
+                <a:cs typeface="Alef" panose="00000500000000000000" pitchFamily="2" charset="-79"/>
+              </a:rPr>
+              <a:t> Edenler</a:t>
+            </a:r>
           </a:p>
         </p:txBody>
       </p:sp>
@@ -12019,10 +12107,10 @@
       </p:sp>
       <p:sp>
         <p:nvSpPr>
-          <p:cNvPr id="4" name="Metin kutusu 3">
+          <p:cNvPr id="3" name="Metin kutusu 2">
             <a:extLst>
               <a:ext uri="{FF2B5EF4-FFF2-40B4-BE49-F238E27FC236}">
-                <a16:creationId xmlns:a16="http://schemas.microsoft.com/office/drawing/2014/main" id="{9668639A-0B97-AD1E-43FA-28EF8958806C}"/>
+                <a16:creationId xmlns:a16="http://schemas.microsoft.com/office/drawing/2014/main" id="{46884D15-E418-F484-DBD1-B3020DA73FE4}"/>
               </a:ext>
             </a:extLst>
           </p:cNvPr>
@@ -12031,8 +12119,8 @@
         </p:nvSpPr>
         <p:spPr>
           <a:xfrm>
-            <a:off x="9137650" y="120760"/>
-            <a:ext cx="2728632" cy="400110"/>
+            <a:off x="7896497" y="120760"/>
+            <a:ext cx="4089581" cy="400110"/>
           </a:xfrm>
           <a:prstGeom prst="rect">
             <a:avLst/>
@@ -12055,7 +12143,7 @@
                 <a:latin typeface="Alef" panose="00000500000000000000" pitchFamily="2" charset="-79"/>
                 <a:cs typeface="Alef" panose="00000500000000000000" pitchFamily="2" charset="-79"/>
               </a:rPr>
-              <a:t>İsmi </a:t>
+              <a:t>İsmini </a:t>
             </a:r>
             <a:r>
               <a:rPr lang="tr-TR" sz="2000" i="1" u="sng" dirty="0" err="1">
@@ -12079,7 +12167,7 @@
                 <a:latin typeface="Alef" panose="00000500000000000000" pitchFamily="2" charset="-79"/>
                 <a:cs typeface="Alef" panose="00000500000000000000" pitchFamily="2" charset="-79"/>
               </a:rPr>
-              <a:t>, Haberi </a:t>
+              <a:t>, Haberini </a:t>
             </a:r>
             <a:r>
               <a:rPr lang="tr-TR" sz="2000" i="1" u="sng" dirty="0" err="1">
@@ -12093,22 +12181,1442 @@
               </a:rPr>
               <a:t>Nasb</a:t>
             </a:r>
-            <a:endParaRPr lang="tr-TR" sz="2000" i="1" u="sng" dirty="0">
+            <a:r>
+              <a:rPr lang="tr-TR" sz="2000" i="1" u="sng" dirty="0">
+                <a:solidFill>
+                  <a:schemeClr val="bg1">
+                    <a:lumMod val="95000"/>
+                  </a:schemeClr>
+                </a:solidFill>
+                <a:latin typeface="Alef" panose="00000500000000000000" pitchFamily="2" charset="-79"/>
+                <a:cs typeface="Alef" panose="00000500000000000000" pitchFamily="2" charset="-79"/>
+              </a:rPr>
+              <a:t> Edenler</a:t>
+            </a:r>
+          </a:p>
+        </p:txBody>
+      </p:sp>
+      <p:sp>
+        <p:nvSpPr>
+          <p:cNvPr id="6" name="Metin kutusu 5">
+            <a:extLst>
+              <a:ext uri="{FF2B5EF4-FFF2-40B4-BE49-F238E27FC236}">
+                <a16:creationId xmlns:a16="http://schemas.microsoft.com/office/drawing/2014/main" id="{D508230F-F398-777E-E497-0077A502A310}"/>
+              </a:ext>
+            </a:extLst>
+          </p:cNvPr>
+          <p:cNvSpPr txBox="1"/>
+          <p:nvPr/>
+        </p:nvSpPr>
+        <p:spPr>
+          <a:xfrm>
+            <a:off x="4089616" y="766354"/>
+            <a:ext cx="4012765" cy="523220"/>
+          </a:xfrm>
+          <a:prstGeom prst="rect">
+            <a:avLst/>
+          </a:prstGeom>
+          <a:noFill/>
+        </p:spPr>
+        <p:txBody>
+          <a:bodyPr wrap="none" rtlCol="0">
+            <a:spAutoFit/>
+          </a:bodyPr>
+          <a:lstStyle/>
+          <a:p>
+            <a:r>
+              <a:rPr lang="ar-AE" sz="2800" b="1" dirty="0">
+                <a:solidFill>
+                  <a:srgbClr val="FF0000"/>
+                </a:solidFill>
+              </a:rPr>
+              <a:t>لَيْسَ</a:t>
+            </a:r>
+            <a:r>
+              <a:rPr lang="tr-TR" sz="2800" b="1" dirty="0"/>
+              <a:t>’ye BENZEYEN </a:t>
+            </a:r>
+            <a:r>
+              <a:rPr lang="ar-AE" sz="2800" b="1" u="sng" dirty="0">
+                <a:solidFill>
+                  <a:schemeClr val="tx2">
+                    <a:lumMod val="90000"/>
+                    <a:lumOff val="10000"/>
+                  </a:schemeClr>
+                </a:solidFill>
+              </a:rPr>
+              <a:t>مَا</a:t>
+            </a:r>
+            <a:r>
+              <a:rPr lang="tr-TR" sz="2800" b="1" dirty="0"/>
+              <a:t> ve </a:t>
+            </a:r>
+            <a:r>
+              <a:rPr lang="ar-AE" sz="2800" b="1" u="sng" dirty="0">
+                <a:solidFill>
+                  <a:schemeClr val="tx2">
+                    <a:lumMod val="90000"/>
+                    <a:lumOff val="10000"/>
+                  </a:schemeClr>
+                </a:solidFill>
+              </a:rPr>
+              <a:t>لَا</a:t>
+            </a:r>
+            <a:endParaRPr lang="tr-TR" sz="2800" b="1" u="sng" dirty="0">
               <a:solidFill>
-                <a:schemeClr val="bg1">
-                  <a:lumMod val="95000"/>
+                <a:schemeClr val="tx2">
+                  <a:lumMod val="90000"/>
+                  <a:lumOff val="10000"/>
                 </a:schemeClr>
               </a:solidFill>
-              <a:latin typeface="Alef" panose="00000500000000000000" pitchFamily="2" charset="-79"/>
-              <a:cs typeface="Alef" panose="00000500000000000000" pitchFamily="2" charset="-79"/>
             </a:endParaRPr>
           </a:p>
         </p:txBody>
       </p:sp>
+      <p:sp>
+        <p:nvSpPr>
+          <p:cNvPr id="7" name="Metin kutusu 6">
+            <a:extLst>
+              <a:ext uri="{FF2B5EF4-FFF2-40B4-BE49-F238E27FC236}">
+                <a16:creationId xmlns:a16="http://schemas.microsoft.com/office/drawing/2014/main" id="{C1497EB9-E1C8-4AF4-66DC-10CB48EF0224}"/>
+              </a:ext>
+            </a:extLst>
+          </p:cNvPr>
+          <p:cNvSpPr txBox="1"/>
+          <p:nvPr/>
+        </p:nvSpPr>
+        <p:spPr>
+          <a:xfrm>
+            <a:off x="59266" y="1357231"/>
+            <a:ext cx="12073463" cy="646331"/>
+          </a:xfrm>
+          <a:prstGeom prst="rect">
+            <a:avLst/>
+          </a:prstGeom>
+          <a:noFill/>
+        </p:spPr>
+        <p:txBody>
+          <a:bodyPr wrap="square" rtlCol="0">
+            <a:spAutoFit/>
+          </a:bodyPr>
+          <a:lstStyle/>
+          <a:p>
+            <a:r>
+              <a:rPr lang="tr-TR" dirty="0"/>
+              <a:t>Bu iki harf </a:t>
+            </a:r>
+            <a:r>
+              <a:rPr lang="ar-AE" u="sng" dirty="0">
+                <a:solidFill>
+                  <a:srgbClr val="C00000"/>
+                </a:solidFill>
+              </a:rPr>
+              <a:t>لَيْسَ</a:t>
+            </a:r>
+            <a:r>
+              <a:rPr lang="tr-TR" dirty="0"/>
+              <a:t> gibi olumsuzluk ifade etmesi ve asılda </a:t>
+            </a:r>
+            <a:r>
+              <a:rPr lang="tr-TR" dirty="0" err="1"/>
+              <a:t>mübteda</a:t>
+            </a:r>
+            <a:r>
+              <a:rPr lang="tr-TR" dirty="0"/>
+              <a:t> haber üzerine dahil olmasından dolayı </a:t>
+            </a:r>
+            <a:r>
+              <a:rPr lang="ar-AE" u="sng" dirty="0">
+                <a:solidFill>
+                  <a:srgbClr val="C00000"/>
+                </a:solidFill>
+              </a:rPr>
+              <a:t>لَيْسَ</a:t>
+            </a:r>
+            <a:r>
+              <a:rPr lang="tr-TR" dirty="0"/>
+              <a:t>’ ye benzemektedir.</a:t>
+            </a:r>
+          </a:p>
+        </p:txBody>
+      </p:sp>
+      <p:sp>
+        <p:nvSpPr>
+          <p:cNvPr id="8" name="Metin kutusu 7">
+            <a:extLst>
+              <a:ext uri="{FF2B5EF4-FFF2-40B4-BE49-F238E27FC236}">
+                <a16:creationId xmlns:a16="http://schemas.microsoft.com/office/drawing/2014/main" id="{DAAA9A43-7C0C-B223-1DBD-07EE5CDAB43D}"/>
+              </a:ext>
+            </a:extLst>
+          </p:cNvPr>
+          <p:cNvSpPr txBox="1"/>
+          <p:nvPr/>
+        </p:nvSpPr>
+        <p:spPr>
+          <a:xfrm>
+            <a:off x="576072" y="2071219"/>
+            <a:ext cx="2570960" cy="461665"/>
+          </a:xfrm>
+          <a:prstGeom prst="rect">
+            <a:avLst/>
+          </a:prstGeom>
+          <a:noFill/>
+        </p:spPr>
+        <p:txBody>
+          <a:bodyPr wrap="none" rtlCol="0">
+            <a:spAutoFit/>
+          </a:bodyPr>
+          <a:lstStyle/>
+          <a:p>
+            <a:r>
+              <a:rPr lang="ar-AE" sz="2400" b="1" dirty="0">
+                <a:solidFill>
+                  <a:srgbClr val="C00000"/>
+                </a:solidFill>
+              </a:rPr>
+              <a:t>مَا</a:t>
+            </a:r>
+            <a:r>
+              <a:rPr lang="tr-TR" sz="2400" b="1" dirty="0">
+                <a:solidFill>
+                  <a:srgbClr val="C00000"/>
+                </a:solidFill>
+              </a:rPr>
+              <a:t> Harfinin Misali:</a:t>
+            </a:r>
+          </a:p>
+        </p:txBody>
+      </p:sp>
+      <p:sp>
+        <p:nvSpPr>
+          <p:cNvPr id="10" name="Metin kutusu 9">
+            <a:extLst>
+              <a:ext uri="{FF2B5EF4-FFF2-40B4-BE49-F238E27FC236}">
+                <a16:creationId xmlns:a16="http://schemas.microsoft.com/office/drawing/2014/main" id="{1D5D7901-E4E8-DB0F-C7E8-C2F33738574A}"/>
+              </a:ext>
+            </a:extLst>
+          </p:cNvPr>
+          <p:cNvSpPr txBox="1"/>
+          <p:nvPr/>
+        </p:nvSpPr>
+        <p:spPr>
+          <a:xfrm>
+            <a:off x="1861552" y="2532884"/>
+            <a:ext cx="2611612" cy="461665"/>
+          </a:xfrm>
+          <a:prstGeom prst="rect">
+            <a:avLst/>
+          </a:prstGeom>
+          <a:noFill/>
+        </p:spPr>
+        <p:txBody>
+          <a:bodyPr wrap="none" rtlCol="0">
+            <a:spAutoFit/>
+          </a:bodyPr>
+          <a:lstStyle/>
+          <a:p>
+            <a:r>
+              <a:rPr lang="ar-AE" sz="2400" dirty="0"/>
+              <a:t>مَا اللَّهُ تَعَالَى مُتَمَكِّنًا بِمَكَانٍ</a:t>
+            </a:r>
+            <a:endParaRPr lang="tr-TR" sz="2400" dirty="0"/>
+          </a:p>
+        </p:txBody>
+      </p:sp>
+      <p:cxnSp>
+        <p:nvCxnSpPr>
+          <p:cNvPr id="12" name="Düz Ok Bağlayıcısı 11">
+            <a:extLst>
+              <a:ext uri="{FF2B5EF4-FFF2-40B4-BE49-F238E27FC236}">
+                <a16:creationId xmlns:a16="http://schemas.microsoft.com/office/drawing/2014/main" id="{81785152-9EBE-72CF-D577-3A3ACC237A90}"/>
+              </a:ext>
+            </a:extLst>
+          </p:cNvPr>
+          <p:cNvCxnSpPr>
+            <a:cxnSpLocks/>
+            <a:stCxn id="10" idx="3"/>
+            <a:endCxn id="13" idx="1"/>
+          </p:cNvCxnSpPr>
+          <p:nvPr/>
+        </p:nvCxnSpPr>
+        <p:spPr>
+          <a:xfrm flipV="1">
+            <a:off x="4473164" y="2763716"/>
+            <a:ext cx="1159540" cy="1"/>
+          </a:xfrm>
+          <a:prstGeom prst="straightConnector1">
+            <a:avLst/>
+          </a:prstGeom>
+          <a:ln>
+            <a:tailEnd type="triangle"/>
+          </a:ln>
+        </p:spPr>
+        <p:style>
+          <a:lnRef idx="2">
+            <a:schemeClr val="accent1"/>
+          </a:lnRef>
+          <a:fillRef idx="0">
+            <a:schemeClr val="accent1"/>
+          </a:fillRef>
+          <a:effectRef idx="1">
+            <a:schemeClr val="accent1"/>
+          </a:effectRef>
+          <a:fontRef idx="minor">
+            <a:schemeClr val="tx1"/>
+          </a:fontRef>
+        </p:style>
+      </p:cxnSp>
+      <p:sp>
+        <p:nvSpPr>
+          <p:cNvPr id="13" name="Metin kutusu 12">
+            <a:extLst>
+              <a:ext uri="{FF2B5EF4-FFF2-40B4-BE49-F238E27FC236}">
+                <a16:creationId xmlns:a16="http://schemas.microsoft.com/office/drawing/2014/main" id="{55F14169-6129-859B-49B6-4ABE30C6CE46}"/>
+              </a:ext>
+            </a:extLst>
+          </p:cNvPr>
+          <p:cNvSpPr txBox="1"/>
+          <p:nvPr/>
+        </p:nvSpPr>
+        <p:spPr>
+          <a:xfrm>
+            <a:off x="5632704" y="2579050"/>
+            <a:ext cx="4424866" cy="369332"/>
+          </a:xfrm>
+          <a:prstGeom prst="rect">
+            <a:avLst/>
+          </a:prstGeom>
+          <a:noFill/>
+        </p:spPr>
+        <p:txBody>
+          <a:bodyPr wrap="none" rtlCol="0">
+            <a:spAutoFit/>
+          </a:bodyPr>
+          <a:lstStyle/>
+          <a:p>
+            <a:r>
+              <a:rPr lang="tr-TR" dirty="0" err="1"/>
+              <a:t>Allah’u</a:t>
+            </a:r>
+            <a:r>
+              <a:rPr lang="tr-TR" dirty="0"/>
+              <a:t> Teala bir mekanda yerleşici değildir.</a:t>
+            </a:r>
+          </a:p>
+        </p:txBody>
+      </p:sp>
+      <p:sp>
+        <p:nvSpPr>
+          <p:cNvPr id="15" name="Metin kutusu 14">
+            <a:extLst>
+              <a:ext uri="{FF2B5EF4-FFF2-40B4-BE49-F238E27FC236}">
+                <a16:creationId xmlns:a16="http://schemas.microsoft.com/office/drawing/2014/main" id="{E17506B3-7547-CE0F-1AD6-A35840E0E915}"/>
+              </a:ext>
+            </a:extLst>
+          </p:cNvPr>
+          <p:cNvSpPr txBox="1"/>
+          <p:nvPr/>
+        </p:nvSpPr>
+        <p:spPr>
+          <a:xfrm>
+            <a:off x="606529" y="4094284"/>
+            <a:ext cx="2510046" cy="461665"/>
+          </a:xfrm>
+          <a:prstGeom prst="rect">
+            <a:avLst/>
+          </a:prstGeom>
+          <a:noFill/>
+        </p:spPr>
+        <p:txBody>
+          <a:bodyPr wrap="none" rtlCol="0">
+            <a:spAutoFit/>
+          </a:bodyPr>
+          <a:lstStyle/>
+          <a:p>
+            <a:r>
+              <a:rPr lang="ar-AE" sz="2400" b="1" dirty="0">
+                <a:solidFill>
+                  <a:srgbClr val="C00000"/>
+                </a:solidFill>
+              </a:rPr>
+              <a:t>لَا</a:t>
+            </a:r>
+            <a:r>
+              <a:rPr lang="tr-TR" sz="2400" b="1" dirty="0">
+                <a:solidFill>
+                  <a:srgbClr val="C00000"/>
+                </a:solidFill>
+              </a:rPr>
+              <a:t> Harfinin Misali:</a:t>
+            </a:r>
+          </a:p>
+        </p:txBody>
+      </p:sp>
+      <p:sp>
+        <p:nvSpPr>
+          <p:cNvPr id="18" name="Metin kutusu 17">
+            <a:extLst>
+              <a:ext uri="{FF2B5EF4-FFF2-40B4-BE49-F238E27FC236}">
+                <a16:creationId xmlns:a16="http://schemas.microsoft.com/office/drawing/2014/main" id="{BF6E1978-9673-F82D-28CA-B425B16A0F39}"/>
+              </a:ext>
+            </a:extLst>
+          </p:cNvPr>
+          <p:cNvSpPr txBox="1"/>
+          <p:nvPr/>
+        </p:nvSpPr>
+        <p:spPr>
+          <a:xfrm>
+            <a:off x="1934681" y="4566183"/>
+            <a:ext cx="2563522" cy="461665"/>
+          </a:xfrm>
+          <a:prstGeom prst="rect">
+            <a:avLst/>
+          </a:prstGeom>
+          <a:noFill/>
+        </p:spPr>
+        <p:txBody>
+          <a:bodyPr wrap="none" rtlCol="0">
+            <a:spAutoFit/>
+          </a:bodyPr>
+          <a:lstStyle/>
+          <a:p>
+            <a:r>
+              <a:rPr lang="ar-AE" sz="2400" dirty="0"/>
+              <a:t>لَا شَيْءٌ مُتَشَابِهًا لِلَّهِ تَعَالَى</a:t>
+            </a:r>
+            <a:endParaRPr lang="tr-TR" sz="2400" dirty="0"/>
+          </a:p>
+        </p:txBody>
+      </p:sp>
+      <p:sp>
+        <p:nvSpPr>
+          <p:cNvPr id="19" name="Metin kutusu 18">
+            <a:extLst>
+              <a:ext uri="{FF2B5EF4-FFF2-40B4-BE49-F238E27FC236}">
+                <a16:creationId xmlns:a16="http://schemas.microsoft.com/office/drawing/2014/main" id="{09F2D4EA-169A-4462-FF54-CE6DBE38A970}"/>
+              </a:ext>
+            </a:extLst>
+          </p:cNvPr>
+          <p:cNvSpPr txBox="1"/>
+          <p:nvPr/>
+        </p:nvSpPr>
+        <p:spPr>
+          <a:xfrm>
+            <a:off x="5705833" y="4612349"/>
+            <a:ext cx="4564135" cy="369332"/>
+          </a:xfrm>
+          <a:prstGeom prst="rect">
+            <a:avLst/>
+          </a:prstGeom>
+          <a:noFill/>
+        </p:spPr>
+        <p:txBody>
+          <a:bodyPr wrap="none" rtlCol="0">
+            <a:spAutoFit/>
+          </a:bodyPr>
+          <a:lstStyle/>
+          <a:p>
+            <a:r>
+              <a:rPr lang="tr-TR" dirty="0"/>
+              <a:t>Hiçbir şey </a:t>
+            </a:r>
+            <a:r>
+              <a:rPr lang="tr-TR" dirty="0" err="1"/>
+              <a:t>Allah’u</a:t>
+            </a:r>
+            <a:r>
+              <a:rPr lang="tr-TR" dirty="0"/>
+              <a:t> Teala’ya benzeyici değildir.</a:t>
+            </a:r>
+          </a:p>
+        </p:txBody>
+      </p:sp>
+      <p:cxnSp>
+        <p:nvCxnSpPr>
+          <p:cNvPr id="20" name="Düz Ok Bağlayıcısı 19">
+            <a:extLst>
+              <a:ext uri="{FF2B5EF4-FFF2-40B4-BE49-F238E27FC236}">
+                <a16:creationId xmlns:a16="http://schemas.microsoft.com/office/drawing/2014/main" id="{04EA0BFB-4C36-43E2-62D6-7A70782D8E8E}"/>
+              </a:ext>
+            </a:extLst>
+          </p:cNvPr>
+          <p:cNvCxnSpPr>
+            <a:cxnSpLocks/>
+            <a:stCxn id="18" idx="3"/>
+            <a:endCxn id="19" idx="1"/>
+          </p:cNvCxnSpPr>
+          <p:nvPr/>
+        </p:nvCxnSpPr>
+        <p:spPr>
+          <a:xfrm flipV="1">
+            <a:off x="4498203" y="4797015"/>
+            <a:ext cx="1207630" cy="1"/>
+          </a:xfrm>
+          <a:prstGeom prst="straightConnector1">
+            <a:avLst/>
+          </a:prstGeom>
+          <a:ln>
+            <a:tailEnd type="triangle"/>
+          </a:ln>
+        </p:spPr>
+        <p:style>
+          <a:lnRef idx="2">
+            <a:schemeClr val="accent1"/>
+          </a:lnRef>
+          <a:fillRef idx="0">
+            <a:schemeClr val="accent1"/>
+          </a:fillRef>
+          <a:effectRef idx="1">
+            <a:schemeClr val="accent1"/>
+          </a:effectRef>
+          <a:fontRef idx="minor">
+            <a:schemeClr val="tx1"/>
+          </a:fontRef>
+        </p:style>
+      </p:cxnSp>
     </p:spTree>
     <p:extLst>
       <p:ext uri="{BB962C8B-B14F-4D97-AF65-F5344CB8AC3E}">
         <p14:creationId xmlns:p14="http://schemas.microsoft.com/office/powerpoint/2010/main" val="3809376876"/>
+      </p:ext>
+    </p:extLst>
+  </p:cSld>
+  <p:clrMapOvr>
+    <a:masterClrMapping/>
+  </p:clrMapOvr>
+</p:sld>
+</file>
+
+<file path=ppt/slides/slide6.xml><?xml version="1.0" encoding="utf-8"?>
+<p:sld xmlns:a="http://schemas.openxmlformats.org/drawingml/2006/main" xmlns:r="http://schemas.openxmlformats.org/officeDocument/2006/relationships" xmlns:p="http://schemas.openxmlformats.org/presentationml/2006/main">
+  <p:cSld>
+    <p:spTree>
+      <p:nvGrpSpPr>
+        <p:cNvPr id="1" name=""/>
+        <p:cNvGrpSpPr/>
+        <p:nvPr/>
+      </p:nvGrpSpPr>
+      <p:grpSpPr>
+        <a:xfrm>
+          <a:off x="0" y="0"/>
+          <a:ext cx="0" cy="0"/>
+          <a:chOff x="0" y="0"/>
+          <a:chExt cx="0" cy="0"/>
+        </a:xfrm>
+      </p:grpSpPr>
+      <p:sp>
+        <p:nvSpPr>
+          <p:cNvPr id="2" name="Başlık 1">
+            <a:extLst>
+              <a:ext uri="{FF2B5EF4-FFF2-40B4-BE49-F238E27FC236}">
+                <a16:creationId xmlns:a16="http://schemas.microsoft.com/office/drawing/2014/main" id="{4F31AC6B-9B8F-F79D-2B52-3A31D83E3662}"/>
+              </a:ext>
+            </a:extLst>
+          </p:cNvPr>
+          <p:cNvSpPr>
+            <a:spLocks noGrp="1"/>
+          </p:cNvSpPr>
+          <p:nvPr>
+            <p:ph type="title"/>
+          </p:nvPr>
+        </p:nvSpPr>
+        <p:spPr>
+          <a:xfrm>
+            <a:off x="59267" y="30553"/>
+            <a:ext cx="12073465" cy="580525"/>
+          </a:xfrm>
+          <a:solidFill>
+            <a:srgbClr val="0070C0"/>
+          </a:solidFill>
+        </p:spPr>
+        <p:txBody>
+          <a:bodyPr>
+            <a:normAutofit fontScale="90000"/>
+          </a:bodyPr>
+          <a:lstStyle/>
+          <a:p>
+            <a:r>
+              <a:rPr lang="tr-TR" dirty="0">
+                <a:solidFill>
+                  <a:schemeClr val="bg1">
+                    <a:lumMod val="95000"/>
+                  </a:schemeClr>
+                </a:solidFill>
+                <a:latin typeface="Algerian" panose="04020705040A02060702" pitchFamily="82" charset="0"/>
+              </a:rPr>
+              <a:t>	AMİL-İ SEMAİ</a:t>
+            </a:r>
+          </a:p>
+        </p:txBody>
+      </p:sp>
+      <p:sp>
+        <p:nvSpPr>
+          <p:cNvPr id="3" name="Metin kutusu 2">
+            <a:extLst>
+              <a:ext uri="{FF2B5EF4-FFF2-40B4-BE49-F238E27FC236}">
+                <a16:creationId xmlns:a16="http://schemas.microsoft.com/office/drawing/2014/main" id="{46884D15-E418-F484-DBD1-B3020DA73FE4}"/>
+              </a:ext>
+            </a:extLst>
+          </p:cNvPr>
+          <p:cNvSpPr txBox="1"/>
+          <p:nvPr/>
+        </p:nvSpPr>
+        <p:spPr>
+          <a:xfrm>
+            <a:off x="8628017" y="120760"/>
+            <a:ext cx="3406702" cy="400110"/>
+          </a:xfrm>
+          <a:prstGeom prst="rect">
+            <a:avLst/>
+          </a:prstGeom>
+          <a:noFill/>
+        </p:spPr>
+        <p:txBody>
+          <a:bodyPr wrap="none" rtlCol="0">
+            <a:spAutoFit/>
+          </a:bodyPr>
+          <a:lstStyle/>
+          <a:p>
+            <a:r>
+              <a:rPr lang="tr-TR" sz="2000" i="1" u="sng" dirty="0" err="1">
+                <a:solidFill>
+                  <a:schemeClr val="bg1">
+                    <a:lumMod val="95000"/>
+                  </a:schemeClr>
+                </a:solidFill>
+                <a:latin typeface="Alef" panose="00000500000000000000" pitchFamily="2" charset="-79"/>
+                <a:cs typeface="Alef" panose="00000500000000000000" pitchFamily="2" charset="-79"/>
+              </a:rPr>
+              <a:t>Müzariyi</a:t>
+            </a:r>
+            <a:r>
+              <a:rPr lang="tr-TR" sz="2000" i="1" u="sng" dirty="0">
+                <a:solidFill>
+                  <a:schemeClr val="bg1">
+                    <a:lumMod val="95000"/>
+                  </a:schemeClr>
+                </a:solidFill>
+                <a:latin typeface="Alef" panose="00000500000000000000" pitchFamily="2" charset="-79"/>
+                <a:cs typeface="Alef" panose="00000500000000000000" pitchFamily="2" charset="-79"/>
+              </a:rPr>
+              <a:t> </a:t>
+            </a:r>
+            <a:r>
+              <a:rPr lang="tr-TR" sz="2000" i="1" u="sng" dirty="0" err="1">
+                <a:solidFill>
+                  <a:schemeClr val="bg1">
+                    <a:lumMod val="95000"/>
+                  </a:schemeClr>
+                </a:solidFill>
+                <a:latin typeface="Alef" panose="00000500000000000000" pitchFamily="2" charset="-79"/>
+                <a:cs typeface="Alef" panose="00000500000000000000" pitchFamily="2" charset="-79"/>
+              </a:rPr>
+              <a:t>Nasb</a:t>
+            </a:r>
+            <a:r>
+              <a:rPr lang="tr-TR" sz="2000" i="1" u="sng" dirty="0">
+                <a:solidFill>
+                  <a:schemeClr val="bg1">
+                    <a:lumMod val="95000"/>
+                  </a:schemeClr>
+                </a:solidFill>
+                <a:latin typeface="Alef" panose="00000500000000000000" pitchFamily="2" charset="-79"/>
+                <a:cs typeface="Alef" panose="00000500000000000000" pitchFamily="2" charset="-79"/>
+              </a:rPr>
+              <a:t> Eden Harfler</a:t>
+            </a:r>
+          </a:p>
+        </p:txBody>
+      </p:sp>
+      <p:graphicFrame>
+        <p:nvGraphicFramePr>
+          <p:cNvPr id="4" name="Tablo 3">
+            <a:extLst>
+              <a:ext uri="{FF2B5EF4-FFF2-40B4-BE49-F238E27FC236}">
+                <a16:creationId xmlns:a16="http://schemas.microsoft.com/office/drawing/2014/main" id="{68584F34-5760-A8FF-F508-8893A0F5A381}"/>
+              </a:ext>
+            </a:extLst>
+          </p:cNvPr>
+          <p:cNvGraphicFramePr>
+            <a:graphicFrameLocks noGrp="1"/>
+          </p:cNvGraphicFramePr>
+          <p:nvPr>
+            <p:extLst>
+              <p:ext uri="{D42A27DB-BD31-4B8C-83A1-F6EECF244321}">
+                <p14:modId xmlns:p14="http://schemas.microsoft.com/office/powerpoint/2010/main" val="2243975665"/>
+              </p:ext>
+            </p:extLst>
+          </p:nvPr>
+        </p:nvGraphicFramePr>
+        <p:xfrm>
+          <a:off x="59267" y="667258"/>
+          <a:ext cx="12073464" cy="3012627"/>
+        </p:xfrm>
+        <a:graphic>
+          <a:graphicData uri="http://schemas.openxmlformats.org/drawingml/2006/table">
+            <a:tbl>
+              <a:tblPr firstRow="1" bandRow="1">
+                <a:tableStyleId>{5C22544A-7EE6-4342-B048-85BDC9FD1C3A}</a:tableStyleId>
+              </a:tblPr>
+              <a:tblGrid>
+                <a:gridCol w="1247019">
+                  <a:extLst>
+                    <a:ext uri="{9D8B030D-6E8A-4147-A177-3AD203B41FA5}">
+                      <a16:colId xmlns:a16="http://schemas.microsoft.com/office/drawing/2014/main" val="3242288309"/>
+                    </a:ext>
+                  </a:extLst>
+                </a:gridCol>
+                <a:gridCol w="1750423">
+                  <a:extLst>
+                    <a:ext uri="{9D8B030D-6E8A-4147-A177-3AD203B41FA5}">
+                      <a16:colId xmlns:a16="http://schemas.microsoft.com/office/drawing/2014/main" val="2112445330"/>
+                    </a:ext>
+                  </a:extLst>
+                </a:gridCol>
+                <a:gridCol w="9076022">
+                  <a:extLst>
+                    <a:ext uri="{9D8B030D-6E8A-4147-A177-3AD203B41FA5}">
+                      <a16:colId xmlns:a16="http://schemas.microsoft.com/office/drawing/2014/main" val="317297140"/>
+                    </a:ext>
+                  </a:extLst>
+                </a:gridCol>
+              </a:tblGrid>
+              <a:tr h="629067">
+                <a:tc>
+                  <a:txBody>
+                    <a:bodyPr/>
+                    <a:lstStyle/>
+                    <a:p>
+                      <a:r>
+                        <a:rPr lang="tr-TR" dirty="0"/>
+                        <a:t>Harf-i Cer</a:t>
+                      </a:r>
+                    </a:p>
+                  </a:txBody>
+                  <a:tcPr/>
+                </a:tc>
+                <a:tc>
+                  <a:txBody>
+                    <a:bodyPr/>
+                    <a:lstStyle/>
+                    <a:p>
+                      <a:r>
+                        <a:rPr lang="tr-TR" dirty="0"/>
+                        <a:t>Mana</a:t>
+                      </a:r>
+                    </a:p>
+                  </a:txBody>
+                  <a:tcPr/>
+                </a:tc>
+                <a:tc>
+                  <a:txBody>
+                    <a:bodyPr/>
+                    <a:lstStyle/>
+                    <a:p>
+                      <a:r>
+                        <a:rPr lang="tr-TR" dirty="0"/>
+                        <a:t>Misal</a:t>
+                      </a:r>
+                    </a:p>
+                  </a:txBody>
+                  <a:tcPr/>
+                </a:tc>
+                <a:extLst>
+                  <a:ext uri="{0D108BD9-81ED-4DB2-BD59-A6C34878D82A}">
+                    <a16:rowId xmlns:a16="http://schemas.microsoft.com/office/drawing/2014/main" val="3289731430"/>
+                  </a:ext>
+                </a:extLst>
+              </a:tr>
+              <a:tr h="449333">
+                <a:tc>
+                  <a:txBody>
+                    <a:bodyPr/>
+                    <a:lstStyle/>
+                    <a:p>
+                      <a:pPr algn="ctr"/>
+                      <a:r>
+                        <a:rPr lang="ar-AE" sz="2400" b="1" dirty="0">
+                          <a:solidFill>
+                            <a:srgbClr val="C00000"/>
+                          </a:solidFill>
+                          <a:latin typeface="Algerian" panose="04020705040A02060702" pitchFamily="82" charset="0"/>
+                        </a:rPr>
+                        <a:t>أَنْ</a:t>
+                      </a:r>
+                      <a:endParaRPr lang="tr-TR" sz="2400" b="1" dirty="0">
+                        <a:solidFill>
+                          <a:srgbClr val="C00000"/>
+                        </a:solidFill>
+                        <a:latin typeface="Algerian" panose="04020705040A02060702" pitchFamily="82" charset="0"/>
+                      </a:endParaRPr>
+                    </a:p>
+                  </a:txBody>
+                  <a:tcPr/>
+                </a:tc>
+                <a:tc>
+                  <a:txBody>
+                    <a:bodyPr/>
+                    <a:lstStyle/>
+                    <a:p>
+                      <a:pPr algn="ctr"/>
+                      <a:r>
+                        <a:rPr lang="tr-TR" sz="1800" dirty="0"/>
+                        <a:t>…</a:t>
+                      </a:r>
+                      <a:r>
+                        <a:rPr lang="tr-TR" sz="1800" dirty="0" err="1"/>
+                        <a:t>mek</a:t>
+                      </a:r>
+                      <a:r>
+                        <a:rPr lang="tr-TR" sz="1800" dirty="0"/>
+                        <a:t>/…</a:t>
+                      </a:r>
+                      <a:r>
+                        <a:rPr lang="tr-TR" sz="1800" dirty="0" err="1"/>
+                        <a:t>mak</a:t>
+                      </a:r>
+                      <a:endParaRPr lang="tr-TR" sz="1800" dirty="0"/>
+                    </a:p>
+                  </a:txBody>
+                  <a:tcPr/>
+                </a:tc>
+                <a:tc>
+                  <a:txBody>
+                    <a:bodyPr/>
+                    <a:lstStyle/>
+                    <a:p>
+                      <a:pPr algn="ctr"/>
+                      <a:r>
+                        <a:rPr lang="tr-TR" sz="1600" b="1" kern="1200" dirty="0">
+                          <a:solidFill>
+                            <a:schemeClr val="tx1"/>
+                          </a:solidFill>
+                          <a:latin typeface="Arabic Typesetting" panose="03020402040406030203" pitchFamily="66" charset="-78"/>
+                          <a:ea typeface="Amiri" panose="00000500000000000000" pitchFamily="2" charset="-78"/>
+                          <a:cs typeface="Arabic Typesetting" panose="03020402040406030203" pitchFamily="66" charset="-78"/>
+                        </a:rPr>
+                        <a:t> </a:t>
+                      </a:r>
+                      <a:r>
+                        <a:rPr lang="ar-AE" sz="1600" b="1" kern="1200" dirty="0">
+                          <a:solidFill>
+                            <a:srgbClr val="C00000"/>
+                          </a:solidFill>
+                          <a:latin typeface="Arabic Typesetting" panose="03020402040406030203" pitchFamily="66" charset="-78"/>
+                          <a:ea typeface="Amiri" panose="00000500000000000000" pitchFamily="2" charset="-78"/>
+                          <a:cs typeface="Arabic Typesetting" panose="03020402040406030203" pitchFamily="66" charset="-78"/>
+                        </a:rPr>
+                        <a:t>أَنْ </a:t>
+                      </a:r>
+                      <a:r>
+                        <a:rPr lang="ar-AE" sz="1600" b="1" kern="1200" dirty="0">
+                          <a:solidFill>
+                            <a:schemeClr val="tx1"/>
+                          </a:solidFill>
+                          <a:latin typeface="Arabic Typesetting" panose="03020402040406030203" pitchFamily="66" charset="-78"/>
+                          <a:ea typeface="Amiri" panose="00000500000000000000" pitchFamily="2" charset="-78"/>
+                          <a:cs typeface="Arabic Typesetting" panose="03020402040406030203" pitchFamily="66" charset="-78"/>
+                        </a:rPr>
+                        <a:t>أُحِبُّ أُطِيعَ اللَّهَ</a:t>
+                      </a:r>
+                      <a:r>
+                        <a:rPr lang="tr-TR" sz="1600" b="1" kern="1200" dirty="0">
+                          <a:solidFill>
+                            <a:schemeClr val="tx1"/>
+                          </a:solidFill>
+                          <a:latin typeface="Arabic Typesetting" panose="03020402040406030203" pitchFamily="66" charset="-78"/>
+                          <a:ea typeface="Amiri" panose="00000500000000000000" pitchFamily="2" charset="-78"/>
+                          <a:cs typeface="Arabic Typesetting" panose="03020402040406030203" pitchFamily="66" charset="-78"/>
+                        </a:rPr>
+                        <a:t> /</a:t>
+                      </a:r>
+                      <a:r>
+                        <a:rPr lang="tr-TR" sz="1600" b="1" kern="1200" dirty="0">
+                          <a:solidFill>
+                            <a:schemeClr val="accent6">
+                              <a:lumMod val="50000"/>
+                            </a:schemeClr>
+                          </a:solidFill>
+                          <a:latin typeface="Arabic Typesetting" panose="03020402040406030203" pitchFamily="66" charset="-78"/>
+                          <a:ea typeface="Amiri" panose="00000500000000000000" pitchFamily="2" charset="-78"/>
+                          <a:cs typeface="Arabic Typesetting" panose="03020402040406030203" pitchFamily="66" charset="-78"/>
+                        </a:rPr>
+                        <a:t>  </a:t>
+                      </a:r>
+                      <a:r>
+                        <a:rPr lang="tr-TR" sz="1600" b="1" kern="1200" dirty="0">
+                          <a:solidFill>
+                            <a:schemeClr val="tx1"/>
+                          </a:solidFill>
+                          <a:latin typeface="Arabic Typesetting" panose="03020402040406030203" pitchFamily="66" charset="-78"/>
+                          <a:ea typeface="Amiri" panose="00000500000000000000" pitchFamily="2" charset="-78"/>
+                          <a:cs typeface="Arabic Typesetting" panose="03020402040406030203" pitchFamily="66" charset="-78"/>
+                        </a:rPr>
+                        <a:t>Allah’a itaat etmeyi seviyorum.</a:t>
+                      </a:r>
+                      <a:endParaRPr lang="tr-TR" sz="1600" b="1" kern="1200" dirty="0">
+                        <a:solidFill>
+                          <a:schemeClr val="accent6">
+                            <a:lumMod val="50000"/>
+                          </a:schemeClr>
+                        </a:solidFill>
+                        <a:latin typeface="Arabic Typesetting" panose="03020402040406030203" pitchFamily="66" charset="-78"/>
+                        <a:ea typeface="Amiri" panose="00000500000000000000" pitchFamily="2" charset="-78"/>
+                        <a:cs typeface="Arabic Typesetting" panose="03020402040406030203" pitchFamily="66" charset="-78"/>
+                      </a:endParaRPr>
+                    </a:p>
+                  </a:txBody>
+                  <a:tcPr/>
+                </a:tc>
+                <a:extLst>
+                  <a:ext uri="{0D108BD9-81ED-4DB2-BD59-A6C34878D82A}">
+                    <a16:rowId xmlns:a16="http://schemas.microsoft.com/office/drawing/2014/main" val="3898272618"/>
+                  </a:ext>
+                </a:extLst>
+              </a:tr>
+              <a:tr h="449333">
+                <a:tc>
+                  <a:txBody>
+                    <a:bodyPr/>
+                    <a:lstStyle/>
+                    <a:p>
+                      <a:pPr algn="ctr"/>
+                      <a:r>
+                        <a:rPr lang="ar-AE" sz="2400" b="1" dirty="0">
+                          <a:solidFill>
+                            <a:srgbClr val="C00000"/>
+                          </a:solidFill>
+                          <a:latin typeface="Algerian" panose="04020705040A02060702" pitchFamily="82" charset="0"/>
+                        </a:rPr>
+                        <a:t>لَنْ</a:t>
+                      </a:r>
+                      <a:endParaRPr lang="tr-TR" sz="2400" b="1" dirty="0">
+                        <a:solidFill>
+                          <a:srgbClr val="C00000"/>
+                        </a:solidFill>
+                        <a:latin typeface="Algerian" panose="04020705040A02060702" pitchFamily="82" charset="0"/>
+                      </a:endParaRPr>
+                    </a:p>
+                  </a:txBody>
+                  <a:tcPr/>
+                </a:tc>
+                <a:tc>
+                  <a:txBody>
+                    <a:bodyPr/>
+                    <a:lstStyle/>
+                    <a:p>
+                      <a:pPr algn="ctr"/>
+                      <a:r>
+                        <a:rPr lang="tr-TR" sz="1800" dirty="0"/>
+                        <a:t>…</a:t>
+                      </a:r>
+                      <a:r>
+                        <a:rPr lang="tr-TR" sz="1800" dirty="0" err="1"/>
+                        <a:t>ecek</a:t>
+                      </a:r>
+                      <a:r>
+                        <a:rPr lang="tr-TR" sz="1800" dirty="0"/>
+                        <a:t>/…</a:t>
+                      </a:r>
+                      <a:r>
+                        <a:rPr lang="tr-TR" sz="1800" dirty="0" err="1"/>
+                        <a:t>acak</a:t>
+                      </a:r>
+                      <a:r>
+                        <a:rPr lang="tr-TR" sz="1800" dirty="0"/>
+                        <a:t> Asla</a:t>
+                      </a:r>
+                    </a:p>
+                  </a:txBody>
+                  <a:tcPr/>
+                </a:tc>
+                <a:tc>
+                  <a:txBody>
+                    <a:bodyPr/>
+                    <a:lstStyle/>
+                    <a:p>
+                      <a:pPr algn="ctr"/>
+                      <a:r>
+                        <a:rPr lang="tr-TR" sz="1600" b="1" kern="1200" dirty="0">
+                          <a:solidFill>
+                            <a:srgbClr val="C00000"/>
+                          </a:solidFill>
+                          <a:latin typeface="Arabic Typesetting" panose="03020402040406030203" pitchFamily="66" charset="-78"/>
+                          <a:ea typeface="Amiri" panose="00000500000000000000" pitchFamily="2" charset="-78"/>
+                          <a:cs typeface="Arabic Typesetting" panose="03020402040406030203" pitchFamily="66" charset="-78"/>
+                        </a:rPr>
+                        <a:t> </a:t>
+                      </a:r>
+                      <a:r>
+                        <a:rPr lang="ar-AE" sz="1600" b="1" kern="1200" dirty="0">
+                          <a:solidFill>
+                            <a:srgbClr val="C00000"/>
+                          </a:solidFill>
+                          <a:latin typeface="Arabic Typesetting" panose="03020402040406030203" pitchFamily="66" charset="-78"/>
+                          <a:ea typeface="Amiri" panose="00000500000000000000" pitchFamily="2" charset="-78"/>
+                          <a:cs typeface="Arabic Typesetting" panose="03020402040406030203" pitchFamily="66" charset="-78"/>
+                        </a:rPr>
+                        <a:t>لَنْ</a:t>
+                      </a:r>
+                      <a:r>
+                        <a:rPr lang="ar-AE" sz="1600" b="1" kern="1200" dirty="0">
+                          <a:solidFill>
+                            <a:schemeClr val="tx1"/>
+                          </a:solidFill>
+                          <a:latin typeface="Arabic Typesetting" panose="03020402040406030203" pitchFamily="66" charset="-78"/>
+                          <a:ea typeface="Amiri" panose="00000500000000000000" pitchFamily="2" charset="-78"/>
+                          <a:cs typeface="Arabic Typesetting" panose="03020402040406030203" pitchFamily="66" charset="-78"/>
+                        </a:rPr>
+                        <a:t> يَغْفِرَ اللَّهُ تَعَالَى لِلْكَافِرِينَ</a:t>
+                      </a:r>
+                      <a:r>
+                        <a:rPr lang="tr-TR" sz="1600" b="1" kern="1200" dirty="0">
+                          <a:solidFill>
+                            <a:schemeClr val="tx1"/>
+                          </a:solidFill>
+                          <a:latin typeface="Arabic Typesetting" panose="03020402040406030203" pitchFamily="66" charset="-78"/>
+                          <a:ea typeface="Amiri" panose="00000500000000000000" pitchFamily="2" charset="-78"/>
+                          <a:cs typeface="Arabic Typesetting" panose="03020402040406030203" pitchFamily="66" charset="-78"/>
+                        </a:rPr>
+                        <a:t> </a:t>
+                      </a:r>
+                      <a:r>
+                        <a:rPr lang="tr-TR" sz="1600" b="1" dirty="0">
+                          <a:solidFill>
+                            <a:schemeClr val="tx1"/>
+                          </a:solidFill>
+                          <a:latin typeface="Arabic Typesetting" panose="03020402040406030203" pitchFamily="66" charset="-78"/>
+                          <a:cs typeface="Arabic Typesetting" panose="03020402040406030203" pitchFamily="66" charset="-78"/>
+                        </a:rPr>
+                        <a:t>/ Elbette Allah Teala kafirleri mağfiret etmeyecek.</a:t>
+                      </a:r>
+                    </a:p>
+                  </a:txBody>
+                  <a:tcPr/>
+                </a:tc>
+                <a:extLst>
+                  <a:ext uri="{0D108BD9-81ED-4DB2-BD59-A6C34878D82A}">
+                    <a16:rowId xmlns:a16="http://schemas.microsoft.com/office/drawing/2014/main" val="2209876613"/>
+                  </a:ext>
+                </a:extLst>
+              </a:tr>
+              <a:tr h="463320">
+                <a:tc>
+                  <a:txBody>
+                    <a:bodyPr/>
+                    <a:lstStyle/>
+                    <a:p>
+                      <a:pPr algn="ctr"/>
+                      <a:r>
+                        <a:rPr lang="ar-AE" sz="2400" b="1" dirty="0">
+                          <a:solidFill>
+                            <a:srgbClr val="C00000"/>
+                          </a:solidFill>
+                          <a:latin typeface="Algerian" panose="04020705040A02060702" pitchFamily="82" charset="0"/>
+                        </a:rPr>
+                        <a:t>كَىْ</a:t>
+                      </a:r>
+                      <a:endParaRPr lang="tr-TR" sz="2400" b="1" dirty="0">
+                        <a:solidFill>
+                          <a:srgbClr val="C00000"/>
+                        </a:solidFill>
+                        <a:latin typeface="Algerian" panose="04020705040A02060702" pitchFamily="82" charset="0"/>
+                      </a:endParaRPr>
+                    </a:p>
+                  </a:txBody>
+                  <a:tcPr/>
+                </a:tc>
+                <a:tc>
+                  <a:txBody>
+                    <a:bodyPr/>
+                    <a:lstStyle/>
+                    <a:p>
+                      <a:pPr algn="ctr"/>
+                      <a:r>
+                        <a:rPr lang="tr-TR" sz="1800" dirty="0"/>
+                        <a:t>İçin </a:t>
+                      </a:r>
+                    </a:p>
+                  </a:txBody>
+                  <a:tcPr/>
+                </a:tc>
+                <a:tc>
+                  <a:txBody>
+                    <a:bodyPr/>
+                    <a:lstStyle/>
+                    <a:p>
+                      <a:pPr algn="ctr"/>
+                      <a:r>
+                        <a:rPr lang="ar-AE" sz="1600" b="1" dirty="0">
+                          <a:solidFill>
+                            <a:schemeClr val="tx1"/>
+                          </a:solidFill>
+                          <a:latin typeface="Arabic Typesetting" panose="03020402040406030203" pitchFamily="66" charset="-78"/>
+                          <a:cs typeface="Arabic Typesetting" panose="03020402040406030203" pitchFamily="66" charset="-78"/>
+                        </a:rPr>
+                        <a:t>أُحِبُّ</a:t>
+                      </a:r>
+                      <a:r>
+                        <a:rPr lang="ar-AE" sz="1600" b="1" dirty="0">
+                          <a:solidFill>
+                            <a:srgbClr val="C00000"/>
+                          </a:solidFill>
+                          <a:latin typeface="Arabic Typesetting" panose="03020402040406030203" pitchFamily="66" charset="-78"/>
+                          <a:cs typeface="Arabic Typesetting" panose="03020402040406030203" pitchFamily="66" charset="-78"/>
+                        </a:rPr>
+                        <a:t> </a:t>
+                      </a:r>
+                      <a:r>
+                        <a:rPr lang="ar-AE" sz="1600" b="1" dirty="0">
+                          <a:solidFill>
+                            <a:schemeClr val="tx1"/>
+                          </a:solidFill>
+                          <a:latin typeface="Arabic Typesetting" panose="03020402040406030203" pitchFamily="66" charset="-78"/>
+                          <a:cs typeface="Arabic Typesetting" panose="03020402040406030203" pitchFamily="66" charset="-78"/>
+                        </a:rPr>
+                        <a:t>طُولَ الْعُمْرِ </a:t>
+                      </a:r>
+                      <a:r>
+                        <a:rPr lang="ar-AE" sz="1600" b="1" dirty="0">
+                          <a:solidFill>
+                            <a:srgbClr val="C00000"/>
+                          </a:solidFill>
+                          <a:latin typeface="Arabic Typesetting" panose="03020402040406030203" pitchFamily="66" charset="-78"/>
+                          <a:cs typeface="Arabic Typesetting" panose="03020402040406030203" pitchFamily="66" charset="-78"/>
+                        </a:rPr>
+                        <a:t>كَىْ</a:t>
+                      </a:r>
+                      <a:r>
+                        <a:rPr lang="ar-AE" sz="1600" b="1" dirty="0">
+                          <a:solidFill>
+                            <a:schemeClr val="tx1"/>
+                          </a:solidFill>
+                          <a:latin typeface="Arabic Typesetting" panose="03020402040406030203" pitchFamily="66" charset="-78"/>
+                          <a:cs typeface="Arabic Typesetting" panose="03020402040406030203" pitchFamily="66" charset="-78"/>
+                        </a:rPr>
+                        <a:t> أُحَصِّلَ الْعِلْمَ</a:t>
+                      </a:r>
+                      <a:r>
+                        <a:rPr lang="tr-TR" sz="1600" b="1" dirty="0">
+                          <a:solidFill>
+                            <a:srgbClr val="C00000"/>
+                          </a:solidFill>
+                          <a:latin typeface="Arabic Typesetting" panose="03020402040406030203" pitchFamily="66" charset="-78"/>
+                          <a:cs typeface="Arabic Typesetting" panose="03020402040406030203" pitchFamily="66" charset="-78"/>
+                        </a:rPr>
+                        <a:t> </a:t>
+                      </a:r>
+                      <a:r>
+                        <a:rPr lang="tr-TR" sz="1600" b="1" dirty="0">
+                          <a:solidFill>
+                            <a:schemeClr val="tx1"/>
+                          </a:solidFill>
+                          <a:latin typeface="Arabic Typesetting" panose="03020402040406030203" pitchFamily="66" charset="-78"/>
+                          <a:cs typeface="Arabic Typesetting" panose="03020402040406030203" pitchFamily="66" charset="-78"/>
+                        </a:rPr>
+                        <a:t>/</a:t>
+                      </a:r>
+                      <a:r>
+                        <a:rPr lang="tr-TR" sz="1600" b="1" dirty="0">
+                          <a:solidFill>
+                            <a:schemeClr val="accent6">
+                              <a:lumMod val="50000"/>
+                            </a:schemeClr>
+                          </a:solidFill>
+                          <a:latin typeface="Arabic Typesetting" panose="03020402040406030203" pitchFamily="66" charset="-78"/>
+                          <a:cs typeface="Arabic Typesetting" panose="03020402040406030203" pitchFamily="66" charset="-78"/>
+                        </a:rPr>
+                        <a:t>  </a:t>
+                      </a:r>
+                      <a:r>
+                        <a:rPr lang="tr-TR" sz="1600" b="1" dirty="0">
+                          <a:solidFill>
+                            <a:schemeClr val="tx1"/>
+                          </a:solidFill>
+                          <a:latin typeface="Arabic Typesetting" panose="03020402040406030203" pitchFamily="66" charset="-78"/>
+                          <a:cs typeface="Arabic Typesetting" panose="03020402040406030203" pitchFamily="66" charset="-78"/>
+                        </a:rPr>
+                        <a:t>İlim tahsil etmek için ömrün uzun olmasını seviyorum.</a:t>
+                      </a:r>
+                    </a:p>
+                  </a:txBody>
+                  <a:tcPr/>
+                </a:tc>
+                <a:extLst>
+                  <a:ext uri="{0D108BD9-81ED-4DB2-BD59-A6C34878D82A}">
+                    <a16:rowId xmlns:a16="http://schemas.microsoft.com/office/drawing/2014/main" val="1718483269"/>
+                  </a:ext>
+                </a:extLst>
+              </a:tr>
+              <a:tr h="463320">
+                <a:tc>
+                  <a:txBody>
+                    <a:bodyPr/>
+                    <a:lstStyle/>
+                    <a:p>
+                      <a:pPr algn="ctr"/>
+                      <a:r>
+                        <a:rPr lang="ar-AE" sz="2400" b="1" dirty="0">
+                          <a:solidFill>
+                            <a:srgbClr val="C00000"/>
+                          </a:solidFill>
+                          <a:latin typeface="Algerian" panose="04020705040A02060702" pitchFamily="82" charset="0"/>
+                        </a:rPr>
+                        <a:t>إِذَنْ</a:t>
+                      </a:r>
+                      <a:endParaRPr lang="tr-TR" sz="2400" b="1" dirty="0">
+                        <a:solidFill>
+                          <a:srgbClr val="C00000"/>
+                        </a:solidFill>
+                        <a:latin typeface="Algerian" panose="04020705040A02060702" pitchFamily="82" charset="0"/>
+                      </a:endParaRPr>
+                    </a:p>
+                  </a:txBody>
+                  <a:tcPr/>
+                </a:tc>
+                <a:tc>
+                  <a:txBody>
+                    <a:bodyPr/>
+                    <a:lstStyle/>
+                    <a:p>
+                      <a:pPr algn="ctr"/>
+                      <a:r>
+                        <a:rPr lang="tr-TR" sz="1800" dirty="0"/>
+                        <a:t>Öyleyse</a:t>
+                      </a:r>
+                    </a:p>
+                  </a:txBody>
+                  <a:tcPr/>
+                </a:tc>
+                <a:tc>
+                  <a:txBody>
+                    <a:bodyPr/>
+                    <a:lstStyle/>
+                    <a:p>
+                      <a:pPr algn="ctr"/>
+                      <a:r>
+                        <a:rPr lang="tr-TR" sz="1600" b="1" dirty="0">
+                          <a:solidFill>
+                            <a:schemeClr val="tx1"/>
+                          </a:solidFill>
+                          <a:latin typeface="Arabic Typesetting" panose="03020402040406030203" pitchFamily="66" charset="-78"/>
+                          <a:cs typeface="Arabic Typesetting" panose="03020402040406030203" pitchFamily="66" charset="-78"/>
+                        </a:rPr>
+                        <a:t>Ben </a:t>
+                      </a:r>
+                      <a:r>
+                        <a:rPr lang="tr-TR" sz="1600" b="1" dirty="0" err="1">
+                          <a:solidFill>
+                            <a:schemeClr val="tx1"/>
+                          </a:solidFill>
+                          <a:latin typeface="Arabic Typesetting" panose="03020402040406030203" pitchFamily="66" charset="-78"/>
+                          <a:cs typeface="Arabic Typesetting" panose="03020402040406030203" pitchFamily="66" charset="-78"/>
+                        </a:rPr>
+                        <a:t>Allah’u</a:t>
+                      </a:r>
+                      <a:r>
+                        <a:rPr lang="tr-TR" sz="1600" b="1" dirty="0">
+                          <a:solidFill>
+                            <a:schemeClr val="tx1"/>
+                          </a:solidFill>
+                          <a:latin typeface="Arabic Typesetting" panose="03020402040406030203" pitchFamily="66" charset="-78"/>
+                          <a:cs typeface="Arabic Typesetting" panose="03020402040406030203" pitchFamily="66" charset="-78"/>
+                        </a:rPr>
+                        <a:t> Teala’ya itaat ediyorum</a:t>
+                      </a:r>
+                      <a:r>
+                        <a:rPr lang="tr-TR" sz="1200" b="0" dirty="0">
+                          <a:solidFill>
+                            <a:schemeClr val="tx1"/>
+                          </a:solidFill>
+                          <a:latin typeface="Arabic Typesetting" panose="03020402040406030203" pitchFamily="66" charset="-78"/>
+                          <a:cs typeface="Arabic Typesetting" panose="03020402040406030203" pitchFamily="66" charset="-78"/>
+                        </a:rPr>
+                        <a:t>. </a:t>
+                      </a:r>
+                      <a:r>
+                        <a:rPr lang="tr-TR" sz="1400" b="0" dirty="0">
+                          <a:solidFill>
+                            <a:schemeClr val="tx1"/>
+                          </a:solidFill>
+                          <a:latin typeface="Arabic Typesetting" panose="03020402040406030203" pitchFamily="66" charset="-78"/>
+                          <a:cs typeface="Arabic Typesetting" panose="03020402040406030203" pitchFamily="66" charset="-78"/>
+                        </a:rPr>
+                        <a:t>(Diyen birine)</a:t>
+                      </a:r>
+                      <a:endParaRPr lang="tr-TR" sz="1800" b="0" dirty="0">
+                        <a:solidFill>
+                          <a:schemeClr val="tx1"/>
+                        </a:solidFill>
+                        <a:latin typeface="Arabic Typesetting" panose="03020402040406030203" pitchFamily="66" charset="-78"/>
+                        <a:cs typeface="Arabic Typesetting" panose="03020402040406030203" pitchFamily="66" charset="-78"/>
+                      </a:endParaRPr>
+                    </a:p>
+                    <a:p>
+                      <a:pPr algn="ctr"/>
+                      <a:endParaRPr lang="tr-TR" sz="1600" b="1" dirty="0">
+                        <a:solidFill>
+                          <a:schemeClr val="tx1"/>
+                        </a:solidFill>
+                        <a:latin typeface="Arabic Typesetting" panose="03020402040406030203" pitchFamily="66" charset="-78"/>
+                        <a:cs typeface="Arabic Typesetting" panose="03020402040406030203" pitchFamily="66" charset="-78"/>
+                      </a:endParaRPr>
+                    </a:p>
+                    <a:p>
+                      <a:pPr marL="0" marR="0" lvl="0" indent="0" algn="ctr" defTabSz="914400" rtl="0" eaLnBrk="1" fontAlgn="auto" latinLnBrk="0" hangingPunct="1">
+                        <a:lnSpc>
+                          <a:spcPct val="100000"/>
+                        </a:lnSpc>
+                        <a:spcBef>
+                          <a:spcPts val="0"/>
+                        </a:spcBef>
+                        <a:spcAft>
+                          <a:spcPts val="0"/>
+                        </a:spcAft>
+                        <a:buClrTx/>
+                        <a:buSzTx/>
+                        <a:buFontTx/>
+                        <a:buNone/>
+                        <a:tabLst/>
+                        <a:defRPr/>
+                      </a:pPr>
+                      <a:r>
+                        <a:rPr lang="ar-AE" sz="1600" b="1" dirty="0">
+                          <a:solidFill>
+                            <a:srgbClr val="C00000"/>
+                          </a:solidFill>
+                          <a:latin typeface="Arabic Typesetting" panose="03020402040406030203" pitchFamily="66" charset="-78"/>
+                          <a:cs typeface="Arabic Typesetting" panose="03020402040406030203" pitchFamily="66" charset="-78"/>
+                        </a:rPr>
+                        <a:t>إِذَنْ </a:t>
+                      </a:r>
+                      <a:r>
+                        <a:rPr lang="ar-AE" sz="1600" b="1" dirty="0">
+                          <a:solidFill>
+                            <a:schemeClr val="tx1"/>
+                          </a:solidFill>
+                          <a:latin typeface="Arabic Typesetting" panose="03020402040406030203" pitchFamily="66" charset="-78"/>
+                          <a:cs typeface="Arabic Typesetting" panose="03020402040406030203" pitchFamily="66" charset="-78"/>
+                        </a:rPr>
+                        <a:t>تَدْخُلَ الْجَنَّةَ</a:t>
+                      </a:r>
+                      <a:r>
+                        <a:rPr lang="tr-TR" sz="1600" b="1" dirty="0">
+                          <a:solidFill>
+                            <a:schemeClr val="tx1"/>
+                          </a:solidFill>
+                          <a:latin typeface="Arabic Typesetting" panose="03020402040406030203" pitchFamily="66" charset="-78"/>
+                          <a:cs typeface="Arabic Typesetting" panose="03020402040406030203" pitchFamily="66" charset="-78"/>
+                        </a:rPr>
+                        <a:t> / Öyleyse cennete girersin. </a:t>
+                      </a:r>
+                      <a:r>
+                        <a:rPr lang="tr-TR" sz="1400" b="0" dirty="0">
+                          <a:solidFill>
+                            <a:schemeClr val="tx1"/>
+                          </a:solidFill>
+                          <a:latin typeface="Arabic Typesetting" panose="03020402040406030203" pitchFamily="66" charset="-78"/>
+                          <a:cs typeface="Arabic Typesetting" panose="03020402040406030203" pitchFamily="66" charset="-78"/>
+                        </a:rPr>
+                        <a:t>(Verilen cevap)</a:t>
+                      </a:r>
+                      <a:endParaRPr lang="tr-TR" sz="1600" b="0" dirty="0">
+                        <a:solidFill>
+                          <a:schemeClr val="tx1"/>
+                        </a:solidFill>
+                        <a:latin typeface="Arabic Typesetting" panose="03020402040406030203" pitchFamily="66" charset="-78"/>
+                        <a:cs typeface="Arabic Typesetting" panose="03020402040406030203" pitchFamily="66" charset="-78"/>
+                      </a:endParaRPr>
+                    </a:p>
+                  </a:txBody>
+                  <a:tcPr/>
+                </a:tc>
+                <a:extLst>
+                  <a:ext uri="{0D108BD9-81ED-4DB2-BD59-A6C34878D82A}">
+                    <a16:rowId xmlns:a16="http://schemas.microsoft.com/office/drawing/2014/main" val="98950525"/>
+                  </a:ext>
+                </a:extLst>
+              </a:tr>
+            </a:tbl>
+          </a:graphicData>
+        </a:graphic>
+      </p:graphicFrame>
+      <p:pic>
+        <p:nvPicPr>
+          <p:cNvPr id="9" name="Resim 8">
+            <a:extLst>
+              <a:ext uri="{FF2B5EF4-FFF2-40B4-BE49-F238E27FC236}">
+                <a16:creationId xmlns:a16="http://schemas.microsoft.com/office/drawing/2014/main" id="{A24E9D9E-9435-21E0-5D0D-72152AA417F0}"/>
+              </a:ext>
+            </a:extLst>
+          </p:cNvPr>
+          <p:cNvPicPr>
+            <a:picLocks noChangeAspect="1"/>
+          </p:cNvPicPr>
+          <p:nvPr/>
+        </p:nvPicPr>
+        <p:blipFill>
+          <a:blip r:embed="rId3">
+            <a:extLst>
+              <a:ext uri="{28A0092B-C50C-407E-A947-70E740481C1C}">
+                <a14:useLocalDpi xmlns:a14="http://schemas.microsoft.com/office/drawing/2010/main" val="0"/>
+              </a:ext>
+            </a:extLst>
+          </a:blip>
+          <a:stretch>
+            <a:fillRect/>
+          </a:stretch>
+        </p:blipFill>
+        <p:spPr>
+          <a:xfrm>
+            <a:off x="5968151" y="2909146"/>
+            <a:ext cx="184574" cy="184574"/>
+          </a:xfrm>
+          <a:prstGeom prst="rect">
+            <a:avLst/>
+          </a:prstGeom>
+        </p:spPr>
+      </p:pic>
+      <p:pic>
+        <p:nvPicPr>
+          <p:cNvPr id="14" name="Resim 13">
+            <a:extLst>
+              <a:ext uri="{FF2B5EF4-FFF2-40B4-BE49-F238E27FC236}">
+                <a16:creationId xmlns:a16="http://schemas.microsoft.com/office/drawing/2014/main" id="{CD6270F0-8F79-4FCC-2590-290A7CDFB589}"/>
+              </a:ext>
+            </a:extLst>
+          </p:cNvPr>
+          <p:cNvPicPr>
+            <a:picLocks noChangeAspect="1"/>
+          </p:cNvPicPr>
+          <p:nvPr/>
+        </p:nvPicPr>
+        <p:blipFill>
+          <a:blip r:embed="rId4">
+            <a:extLst>
+              <a:ext uri="{28A0092B-C50C-407E-A947-70E740481C1C}">
+                <a14:useLocalDpi xmlns:a14="http://schemas.microsoft.com/office/drawing/2010/main" val="0"/>
+              </a:ext>
+            </a:extLst>
+          </a:blip>
+          <a:stretch>
+            <a:fillRect/>
+          </a:stretch>
+        </p:blipFill>
+        <p:spPr>
+          <a:xfrm>
+            <a:off x="9169400" y="3429000"/>
+            <a:ext cx="162560" cy="162560"/>
+          </a:xfrm>
+          <a:prstGeom prst="rect">
+            <a:avLst/>
+          </a:prstGeom>
+        </p:spPr>
+      </p:pic>
+    </p:spTree>
+    <p:extLst>
+      <p:ext uri="{BB962C8B-B14F-4D97-AF65-F5344CB8AC3E}">
+        <p14:creationId xmlns:p14="http://schemas.microsoft.com/office/powerpoint/2010/main" val="2616341515"/>
       </p:ext>
     </p:extLst>
   </p:cSld>
